--- a/docs/presentation/CSE-810-PRESENTATION-INCEPTION.pptx
+++ b/docs/presentation/CSE-810-PRESENTATION-INCEPTION.pptx
@@ -1054,7 +1054,7 @@
   <p:cSld>
     <p:spTree>
       <p:nvGrpSpPr>
-        <p:cNvPr id="326" name="Shape 326"/>
+        <p:cNvPr id="325" name="Shape 325"/>
         <p:cNvGrpSpPr/>
         <p:nvPr/>
       </p:nvGrpSpPr>
@@ -1068,7 +1068,7 @@
       </p:grpSpPr>
       <p:sp>
         <p:nvSpPr>
-          <p:cNvPr id="327" name="Google Shape;327;p10:notes"/>
+          <p:cNvPr id="326" name="Google Shape;326;p10:notes"/>
           <p:cNvSpPr/>
           <p:nvPr>
             <p:ph idx="2" type="sldImg"/>
@@ -1113,7 +1113,7 @@
       </p:sp>
       <p:sp>
         <p:nvSpPr>
-          <p:cNvPr id="328" name="Google Shape;328;p10:notes"/>
+          <p:cNvPr id="327" name="Google Shape;327;p10:notes"/>
           <p:cNvSpPr txBox="1"/>
           <p:nvPr>
             <p:ph idx="1" type="body"/>
@@ -1160,7 +1160,7 @@
       </p:sp>
       <p:sp>
         <p:nvSpPr>
-          <p:cNvPr id="329" name="Google Shape;329;p10:notes"/>
+          <p:cNvPr id="328" name="Google Shape;328;p10:notes"/>
           <p:cNvSpPr txBox="1"/>
           <p:nvPr>
             <p:ph idx="12" type="sldNum"/>
@@ -1239,7 +1239,7 @@
   <p:cSld>
     <p:spTree>
       <p:nvGrpSpPr>
-        <p:cNvPr id="390" name="Shape 390"/>
+        <p:cNvPr id="389" name="Shape 389"/>
         <p:cNvGrpSpPr/>
         <p:nvPr/>
       </p:nvGrpSpPr>
@@ -1253,7 +1253,7 @@
       </p:grpSpPr>
       <p:sp>
         <p:nvSpPr>
-          <p:cNvPr id="391" name="Google Shape;391;p11:notes"/>
+          <p:cNvPr id="390" name="Google Shape;390;p11:notes"/>
           <p:cNvSpPr/>
           <p:nvPr>
             <p:ph idx="2" type="sldImg"/>
@@ -1298,7 +1298,7 @@
       </p:sp>
       <p:sp>
         <p:nvSpPr>
-          <p:cNvPr id="392" name="Google Shape;392;p11:notes"/>
+          <p:cNvPr id="391" name="Google Shape;391;p11:notes"/>
           <p:cNvSpPr txBox="1"/>
           <p:nvPr>
             <p:ph idx="1" type="body"/>
@@ -1345,7 +1345,7 @@
       </p:sp>
       <p:sp>
         <p:nvSpPr>
-          <p:cNvPr id="393" name="Google Shape;393;p11:notes"/>
+          <p:cNvPr id="392" name="Google Shape;392;p11:notes"/>
           <p:cNvSpPr txBox="1"/>
           <p:nvPr>
             <p:ph idx="12" type="sldNum"/>
@@ -1424,7 +1424,7 @@
   <p:cSld>
     <p:spTree>
       <p:nvGrpSpPr>
-        <p:cNvPr id="427" name="Shape 427"/>
+        <p:cNvPr id="426" name="Shape 426"/>
         <p:cNvGrpSpPr/>
         <p:nvPr/>
       </p:nvGrpSpPr>
@@ -1438,7 +1438,7 @@
       </p:grpSpPr>
       <p:sp>
         <p:nvSpPr>
-          <p:cNvPr id="428" name="Google Shape;428;p12:notes"/>
+          <p:cNvPr id="427" name="Google Shape;427;p12:notes"/>
           <p:cNvSpPr/>
           <p:nvPr>
             <p:ph idx="2" type="sldImg"/>
@@ -1483,7 +1483,7 @@
       </p:sp>
       <p:sp>
         <p:nvSpPr>
-          <p:cNvPr id="429" name="Google Shape;429;p12:notes"/>
+          <p:cNvPr id="428" name="Google Shape;428;p12:notes"/>
           <p:cNvSpPr txBox="1"/>
           <p:nvPr>
             <p:ph idx="1" type="body"/>
@@ -1530,7 +1530,7 @@
       </p:sp>
       <p:sp>
         <p:nvSpPr>
-          <p:cNvPr id="430" name="Google Shape;430;p12:notes"/>
+          <p:cNvPr id="429" name="Google Shape;429;p12:notes"/>
           <p:cNvSpPr txBox="1"/>
           <p:nvPr>
             <p:ph idx="12" type="sldNum"/>
@@ -1609,7 +1609,7 @@
   <p:cSld>
     <p:spTree>
       <p:nvGrpSpPr>
-        <p:cNvPr id="459" name="Shape 459"/>
+        <p:cNvPr id="458" name="Shape 458"/>
         <p:cNvGrpSpPr/>
         <p:nvPr/>
       </p:nvGrpSpPr>
@@ -1623,7 +1623,7 @@
       </p:grpSpPr>
       <p:sp>
         <p:nvSpPr>
-          <p:cNvPr id="460" name="Google Shape;460;p13:notes"/>
+          <p:cNvPr id="459" name="Google Shape;459;p13:notes"/>
           <p:cNvSpPr/>
           <p:nvPr>
             <p:ph idx="2" type="sldImg"/>
@@ -1668,7 +1668,7 @@
       </p:sp>
       <p:sp>
         <p:nvSpPr>
-          <p:cNvPr id="461" name="Google Shape;461;p13:notes"/>
+          <p:cNvPr id="460" name="Google Shape;460;p13:notes"/>
           <p:cNvSpPr txBox="1"/>
           <p:nvPr>
             <p:ph idx="1" type="body"/>
@@ -1715,7 +1715,7 @@
       </p:sp>
       <p:sp>
         <p:nvSpPr>
-          <p:cNvPr id="462" name="Google Shape;462;p13:notes"/>
+          <p:cNvPr id="461" name="Google Shape;461;p13:notes"/>
           <p:cNvSpPr txBox="1"/>
           <p:nvPr>
             <p:ph idx="12" type="sldNum"/>
@@ -1794,7 +1794,7 @@
   <p:cSld>
     <p:spTree>
       <p:nvGrpSpPr>
-        <p:cNvPr id="497" name="Shape 497"/>
+        <p:cNvPr id="496" name="Shape 496"/>
         <p:cNvGrpSpPr/>
         <p:nvPr/>
       </p:nvGrpSpPr>
@@ -1808,7 +1808,7 @@
       </p:grpSpPr>
       <p:sp>
         <p:nvSpPr>
-          <p:cNvPr id="498" name="Google Shape;498;p14:notes"/>
+          <p:cNvPr id="497" name="Google Shape;497;p14:notes"/>
           <p:cNvSpPr/>
           <p:nvPr>
             <p:ph idx="2" type="sldImg"/>
@@ -1853,7 +1853,7 @@
       </p:sp>
       <p:sp>
         <p:nvSpPr>
-          <p:cNvPr id="499" name="Google Shape;499;p14:notes"/>
+          <p:cNvPr id="498" name="Google Shape;498;p14:notes"/>
           <p:cNvSpPr txBox="1"/>
           <p:nvPr>
             <p:ph idx="1" type="body"/>
@@ -1900,7 +1900,7 @@
       </p:sp>
       <p:sp>
         <p:nvSpPr>
-          <p:cNvPr id="500" name="Google Shape;500;p14:notes"/>
+          <p:cNvPr id="499" name="Google Shape;499;p14:notes"/>
           <p:cNvSpPr txBox="1"/>
           <p:nvPr>
             <p:ph idx="12" type="sldNum"/>
@@ -1979,7 +1979,7 @@
   <p:cSld>
     <p:spTree>
       <p:nvGrpSpPr>
-        <p:cNvPr id="533" name="Shape 533"/>
+        <p:cNvPr id="532" name="Shape 532"/>
         <p:cNvGrpSpPr/>
         <p:nvPr/>
       </p:nvGrpSpPr>
@@ -1993,7 +1993,7 @@
       </p:grpSpPr>
       <p:sp>
         <p:nvSpPr>
-          <p:cNvPr id="534" name="Google Shape;534;p15:notes"/>
+          <p:cNvPr id="533" name="Google Shape;533;p15:notes"/>
           <p:cNvSpPr/>
           <p:nvPr>
             <p:ph idx="2" type="sldImg"/>
@@ -2038,7 +2038,7 @@
       </p:sp>
       <p:sp>
         <p:nvSpPr>
-          <p:cNvPr id="535" name="Google Shape;535;p15:notes"/>
+          <p:cNvPr id="534" name="Google Shape;534;p15:notes"/>
           <p:cNvSpPr txBox="1"/>
           <p:nvPr>
             <p:ph idx="1" type="body"/>
@@ -2085,7 +2085,7 @@
       </p:sp>
       <p:sp>
         <p:nvSpPr>
-          <p:cNvPr id="536" name="Google Shape;536;p15:notes"/>
+          <p:cNvPr id="535" name="Google Shape;535;p15:notes"/>
           <p:cNvSpPr txBox="1"/>
           <p:nvPr>
             <p:ph idx="12" type="sldNum"/>
@@ -2164,7 +2164,7 @@
   <p:cSld>
     <p:spTree>
       <p:nvGrpSpPr>
-        <p:cNvPr id="575" name="Shape 575"/>
+        <p:cNvPr id="574" name="Shape 574"/>
         <p:cNvGrpSpPr/>
         <p:nvPr/>
       </p:nvGrpSpPr>
@@ -2178,7 +2178,7 @@
       </p:grpSpPr>
       <p:sp>
         <p:nvSpPr>
-          <p:cNvPr id="576" name="Google Shape;576;p16:notes"/>
+          <p:cNvPr id="575" name="Google Shape;575;p16:notes"/>
           <p:cNvSpPr/>
           <p:nvPr>
             <p:ph idx="2" type="sldImg"/>
@@ -2223,7 +2223,7 @@
       </p:sp>
       <p:sp>
         <p:nvSpPr>
-          <p:cNvPr id="577" name="Google Shape;577;p16:notes"/>
+          <p:cNvPr id="576" name="Google Shape;576;p16:notes"/>
           <p:cNvSpPr txBox="1"/>
           <p:nvPr>
             <p:ph idx="1" type="body"/>
@@ -2270,7 +2270,7 @@
       </p:sp>
       <p:sp>
         <p:nvSpPr>
-          <p:cNvPr id="578" name="Google Shape;578;p16:notes"/>
+          <p:cNvPr id="577" name="Google Shape;577;p16:notes"/>
           <p:cNvSpPr txBox="1"/>
           <p:nvPr>
             <p:ph idx="12" type="sldNum"/>
@@ -2349,7 +2349,7 @@
   <p:cSld>
     <p:spTree>
       <p:nvGrpSpPr>
-        <p:cNvPr id="604" name="Shape 604"/>
+        <p:cNvPr id="603" name="Shape 603"/>
         <p:cNvGrpSpPr/>
         <p:nvPr/>
       </p:nvGrpSpPr>
@@ -2363,7 +2363,7 @@
       </p:grpSpPr>
       <p:sp>
         <p:nvSpPr>
-          <p:cNvPr id="605" name="Google Shape;605;p17:notes"/>
+          <p:cNvPr id="604" name="Google Shape;604;p17:notes"/>
           <p:cNvSpPr/>
           <p:nvPr>
             <p:ph idx="2" type="sldImg"/>
@@ -2408,7 +2408,7 @@
       </p:sp>
       <p:sp>
         <p:nvSpPr>
-          <p:cNvPr id="606" name="Google Shape;606;p17:notes"/>
+          <p:cNvPr id="605" name="Google Shape;605;p17:notes"/>
           <p:cNvSpPr txBox="1"/>
           <p:nvPr>
             <p:ph idx="1" type="body"/>
@@ -2455,7 +2455,7 @@
       </p:sp>
       <p:sp>
         <p:nvSpPr>
-          <p:cNvPr id="607" name="Google Shape;607;p17:notes"/>
+          <p:cNvPr id="606" name="Google Shape;606;p17:notes"/>
           <p:cNvSpPr txBox="1"/>
           <p:nvPr>
             <p:ph idx="12" type="sldNum"/>
@@ -2534,7 +2534,7 @@
   <p:cSld>
     <p:spTree>
       <p:nvGrpSpPr>
-        <p:cNvPr id="646" name="Shape 646"/>
+        <p:cNvPr id="645" name="Shape 645"/>
         <p:cNvGrpSpPr/>
         <p:nvPr/>
       </p:nvGrpSpPr>
@@ -2548,7 +2548,7 @@
       </p:grpSpPr>
       <p:sp>
         <p:nvSpPr>
-          <p:cNvPr id="647" name="Google Shape;647;p18:notes"/>
+          <p:cNvPr id="646" name="Google Shape;646;p18:notes"/>
           <p:cNvSpPr/>
           <p:nvPr>
             <p:ph idx="2" type="sldImg"/>
@@ -2593,7 +2593,7 @@
       </p:sp>
       <p:sp>
         <p:nvSpPr>
-          <p:cNvPr id="648" name="Google Shape;648;p18:notes"/>
+          <p:cNvPr id="647" name="Google Shape;647;p18:notes"/>
           <p:cNvSpPr txBox="1"/>
           <p:nvPr>
             <p:ph idx="1" type="body"/>
@@ -2640,7 +2640,7 @@
       </p:sp>
       <p:sp>
         <p:nvSpPr>
-          <p:cNvPr id="649" name="Google Shape;649;p18:notes"/>
+          <p:cNvPr id="648" name="Google Shape;648;p18:notes"/>
           <p:cNvSpPr txBox="1"/>
           <p:nvPr>
             <p:ph idx="12" type="sldNum"/>
@@ -2719,7 +2719,7 @@
   <p:cSld>
     <p:spTree>
       <p:nvGrpSpPr>
-        <p:cNvPr id="677" name="Shape 677"/>
+        <p:cNvPr id="676" name="Shape 676"/>
         <p:cNvGrpSpPr/>
         <p:nvPr/>
       </p:nvGrpSpPr>
@@ -2733,7 +2733,7 @@
       </p:grpSpPr>
       <p:sp>
         <p:nvSpPr>
-          <p:cNvPr id="678" name="Google Shape;678;p19:notes"/>
+          <p:cNvPr id="677" name="Google Shape;677;p19:notes"/>
           <p:cNvSpPr/>
           <p:nvPr>
             <p:ph idx="2" type="sldImg"/>
@@ -2778,7 +2778,7 @@
       </p:sp>
       <p:sp>
         <p:nvSpPr>
-          <p:cNvPr id="679" name="Google Shape;679;p19:notes"/>
+          <p:cNvPr id="678" name="Google Shape;678;p19:notes"/>
           <p:cNvSpPr txBox="1"/>
           <p:nvPr>
             <p:ph idx="1" type="body"/>
@@ -2825,7 +2825,7 @@
       </p:sp>
       <p:sp>
         <p:nvSpPr>
-          <p:cNvPr id="680" name="Google Shape;680;p19:notes"/>
+          <p:cNvPr id="679" name="Google Shape;679;p19:notes"/>
           <p:cNvSpPr txBox="1"/>
           <p:nvPr>
             <p:ph idx="12" type="sldNum"/>
@@ -2904,7 +2904,7 @@
   <p:cSld>
     <p:spTree>
       <p:nvGrpSpPr>
-        <p:cNvPr id="29" name="Shape 29"/>
+        <p:cNvPr id="28" name="Shape 28"/>
         <p:cNvGrpSpPr/>
         <p:nvPr/>
       </p:nvGrpSpPr>
@@ -2918,7 +2918,7 @@
       </p:grpSpPr>
       <p:sp>
         <p:nvSpPr>
-          <p:cNvPr id="30" name="Google Shape;30;p2:notes"/>
+          <p:cNvPr id="29" name="Google Shape;29;p2:notes"/>
           <p:cNvSpPr/>
           <p:nvPr>
             <p:ph idx="2" type="sldImg"/>
@@ -2963,7 +2963,7 @@
       </p:sp>
       <p:sp>
         <p:nvSpPr>
-          <p:cNvPr id="31" name="Google Shape;31;p2:notes"/>
+          <p:cNvPr id="30" name="Google Shape;30;p2:notes"/>
           <p:cNvSpPr txBox="1"/>
           <p:nvPr>
             <p:ph idx="1" type="body"/>
@@ -3010,7 +3010,7 @@
       </p:sp>
       <p:sp>
         <p:nvSpPr>
-          <p:cNvPr id="32" name="Google Shape;32;p2:notes"/>
+          <p:cNvPr id="31" name="Google Shape;31;p2:notes"/>
           <p:cNvSpPr txBox="1"/>
           <p:nvPr>
             <p:ph idx="12" type="sldNum"/>
@@ -3089,7 +3089,7 @@
   <p:cSld>
     <p:spTree>
       <p:nvGrpSpPr>
-        <p:cNvPr id="724" name="Shape 724"/>
+        <p:cNvPr id="723" name="Shape 723"/>
         <p:cNvGrpSpPr/>
         <p:nvPr/>
       </p:nvGrpSpPr>
@@ -3103,7 +3103,7 @@
       </p:grpSpPr>
       <p:sp>
         <p:nvSpPr>
-          <p:cNvPr id="725" name="Google Shape;725;g3fa0f521900_19_0:notes"/>
+          <p:cNvPr id="724" name="Google Shape;724;g3fa0f521900_19_0:notes"/>
           <p:cNvSpPr/>
           <p:nvPr>
             <p:ph idx="2" type="sldImg"/>
@@ -3148,7 +3148,7 @@
       </p:sp>
       <p:sp>
         <p:nvSpPr>
-          <p:cNvPr id="726" name="Google Shape;726;g3fa0f521900_19_0:notes"/>
+          <p:cNvPr id="725" name="Google Shape;725;g3fa0f521900_19_0:notes"/>
           <p:cNvSpPr txBox="1"/>
           <p:nvPr>
             <p:ph idx="1" type="body"/>
@@ -3191,7 +3191,7 @@
       </p:sp>
       <p:sp>
         <p:nvSpPr>
-          <p:cNvPr id="727" name="Google Shape;727;g3fa0f521900_19_0:notes"/>
+          <p:cNvPr id="726" name="Google Shape;726;g3fa0f521900_19_0:notes"/>
           <p:cNvSpPr txBox="1"/>
           <p:nvPr>
             <p:ph idx="12" type="sldNum"/>
@@ -3246,7 +3246,7 @@
   <p:cSld>
     <p:spTree>
       <p:nvGrpSpPr>
-        <p:cNvPr id="793" name="Shape 793"/>
+        <p:cNvPr id="792" name="Shape 792"/>
         <p:cNvGrpSpPr/>
         <p:nvPr/>
       </p:nvGrpSpPr>
@@ -3260,7 +3260,7 @@
       </p:grpSpPr>
       <p:sp>
         <p:nvSpPr>
-          <p:cNvPr id="794" name="Google Shape;794;g3fa0f521900_31_0:notes"/>
+          <p:cNvPr id="793" name="Google Shape;793;g3fa0f521900_31_0:notes"/>
           <p:cNvSpPr/>
           <p:nvPr>
             <p:ph idx="2" type="sldImg"/>
@@ -3305,7 +3305,7 @@
       </p:sp>
       <p:sp>
         <p:nvSpPr>
-          <p:cNvPr id="795" name="Google Shape;795;g3fa0f521900_31_0:notes"/>
+          <p:cNvPr id="794" name="Google Shape;794;g3fa0f521900_31_0:notes"/>
           <p:cNvSpPr txBox="1"/>
           <p:nvPr>
             <p:ph idx="1" type="body"/>
@@ -3348,7 +3348,7 @@
       </p:sp>
       <p:sp>
         <p:nvSpPr>
-          <p:cNvPr id="796" name="Google Shape;796;g3fa0f521900_31_0:notes"/>
+          <p:cNvPr id="795" name="Google Shape;795;g3fa0f521900_31_0:notes"/>
           <p:cNvSpPr txBox="1"/>
           <p:nvPr>
             <p:ph idx="12" type="sldNum"/>
@@ -3403,7 +3403,7 @@
   <p:cSld>
     <p:spTree>
       <p:nvGrpSpPr>
-        <p:cNvPr id="49" name="Shape 49"/>
+        <p:cNvPr id="48" name="Shape 48"/>
         <p:cNvGrpSpPr/>
         <p:nvPr/>
       </p:nvGrpSpPr>
@@ -3417,7 +3417,7 @@
       </p:grpSpPr>
       <p:sp>
         <p:nvSpPr>
-          <p:cNvPr id="50" name="Google Shape;50;p3:notes"/>
+          <p:cNvPr id="49" name="Google Shape;49;p3:notes"/>
           <p:cNvSpPr/>
           <p:nvPr>
             <p:ph idx="2" type="sldImg"/>
@@ -3462,7 +3462,7 @@
       </p:sp>
       <p:sp>
         <p:nvSpPr>
-          <p:cNvPr id="51" name="Google Shape;51;p3:notes"/>
+          <p:cNvPr id="50" name="Google Shape;50;p3:notes"/>
           <p:cNvSpPr txBox="1"/>
           <p:nvPr>
             <p:ph idx="1" type="body"/>
@@ -3509,7 +3509,7 @@
       </p:sp>
       <p:sp>
         <p:nvSpPr>
-          <p:cNvPr id="52" name="Google Shape;52;p3:notes"/>
+          <p:cNvPr id="51" name="Google Shape;51;p3:notes"/>
           <p:cNvSpPr txBox="1"/>
           <p:nvPr>
             <p:ph idx="12" type="sldNum"/>
@@ -3588,7 +3588,7 @@
   <p:cSld>
     <p:spTree>
       <p:nvGrpSpPr>
-        <p:cNvPr id="129" name="Shape 129"/>
+        <p:cNvPr id="128" name="Shape 128"/>
         <p:cNvGrpSpPr/>
         <p:nvPr/>
       </p:nvGrpSpPr>
@@ -3602,7 +3602,7 @@
       </p:grpSpPr>
       <p:sp>
         <p:nvSpPr>
-          <p:cNvPr id="130" name="Google Shape;130;p4:notes"/>
+          <p:cNvPr id="129" name="Google Shape;129;p4:notes"/>
           <p:cNvSpPr/>
           <p:nvPr>
             <p:ph idx="2" type="sldImg"/>
@@ -3647,7 +3647,7 @@
       </p:sp>
       <p:sp>
         <p:nvSpPr>
-          <p:cNvPr id="131" name="Google Shape;131;p4:notes"/>
+          <p:cNvPr id="130" name="Google Shape;130;p4:notes"/>
           <p:cNvSpPr txBox="1"/>
           <p:nvPr>
             <p:ph idx="1" type="body"/>
@@ -3694,7 +3694,7 @@
       </p:sp>
       <p:sp>
         <p:nvSpPr>
-          <p:cNvPr id="132" name="Google Shape;132;p4:notes"/>
+          <p:cNvPr id="131" name="Google Shape;131;p4:notes"/>
           <p:cNvSpPr txBox="1"/>
           <p:nvPr>
             <p:ph idx="12" type="sldNum"/>
@@ -3773,7 +3773,7 @@
   <p:cSld>
     <p:spTree>
       <p:nvGrpSpPr>
-        <p:cNvPr id="157" name="Shape 157"/>
+        <p:cNvPr id="156" name="Shape 156"/>
         <p:cNvGrpSpPr/>
         <p:nvPr/>
       </p:nvGrpSpPr>
@@ -3787,7 +3787,7 @@
       </p:grpSpPr>
       <p:sp>
         <p:nvSpPr>
-          <p:cNvPr id="158" name="Google Shape;158;p5:notes"/>
+          <p:cNvPr id="157" name="Google Shape;157;p5:notes"/>
           <p:cNvSpPr/>
           <p:nvPr>
             <p:ph idx="2" type="sldImg"/>
@@ -3832,7 +3832,7 @@
       </p:sp>
       <p:sp>
         <p:nvSpPr>
-          <p:cNvPr id="159" name="Google Shape;159;p5:notes"/>
+          <p:cNvPr id="158" name="Google Shape;158;p5:notes"/>
           <p:cNvSpPr txBox="1"/>
           <p:nvPr>
             <p:ph idx="1" type="body"/>
@@ -3879,7 +3879,7 @@
       </p:sp>
       <p:sp>
         <p:nvSpPr>
-          <p:cNvPr id="160" name="Google Shape;160;p5:notes"/>
+          <p:cNvPr id="159" name="Google Shape;159;p5:notes"/>
           <p:cNvSpPr txBox="1"/>
           <p:nvPr>
             <p:ph idx="12" type="sldNum"/>
@@ -3958,7 +3958,7 @@
   <p:cSld>
     <p:spTree>
       <p:nvGrpSpPr>
-        <p:cNvPr id="197" name="Shape 197"/>
+        <p:cNvPr id="196" name="Shape 196"/>
         <p:cNvGrpSpPr/>
         <p:nvPr/>
       </p:nvGrpSpPr>
@@ -3972,7 +3972,7 @@
       </p:grpSpPr>
       <p:sp>
         <p:nvSpPr>
-          <p:cNvPr id="198" name="Google Shape;198;p6:notes"/>
+          <p:cNvPr id="197" name="Google Shape;197;p6:notes"/>
           <p:cNvSpPr/>
           <p:nvPr>
             <p:ph idx="2" type="sldImg"/>
@@ -4017,7 +4017,7 @@
       </p:sp>
       <p:sp>
         <p:nvSpPr>
-          <p:cNvPr id="199" name="Google Shape;199;p6:notes"/>
+          <p:cNvPr id="198" name="Google Shape;198;p6:notes"/>
           <p:cNvSpPr txBox="1"/>
           <p:nvPr>
             <p:ph idx="1" type="body"/>
@@ -4064,7 +4064,7 @@
       </p:sp>
       <p:sp>
         <p:nvSpPr>
-          <p:cNvPr id="200" name="Google Shape;200;p6:notes"/>
+          <p:cNvPr id="199" name="Google Shape;199;p6:notes"/>
           <p:cNvSpPr txBox="1"/>
           <p:nvPr>
             <p:ph idx="12" type="sldNum"/>
@@ -4143,7 +4143,7 @@
   <p:cSld>
     <p:spTree>
       <p:nvGrpSpPr>
-        <p:cNvPr id="243" name="Shape 243"/>
+        <p:cNvPr id="242" name="Shape 242"/>
         <p:cNvGrpSpPr/>
         <p:nvPr/>
       </p:nvGrpSpPr>
@@ -4157,7 +4157,7 @@
       </p:grpSpPr>
       <p:sp>
         <p:nvSpPr>
-          <p:cNvPr id="244" name="Google Shape;244;p7:notes"/>
+          <p:cNvPr id="243" name="Google Shape;243;p7:notes"/>
           <p:cNvSpPr/>
           <p:nvPr>
             <p:ph idx="2" type="sldImg"/>
@@ -4202,7 +4202,7 @@
       </p:sp>
       <p:sp>
         <p:nvSpPr>
-          <p:cNvPr id="245" name="Google Shape;245;p7:notes"/>
+          <p:cNvPr id="244" name="Google Shape;244;p7:notes"/>
           <p:cNvSpPr txBox="1"/>
           <p:nvPr>
             <p:ph idx="1" type="body"/>
@@ -4249,7 +4249,7 @@
       </p:sp>
       <p:sp>
         <p:nvSpPr>
-          <p:cNvPr id="246" name="Google Shape;246;p7:notes"/>
+          <p:cNvPr id="245" name="Google Shape;245;p7:notes"/>
           <p:cNvSpPr txBox="1"/>
           <p:nvPr>
             <p:ph idx="12" type="sldNum"/>
@@ -4328,7 +4328,7 @@
   <p:cSld>
     <p:spTree>
       <p:nvGrpSpPr>
-        <p:cNvPr id="278" name="Shape 278"/>
+        <p:cNvPr id="277" name="Shape 277"/>
         <p:cNvGrpSpPr/>
         <p:nvPr/>
       </p:nvGrpSpPr>
@@ -4342,7 +4342,7 @@
       </p:grpSpPr>
       <p:sp>
         <p:nvSpPr>
-          <p:cNvPr id="279" name="Google Shape;279;p8:notes"/>
+          <p:cNvPr id="278" name="Google Shape;278;p8:notes"/>
           <p:cNvSpPr/>
           <p:nvPr>
             <p:ph idx="2" type="sldImg"/>
@@ -4387,7 +4387,7 @@
       </p:sp>
       <p:sp>
         <p:nvSpPr>
-          <p:cNvPr id="280" name="Google Shape;280;p8:notes"/>
+          <p:cNvPr id="279" name="Google Shape;279;p8:notes"/>
           <p:cNvSpPr txBox="1"/>
           <p:nvPr>
             <p:ph idx="1" type="body"/>
@@ -4434,7 +4434,7 @@
       </p:sp>
       <p:sp>
         <p:nvSpPr>
-          <p:cNvPr id="281" name="Google Shape;281;p8:notes"/>
+          <p:cNvPr id="280" name="Google Shape;280;p8:notes"/>
           <p:cNvSpPr txBox="1"/>
           <p:nvPr>
             <p:ph idx="12" type="sldNum"/>
@@ -4513,7 +4513,7 @@
   <p:cSld>
     <p:spTree>
       <p:nvGrpSpPr>
-        <p:cNvPr id="291" name="Shape 291"/>
+        <p:cNvPr id="290" name="Shape 290"/>
         <p:cNvGrpSpPr/>
         <p:nvPr/>
       </p:nvGrpSpPr>
@@ -4527,7 +4527,7 @@
       </p:grpSpPr>
       <p:sp>
         <p:nvSpPr>
-          <p:cNvPr id="292" name="Google Shape;292;p9:notes"/>
+          <p:cNvPr id="291" name="Google Shape;291;p9:notes"/>
           <p:cNvSpPr/>
           <p:nvPr>
             <p:ph idx="2" type="sldImg"/>
@@ -4572,7 +4572,7 @@
       </p:sp>
       <p:sp>
         <p:nvSpPr>
-          <p:cNvPr id="293" name="Google Shape;293;p9:notes"/>
+          <p:cNvPr id="292" name="Google Shape;292;p9:notes"/>
           <p:cNvSpPr txBox="1"/>
           <p:nvPr>
             <p:ph idx="1" type="body"/>
@@ -4619,7 +4619,7 @@
       </p:sp>
       <p:sp>
         <p:nvSpPr>
-          <p:cNvPr id="294" name="Google Shape;294;p9:notes"/>
+          <p:cNvPr id="293" name="Google Shape;293;p9:notes"/>
           <p:cNvSpPr txBox="1"/>
           <p:nvPr>
             <p:ph idx="12" type="sldNum"/>
@@ -5988,7 +5988,7 @@
             <a:tbl>
               <a:tblPr>
                 <a:noFill/>
-                <a:tableStyleId>{2663F03A-32B3-4559-8D9F-3A11EFFF4BFD}</a:tableStyleId>
+                <a:tableStyleId>{164A1B23-7A83-474B-B4BF-E042B0863BCF}</a:tableStyleId>
               </a:tblPr>
               <a:tblGrid>
                 <a:gridCol w="1571625"/>
@@ -6698,8 +6698,8 @@
         </p:nvSpPr>
         <p:spPr>
           <a:xfrm>
-            <a:off x="3286125" y="3836194"/>
-            <a:ext cx="2571750" cy="1143000"/>
+            <a:off x="3000496" y="3836200"/>
+            <a:ext cx="3111300" cy="1143000"/>
           </a:xfrm>
           <a:prstGeom prst="rect">
             <a:avLst/>
@@ -6759,72 +6759,13 @@
       <p:sp>
         <p:nvSpPr>
           <p:cNvPr id="23" name="Google Shape;23;p3"/>
-          <p:cNvSpPr/>
-          <p:nvPr/>
-        </p:nvSpPr>
-        <p:spPr>
-          <a:xfrm>
-            <a:off x="3286125" y="3836194"/>
-            <a:ext cx="2571750" cy="21431"/>
-          </a:xfrm>
-          <a:prstGeom prst="rect">
-            <a:avLst/>
-          </a:prstGeom>
-          <a:solidFill>
-            <a:srgbClr val="2E4A7A"/>
-          </a:solidFill>
-          <a:ln>
-            <a:noFill/>
-          </a:ln>
-        </p:spPr>
-        <p:txBody>
-          <a:bodyPr anchorCtr="0" anchor="ctr" bIns="68575" lIns="68575" spcFirstLastPara="1" rIns="68575" wrap="square" tIns="68575">
-            <a:noAutofit/>
-          </a:bodyPr>
-          <a:lstStyle/>
-          <a:p>
-            <a:pPr indent="0" lvl="0" marL="0" marR="0" rtl="0" algn="l">
-              <a:lnSpc>
-                <a:spcPct val="100000"/>
-              </a:lnSpc>
-              <a:spcBef>
-                <a:spcPts val="0"/>
-              </a:spcBef>
-              <a:spcAft>
-                <a:spcPts val="0"/>
-              </a:spcAft>
-              <a:buClr>
-                <a:srgbClr val="000000"/>
-              </a:buClr>
-              <a:buSzPts val="1400"/>
-              <a:buFont typeface="Arial"/>
-              <a:buNone/>
-            </a:pPr>
-            <a:r>
-              <a:t/>
-            </a:r>
-            <a:endParaRPr b="0" i="0" sz="1400" u="none" cap="none" strike="noStrike">
-              <a:solidFill>
-                <a:srgbClr val="000000"/>
-              </a:solidFill>
-              <a:latin typeface="Arial"/>
-              <a:ea typeface="Arial"/>
-              <a:cs typeface="Arial"/>
-              <a:sym typeface="Arial"/>
-            </a:endParaRPr>
-          </a:p>
-        </p:txBody>
-      </p:sp>
-      <p:sp>
-        <p:nvSpPr>
-          <p:cNvPr id="24" name="Google Shape;24;p3"/>
           <p:cNvSpPr txBox="1"/>
           <p:nvPr/>
         </p:nvSpPr>
         <p:spPr>
           <a:xfrm>
-            <a:off x="3286125" y="3979069"/>
-            <a:ext cx="2571750" cy="100013"/>
+            <a:off x="3000496" y="3979075"/>
+            <a:ext cx="3111300" cy="99900"/>
           </a:xfrm>
           <a:prstGeom prst="rect">
             <a:avLst/>
@@ -6883,14 +6824,14 @@
       </p:sp>
       <p:sp>
         <p:nvSpPr>
-          <p:cNvPr id="25" name="Google Shape;25;p3"/>
+          <p:cNvPr id="24" name="Google Shape;24;p3"/>
           <p:cNvSpPr txBox="1"/>
           <p:nvPr/>
         </p:nvSpPr>
         <p:spPr>
           <a:xfrm>
-            <a:off x="3286125" y="4164806"/>
-            <a:ext cx="2571750" cy="185738"/>
+            <a:off x="3000496" y="4164812"/>
+            <a:ext cx="3111300" cy="185700"/>
           </a:xfrm>
           <a:prstGeom prst="rect">
             <a:avLst/>
@@ -6949,14 +6890,80 @@
       </p:sp>
       <p:sp>
         <p:nvSpPr>
+          <p:cNvPr id="25" name="Google Shape;25;p3"/>
+          <p:cNvSpPr txBox="1"/>
+          <p:nvPr/>
+        </p:nvSpPr>
+        <p:spPr>
+          <a:xfrm>
+            <a:off x="3000496" y="4393412"/>
+            <a:ext cx="3111300" cy="114300"/>
+          </a:xfrm>
+          <a:prstGeom prst="rect">
+            <a:avLst/>
+          </a:prstGeom>
+          <a:noFill/>
+          <a:ln>
+            <a:noFill/>
+          </a:ln>
+        </p:spPr>
+        <p:txBody>
+          <a:bodyPr anchorCtr="0" anchor="ctr" bIns="0" lIns="0" spcFirstLastPara="1" rIns="0" wrap="square" tIns="0">
+            <a:noAutofit/>
+          </a:bodyPr>
+          <a:lstStyle/>
+          <a:p>
+            <a:pPr indent="0" lvl="0" marL="0" marR="0" rtl="0" algn="ctr">
+              <a:lnSpc>
+                <a:spcPct val="100000"/>
+              </a:lnSpc>
+              <a:spcBef>
+                <a:spcPts val="0"/>
+              </a:spcBef>
+              <a:spcAft>
+                <a:spcPts val="0"/>
+              </a:spcAft>
+              <a:buClr>
+                <a:srgbClr val="2E4A7A"/>
+              </a:buClr>
+              <a:buSzPts val="800"/>
+              <a:buFont typeface="Calibri"/>
+              <a:buNone/>
+            </a:pPr>
+            <a:r>
+              <a:rPr b="1" i="0" lang="en" sz="900" u="none" cap="none" strike="noStrike">
+                <a:solidFill>
+                  <a:srgbClr val="1A1A2E"/>
+                </a:solidFill>
+                <a:latin typeface="Cambria"/>
+                <a:ea typeface="Cambria"/>
+                <a:cs typeface="Cambria"/>
+                <a:sym typeface="Cambria"/>
+              </a:rPr>
+              <a:t>Professor and Chair</a:t>
+            </a:r>
+            <a:endParaRPr i="0" sz="900" u="none" cap="none" strike="noStrike">
+              <a:solidFill>
+                <a:srgbClr val="1A1A2E"/>
+              </a:solidFill>
+              <a:latin typeface="Cambria"/>
+              <a:ea typeface="Cambria"/>
+              <a:cs typeface="Cambria"/>
+              <a:sym typeface="Cambria"/>
+            </a:endParaRPr>
+          </a:p>
+        </p:txBody>
+      </p:sp>
+      <p:sp>
+        <p:nvSpPr>
           <p:cNvPr id="26" name="Google Shape;26;p3"/>
           <p:cNvSpPr txBox="1"/>
           <p:nvPr/>
         </p:nvSpPr>
         <p:spPr>
           <a:xfrm>
-            <a:off x="3286125" y="4393406"/>
-            <a:ext cx="2571750" cy="114300"/>
+            <a:off x="3000496" y="4550575"/>
+            <a:ext cx="3111300" cy="114300"/>
           </a:xfrm>
           <a:prstGeom prst="rect">
             <a:avLst/>
@@ -6983,7 +6990,7 @@
                 <a:spcPts val="0"/>
               </a:spcAft>
               <a:buClr>
-                <a:srgbClr val="2E4A7A"/>
+                <a:srgbClr val="1A1A2E"/>
               </a:buClr>
               <a:buSzPts val="800"/>
               <a:buFont typeface="Calibri"/>
@@ -6992,23 +6999,23 @@
             <a:r>
               <a:rPr b="1" i="0" lang="en" sz="900" u="none" cap="none" strike="noStrike">
                 <a:solidFill>
-                  <a:srgbClr val="2E4A7A"/>
-                </a:solidFill>
-                <a:latin typeface="Calibri"/>
-                <a:ea typeface="Calibri"/>
-                <a:cs typeface="Calibri"/>
-                <a:sym typeface="Calibri"/>
+                  <a:srgbClr val="1A1A2E"/>
+                </a:solidFill>
+                <a:latin typeface="Cambria"/>
+                <a:ea typeface="Cambria"/>
+                <a:cs typeface="Cambria"/>
+                <a:sym typeface="Cambria"/>
               </a:rPr>
-              <a:t>Professor and Chair</a:t>
-            </a:r>
-            <a:endParaRPr b="0" i="0" sz="900" u="none" cap="none" strike="noStrike">
-              <a:solidFill>
-                <a:schemeClr val="dk1"/>
-              </a:solidFill>
-              <a:latin typeface="Calibri"/>
-              <a:ea typeface="Calibri"/>
-              <a:cs typeface="Calibri"/>
-              <a:sym typeface="Calibri"/>
+              <a:t>Department of Computer Science and Engineering</a:t>
+            </a:r>
+            <a:endParaRPr b="1" i="0" sz="900" u="none" cap="none" strike="noStrike">
+              <a:solidFill>
+                <a:srgbClr val="1A1A2E"/>
+              </a:solidFill>
+              <a:latin typeface="Cambria"/>
+              <a:ea typeface="Cambria"/>
+              <a:cs typeface="Cambria"/>
+              <a:sym typeface="Cambria"/>
             </a:endParaRPr>
           </a:p>
         </p:txBody>
@@ -7021,74 +7028,8 @@
         </p:nvSpPr>
         <p:spPr>
           <a:xfrm>
-            <a:off x="3286125" y="4550569"/>
-            <a:ext cx="2571750" cy="114300"/>
-          </a:xfrm>
-          <a:prstGeom prst="rect">
-            <a:avLst/>
-          </a:prstGeom>
-          <a:noFill/>
-          <a:ln>
-            <a:noFill/>
-          </a:ln>
-        </p:spPr>
-        <p:txBody>
-          <a:bodyPr anchorCtr="0" anchor="ctr" bIns="0" lIns="0" spcFirstLastPara="1" rIns="0" wrap="square" tIns="0">
-            <a:noAutofit/>
-          </a:bodyPr>
-          <a:lstStyle/>
-          <a:p>
-            <a:pPr indent="0" lvl="0" marL="0" marR="0" rtl="0" algn="ctr">
-              <a:lnSpc>
-                <a:spcPct val="100000"/>
-              </a:lnSpc>
-              <a:spcBef>
-                <a:spcPts val="0"/>
-              </a:spcBef>
-              <a:spcAft>
-                <a:spcPts val="0"/>
-              </a:spcAft>
-              <a:buClr>
-                <a:srgbClr val="1A1A2E"/>
-              </a:buClr>
-              <a:buSzPts val="800"/>
-              <a:buFont typeface="Calibri"/>
-              <a:buNone/>
-            </a:pPr>
-            <a:r>
-              <a:rPr b="1" i="0" lang="en" sz="900" u="none" cap="none" strike="noStrike">
-                <a:solidFill>
-                  <a:srgbClr val="1A1A2E"/>
-                </a:solidFill>
-                <a:latin typeface="Calibri"/>
-                <a:ea typeface="Calibri"/>
-                <a:cs typeface="Calibri"/>
-                <a:sym typeface="Calibri"/>
-              </a:rPr>
-              <a:t>Department of Computer Science and Engineering</a:t>
-            </a:r>
-            <a:endParaRPr b="1" i="0" sz="900" u="none" cap="none" strike="noStrike">
-              <a:solidFill>
-                <a:schemeClr val="dk1"/>
-              </a:solidFill>
-              <a:latin typeface="Calibri"/>
-              <a:ea typeface="Calibri"/>
-              <a:cs typeface="Calibri"/>
-              <a:sym typeface="Calibri"/>
-            </a:endParaRPr>
-          </a:p>
-        </p:txBody>
-      </p:sp>
-      <p:sp>
-        <p:nvSpPr>
-          <p:cNvPr id="28" name="Google Shape;28;p3"/>
-          <p:cNvSpPr txBox="1"/>
-          <p:nvPr/>
-        </p:nvSpPr>
-        <p:spPr>
-          <a:xfrm>
-            <a:off x="3286025" y="4707744"/>
-            <a:ext cx="2571900" cy="99900"/>
+            <a:off x="3000375" y="4707750"/>
+            <a:ext cx="3111600" cy="99900"/>
           </a:xfrm>
           <a:prstGeom prst="rect">
             <a:avLst/>
@@ -7124,83 +7065,83 @@
             <a:r>
               <a:rPr b="1" i="0" lang="en" sz="900" u="none" cap="none" strike="noStrike">
                 <a:solidFill>
-                  <a:srgbClr val="2E4A7A"/>
-                </a:solidFill>
-                <a:latin typeface="Calibri"/>
-                <a:ea typeface="Calibri"/>
-                <a:cs typeface="Calibri"/>
-                <a:sym typeface="Calibri"/>
+                  <a:srgbClr val="1A1A2E"/>
+                </a:solidFill>
+                <a:latin typeface="Cambria"/>
+                <a:ea typeface="Cambria"/>
+                <a:cs typeface="Cambria"/>
+                <a:sym typeface="Cambria"/>
               </a:rPr>
               <a:t>U</a:t>
             </a:r>
             <a:r>
               <a:rPr b="1" lang="en" sz="900">
                 <a:solidFill>
-                  <a:srgbClr val="2E4A7A"/>
-                </a:solidFill>
-                <a:latin typeface="Calibri"/>
-                <a:ea typeface="Calibri"/>
-                <a:cs typeface="Calibri"/>
-                <a:sym typeface="Calibri"/>
+                  <a:srgbClr val="1A1A2E"/>
+                </a:solidFill>
+                <a:latin typeface="Cambria"/>
+                <a:ea typeface="Cambria"/>
+                <a:cs typeface="Cambria"/>
+                <a:sym typeface="Cambria"/>
               </a:rPr>
               <a:t>niversity</a:t>
             </a:r>
             <a:r>
               <a:rPr b="1" i="0" lang="en" sz="900" u="none" cap="none" strike="noStrike">
                 <a:solidFill>
-                  <a:srgbClr val="2E4A7A"/>
-                </a:solidFill>
-                <a:latin typeface="Calibri"/>
-                <a:ea typeface="Calibri"/>
-                <a:cs typeface="Calibri"/>
-                <a:sym typeface="Calibri"/>
+                  <a:srgbClr val="1A1A2E"/>
+                </a:solidFill>
+                <a:latin typeface="Cambria"/>
+                <a:ea typeface="Cambria"/>
+                <a:cs typeface="Cambria"/>
+                <a:sym typeface="Cambria"/>
               </a:rPr>
               <a:t> </a:t>
             </a:r>
             <a:r>
               <a:rPr b="1" lang="en" sz="900">
                 <a:solidFill>
-                  <a:srgbClr val="2E4A7A"/>
-                </a:solidFill>
-                <a:latin typeface="Calibri"/>
-                <a:ea typeface="Calibri"/>
-                <a:cs typeface="Calibri"/>
-                <a:sym typeface="Calibri"/>
+                  <a:srgbClr val="1A1A2E"/>
+                </a:solidFill>
+                <a:latin typeface="Cambria"/>
+                <a:ea typeface="Cambria"/>
+                <a:cs typeface="Cambria"/>
+                <a:sym typeface="Cambria"/>
               </a:rPr>
               <a:t>of</a:t>
             </a:r>
             <a:r>
               <a:rPr b="1" i="0" lang="en" sz="900" u="none" cap="none" strike="noStrike">
                 <a:solidFill>
-                  <a:srgbClr val="2E4A7A"/>
-                </a:solidFill>
-                <a:latin typeface="Calibri"/>
-                <a:ea typeface="Calibri"/>
-                <a:cs typeface="Calibri"/>
-                <a:sym typeface="Calibri"/>
+                  <a:srgbClr val="1A1A2E"/>
+                </a:solidFill>
+                <a:latin typeface="Cambria"/>
+                <a:ea typeface="Cambria"/>
+                <a:cs typeface="Cambria"/>
+                <a:sym typeface="Cambria"/>
               </a:rPr>
               <a:t> D</a:t>
             </a:r>
             <a:r>
               <a:rPr b="1" lang="en" sz="900">
                 <a:solidFill>
-                  <a:srgbClr val="2E4A7A"/>
-                </a:solidFill>
-                <a:latin typeface="Calibri"/>
-                <a:ea typeface="Calibri"/>
-                <a:cs typeface="Calibri"/>
-                <a:sym typeface="Calibri"/>
+                  <a:srgbClr val="1A1A2E"/>
+                </a:solidFill>
+                <a:latin typeface="Cambria"/>
+                <a:ea typeface="Cambria"/>
+                <a:cs typeface="Cambria"/>
+                <a:sym typeface="Cambria"/>
               </a:rPr>
               <a:t>haka</a:t>
             </a:r>
-            <a:endParaRPr b="0" i="0" sz="900" u="none" cap="none" strike="noStrike">
-              <a:solidFill>
-                <a:schemeClr val="dk1"/>
-              </a:solidFill>
-              <a:latin typeface="Calibri"/>
-              <a:ea typeface="Calibri"/>
-              <a:cs typeface="Calibri"/>
-              <a:sym typeface="Calibri"/>
+            <a:endParaRPr i="0" sz="900" u="none" cap="none" strike="noStrike">
+              <a:solidFill>
+                <a:srgbClr val="1A1A2E"/>
+              </a:solidFill>
+              <a:latin typeface="Cambria"/>
+              <a:ea typeface="Cambria"/>
+              <a:cs typeface="Cambria"/>
+              <a:sym typeface="Cambria"/>
             </a:endParaRPr>
           </a:p>
         </p:txBody>
@@ -7225,7 +7166,7 @@
     </p:bg>
     <p:spTree>
       <p:nvGrpSpPr>
-        <p:cNvPr id="330" name="Shape 330"/>
+        <p:cNvPr id="329" name="Shape 329"/>
         <p:cNvGrpSpPr/>
         <p:nvPr/>
       </p:nvGrpSpPr>
@@ -7239,7 +7180,7 @@
       </p:grpSpPr>
       <p:sp>
         <p:nvSpPr>
-          <p:cNvPr id="331" name="Google Shape;331;p12"/>
+          <p:cNvPr id="330" name="Google Shape;330;p12"/>
           <p:cNvSpPr txBox="1"/>
           <p:nvPr/>
         </p:nvSpPr>
@@ -7317,7 +7258,7 @@
       </p:sp>
       <p:sp>
         <p:nvSpPr>
-          <p:cNvPr id="332" name="Google Shape;332;p12"/>
+          <p:cNvPr id="331" name="Google Shape;331;p12"/>
           <p:cNvSpPr/>
           <p:nvPr/>
         </p:nvSpPr>
@@ -7376,7 +7317,7 @@
       </p:sp>
       <p:sp>
         <p:nvSpPr>
-          <p:cNvPr id="333" name="Google Shape;333;p12"/>
+          <p:cNvPr id="332" name="Google Shape;332;p12"/>
           <p:cNvSpPr txBox="1"/>
           <p:nvPr/>
         </p:nvSpPr>
@@ -7442,7 +7383,7 @@
       </p:sp>
       <p:sp>
         <p:nvSpPr>
-          <p:cNvPr id="334" name="Google Shape;334;p12"/>
+          <p:cNvPr id="333" name="Google Shape;333;p12"/>
           <p:cNvSpPr/>
           <p:nvPr/>
         </p:nvSpPr>
@@ -7516,7 +7457,7 @@
       </p:sp>
       <p:sp>
         <p:nvSpPr>
-          <p:cNvPr id="335" name="Google Shape;335;p12"/>
+          <p:cNvPr id="334" name="Google Shape;334;p12"/>
           <p:cNvSpPr/>
           <p:nvPr/>
         </p:nvSpPr>
@@ -7575,7 +7516,7 @@
       </p:sp>
       <p:sp>
         <p:nvSpPr>
-          <p:cNvPr id="336" name="Google Shape;336;p12"/>
+          <p:cNvPr id="335" name="Google Shape;335;p12"/>
           <p:cNvSpPr txBox="1"/>
           <p:nvPr/>
         </p:nvSpPr>
@@ -7641,7 +7582,7 @@
       </p:sp>
       <p:sp>
         <p:nvSpPr>
-          <p:cNvPr id="337" name="Google Shape;337;p12"/>
+          <p:cNvPr id="336" name="Google Shape;336;p12"/>
           <p:cNvSpPr txBox="1"/>
           <p:nvPr/>
         </p:nvSpPr>
@@ -7707,7 +7648,7 @@
       </p:sp>
       <p:sp>
         <p:nvSpPr>
-          <p:cNvPr id="338" name="Google Shape;338;p12"/>
+          <p:cNvPr id="337" name="Google Shape;337;p12"/>
           <p:cNvSpPr/>
           <p:nvPr/>
         </p:nvSpPr>
@@ -7781,7 +7722,7 @@
       </p:sp>
       <p:sp>
         <p:nvSpPr>
-          <p:cNvPr id="339" name="Google Shape;339;p12"/>
+          <p:cNvPr id="338" name="Google Shape;338;p12"/>
           <p:cNvSpPr/>
           <p:nvPr/>
         </p:nvSpPr>
@@ -7840,7 +7781,7 @@
       </p:sp>
       <p:sp>
         <p:nvSpPr>
-          <p:cNvPr id="340" name="Google Shape;340;p12"/>
+          <p:cNvPr id="339" name="Google Shape;339;p12"/>
           <p:cNvSpPr txBox="1"/>
           <p:nvPr/>
         </p:nvSpPr>
@@ -7906,7 +7847,7 @@
       </p:sp>
       <p:sp>
         <p:nvSpPr>
-          <p:cNvPr id="341" name="Google Shape;341;p12"/>
+          <p:cNvPr id="340" name="Google Shape;340;p12"/>
           <p:cNvSpPr txBox="1"/>
           <p:nvPr/>
         </p:nvSpPr>
@@ -7972,7 +7913,7 @@
       </p:sp>
       <p:sp>
         <p:nvSpPr>
-          <p:cNvPr id="342" name="Google Shape;342;p12"/>
+          <p:cNvPr id="341" name="Google Shape;341;p12"/>
           <p:cNvSpPr/>
           <p:nvPr/>
         </p:nvSpPr>
@@ -8046,7 +7987,7 @@
       </p:sp>
       <p:sp>
         <p:nvSpPr>
-          <p:cNvPr id="343" name="Google Shape;343;p12"/>
+          <p:cNvPr id="342" name="Google Shape;342;p12"/>
           <p:cNvSpPr/>
           <p:nvPr/>
         </p:nvSpPr>
@@ -8105,7 +8046,7 @@
       </p:sp>
       <p:sp>
         <p:nvSpPr>
-          <p:cNvPr id="344" name="Google Shape;344;p12"/>
+          <p:cNvPr id="343" name="Google Shape;343;p12"/>
           <p:cNvSpPr txBox="1"/>
           <p:nvPr/>
         </p:nvSpPr>
@@ -8171,7 +8112,7 @@
       </p:sp>
       <p:sp>
         <p:nvSpPr>
-          <p:cNvPr id="345" name="Google Shape;345;p12"/>
+          <p:cNvPr id="344" name="Google Shape;344;p12"/>
           <p:cNvSpPr txBox="1"/>
           <p:nvPr/>
         </p:nvSpPr>
@@ -8237,7 +8178,7 @@
       </p:sp>
       <p:sp>
         <p:nvSpPr>
-          <p:cNvPr id="346" name="Google Shape;346;p12"/>
+          <p:cNvPr id="345" name="Google Shape;345;p12"/>
           <p:cNvSpPr/>
           <p:nvPr/>
         </p:nvSpPr>
@@ -8304,7 +8245,7 @@
       </p:sp>
       <p:sp>
         <p:nvSpPr>
-          <p:cNvPr id="347" name="Google Shape;347;p12"/>
+          <p:cNvPr id="346" name="Google Shape;346;p12"/>
           <p:cNvSpPr/>
           <p:nvPr/>
         </p:nvSpPr>
@@ -8378,7 +8319,7 @@
       </p:sp>
       <p:sp>
         <p:nvSpPr>
-          <p:cNvPr id="348" name="Google Shape;348;p12"/>
+          <p:cNvPr id="347" name="Google Shape;347;p12"/>
           <p:cNvSpPr/>
           <p:nvPr/>
         </p:nvSpPr>
@@ -8437,7 +8378,7 @@
       </p:sp>
       <p:sp>
         <p:nvSpPr>
-          <p:cNvPr id="349" name="Google Shape;349;p12"/>
+          <p:cNvPr id="348" name="Google Shape;348;p12"/>
           <p:cNvSpPr txBox="1"/>
           <p:nvPr/>
         </p:nvSpPr>
@@ -8503,7 +8444,7 @@
       </p:sp>
       <p:sp>
         <p:nvSpPr>
-          <p:cNvPr id="350" name="Google Shape;350;p12"/>
+          <p:cNvPr id="349" name="Google Shape;349;p12"/>
           <p:cNvSpPr txBox="1"/>
           <p:nvPr/>
         </p:nvSpPr>
@@ -8569,7 +8510,7 @@
       </p:sp>
       <p:sp>
         <p:nvSpPr>
-          <p:cNvPr id="351" name="Google Shape;351;p12"/>
+          <p:cNvPr id="350" name="Google Shape;350;p12"/>
           <p:cNvSpPr/>
           <p:nvPr/>
         </p:nvSpPr>
@@ -8630,7 +8571,7 @@
       </p:sp>
       <p:sp>
         <p:nvSpPr>
-          <p:cNvPr id="352" name="Google Shape;352;p12"/>
+          <p:cNvPr id="351" name="Google Shape;351;p12"/>
           <p:cNvSpPr txBox="1"/>
           <p:nvPr/>
         </p:nvSpPr>
@@ -8696,7 +8637,7 @@
       </p:sp>
       <p:sp>
         <p:nvSpPr>
-          <p:cNvPr id="353" name="Google Shape;353;p12"/>
+          <p:cNvPr id="352" name="Google Shape;352;p12"/>
           <p:cNvSpPr txBox="1"/>
           <p:nvPr/>
         </p:nvSpPr>
@@ -8762,7 +8703,7 @@
       </p:sp>
       <p:sp>
         <p:nvSpPr>
-          <p:cNvPr id="354" name="Google Shape;354;p12"/>
+          <p:cNvPr id="353" name="Google Shape;353;p12"/>
           <p:cNvSpPr txBox="1"/>
           <p:nvPr/>
         </p:nvSpPr>
@@ -8828,7 +8769,7 @@
       </p:sp>
       <p:sp>
         <p:nvSpPr>
-          <p:cNvPr id="355" name="Google Shape;355;p12"/>
+          <p:cNvPr id="354" name="Google Shape;354;p12"/>
           <p:cNvSpPr/>
           <p:nvPr/>
         </p:nvSpPr>
@@ -8902,7 +8843,7 @@
       </p:sp>
       <p:sp>
         <p:nvSpPr>
-          <p:cNvPr id="356" name="Google Shape;356;p12"/>
+          <p:cNvPr id="355" name="Google Shape;355;p12"/>
           <p:cNvSpPr/>
           <p:nvPr/>
         </p:nvSpPr>
@@ -8961,7 +8902,7 @@
       </p:sp>
       <p:sp>
         <p:nvSpPr>
-          <p:cNvPr id="357" name="Google Shape;357;p12"/>
+          <p:cNvPr id="356" name="Google Shape;356;p12"/>
           <p:cNvSpPr txBox="1"/>
           <p:nvPr/>
         </p:nvSpPr>
@@ -9027,7 +8968,7 @@
       </p:sp>
       <p:sp>
         <p:nvSpPr>
-          <p:cNvPr id="358" name="Google Shape;358;p12"/>
+          <p:cNvPr id="357" name="Google Shape;357;p12"/>
           <p:cNvSpPr txBox="1"/>
           <p:nvPr/>
         </p:nvSpPr>
@@ -9093,7 +9034,7 @@
       </p:sp>
       <p:sp>
         <p:nvSpPr>
-          <p:cNvPr id="359" name="Google Shape;359;p12"/>
+          <p:cNvPr id="358" name="Google Shape;358;p12"/>
           <p:cNvSpPr/>
           <p:nvPr/>
         </p:nvSpPr>
@@ -9154,7 +9095,7 @@
       </p:sp>
       <p:sp>
         <p:nvSpPr>
-          <p:cNvPr id="360" name="Google Shape;360;p12"/>
+          <p:cNvPr id="359" name="Google Shape;359;p12"/>
           <p:cNvSpPr txBox="1"/>
           <p:nvPr/>
         </p:nvSpPr>
@@ -9220,7 +9161,7 @@
       </p:sp>
       <p:sp>
         <p:nvSpPr>
-          <p:cNvPr id="361" name="Google Shape;361;p12"/>
+          <p:cNvPr id="360" name="Google Shape;360;p12"/>
           <p:cNvSpPr txBox="1"/>
           <p:nvPr/>
         </p:nvSpPr>
@@ -9286,7 +9227,7 @@
       </p:sp>
       <p:sp>
         <p:nvSpPr>
-          <p:cNvPr id="362" name="Google Shape;362;p12"/>
+          <p:cNvPr id="361" name="Google Shape;361;p12"/>
           <p:cNvSpPr txBox="1"/>
           <p:nvPr/>
         </p:nvSpPr>
@@ -9352,7 +9293,7 @@
       </p:sp>
       <p:sp>
         <p:nvSpPr>
-          <p:cNvPr id="363" name="Google Shape;363;p12"/>
+          <p:cNvPr id="362" name="Google Shape;362;p12"/>
           <p:cNvSpPr/>
           <p:nvPr/>
         </p:nvSpPr>
@@ -9417,7 +9358,7 @@
       </p:sp>
       <p:sp>
         <p:nvSpPr>
-          <p:cNvPr id="364" name="Google Shape;364;p12"/>
+          <p:cNvPr id="363" name="Google Shape;363;p12"/>
           <p:cNvSpPr/>
           <p:nvPr/>
         </p:nvSpPr>
@@ -9491,7 +9432,7 @@
       </p:sp>
       <p:sp>
         <p:nvSpPr>
-          <p:cNvPr id="365" name="Google Shape;365;p12"/>
+          <p:cNvPr id="364" name="Google Shape;364;p12"/>
           <p:cNvSpPr/>
           <p:nvPr/>
         </p:nvSpPr>
@@ -9550,7 +9491,7 @@
       </p:sp>
       <p:sp>
         <p:nvSpPr>
-          <p:cNvPr id="366" name="Google Shape;366;p12"/>
+          <p:cNvPr id="365" name="Google Shape;365;p12"/>
           <p:cNvSpPr txBox="1"/>
           <p:nvPr/>
         </p:nvSpPr>
@@ -9616,7 +9557,7 @@
       </p:sp>
       <p:sp>
         <p:nvSpPr>
-          <p:cNvPr id="367" name="Google Shape;367;p12"/>
+          <p:cNvPr id="366" name="Google Shape;366;p12"/>
           <p:cNvSpPr txBox="1"/>
           <p:nvPr/>
         </p:nvSpPr>
@@ -9682,7 +9623,7 @@
       </p:sp>
       <p:sp>
         <p:nvSpPr>
-          <p:cNvPr id="368" name="Google Shape;368;p12"/>
+          <p:cNvPr id="367" name="Google Shape;367;p12"/>
           <p:cNvSpPr/>
           <p:nvPr/>
         </p:nvSpPr>
@@ -9743,7 +9684,7 @@
       </p:sp>
       <p:sp>
         <p:nvSpPr>
-          <p:cNvPr id="369" name="Google Shape;369;p12"/>
+          <p:cNvPr id="368" name="Google Shape;368;p12"/>
           <p:cNvSpPr txBox="1"/>
           <p:nvPr/>
         </p:nvSpPr>
@@ -9809,7 +9750,7 @@
       </p:sp>
       <p:sp>
         <p:nvSpPr>
-          <p:cNvPr id="370" name="Google Shape;370;p12"/>
+          <p:cNvPr id="369" name="Google Shape;369;p12"/>
           <p:cNvSpPr txBox="1"/>
           <p:nvPr/>
         </p:nvSpPr>
@@ -9875,7 +9816,7 @@
       </p:sp>
       <p:sp>
         <p:nvSpPr>
-          <p:cNvPr id="371" name="Google Shape;371;p12"/>
+          <p:cNvPr id="370" name="Google Shape;370;p12"/>
           <p:cNvSpPr txBox="1"/>
           <p:nvPr/>
         </p:nvSpPr>
@@ -9941,7 +9882,7 @@
       </p:sp>
       <p:sp>
         <p:nvSpPr>
-          <p:cNvPr id="372" name="Google Shape;372;p12"/>
+          <p:cNvPr id="371" name="Google Shape;371;p12"/>
           <p:cNvSpPr/>
           <p:nvPr/>
         </p:nvSpPr>
@@ -10008,7 +9949,7 @@
       </p:sp>
       <p:sp>
         <p:nvSpPr>
-          <p:cNvPr id="373" name="Google Shape;373;p12"/>
+          <p:cNvPr id="372" name="Google Shape;372;p12"/>
           <p:cNvSpPr/>
           <p:nvPr/>
         </p:nvSpPr>
@@ -10067,7 +10008,7 @@
       </p:sp>
       <p:sp>
         <p:nvSpPr>
-          <p:cNvPr id="374" name="Google Shape;374;p12"/>
+          <p:cNvPr id="373" name="Google Shape;373;p12"/>
           <p:cNvSpPr txBox="1"/>
           <p:nvPr/>
         </p:nvSpPr>
@@ -10133,7 +10074,7 @@
       </p:sp>
       <p:sp>
         <p:nvSpPr>
-          <p:cNvPr id="375" name="Google Shape;375;p12"/>
+          <p:cNvPr id="374" name="Google Shape;374;p12"/>
           <p:cNvSpPr txBox="1"/>
           <p:nvPr/>
         </p:nvSpPr>
@@ -10199,7 +10140,7 @@
       </p:sp>
       <p:sp>
         <p:nvSpPr>
-          <p:cNvPr id="376" name="Google Shape;376;p12"/>
+          <p:cNvPr id="375" name="Google Shape;375;p12"/>
           <p:cNvSpPr/>
           <p:nvPr/>
         </p:nvSpPr>
@@ -10260,7 +10201,7 @@
       </p:sp>
       <p:sp>
         <p:nvSpPr>
-          <p:cNvPr id="377" name="Google Shape;377;p12"/>
+          <p:cNvPr id="376" name="Google Shape;376;p12"/>
           <p:cNvSpPr txBox="1"/>
           <p:nvPr/>
         </p:nvSpPr>
@@ -10326,7 +10267,7 @@
       </p:sp>
       <p:sp>
         <p:nvSpPr>
-          <p:cNvPr id="378" name="Google Shape;378;p12"/>
+          <p:cNvPr id="377" name="Google Shape;377;p12"/>
           <p:cNvSpPr txBox="1"/>
           <p:nvPr/>
         </p:nvSpPr>
@@ -10392,7 +10333,7 @@
       </p:sp>
       <p:sp>
         <p:nvSpPr>
-          <p:cNvPr id="379" name="Google Shape;379;p12"/>
+          <p:cNvPr id="378" name="Google Shape;378;p12"/>
           <p:cNvSpPr txBox="1"/>
           <p:nvPr/>
         </p:nvSpPr>
@@ -10458,9 +10399,9 @@
       </p:sp>
       <p:cxnSp>
         <p:nvCxnSpPr>
-          <p:cNvPr id="380" name="Google Shape;380;p12"/>
+          <p:cNvPr id="379" name="Google Shape;379;p12"/>
           <p:cNvCxnSpPr>
-            <a:endCxn id="366" idx="0"/>
+            <a:endCxn id="365" idx="0"/>
           </p:cNvCxnSpPr>
           <p:nvPr/>
         </p:nvCxnSpPr>
@@ -10486,7 +10427,7 @@
       </p:cxnSp>
       <p:cxnSp>
         <p:nvCxnSpPr>
-          <p:cNvPr id="381" name="Google Shape;381;p12"/>
+          <p:cNvPr id="380" name="Google Shape;380;p12"/>
           <p:cNvCxnSpPr/>
           <p:nvPr/>
         </p:nvCxnSpPr>
@@ -10512,7 +10453,7 @@
       </p:cxnSp>
       <p:cxnSp>
         <p:nvCxnSpPr>
-          <p:cNvPr id="382" name="Google Shape;382;p12"/>
+          <p:cNvPr id="381" name="Google Shape;381;p12"/>
           <p:cNvCxnSpPr/>
           <p:nvPr/>
         </p:nvCxnSpPr>
@@ -10538,7 +10479,7 @@
       </p:cxnSp>
       <p:sp>
         <p:nvSpPr>
-          <p:cNvPr id="383" name="Google Shape;383;p12"/>
+          <p:cNvPr id="382" name="Google Shape;382;p12"/>
           <p:cNvSpPr txBox="1"/>
           <p:nvPr/>
         </p:nvSpPr>
@@ -10604,7 +10545,7 @@
       </p:sp>
       <p:sp>
         <p:nvSpPr>
-          <p:cNvPr id="384" name="Google Shape;384;p12"/>
+          <p:cNvPr id="383" name="Google Shape;383;p12"/>
           <p:cNvSpPr/>
           <p:nvPr/>
         </p:nvSpPr>
@@ -10678,7 +10619,7 @@
       </p:sp>
       <p:sp>
         <p:nvSpPr>
-          <p:cNvPr id="385" name="Google Shape;385;p12"/>
+          <p:cNvPr id="384" name="Google Shape;384;p12"/>
           <p:cNvSpPr txBox="1"/>
           <p:nvPr/>
         </p:nvSpPr>
@@ -10744,7 +10685,7 @@
       </p:sp>
       <p:sp>
         <p:nvSpPr>
-          <p:cNvPr id="386" name="Google Shape;386;p12"/>
+          <p:cNvPr id="385" name="Google Shape;385;p12"/>
           <p:cNvSpPr txBox="1"/>
           <p:nvPr/>
         </p:nvSpPr>
@@ -10810,7 +10751,7 @@
       </p:sp>
       <p:sp>
         <p:nvSpPr>
-          <p:cNvPr id="387" name="Google Shape;387;p12"/>
+          <p:cNvPr id="386" name="Google Shape;386;p12"/>
           <p:cNvSpPr/>
           <p:nvPr/>
         </p:nvSpPr>
@@ -10869,7 +10810,7 @@
       </p:sp>
       <p:sp>
         <p:nvSpPr>
-          <p:cNvPr id="388" name="Google Shape;388;p12"/>
+          <p:cNvPr id="387" name="Google Shape;387;p12"/>
           <p:cNvSpPr txBox="1"/>
           <p:nvPr/>
         </p:nvSpPr>
@@ -10947,7 +10888,7 @@
       </p:sp>
       <p:sp>
         <p:nvSpPr>
-          <p:cNvPr id="389" name="Google Shape;389;p12"/>
+          <p:cNvPr id="388" name="Google Shape;388;p12"/>
           <p:cNvSpPr/>
           <p:nvPr/>
         </p:nvSpPr>
@@ -11024,7 +10965,7 @@
     </p:bg>
     <p:spTree>
       <p:nvGrpSpPr>
-        <p:cNvPr id="394" name="Shape 394"/>
+        <p:cNvPr id="393" name="Shape 393"/>
         <p:cNvGrpSpPr/>
         <p:nvPr/>
       </p:nvGrpSpPr>
@@ -11038,7 +10979,7 @@
       </p:grpSpPr>
       <p:sp>
         <p:nvSpPr>
-          <p:cNvPr id="395" name="Google Shape;395;p13"/>
+          <p:cNvPr id="394" name="Google Shape;394;p13"/>
           <p:cNvSpPr txBox="1"/>
           <p:nvPr/>
         </p:nvSpPr>
@@ -11104,7 +11045,7 @@
       </p:sp>
       <p:sp>
         <p:nvSpPr>
-          <p:cNvPr id="396" name="Google Shape;396;p13"/>
+          <p:cNvPr id="395" name="Google Shape;395;p13"/>
           <p:cNvSpPr/>
           <p:nvPr/>
         </p:nvSpPr>
@@ -11163,7 +11104,7 @@
       </p:sp>
       <p:sp>
         <p:nvSpPr>
-          <p:cNvPr id="397" name="Google Shape;397;p13"/>
+          <p:cNvPr id="396" name="Google Shape;396;p13"/>
           <p:cNvSpPr txBox="1"/>
           <p:nvPr/>
         </p:nvSpPr>
@@ -11229,7 +11170,7 @@
       </p:sp>
       <p:sp>
         <p:nvSpPr>
-          <p:cNvPr id="398" name="Google Shape;398;p13"/>
+          <p:cNvPr id="397" name="Google Shape;397;p13"/>
           <p:cNvSpPr/>
           <p:nvPr/>
         </p:nvSpPr>
@@ -11303,7 +11244,7 @@
       </p:sp>
       <p:sp>
         <p:nvSpPr>
-          <p:cNvPr id="399" name="Google Shape;399;p13"/>
+          <p:cNvPr id="398" name="Google Shape;398;p13"/>
           <p:cNvSpPr/>
           <p:nvPr/>
         </p:nvSpPr>
@@ -11362,7 +11303,7 @@
       </p:sp>
       <p:sp>
         <p:nvSpPr>
-          <p:cNvPr id="400" name="Google Shape;400;p13"/>
+          <p:cNvPr id="399" name="Google Shape;399;p13"/>
           <p:cNvSpPr/>
           <p:nvPr/>
         </p:nvSpPr>
@@ -11430,7 +11371,7 @@
       </p:sp>
       <p:sp>
         <p:nvSpPr>
-          <p:cNvPr id="401" name="Google Shape;401;p13"/>
+          <p:cNvPr id="400" name="Google Shape;400;p13"/>
           <p:cNvSpPr txBox="1"/>
           <p:nvPr/>
         </p:nvSpPr>
@@ -11496,7 +11437,7 @@
       </p:sp>
       <p:sp>
         <p:nvSpPr>
-          <p:cNvPr id="402" name="Google Shape;402;p13"/>
+          <p:cNvPr id="401" name="Google Shape;401;p13"/>
           <p:cNvSpPr txBox="1"/>
           <p:nvPr/>
         </p:nvSpPr>
@@ -11589,7 +11530,7 @@
       </p:sp>
       <p:sp>
         <p:nvSpPr>
-          <p:cNvPr id="403" name="Google Shape;403;p13"/>
+          <p:cNvPr id="402" name="Google Shape;402;p13"/>
           <p:cNvSpPr/>
           <p:nvPr/>
         </p:nvSpPr>
@@ -11663,7 +11604,7 @@
       </p:sp>
       <p:sp>
         <p:nvSpPr>
-          <p:cNvPr id="404" name="Google Shape;404;p13"/>
+          <p:cNvPr id="403" name="Google Shape;403;p13"/>
           <p:cNvSpPr/>
           <p:nvPr/>
         </p:nvSpPr>
@@ -11722,7 +11663,7 @@
       </p:sp>
       <p:sp>
         <p:nvSpPr>
-          <p:cNvPr id="405" name="Google Shape;405;p13"/>
+          <p:cNvPr id="404" name="Google Shape;404;p13"/>
           <p:cNvSpPr/>
           <p:nvPr/>
         </p:nvSpPr>
@@ -11790,7 +11731,7 @@
       </p:sp>
       <p:sp>
         <p:nvSpPr>
-          <p:cNvPr id="406" name="Google Shape;406;p13"/>
+          <p:cNvPr id="405" name="Google Shape;405;p13"/>
           <p:cNvSpPr txBox="1"/>
           <p:nvPr/>
         </p:nvSpPr>
@@ -11856,7 +11797,7 @@
       </p:sp>
       <p:sp>
         <p:nvSpPr>
-          <p:cNvPr id="407" name="Google Shape;407;p13"/>
+          <p:cNvPr id="406" name="Google Shape;406;p13"/>
           <p:cNvSpPr txBox="1"/>
           <p:nvPr/>
         </p:nvSpPr>
@@ -11976,7 +11917,7 @@
       </p:sp>
       <p:sp>
         <p:nvSpPr>
-          <p:cNvPr id="408" name="Google Shape;408;p13"/>
+          <p:cNvPr id="407" name="Google Shape;407;p13"/>
           <p:cNvSpPr/>
           <p:nvPr/>
         </p:nvSpPr>
@@ -12050,7 +11991,7 @@
       </p:sp>
       <p:sp>
         <p:nvSpPr>
-          <p:cNvPr id="409" name="Google Shape;409;p13"/>
+          <p:cNvPr id="408" name="Google Shape;408;p13"/>
           <p:cNvSpPr/>
           <p:nvPr/>
         </p:nvSpPr>
@@ -12109,7 +12050,7 @@
       </p:sp>
       <p:sp>
         <p:nvSpPr>
-          <p:cNvPr id="410" name="Google Shape;410;p13"/>
+          <p:cNvPr id="409" name="Google Shape;409;p13"/>
           <p:cNvSpPr/>
           <p:nvPr/>
         </p:nvSpPr>
@@ -12177,7 +12118,7 @@
       </p:sp>
       <p:sp>
         <p:nvSpPr>
-          <p:cNvPr id="411" name="Google Shape;411;p13"/>
+          <p:cNvPr id="410" name="Google Shape;410;p13"/>
           <p:cNvSpPr txBox="1"/>
           <p:nvPr/>
         </p:nvSpPr>
@@ -12243,7 +12184,7 @@
       </p:sp>
       <p:sp>
         <p:nvSpPr>
-          <p:cNvPr id="412" name="Google Shape;412;p13"/>
+          <p:cNvPr id="411" name="Google Shape;411;p13"/>
           <p:cNvSpPr txBox="1"/>
           <p:nvPr/>
         </p:nvSpPr>
@@ -12336,7 +12277,7 @@
       </p:sp>
       <p:sp>
         <p:nvSpPr>
-          <p:cNvPr id="413" name="Google Shape;413;p13"/>
+          <p:cNvPr id="412" name="Google Shape;412;p13"/>
           <p:cNvSpPr/>
           <p:nvPr/>
         </p:nvSpPr>
@@ -12410,7 +12351,7 @@
       </p:sp>
       <p:sp>
         <p:nvSpPr>
-          <p:cNvPr id="414" name="Google Shape;414;p13"/>
+          <p:cNvPr id="413" name="Google Shape;413;p13"/>
           <p:cNvSpPr/>
           <p:nvPr/>
         </p:nvSpPr>
@@ -12469,7 +12410,7 @@
       </p:sp>
       <p:sp>
         <p:nvSpPr>
-          <p:cNvPr id="415" name="Google Shape;415;p13"/>
+          <p:cNvPr id="414" name="Google Shape;414;p13"/>
           <p:cNvSpPr/>
           <p:nvPr/>
         </p:nvSpPr>
@@ -12537,7 +12478,7 @@
       </p:sp>
       <p:sp>
         <p:nvSpPr>
-          <p:cNvPr id="416" name="Google Shape;416;p13"/>
+          <p:cNvPr id="415" name="Google Shape;415;p13"/>
           <p:cNvSpPr txBox="1"/>
           <p:nvPr/>
         </p:nvSpPr>
@@ -12603,7 +12544,7 @@
       </p:sp>
       <p:sp>
         <p:nvSpPr>
-          <p:cNvPr id="417" name="Google Shape;417;p13"/>
+          <p:cNvPr id="416" name="Google Shape;416;p13"/>
           <p:cNvSpPr txBox="1"/>
           <p:nvPr/>
         </p:nvSpPr>
@@ -12711,7 +12652,7 @@
       </p:sp>
       <p:sp>
         <p:nvSpPr>
-          <p:cNvPr id="418" name="Google Shape;418;p13"/>
+          <p:cNvPr id="417" name="Google Shape;417;p13"/>
           <p:cNvSpPr/>
           <p:nvPr/>
         </p:nvSpPr>
@@ -12785,7 +12726,7 @@
       </p:sp>
       <p:sp>
         <p:nvSpPr>
-          <p:cNvPr id="419" name="Google Shape;419;p13"/>
+          <p:cNvPr id="418" name="Google Shape;418;p13"/>
           <p:cNvSpPr/>
           <p:nvPr/>
         </p:nvSpPr>
@@ -12844,7 +12785,7 @@
       </p:sp>
       <p:sp>
         <p:nvSpPr>
-          <p:cNvPr id="420" name="Google Shape;420;p13"/>
+          <p:cNvPr id="419" name="Google Shape;419;p13"/>
           <p:cNvSpPr/>
           <p:nvPr/>
         </p:nvSpPr>
@@ -12912,7 +12853,7 @@
       </p:sp>
       <p:sp>
         <p:nvSpPr>
-          <p:cNvPr id="421" name="Google Shape;421;p13"/>
+          <p:cNvPr id="420" name="Google Shape;420;p13"/>
           <p:cNvSpPr txBox="1"/>
           <p:nvPr/>
         </p:nvSpPr>
@@ -12978,7 +12919,7 @@
       </p:sp>
       <p:sp>
         <p:nvSpPr>
-          <p:cNvPr id="422" name="Google Shape;422;p13"/>
+          <p:cNvPr id="421" name="Google Shape;421;p13"/>
           <p:cNvSpPr txBox="1"/>
           <p:nvPr/>
         </p:nvSpPr>
@@ -13071,7 +13012,7 @@
       </p:sp>
       <p:sp>
         <p:nvSpPr>
-          <p:cNvPr id="423" name="Google Shape;423;p13"/>
+          <p:cNvPr id="422" name="Google Shape;422;p13"/>
           <p:cNvSpPr txBox="1"/>
           <p:nvPr/>
         </p:nvSpPr>
@@ -13152,7 +13093,7 @@
       </p:sp>
       <p:cxnSp>
         <p:nvCxnSpPr>
-          <p:cNvPr id="424" name="Google Shape;424;p13"/>
+          <p:cNvPr id="423" name="Google Shape;423;p13"/>
           <p:cNvCxnSpPr/>
           <p:nvPr/>
         </p:nvCxnSpPr>
@@ -13178,7 +13119,7 @@
       </p:cxnSp>
       <p:sp>
         <p:nvSpPr>
-          <p:cNvPr id="425" name="Google Shape;425;p13"/>
+          <p:cNvPr id="424" name="Google Shape;424;p13"/>
           <p:cNvSpPr txBox="1"/>
           <p:nvPr/>
         </p:nvSpPr>
@@ -13256,7 +13197,7 @@
       </p:sp>
       <p:sp>
         <p:nvSpPr>
-          <p:cNvPr id="426" name="Google Shape;426;p13"/>
+          <p:cNvPr id="425" name="Google Shape;425;p13"/>
           <p:cNvSpPr/>
           <p:nvPr/>
         </p:nvSpPr>
@@ -13333,7 +13274,7 @@
     </p:bg>
     <p:spTree>
       <p:nvGrpSpPr>
-        <p:cNvPr id="431" name="Shape 431"/>
+        <p:cNvPr id="430" name="Shape 430"/>
         <p:cNvGrpSpPr/>
         <p:nvPr/>
       </p:nvGrpSpPr>
@@ -13347,7 +13288,7 @@
       </p:grpSpPr>
       <p:sp>
         <p:nvSpPr>
-          <p:cNvPr id="432" name="Google Shape;432;p14"/>
+          <p:cNvPr id="431" name="Google Shape;431;p14"/>
           <p:cNvSpPr txBox="1"/>
           <p:nvPr/>
         </p:nvSpPr>
@@ -13413,7 +13354,7 @@
       </p:sp>
       <p:sp>
         <p:nvSpPr>
-          <p:cNvPr id="433" name="Google Shape;433;p14"/>
+          <p:cNvPr id="432" name="Google Shape;432;p14"/>
           <p:cNvSpPr/>
           <p:nvPr/>
         </p:nvSpPr>
@@ -13472,7 +13413,7 @@
       </p:sp>
       <p:sp>
         <p:nvSpPr>
-          <p:cNvPr id="434" name="Google Shape;434;p14"/>
+          <p:cNvPr id="433" name="Google Shape;433;p14"/>
           <p:cNvSpPr txBox="1"/>
           <p:nvPr/>
         </p:nvSpPr>
@@ -13538,7 +13479,7 @@
       </p:sp>
       <p:sp>
         <p:nvSpPr>
-          <p:cNvPr id="435" name="Google Shape;435;p14"/>
+          <p:cNvPr id="434" name="Google Shape;434;p14"/>
           <p:cNvSpPr/>
           <p:nvPr/>
         </p:nvSpPr>
@@ -13612,7 +13553,7 @@
       </p:sp>
       <p:sp>
         <p:nvSpPr>
-          <p:cNvPr id="436" name="Google Shape;436;p14"/>
+          <p:cNvPr id="435" name="Google Shape;435;p14"/>
           <p:cNvSpPr/>
           <p:nvPr/>
         </p:nvSpPr>
@@ -13671,7 +13612,7 @@
       </p:sp>
       <p:sp>
         <p:nvSpPr>
-          <p:cNvPr id="437" name="Google Shape;437;p14"/>
+          <p:cNvPr id="436" name="Google Shape;436;p14"/>
           <p:cNvSpPr txBox="1"/>
           <p:nvPr/>
         </p:nvSpPr>
@@ -13737,7 +13678,7 @@
       </p:sp>
       <p:sp>
         <p:nvSpPr>
-          <p:cNvPr id="438" name="Google Shape;438;p14"/>
+          <p:cNvPr id="437" name="Google Shape;437;p14"/>
           <p:cNvSpPr txBox="1"/>
           <p:nvPr/>
         </p:nvSpPr>
@@ -13803,7 +13744,7 @@
       </p:sp>
       <p:cxnSp>
         <p:nvCxnSpPr>
-          <p:cNvPr id="439" name="Google Shape;439;p14"/>
+          <p:cNvPr id="438" name="Google Shape;438;p14"/>
           <p:cNvCxnSpPr/>
           <p:nvPr/>
         </p:nvCxnSpPr>
@@ -13831,7 +13772,7 @@
       </p:cxnSp>
       <p:sp>
         <p:nvSpPr>
-          <p:cNvPr id="440" name="Google Shape;440;p14"/>
+          <p:cNvPr id="439" name="Google Shape;439;p14"/>
           <p:cNvSpPr txBox="1"/>
           <p:nvPr/>
         </p:nvSpPr>
@@ -13897,7 +13838,7 @@
       </p:sp>
       <p:sp>
         <p:nvSpPr>
-          <p:cNvPr id="441" name="Google Shape;441;p14"/>
+          <p:cNvPr id="440" name="Google Shape;440;p14"/>
           <p:cNvSpPr/>
           <p:nvPr/>
         </p:nvSpPr>
@@ -13971,7 +13912,7 @@
       </p:sp>
       <p:sp>
         <p:nvSpPr>
-          <p:cNvPr id="442" name="Google Shape;442;p14"/>
+          <p:cNvPr id="441" name="Google Shape;441;p14"/>
           <p:cNvSpPr/>
           <p:nvPr/>
         </p:nvSpPr>
@@ -14030,7 +13971,7 @@
       </p:sp>
       <p:sp>
         <p:nvSpPr>
-          <p:cNvPr id="443" name="Google Shape;443;p14"/>
+          <p:cNvPr id="442" name="Google Shape;442;p14"/>
           <p:cNvSpPr txBox="1"/>
           <p:nvPr/>
         </p:nvSpPr>
@@ -14096,7 +14037,7 @@
       </p:sp>
       <p:sp>
         <p:nvSpPr>
-          <p:cNvPr id="444" name="Google Shape;444;p14"/>
+          <p:cNvPr id="443" name="Google Shape;443;p14"/>
           <p:cNvSpPr txBox="1"/>
           <p:nvPr/>
         </p:nvSpPr>
@@ -14162,7 +14103,7 @@
       </p:sp>
       <p:cxnSp>
         <p:nvCxnSpPr>
-          <p:cNvPr id="445" name="Google Shape;445;p14"/>
+          <p:cNvPr id="444" name="Google Shape;444;p14"/>
           <p:cNvCxnSpPr/>
           <p:nvPr/>
         </p:nvCxnSpPr>
@@ -14190,7 +14131,7 @@
       </p:cxnSp>
       <p:sp>
         <p:nvSpPr>
-          <p:cNvPr id="446" name="Google Shape;446;p14"/>
+          <p:cNvPr id="445" name="Google Shape;445;p14"/>
           <p:cNvSpPr txBox="1"/>
           <p:nvPr/>
         </p:nvSpPr>
@@ -14256,7 +14197,7 @@
       </p:sp>
       <p:sp>
         <p:nvSpPr>
-          <p:cNvPr id="447" name="Google Shape;447;p14"/>
+          <p:cNvPr id="446" name="Google Shape;446;p14"/>
           <p:cNvSpPr/>
           <p:nvPr/>
         </p:nvSpPr>
@@ -14330,7 +14271,7 @@
       </p:sp>
       <p:sp>
         <p:nvSpPr>
-          <p:cNvPr id="448" name="Google Shape;448;p14"/>
+          <p:cNvPr id="447" name="Google Shape;447;p14"/>
           <p:cNvSpPr/>
           <p:nvPr/>
         </p:nvSpPr>
@@ -14389,7 +14330,7 @@
       </p:sp>
       <p:sp>
         <p:nvSpPr>
-          <p:cNvPr id="449" name="Google Shape;449;p14"/>
+          <p:cNvPr id="448" name="Google Shape;448;p14"/>
           <p:cNvSpPr txBox="1"/>
           <p:nvPr/>
         </p:nvSpPr>
@@ -14455,7 +14396,7 @@
       </p:sp>
       <p:sp>
         <p:nvSpPr>
-          <p:cNvPr id="450" name="Google Shape;450;p14"/>
+          <p:cNvPr id="449" name="Google Shape;449;p14"/>
           <p:cNvSpPr txBox="1"/>
           <p:nvPr/>
         </p:nvSpPr>
@@ -14521,7 +14462,7 @@
       </p:sp>
       <p:cxnSp>
         <p:nvCxnSpPr>
-          <p:cNvPr id="451" name="Google Shape;451;p14"/>
+          <p:cNvPr id="450" name="Google Shape;450;p14"/>
           <p:cNvCxnSpPr/>
           <p:nvPr/>
         </p:nvCxnSpPr>
@@ -14549,7 +14490,7 @@
       </p:cxnSp>
       <p:sp>
         <p:nvSpPr>
-          <p:cNvPr id="452" name="Google Shape;452;p14"/>
+          <p:cNvPr id="451" name="Google Shape;451;p14"/>
           <p:cNvSpPr txBox="1"/>
           <p:nvPr/>
         </p:nvSpPr>
@@ -14615,7 +14556,7 @@
       </p:sp>
       <p:sp>
         <p:nvSpPr>
-          <p:cNvPr id="453" name="Google Shape;453;p14"/>
+          <p:cNvPr id="452" name="Google Shape;452;p14"/>
           <p:cNvSpPr/>
           <p:nvPr/>
         </p:nvSpPr>
@@ -14676,7 +14617,7 @@
       </p:sp>
       <p:sp>
         <p:nvSpPr>
-          <p:cNvPr id="454" name="Google Shape;454;p14"/>
+          <p:cNvPr id="453" name="Google Shape;453;p14"/>
           <p:cNvSpPr txBox="1"/>
           <p:nvPr/>
         </p:nvSpPr>
@@ -14742,7 +14683,7 @@
       </p:sp>
       <p:sp>
         <p:nvSpPr>
-          <p:cNvPr id="455" name="Google Shape;455;p14"/>
+          <p:cNvPr id="454" name="Google Shape;454;p14"/>
           <p:cNvSpPr txBox="1"/>
           <p:nvPr/>
         </p:nvSpPr>
@@ -14808,7 +14749,7 @@
       </p:sp>
       <p:cxnSp>
         <p:nvCxnSpPr>
-          <p:cNvPr id="456" name="Google Shape;456;p14"/>
+          <p:cNvPr id="455" name="Google Shape;455;p14"/>
           <p:cNvCxnSpPr/>
           <p:nvPr/>
         </p:nvCxnSpPr>
@@ -14834,7 +14775,7 @@
       </p:cxnSp>
       <p:sp>
         <p:nvSpPr>
-          <p:cNvPr id="457" name="Google Shape;457;p14"/>
+          <p:cNvPr id="456" name="Google Shape;456;p14"/>
           <p:cNvSpPr txBox="1"/>
           <p:nvPr/>
         </p:nvSpPr>
@@ -14912,7 +14853,7 @@
       </p:sp>
       <p:sp>
         <p:nvSpPr>
-          <p:cNvPr id="458" name="Google Shape;458;p14"/>
+          <p:cNvPr id="457" name="Google Shape;457;p14"/>
           <p:cNvSpPr/>
           <p:nvPr/>
         </p:nvSpPr>
@@ -14989,7 +14930,7 @@
     </p:bg>
     <p:spTree>
       <p:nvGrpSpPr>
-        <p:cNvPr id="463" name="Shape 463"/>
+        <p:cNvPr id="462" name="Shape 462"/>
         <p:cNvGrpSpPr/>
         <p:nvPr/>
       </p:nvGrpSpPr>
@@ -15003,7 +14944,7 @@
       </p:grpSpPr>
       <p:sp>
         <p:nvSpPr>
-          <p:cNvPr id="464" name="Google Shape;464;p15"/>
+          <p:cNvPr id="463" name="Google Shape;463;p15"/>
           <p:cNvSpPr txBox="1"/>
           <p:nvPr/>
         </p:nvSpPr>
@@ -15069,7 +15010,7 @@
       </p:sp>
       <p:sp>
         <p:nvSpPr>
-          <p:cNvPr id="465" name="Google Shape;465;p15"/>
+          <p:cNvPr id="464" name="Google Shape;464;p15"/>
           <p:cNvSpPr/>
           <p:nvPr/>
         </p:nvSpPr>
@@ -15128,7 +15069,7 @@
       </p:sp>
       <p:cxnSp>
         <p:nvCxnSpPr>
-          <p:cNvPr id="466" name="Google Shape;466;p15"/>
+          <p:cNvPr id="465" name="Google Shape;465;p15"/>
           <p:cNvCxnSpPr/>
           <p:nvPr/>
         </p:nvCxnSpPr>
@@ -15154,7 +15095,7 @@
       </p:cxnSp>
       <p:cxnSp>
         <p:nvCxnSpPr>
-          <p:cNvPr id="467" name="Google Shape;467;p15"/>
+          <p:cNvPr id="466" name="Google Shape;466;p15"/>
           <p:cNvCxnSpPr/>
           <p:nvPr/>
         </p:nvCxnSpPr>
@@ -15180,7 +15121,7 @@
       </p:cxnSp>
       <p:sp>
         <p:nvSpPr>
-          <p:cNvPr id="468" name="Google Shape;468;p15"/>
+          <p:cNvPr id="467" name="Google Shape;467;p15"/>
           <p:cNvSpPr/>
           <p:nvPr/>
         </p:nvSpPr>
@@ -15256,7 +15197,7 @@
       </p:sp>
       <p:sp>
         <p:nvSpPr>
-          <p:cNvPr id="469" name="Google Shape;469;p15"/>
+          <p:cNvPr id="468" name="Google Shape;468;p15"/>
           <p:cNvSpPr txBox="1"/>
           <p:nvPr/>
         </p:nvSpPr>
@@ -15322,7 +15263,7 @@
       </p:sp>
       <p:sp>
         <p:nvSpPr>
-          <p:cNvPr id="470" name="Google Shape;470;p15"/>
+          <p:cNvPr id="469" name="Google Shape;469;p15"/>
           <p:cNvSpPr/>
           <p:nvPr/>
         </p:nvSpPr>
@@ -15398,7 +15339,7 @@
       </p:sp>
       <p:sp>
         <p:nvSpPr>
-          <p:cNvPr id="471" name="Google Shape;471;p15"/>
+          <p:cNvPr id="470" name="Google Shape;470;p15"/>
           <p:cNvSpPr txBox="1"/>
           <p:nvPr/>
         </p:nvSpPr>
@@ -15464,7 +15405,7 @@
       </p:sp>
       <p:sp>
         <p:nvSpPr>
-          <p:cNvPr id="472" name="Google Shape;472;p15"/>
+          <p:cNvPr id="471" name="Google Shape;471;p15"/>
           <p:cNvSpPr/>
           <p:nvPr/>
         </p:nvSpPr>
@@ -15536,7 +15477,7 @@
       </p:sp>
       <p:sp>
         <p:nvSpPr>
-          <p:cNvPr id="473" name="Google Shape;473;p15"/>
+          <p:cNvPr id="472" name="Google Shape;472;p15"/>
           <p:cNvSpPr txBox="1"/>
           <p:nvPr/>
         </p:nvSpPr>
@@ -15602,7 +15543,7 @@
       </p:sp>
       <p:sp>
         <p:nvSpPr>
-          <p:cNvPr id="474" name="Google Shape;474;p15"/>
+          <p:cNvPr id="473" name="Google Shape;473;p15"/>
           <p:cNvSpPr txBox="1"/>
           <p:nvPr/>
         </p:nvSpPr>
@@ -15668,7 +15609,7 @@
       </p:sp>
       <p:sp>
         <p:nvSpPr>
-          <p:cNvPr id="475" name="Google Shape;475;p15"/>
+          <p:cNvPr id="474" name="Google Shape;474;p15"/>
           <p:cNvSpPr txBox="1"/>
           <p:nvPr/>
         </p:nvSpPr>
@@ -15734,7 +15675,7 @@
       </p:sp>
       <p:sp>
         <p:nvSpPr>
-          <p:cNvPr id="476" name="Google Shape;476;p15"/>
+          <p:cNvPr id="475" name="Google Shape;475;p15"/>
           <p:cNvSpPr/>
           <p:nvPr/>
         </p:nvSpPr>
@@ -15806,7 +15747,7 @@
       </p:sp>
       <p:sp>
         <p:nvSpPr>
-          <p:cNvPr id="477" name="Google Shape;477;p15"/>
+          <p:cNvPr id="476" name="Google Shape;476;p15"/>
           <p:cNvSpPr txBox="1"/>
           <p:nvPr/>
         </p:nvSpPr>
@@ -15872,7 +15813,7 @@
       </p:sp>
       <p:sp>
         <p:nvSpPr>
-          <p:cNvPr id="478" name="Google Shape;478;p15"/>
+          <p:cNvPr id="477" name="Google Shape;477;p15"/>
           <p:cNvSpPr txBox="1"/>
           <p:nvPr/>
         </p:nvSpPr>
@@ -15938,7 +15879,7 @@
       </p:sp>
       <p:sp>
         <p:nvSpPr>
-          <p:cNvPr id="479" name="Google Shape;479;p15"/>
+          <p:cNvPr id="478" name="Google Shape;478;p15"/>
           <p:cNvSpPr txBox="1"/>
           <p:nvPr/>
         </p:nvSpPr>
@@ -16004,7 +15945,7 @@
       </p:sp>
       <p:sp>
         <p:nvSpPr>
-          <p:cNvPr id="480" name="Google Shape;480;p15"/>
+          <p:cNvPr id="479" name="Google Shape;479;p15"/>
           <p:cNvSpPr/>
           <p:nvPr/>
         </p:nvSpPr>
@@ -16076,7 +16017,7 @@
       </p:sp>
       <p:sp>
         <p:nvSpPr>
-          <p:cNvPr id="481" name="Google Shape;481;p15"/>
+          <p:cNvPr id="480" name="Google Shape;480;p15"/>
           <p:cNvSpPr txBox="1"/>
           <p:nvPr/>
         </p:nvSpPr>
@@ -16142,7 +16083,7 @@
       </p:sp>
       <p:sp>
         <p:nvSpPr>
-          <p:cNvPr id="482" name="Google Shape;482;p15"/>
+          <p:cNvPr id="481" name="Google Shape;481;p15"/>
           <p:cNvSpPr txBox="1"/>
           <p:nvPr/>
         </p:nvSpPr>
@@ -16208,7 +16149,7 @@
       </p:sp>
       <p:sp>
         <p:nvSpPr>
-          <p:cNvPr id="483" name="Google Shape;483;p15"/>
+          <p:cNvPr id="482" name="Google Shape;482;p15"/>
           <p:cNvSpPr txBox="1"/>
           <p:nvPr/>
         </p:nvSpPr>
@@ -16274,7 +16215,7 @@
       </p:sp>
       <p:sp>
         <p:nvSpPr>
-          <p:cNvPr id="484" name="Google Shape;484;p15"/>
+          <p:cNvPr id="483" name="Google Shape;483;p15"/>
           <p:cNvSpPr txBox="1"/>
           <p:nvPr/>
         </p:nvSpPr>
@@ -16340,7 +16281,7 @@
       </p:sp>
       <p:sp>
         <p:nvSpPr>
-          <p:cNvPr id="485" name="Google Shape;485;p15"/>
+          <p:cNvPr id="484" name="Google Shape;484;p15"/>
           <p:cNvSpPr txBox="1"/>
           <p:nvPr/>
         </p:nvSpPr>
@@ -16406,7 +16347,7 @@
       </p:sp>
       <p:sp>
         <p:nvSpPr>
-          <p:cNvPr id="486" name="Google Shape;486;p15"/>
+          <p:cNvPr id="485" name="Google Shape;485;p15"/>
           <p:cNvSpPr/>
           <p:nvPr/>
         </p:nvSpPr>
@@ -16480,7 +16421,7 @@
       </p:sp>
       <p:sp>
         <p:nvSpPr>
-          <p:cNvPr id="487" name="Google Shape;487;p15"/>
+          <p:cNvPr id="486" name="Google Shape;486;p15"/>
           <p:cNvSpPr txBox="1"/>
           <p:nvPr/>
         </p:nvSpPr>
@@ -16546,7 +16487,7 @@
       </p:sp>
       <p:sp>
         <p:nvSpPr>
-          <p:cNvPr id="488" name="Google Shape;488;p15"/>
+          <p:cNvPr id="487" name="Google Shape;487;p15"/>
           <p:cNvSpPr txBox="1"/>
           <p:nvPr/>
         </p:nvSpPr>
@@ -16612,7 +16553,7 @@
       </p:sp>
       <p:sp>
         <p:nvSpPr>
-          <p:cNvPr id="489" name="Google Shape;489;p15"/>
+          <p:cNvPr id="488" name="Google Shape;488;p15"/>
           <p:cNvSpPr/>
           <p:nvPr/>
         </p:nvSpPr>
@@ -16686,7 +16627,7 @@
       </p:sp>
       <p:sp>
         <p:nvSpPr>
-          <p:cNvPr id="490" name="Google Shape;490;p15"/>
+          <p:cNvPr id="489" name="Google Shape;489;p15"/>
           <p:cNvSpPr txBox="1"/>
           <p:nvPr/>
         </p:nvSpPr>
@@ -16752,7 +16693,7 @@
       </p:sp>
       <p:sp>
         <p:nvSpPr>
-          <p:cNvPr id="491" name="Google Shape;491;p15"/>
+          <p:cNvPr id="490" name="Google Shape;490;p15"/>
           <p:cNvSpPr txBox="1"/>
           <p:nvPr/>
         </p:nvSpPr>
@@ -16818,7 +16759,7 @@
       </p:sp>
       <p:sp>
         <p:nvSpPr>
-          <p:cNvPr id="492" name="Google Shape;492;p15"/>
+          <p:cNvPr id="491" name="Google Shape;491;p15"/>
           <p:cNvSpPr/>
           <p:nvPr/>
         </p:nvSpPr>
@@ -16892,7 +16833,7 @@
       </p:sp>
       <p:sp>
         <p:nvSpPr>
-          <p:cNvPr id="493" name="Google Shape;493;p15"/>
+          <p:cNvPr id="492" name="Google Shape;492;p15"/>
           <p:cNvSpPr txBox="1"/>
           <p:nvPr/>
         </p:nvSpPr>
@@ -16958,7 +16899,7 @@
       </p:sp>
       <p:sp>
         <p:nvSpPr>
-          <p:cNvPr id="494" name="Google Shape;494;p15"/>
+          <p:cNvPr id="493" name="Google Shape;493;p15"/>
           <p:cNvSpPr/>
           <p:nvPr/>
         </p:nvSpPr>
@@ -17017,7 +16958,7 @@
       </p:sp>
       <p:sp>
         <p:nvSpPr>
-          <p:cNvPr id="495" name="Google Shape;495;p15"/>
+          <p:cNvPr id="494" name="Google Shape;494;p15"/>
           <p:cNvSpPr txBox="1"/>
           <p:nvPr/>
         </p:nvSpPr>
@@ -17095,7 +17036,7 @@
       </p:sp>
       <p:sp>
         <p:nvSpPr>
-          <p:cNvPr id="496" name="Google Shape;496;p15"/>
+          <p:cNvPr id="495" name="Google Shape;495;p15"/>
           <p:cNvSpPr/>
           <p:nvPr/>
         </p:nvSpPr>
@@ -17172,7 +17113,7 @@
     </p:bg>
     <p:spTree>
       <p:nvGrpSpPr>
-        <p:cNvPr id="501" name="Shape 501"/>
+        <p:cNvPr id="500" name="Shape 500"/>
         <p:cNvGrpSpPr/>
         <p:nvPr/>
       </p:nvGrpSpPr>
@@ -17186,7 +17127,7 @@
       </p:grpSpPr>
       <p:sp>
         <p:nvSpPr>
-          <p:cNvPr id="502" name="Google Shape;502;p16"/>
+          <p:cNvPr id="501" name="Google Shape;501;p16"/>
           <p:cNvSpPr txBox="1"/>
           <p:nvPr/>
         </p:nvSpPr>
@@ -17252,7 +17193,7 @@
       </p:sp>
       <p:sp>
         <p:nvSpPr>
-          <p:cNvPr id="503" name="Google Shape;503;p16"/>
+          <p:cNvPr id="502" name="Google Shape;502;p16"/>
           <p:cNvSpPr/>
           <p:nvPr/>
         </p:nvSpPr>
@@ -17311,7 +17252,7 @@
       </p:sp>
       <p:sp>
         <p:nvSpPr>
-          <p:cNvPr id="504" name="Google Shape;504;p16"/>
+          <p:cNvPr id="503" name="Google Shape;503;p16"/>
           <p:cNvSpPr txBox="1"/>
           <p:nvPr/>
         </p:nvSpPr>
@@ -17428,7 +17369,7 @@
       </p:sp>
       <p:sp>
         <p:nvSpPr>
-          <p:cNvPr id="505" name="Google Shape;505;p16"/>
+          <p:cNvPr id="504" name="Google Shape;504;p16"/>
           <p:cNvSpPr/>
           <p:nvPr/>
         </p:nvSpPr>
@@ -17493,7 +17434,7 @@
       </p:sp>
       <p:sp>
         <p:nvSpPr>
-          <p:cNvPr id="506" name="Google Shape;506;p16"/>
+          <p:cNvPr id="505" name="Google Shape;505;p16"/>
           <p:cNvSpPr/>
           <p:nvPr/>
         </p:nvSpPr>
@@ -17554,7 +17495,7 @@
       </p:sp>
       <p:sp>
         <p:nvSpPr>
-          <p:cNvPr id="507" name="Google Shape;507;p16"/>
+          <p:cNvPr id="506" name="Google Shape;506;p16"/>
           <p:cNvSpPr/>
           <p:nvPr/>
         </p:nvSpPr>
@@ -17613,7 +17554,7 @@
       </p:sp>
       <p:sp>
         <p:nvSpPr>
-          <p:cNvPr id="508" name="Google Shape;508;p16"/>
+          <p:cNvPr id="507" name="Google Shape;507;p16"/>
           <p:cNvSpPr/>
           <p:nvPr/>
         </p:nvSpPr>
@@ -17672,7 +17613,7 @@
       </p:sp>
       <p:sp>
         <p:nvSpPr>
-          <p:cNvPr id="509" name="Google Shape;509;p16"/>
+          <p:cNvPr id="508" name="Google Shape;508;p16"/>
           <p:cNvSpPr/>
           <p:nvPr/>
         </p:nvSpPr>
@@ -17731,7 +17672,7 @@
       </p:sp>
       <p:sp>
         <p:nvSpPr>
-          <p:cNvPr id="510" name="Google Shape;510;p16"/>
+          <p:cNvPr id="509" name="Google Shape;509;p16"/>
           <p:cNvSpPr/>
           <p:nvPr/>
         </p:nvSpPr>
@@ -17796,7 +17737,7 @@
       </p:sp>
       <p:sp>
         <p:nvSpPr>
-          <p:cNvPr id="511" name="Google Shape;511;p16"/>
+          <p:cNvPr id="510" name="Google Shape;510;p16"/>
           <p:cNvSpPr txBox="1"/>
           <p:nvPr/>
         </p:nvSpPr>
@@ -17862,7 +17803,7 @@
       </p:sp>
       <p:sp>
         <p:nvSpPr>
-          <p:cNvPr id="512" name="Google Shape;512;p16"/>
+          <p:cNvPr id="511" name="Google Shape;511;p16"/>
           <p:cNvSpPr txBox="1"/>
           <p:nvPr/>
         </p:nvSpPr>
@@ -17928,7 +17869,7 @@
       </p:sp>
       <p:sp>
         <p:nvSpPr>
-          <p:cNvPr id="513" name="Google Shape;513;p16"/>
+          <p:cNvPr id="512" name="Google Shape;512;p16"/>
           <p:cNvSpPr txBox="1"/>
           <p:nvPr/>
         </p:nvSpPr>
@@ -17994,7 +17935,7 @@
       </p:sp>
       <p:sp>
         <p:nvSpPr>
-          <p:cNvPr id="514" name="Google Shape;514;p16"/>
+          <p:cNvPr id="513" name="Google Shape;513;p16"/>
           <p:cNvSpPr/>
           <p:nvPr/>
         </p:nvSpPr>
@@ -18059,7 +18000,7 @@
       </p:sp>
       <p:sp>
         <p:nvSpPr>
-          <p:cNvPr id="515" name="Google Shape;515;p16"/>
+          <p:cNvPr id="514" name="Google Shape;514;p16"/>
           <p:cNvSpPr txBox="1"/>
           <p:nvPr/>
         </p:nvSpPr>
@@ -18125,7 +18066,7 @@
       </p:sp>
       <p:sp>
         <p:nvSpPr>
-          <p:cNvPr id="516" name="Google Shape;516;p16"/>
+          <p:cNvPr id="515" name="Google Shape;515;p16"/>
           <p:cNvSpPr txBox="1"/>
           <p:nvPr/>
         </p:nvSpPr>
@@ -18191,7 +18132,7 @@
       </p:sp>
       <p:sp>
         <p:nvSpPr>
-          <p:cNvPr id="517" name="Google Shape;517;p16"/>
+          <p:cNvPr id="516" name="Google Shape;516;p16"/>
           <p:cNvSpPr txBox="1"/>
           <p:nvPr/>
         </p:nvSpPr>
@@ -18257,7 +18198,7 @@
       </p:sp>
       <p:sp>
         <p:nvSpPr>
-          <p:cNvPr id="518" name="Google Shape;518;p16"/>
+          <p:cNvPr id="517" name="Google Shape;517;p16"/>
           <p:cNvSpPr/>
           <p:nvPr/>
         </p:nvSpPr>
@@ -18322,7 +18263,7 @@
       </p:sp>
       <p:sp>
         <p:nvSpPr>
-          <p:cNvPr id="519" name="Google Shape;519;p16"/>
+          <p:cNvPr id="518" name="Google Shape;518;p16"/>
           <p:cNvSpPr txBox="1"/>
           <p:nvPr/>
         </p:nvSpPr>
@@ -18388,7 +18329,7 @@
       </p:sp>
       <p:sp>
         <p:nvSpPr>
-          <p:cNvPr id="520" name="Google Shape;520;p16"/>
+          <p:cNvPr id="519" name="Google Shape;519;p16"/>
           <p:cNvSpPr txBox="1"/>
           <p:nvPr/>
         </p:nvSpPr>
@@ -18454,7 +18395,7 @@
       </p:sp>
       <p:sp>
         <p:nvSpPr>
-          <p:cNvPr id="521" name="Google Shape;521;p16"/>
+          <p:cNvPr id="520" name="Google Shape;520;p16"/>
           <p:cNvSpPr txBox="1"/>
           <p:nvPr/>
         </p:nvSpPr>
@@ -18520,7 +18461,7 @@
       </p:sp>
       <p:sp>
         <p:nvSpPr>
-          <p:cNvPr id="522" name="Google Shape;522;p16"/>
+          <p:cNvPr id="521" name="Google Shape;521;p16"/>
           <p:cNvSpPr/>
           <p:nvPr/>
         </p:nvSpPr>
@@ -18585,7 +18526,7 @@
       </p:sp>
       <p:sp>
         <p:nvSpPr>
-          <p:cNvPr id="523" name="Google Shape;523;p16"/>
+          <p:cNvPr id="522" name="Google Shape;522;p16"/>
           <p:cNvSpPr txBox="1"/>
           <p:nvPr/>
         </p:nvSpPr>
@@ -18651,7 +18592,7 @@
       </p:sp>
       <p:sp>
         <p:nvSpPr>
-          <p:cNvPr id="524" name="Google Shape;524;p16"/>
+          <p:cNvPr id="523" name="Google Shape;523;p16"/>
           <p:cNvSpPr txBox="1"/>
           <p:nvPr/>
         </p:nvSpPr>
@@ -18717,7 +18658,7 @@
       </p:sp>
       <p:sp>
         <p:nvSpPr>
-          <p:cNvPr id="525" name="Google Shape;525;p16"/>
+          <p:cNvPr id="524" name="Google Shape;524;p16"/>
           <p:cNvSpPr txBox="1"/>
           <p:nvPr/>
         </p:nvSpPr>
@@ -18783,7 +18724,7 @@
       </p:sp>
       <p:sp>
         <p:nvSpPr>
-          <p:cNvPr id="526" name="Google Shape;526;p16"/>
+          <p:cNvPr id="525" name="Google Shape;525;p16"/>
           <p:cNvSpPr/>
           <p:nvPr/>
         </p:nvSpPr>
@@ -18848,7 +18789,7 @@
       </p:sp>
       <p:sp>
         <p:nvSpPr>
-          <p:cNvPr id="527" name="Google Shape;527;p16"/>
+          <p:cNvPr id="526" name="Google Shape;526;p16"/>
           <p:cNvSpPr/>
           <p:nvPr/>
         </p:nvSpPr>
@@ -18909,7 +18850,7 @@
       </p:sp>
       <p:sp>
         <p:nvSpPr>
-          <p:cNvPr id="528" name="Google Shape;528;p16"/>
+          <p:cNvPr id="527" name="Google Shape;527;p16"/>
           <p:cNvSpPr txBox="1"/>
           <p:nvPr/>
         </p:nvSpPr>
@@ -19015,7 +18956,7 @@
       </p:sp>
       <p:sp>
         <p:nvSpPr>
-          <p:cNvPr id="529" name="Google Shape;529;p16"/>
+          <p:cNvPr id="528" name="Google Shape;528;p16"/>
           <p:cNvSpPr/>
           <p:nvPr/>
         </p:nvSpPr>
@@ -19074,7 +19015,7 @@
       </p:sp>
       <p:sp>
         <p:nvSpPr>
-          <p:cNvPr id="530" name="Google Shape;530;p16"/>
+          <p:cNvPr id="529" name="Google Shape;529;p16"/>
           <p:cNvSpPr txBox="1"/>
           <p:nvPr/>
         </p:nvSpPr>
@@ -19140,7 +19081,7 @@
       </p:sp>
       <p:sp>
         <p:nvSpPr>
-          <p:cNvPr id="531" name="Google Shape;531;p16"/>
+          <p:cNvPr id="530" name="Google Shape;530;p16"/>
           <p:cNvSpPr txBox="1"/>
           <p:nvPr/>
         </p:nvSpPr>
@@ -19218,7 +19159,7 @@
       </p:sp>
       <p:sp>
         <p:nvSpPr>
-          <p:cNvPr id="532" name="Google Shape;532;p16"/>
+          <p:cNvPr id="531" name="Google Shape;531;p16"/>
           <p:cNvSpPr/>
           <p:nvPr/>
         </p:nvSpPr>
@@ -19295,7 +19236,7 @@
     </p:bg>
     <p:spTree>
       <p:nvGrpSpPr>
-        <p:cNvPr id="537" name="Shape 537"/>
+        <p:cNvPr id="536" name="Shape 536"/>
         <p:cNvGrpSpPr/>
         <p:nvPr/>
       </p:nvGrpSpPr>
@@ -19309,7 +19250,7 @@
       </p:grpSpPr>
       <p:sp>
         <p:nvSpPr>
-          <p:cNvPr id="538" name="Google Shape;538;p17"/>
+          <p:cNvPr id="537" name="Google Shape;537;p17"/>
           <p:cNvSpPr txBox="1"/>
           <p:nvPr/>
         </p:nvSpPr>
@@ -19375,7 +19316,7 @@
       </p:sp>
       <p:sp>
         <p:nvSpPr>
-          <p:cNvPr id="539" name="Google Shape;539;p17"/>
+          <p:cNvPr id="538" name="Google Shape;538;p17"/>
           <p:cNvSpPr/>
           <p:nvPr/>
         </p:nvSpPr>
@@ -19434,7 +19375,7 @@
       </p:sp>
       <p:sp>
         <p:nvSpPr>
-          <p:cNvPr id="540" name="Google Shape;540;p17"/>
+          <p:cNvPr id="539" name="Google Shape;539;p17"/>
           <p:cNvSpPr/>
           <p:nvPr/>
         </p:nvSpPr>
@@ -19497,7 +19438,7 @@
       </p:sp>
       <p:sp>
         <p:nvSpPr>
-          <p:cNvPr id="541" name="Google Shape;541;p17"/>
+          <p:cNvPr id="540" name="Google Shape;540;p17"/>
           <p:cNvSpPr/>
           <p:nvPr/>
         </p:nvSpPr>
@@ -19571,7 +19512,7 @@
       </p:sp>
       <p:sp>
         <p:nvSpPr>
-          <p:cNvPr id="542" name="Google Shape;542;p17"/>
+          <p:cNvPr id="541" name="Google Shape;541;p17"/>
           <p:cNvSpPr/>
           <p:nvPr/>
         </p:nvSpPr>
@@ -19636,7 +19577,7 @@
       </p:sp>
       <p:sp>
         <p:nvSpPr>
-          <p:cNvPr id="543" name="Google Shape;543;p17"/>
+          <p:cNvPr id="542" name="Google Shape;542;p17"/>
           <p:cNvSpPr txBox="1"/>
           <p:nvPr/>
         </p:nvSpPr>
@@ -19702,7 +19643,7 @@
       </p:sp>
       <p:sp>
         <p:nvSpPr>
-          <p:cNvPr id="544" name="Google Shape;544;p17"/>
+          <p:cNvPr id="543" name="Google Shape;543;p17"/>
           <p:cNvSpPr txBox="1"/>
           <p:nvPr/>
         </p:nvSpPr>
@@ -19768,7 +19709,7 @@
       </p:sp>
       <p:sp>
         <p:nvSpPr>
-          <p:cNvPr id="545" name="Google Shape;545;p17"/>
+          <p:cNvPr id="544" name="Google Shape;544;p17"/>
           <p:cNvSpPr txBox="1"/>
           <p:nvPr/>
         </p:nvSpPr>
@@ -19834,7 +19775,7 @@
       </p:sp>
       <p:sp>
         <p:nvSpPr>
-          <p:cNvPr id="546" name="Google Shape;546;p17"/>
+          <p:cNvPr id="545" name="Google Shape;545;p17"/>
           <p:cNvSpPr/>
           <p:nvPr/>
         </p:nvSpPr>
@@ -19908,7 +19849,7 @@
       </p:sp>
       <p:sp>
         <p:nvSpPr>
-          <p:cNvPr id="547" name="Google Shape;547;p17"/>
+          <p:cNvPr id="546" name="Google Shape;546;p17"/>
           <p:cNvSpPr/>
           <p:nvPr/>
         </p:nvSpPr>
@@ -19973,7 +19914,7 @@
       </p:sp>
       <p:sp>
         <p:nvSpPr>
-          <p:cNvPr id="548" name="Google Shape;548;p17"/>
+          <p:cNvPr id="547" name="Google Shape;547;p17"/>
           <p:cNvSpPr txBox="1"/>
           <p:nvPr/>
         </p:nvSpPr>
@@ -20039,7 +19980,7 @@
       </p:sp>
       <p:sp>
         <p:nvSpPr>
-          <p:cNvPr id="549" name="Google Shape;549;p17"/>
+          <p:cNvPr id="548" name="Google Shape;548;p17"/>
           <p:cNvSpPr txBox="1"/>
           <p:nvPr/>
         </p:nvSpPr>
@@ -20105,7 +20046,7 @@
       </p:sp>
       <p:sp>
         <p:nvSpPr>
-          <p:cNvPr id="550" name="Google Shape;550;p17"/>
+          <p:cNvPr id="549" name="Google Shape;549;p17"/>
           <p:cNvSpPr txBox="1"/>
           <p:nvPr/>
         </p:nvSpPr>
@@ -20171,7 +20112,7 @@
       </p:sp>
       <p:sp>
         <p:nvSpPr>
-          <p:cNvPr id="551" name="Google Shape;551;p17"/>
+          <p:cNvPr id="550" name="Google Shape;550;p17"/>
           <p:cNvSpPr/>
           <p:nvPr/>
         </p:nvSpPr>
@@ -20245,7 +20186,7 @@
       </p:sp>
       <p:sp>
         <p:nvSpPr>
-          <p:cNvPr id="552" name="Google Shape;552;p17"/>
+          <p:cNvPr id="551" name="Google Shape;551;p17"/>
           <p:cNvSpPr/>
           <p:nvPr/>
         </p:nvSpPr>
@@ -20310,7 +20251,7 @@
       </p:sp>
       <p:sp>
         <p:nvSpPr>
-          <p:cNvPr id="553" name="Google Shape;553;p17"/>
+          <p:cNvPr id="552" name="Google Shape;552;p17"/>
           <p:cNvSpPr txBox="1"/>
           <p:nvPr/>
         </p:nvSpPr>
@@ -20376,7 +20317,7 @@
       </p:sp>
       <p:sp>
         <p:nvSpPr>
-          <p:cNvPr id="554" name="Google Shape;554;p17"/>
+          <p:cNvPr id="553" name="Google Shape;553;p17"/>
           <p:cNvSpPr txBox="1"/>
           <p:nvPr/>
         </p:nvSpPr>
@@ -20442,7 +20383,7 @@
       </p:sp>
       <p:sp>
         <p:nvSpPr>
-          <p:cNvPr id="555" name="Google Shape;555;p17"/>
+          <p:cNvPr id="554" name="Google Shape;554;p17"/>
           <p:cNvSpPr txBox="1"/>
           <p:nvPr/>
         </p:nvSpPr>
@@ -20508,7 +20449,7 @@
       </p:sp>
       <p:sp>
         <p:nvSpPr>
-          <p:cNvPr id="556" name="Google Shape;556;p17"/>
+          <p:cNvPr id="555" name="Google Shape;555;p17"/>
           <p:cNvSpPr/>
           <p:nvPr/>
         </p:nvSpPr>
@@ -20582,7 +20523,7 @@
       </p:sp>
       <p:sp>
         <p:nvSpPr>
-          <p:cNvPr id="557" name="Google Shape;557;p17"/>
+          <p:cNvPr id="556" name="Google Shape;556;p17"/>
           <p:cNvSpPr/>
           <p:nvPr/>
         </p:nvSpPr>
@@ -20647,7 +20588,7 @@
       </p:sp>
       <p:sp>
         <p:nvSpPr>
-          <p:cNvPr id="558" name="Google Shape;558;p17"/>
+          <p:cNvPr id="557" name="Google Shape;557;p17"/>
           <p:cNvSpPr txBox="1"/>
           <p:nvPr/>
         </p:nvSpPr>
@@ -20713,7 +20654,7 @@
       </p:sp>
       <p:sp>
         <p:nvSpPr>
-          <p:cNvPr id="559" name="Google Shape;559;p17"/>
+          <p:cNvPr id="558" name="Google Shape;558;p17"/>
           <p:cNvSpPr txBox="1"/>
           <p:nvPr/>
         </p:nvSpPr>
@@ -20779,7 +20720,7 @@
       </p:sp>
       <p:sp>
         <p:nvSpPr>
-          <p:cNvPr id="560" name="Google Shape;560;p17"/>
+          <p:cNvPr id="559" name="Google Shape;559;p17"/>
           <p:cNvSpPr txBox="1"/>
           <p:nvPr/>
         </p:nvSpPr>
@@ -20845,7 +20786,7 @@
       </p:sp>
       <p:sp>
         <p:nvSpPr>
-          <p:cNvPr id="561" name="Google Shape;561;p17"/>
+          <p:cNvPr id="560" name="Google Shape;560;p17"/>
           <p:cNvSpPr txBox="1"/>
           <p:nvPr/>
         </p:nvSpPr>
@@ -20911,7 +20852,7 @@
       </p:sp>
       <p:sp>
         <p:nvSpPr>
-          <p:cNvPr id="562" name="Google Shape;562;p17"/>
+          <p:cNvPr id="561" name="Google Shape;561;p17"/>
           <p:cNvSpPr/>
           <p:nvPr/>
         </p:nvSpPr>
@@ -20972,7 +20913,7 @@
       </p:sp>
       <p:sp>
         <p:nvSpPr>
-          <p:cNvPr id="563" name="Google Shape;563;p17"/>
+          <p:cNvPr id="562" name="Google Shape;562;p17"/>
           <p:cNvSpPr/>
           <p:nvPr/>
         </p:nvSpPr>
@@ -21033,7 +20974,7 @@
       </p:sp>
       <p:sp>
         <p:nvSpPr>
-          <p:cNvPr id="564" name="Google Shape;564;p17"/>
+          <p:cNvPr id="563" name="Google Shape;563;p17"/>
           <p:cNvSpPr/>
           <p:nvPr/>
         </p:nvSpPr>
@@ -21094,7 +21035,7 @@
       </p:sp>
       <p:sp>
         <p:nvSpPr>
-          <p:cNvPr id="565" name="Google Shape;565;p17"/>
+          <p:cNvPr id="564" name="Google Shape;564;p17"/>
           <p:cNvSpPr/>
           <p:nvPr/>
         </p:nvSpPr>
@@ -21155,7 +21096,7 @@
       </p:sp>
       <p:sp>
         <p:nvSpPr>
-          <p:cNvPr id="566" name="Google Shape;566;p17"/>
+          <p:cNvPr id="565" name="Google Shape;565;p17"/>
           <p:cNvSpPr txBox="1"/>
           <p:nvPr/>
         </p:nvSpPr>
@@ -21221,7 +21162,7 @@
       </p:sp>
       <p:sp>
         <p:nvSpPr>
-          <p:cNvPr id="567" name="Google Shape;567;p17"/>
+          <p:cNvPr id="566" name="Google Shape;566;p17"/>
           <p:cNvSpPr txBox="1"/>
           <p:nvPr/>
         </p:nvSpPr>
@@ -21287,7 +21228,7 @@
       </p:sp>
       <p:sp>
         <p:nvSpPr>
-          <p:cNvPr id="568" name="Google Shape;568;p17"/>
+          <p:cNvPr id="567" name="Google Shape;567;p17"/>
           <p:cNvSpPr txBox="1"/>
           <p:nvPr/>
         </p:nvSpPr>
@@ -21353,7 +21294,7 @@
       </p:sp>
       <p:sp>
         <p:nvSpPr>
-          <p:cNvPr id="569" name="Google Shape;569;p17"/>
+          <p:cNvPr id="568" name="Google Shape;568;p17"/>
           <p:cNvSpPr txBox="1"/>
           <p:nvPr/>
         </p:nvSpPr>
@@ -21419,7 +21360,7 @@
       </p:sp>
       <p:sp>
         <p:nvSpPr>
-          <p:cNvPr id="570" name="Google Shape;570;p17"/>
+          <p:cNvPr id="569" name="Google Shape;569;p17"/>
           <p:cNvSpPr txBox="1"/>
           <p:nvPr/>
         </p:nvSpPr>
@@ -21485,7 +21426,7 @@
       </p:sp>
       <p:sp>
         <p:nvSpPr>
-          <p:cNvPr id="571" name="Google Shape;571;p17"/>
+          <p:cNvPr id="570" name="Google Shape;570;p17"/>
           <p:cNvSpPr txBox="1"/>
           <p:nvPr/>
         </p:nvSpPr>
@@ -21551,7 +21492,7 @@
       </p:sp>
       <p:cxnSp>
         <p:nvCxnSpPr>
-          <p:cNvPr id="572" name="Google Shape;572;p17"/>
+          <p:cNvPr id="571" name="Google Shape;571;p17"/>
           <p:cNvCxnSpPr/>
           <p:nvPr/>
         </p:nvCxnSpPr>
@@ -21577,7 +21518,7 @@
       </p:cxnSp>
       <p:sp>
         <p:nvSpPr>
-          <p:cNvPr id="573" name="Google Shape;573;p17"/>
+          <p:cNvPr id="572" name="Google Shape;572;p17"/>
           <p:cNvSpPr txBox="1"/>
           <p:nvPr/>
         </p:nvSpPr>
@@ -21655,7 +21596,7 @@
       </p:sp>
       <p:sp>
         <p:nvSpPr>
-          <p:cNvPr id="574" name="Google Shape;574;p17"/>
+          <p:cNvPr id="573" name="Google Shape;573;p17"/>
           <p:cNvSpPr/>
           <p:nvPr/>
         </p:nvSpPr>
@@ -21732,7 +21673,7 @@
     </p:bg>
     <p:spTree>
       <p:nvGrpSpPr>
-        <p:cNvPr id="579" name="Shape 579"/>
+        <p:cNvPr id="578" name="Shape 578"/>
         <p:cNvGrpSpPr/>
         <p:nvPr/>
       </p:nvGrpSpPr>
@@ -21746,7 +21687,7 @@
       </p:grpSpPr>
       <p:sp>
         <p:nvSpPr>
-          <p:cNvPr id="580" name="Google Shape;580;p18"/>
+          <p:cNvPr id="579" name="Google Shape;579;p18"/>
           <p:cNvSpPr txBox="1"/>
           <p:nvPr/>
         </p:nvSpPr>
@@ -21812,7 +21753,7 @@
       </p:sp>
       <p:sp>
         <p:nvSpPr>
-          <p:cNvPr id="581" name="Google Shape;581;p18"/>
+          <p:cNvPr id="580" name="Google Shape;580;p18"/>
           <p:cNvSpPr/>
           <p:nvPr/>
         </p:nvSpPr>
@@ -21871,7 +21812,7 @@
       </p:sp>
       <p:sp>
         <p:nvSpPr>
-          <p:cNvPr id="582" name="Google Shape;582;p18"/>
+          <p:cNvPr id="581" name="Google Shape;581;p18"/>
           <p:cNvSpPr txBox="1"/>
           <p:nvPr/>
         </p:nvSpPr>
@@ -21937,7 +21878,7 @@
       </p:sp>
       <p:sp>
         <p:nvSpPr>
-          <p:cNvPr id="583" name="Google Shape;583;p18"/>
+          <p:cNvPr id="582" name="Google Shape;582;p18"/>
           <p:cNvSpPr txBox="1"/>
           <p:nvPr/>
         </p:nvSpPr>
@@ -22003,7 +21944,7 @@
       </p:sp>
       <p:sp>
         <p:nvSpPr>
-          <p:cNvPr id="584" name="Google Shape;584;p18"/>
+          <p:cNvPr id="583" name="Google Shape;583;p18"/>
           <p:cNvSpPr/>
           <p:nvPr/>
         </p:nvSpPr>
@@ -22064,7 +22005,7 @@
       </p:sp>
       <p:sp>
         <p:nvSpPr>
-          <p:cNvPr id="585" name="Google Shape;585;p18"/>
+          <p:cNvPr id="584" name="Google Shape;584;p18"/>
           <p:cNvSpPr txBox="1"/>
           <p:nvPr/>
         </p:nvSpPr>
@@ -22130,7 +22071,7 @@
       </p:sp>
       <p:sp>
         <p:nvSpPr>
-          <p:cNvPr id="586" name="Google Shape;586;p18"/>
+          <p:cNvPr id="585" name="Google Shape;585;p18"/>
           <p:cNvSpPr/>
           <p:nvPr/>
         </p:nvSpPr>
@@ -22189,7 +22130,7 @@
       </p:sp>
       <p:sp>
         <p:nvSpPr>
-          <p:cNvPr id="587" name="Google Shape;587;p18"/>
+          <p:cNvPr id="586" name="Google Shape;586;p18"/>
           <p:cNvSpPr txBox="1"/>
           <p:nvPr/>
         </p:nvSpPr>
@@ -22255,7 +22196,7 @@
       </p:sp>
       <p:sp>
         <p:nvSpPr>
-          <p:cNvPr id="588" name="Google Shape;588;p18"/>
+          <p:cNvPr id="587" name="Google Shape;587;p18"/>
           <p:cNvSpPr txBox="1"/>
           <p:nvPr/>
         </p:nvSpPr>
@@ -22321,7 +22262,7 @@
       </p:sp>
       <p:sp>
         <p:nvSpPr>
-          <p:cNvPr id="589" name="Google Shape;589;p18"/>
+          <p:cNvPr id="588" name="Google Shape;588;p18"/>
           <p:cNvSpPr txBox="1"/>
           <p:nvPr/>
         </p:nvSpPr>
@@ -22387,7 +22328,7 @@
       </p:sp>
       <p:sp>
         <p:nvSpPr>
-          <p:cNvPr id="590" name="Google Shape;590;p18"/>
+          <p:cNvPr id="589" name="Google Shape;589;p18"/>
           <p:cNvSpPr/>
           <p:nvPr/>
         </p:nvSpPr>
@@ -22448,7 +22389,7 @@
       </p:sp>
       <p:sp>
         <p:nvSpPr>
-          <p:cNvPr id="591" name="Google Shape;591;p18"/>
+          <p:cNvPr id="590" name="Google Shape;590;p18"/>
           <p:cNvSpPr txBox="1"/>
           <p:nvPr/>
         </p:nvSpPr>
@@ -22514,7 +22455,7 @@
       </p:sp>
       <p:sp>
         <p:nvSpPr>
-          <p:cNvPr id="592" name="Google Shape;592;p18"/>
+          <p:cNvPr id="591" name="Google Shape;591;p18"/>
           <p:cNvSpPr/>
           <p:nvPr/>
         </p:nvSpPr>
@@ -22573,7 +22514,7 @@
       </p:sp>
       <p:sp>
         <p:nvSpPr>
-          <p:cNvPr id="593" name="Google Shape;593;p18"/>
+          <p:cNvPr id="592" name="Google Shape;592;p18"/>
           <p:cNvSpPr txBox="1"/>
           <p:nvPr/>
         </p:nvSpPr>
@@ -22639,7 +22580,7 @@
       </p:sp>
       <p:sp>
         <p:nvSpPr>
-          <p:cNvPr id="594" name="Google Shape;594;p18"/>
+          <p:cNvPr id="593" name="Google Shape;593;p18"/>
           <p:cNvSpPr txBox="1"/>
           <p:nvPr/>
         </p:nvSpPr>
@@ -22705,7 +22646,7 @@
       </p:sp>
       <p:sp>
         <p:nvSpPr>
-          <p:cNvPr id="595" name="Google Shape;595;p18"/>
+          <p:cNvPr id="594" name="Google Shape;594;p18"/>
           <p:cNvSpPr txBox="1"/>
           <p:nvPr/>
         </p:nvSpPr>
@@ -22771,7 +22712,7 @@
       </p:sp>
       <p:sp>
         <p:nvSpPr>
-          <p:cNvPr id="596" name="Google Shape;596;p18"/>
+          <p:cNvPr id="595" name="Google Shape;595;p18"/>
           <p:cNvSpPr/>
           <p:nvPr/>
         </p:nvSpPr>
@@ -22832,7 +22773,7 @@
       </p:sp>
       <p:sp>
         <p:nvSpPr>
-          <p:cNvPr id="597" name="Google Shape;597;p18"/>
+          <p:cNvPr id="596" name="Google Shape;596;p18"/>
           <p:cNvSpPr txBox="1"/>
           <p:nvPr/>
         </p:nvSpPr>
@@ -22898,7 +22839,7 @@
       </p:sp>
       <p:sp>
         <p:nvSpPr>
-          <p:cNvPr id="598" name="Google Shape;598;p18"/>
+          <p:cNvPr id="597" name="Google Shape;597;p18"/>
           <p:cNvSpPr/>
           <p:nvPr/>
         </p:nvSpPr>
@@ -22957,7 +22898,7 @@
       </p:sp>
       <p:sp>
         <p:nvSpPr>
-          <p:cNvPr id="599" name="Google Shape;599;p18"/>
+          <p:cNvPr id="598" name="Google Shape;598;p18"/>
           <p:cNvSpPr txBox="1"/>
           <p:nvPr/>
         </p:nvSpPr>
@@ -23023,7 +22964,7 @@
       </p:sp>
       <p:sp>
         <p:nvSpPr>
-          <p:cNvPr id="600" name="Google Shape;600;p18"/>
+          <p:cNvPr id="599" name="Google Shape;599;p18"/>
           <p:cNvSpPr txBox="1"/>
           <p:nvPr/>
         </p:nvSpPr>
@@ -23129,7 +23070,7 @@
       </p:sp>
       <p:cxnSp>
         <p:nvCxnSpPr>
-          <p:cNvPr id="601" name="Google Shape;601;p18"/>
+          <p:cNvPr id="600" name="Google Shape;600;p18"/>
           <p:cNvCxnSpPr/>
           <p:nvPr/>
         </p:nvCxnSpPr>
@@ -23155,7 +23096,7 @@
       </p:cxnSp>
       <p:sp>
         <p:nvSpPr>
-          <p:cNvPr id="602" name="Google Shape;602;p18"/>
+          <p:cNvPr id="601" name="Google Shape;601;p18"/>
           <p:cNvSpPr txBox="1"/>
           <p:nvPr/>
         </p:nvSpPr>
@@ -23233,7 +23174,7 @@
       </p:sp>
       <p:sp>
         <p:nvSpPr>
-          <p:cNvPr id="603" name="Google Shape;603;p18"/>
+          <p:cNvPr id="602" name="Google Shape;602;p18"/>
           <p:cNvSpPr/>
           <p:nvPr/>
         </p:nvSpPr>
@@ -23310,7 +23251,7 @@
     </p:bg>
     <p:spTree>
       <p:nvGrpSpPr>
-        <p:cNvPr id="608" name="Shape 608"/>
+        <p:cNvPr id="607" name="Shape 607"/>
         <p:cNvGrpSpPr/>
         <p:nvPr/>
       </p:nvGrpSpPr>
@@ -23324,7 +23265,7 @@
       </p:grpSpPr>
       <p:sp>
         <p:nvSpPr>
-          <p:cNvPr id="609" name="Google Shape;609;p19"/>
+          <p:cNvPr id="608" name="Google Shape;608;p19"/>
           <p:cNvSpPr txBox="1"/>
           <p:nvPr/>
         </p:nvSpPr>
@@ -23390,7 +23331,7 @@
       </p:sp>
       <p:sp>
         <p:nvSpPr>
-          <p:cNvPr id="610" name="Google Shape;610;p19"/>
+          <p:cNvPr id="609" name="Google Shape;609;p19"/>
           <p:cNvSpPr/>
           <p:nvPr/>
         </p:nvSpPr>
@@ -23449,7 +23390,7 @@
       </p:sp>
       <p:sp>
         <p:nvSpPr>
-          <p:cNvPr id="611" name="Google Shape;611;p19"/>
+          <p:cNvPr id="610" name="Google Shape;610;p19"/>
           <p:cNvSpPr/>
           <p:nvPr/>
         </p:nvSpPr>
@@ -23510,7 +23451,7 @@
       </p:sp>
       <p:sp>
         <p:nvSpPr>
-          <p:cNvPr id="612" name="Google Shape;612;p19"/>
+          <p:cNvPr id="611" name="Google Shape;611;p19"/>
           <p:cNvSpPr txBox="1"/>
           <p:nvPr/>
         </p:nvSpPr>
@@ -23600,7 +23541,7 @@
       </p:sp>
       <p:sp>
         <p:nvSpPr>
-          <p:cNvPr id="613" name="Google Shape;613;p19"/>
+          <p:cNvPr id="612" name="Google Shape;612;p19"/>
           <p:cNvSpPr/>
           <p:nvPr/>
         </p:nvSpPr>
@@ -23659,7 +23600,7 @@
       </p:sp>
       <p:sp>
         <p:nvSpPr>
-          <p:cNvPr id="614" name="Google Shape;614;p19"/>
+          <p:cNvPr id="613" name="Google Shape;613;p19"/>
           <p:cNvSpPr/>
           <p:nvPr/>
         </p:nvSpPr>
@@ -23718,7 +23659,7 @@
       </p:sp>
       <p:sp>
         <p:nvSpPr>
-          <p:cNvPr id="615" name="Google Shape;615;p19"/>
+          <p:cNvPr id="614" name="Google Shape;614;p19"/>
           <p:cNvSpPr/>
           <p:nvPr/>
         </p:nvSpPr>
@@ -23777,7 +23718,7 @@
       </p:sp>
       <p:sp>
         <p:nvSpPr>
-          <p:cNvPr id="616" name="Google Shape;616;p19"/>
+          <p:cNvPr id="615" name="Google Shape;615;p19"/>
           <p:cNvSpPr/>
           <p:nvPr/>
         </p:nvSpPr>
@@ -23836,7 +23777,7 @@
       </p:sp>
       <p:sp>
         <p:nvSpPr>
-          <p:cNvPr id="617" name="Google Shape;617;p19"/>
+          <p:cNvPr id="616" name="Google Shape;616;p19"/>
           <p:cNvSpPr txBox="1"/>
           <p:nvPr/>
         </p:nvSpPr>
@@ -23902,7 +23843,7 @@
       </p:sp>
       <p:sp>
         <p:nvSpPr>
-          <p:cNvPr id="618" name="Google Shape;618;p19"/>
+          <p:cNvPr id="617" name="Google Shape;617;p19"/>
           <p:cNvSpPr txBox="1"/>
           <p:nvPr/>
         </p:nvSpPr>
@@ -23980,7 +23921,7 @@
       </p:sp>
       <p:sp>
         <p:nvSpPr>
-          <p:cNvPr id="619" name="Google Shape;619;p19"/>
+          <p:cNvPr id="618" name="Google Shape;618;p19"/>
           <p:cNvSpPr/>
           <p:nvPr/>
         </p:nvSpPr>
@@ -24045,7 +23986,7 @@
       </p:sp>
       <p:sp>
         <p:nvSpPr>
-          <p:cNvPr id="620" name="Google Shape;620;p19"/>
+          <p:cNvPr id="619" name="Google Shape;619;p19"/>
           <p:cNvSpPr/>
           <p:nvPr/>
         </p:nvSpPr>
@@ -24104,7 +24045,7 @@
       </p:sp>
       <p:sp>
         <p:nvSpPr>
-          <p:cNvPr id="621" name="Google Shape;621;p19"/>
+          <p:cNvPr id="620" name="Google Shape;620;p19"/>
           <p:cNvSpPr txBox="1"/>
           <p:nvPr/>
         </p:nvSpPr>
@@ -24170,7 +24111,7 @@
       </p:sp>
       <p:sp>
         <p:nvSpPr>
-          <p:cNvPr id="622" name="Google Shape;622;p19"/>
+          <p:cNvPr id="621" name="Google Shape;621;p19"/>
           <p:cNvSpPr/>
           <p:nvPr/>
         </p:nvSpPr>
@@ -24231,7 +24172,7 @@
       </p:sp>
       <p:sp>
         <p:nvSpPr>
-          <p:cNvPr id="623" name="Google Shape;623;p19"/>
+          <p:cNvPr id="622" name="Google Shape;622;p19"/>
           <p:cNvSpPr txBox="1"/>
           <p:nvPr/>
         </p:nvSpPr>
@@ -24297,7 +24238,7 @@
       </p:sp>
       <p:sp>
         <p:nvSpPr>
-          <p:cNvPr id="624" name="Google Shape;624;p19"/>
+          <p:cNvPr id="623" name="Google Shape;623;p19"/>
           <p:cNvSpPr txBox="1"/>
           <p:nvPr/>
         </p:nvSpPr>
@@ -24443,7 +24384,7 @@
       </p:sp>
       <p:sp>
         <p:nvSpPr>
-          <p:cNvPr id="625" name="Google Shape;625;p19"/>
+          <p:cNvPr id="624" name="Google Shape;624;p19"/>
           <p:cNvSpPr/>
           <p:nvPr/>
         </p:nvSpPr>
@@ -24502,7 +24443,7 @@
       </p:sp>
       <p:sp>
         <p:nvSpPr>
-          <p:cNvPr id="626" name="Google Shape;626;p19"/>
+          <p:cNvPr id="625" name="Google Shape;625;p19"/>
           <p:cNvSpPr txBox="1"/>
           <p:nvPr/>
         </p:nvSpPr>
@@ -24568,7 +24509,7 @@
       </p:sp>
       <p:sp>
         <p:nvSpPr>
-          <p:cNvPr id="627" name="Google Shape;627;p19"/>
+          <p:cNvPr id="626" name="Google Shape;626;p19"/>
           <p:cNvSpPr txBox="1"/>
           <p:nvPr/>
         </p:nvSpPr>
@@ -24634,7 +24575,7 @@
       </p:sp>
       <p:sp>
         <p:nvSpPr>
-          <p:cNvPr id="628" name="Google Shape;628;p19"/>
+          <p:cNvPr id="627" name="Google Shape;627;p19"/>
           <p:cNvSpPr/>
           <p:nvPr/>
         </p:nvSpPr>
@@ -24699,7 +24640,7 @@
       </p:sp>
       <p:sp>
         <p:nvSpPr>
-          <p:cNvPr id="629" name="Google Shape;629;p19"/>
+          <p:cNvPr id="628" name="Google Shape;628;p19"/>
           <p:cNvSpPr/>
           <p:nvPr/>
         </p:nvSpPr>
@@ -24758,7 +24699,7 @@
       </p:sp>
       <p:sp>
         <p:nvSpPr>
-          <p:cNvPr id="630" name="Google Shape;630;p19"/>
+          <p:cNvPr id="629" name="Google Shape;629;p19"/>
           <p:cNvSpPr txBox="1"/>
           <p:nvPr/>
         </p:nvSpPr>
@@ -24824,7 +24765,7 @@
       </p:sp>
       <p:sp>
         <p:nvSpPr>
-          <p:cNvPr id="631" name="Google Shape;631;p19"/>
+          <p:cNvPr id="630" name="Google Shape;630;p19"/>
           <p:cNvSpPr/>
           <p:nvPr/>
         </p:nvSpPr>
@@ -24885,7 +24826,7 @@
       </p:sp>
       <p:sp>
         <p:nvSpPr>
-          <p:cNvPr id="632" name="Google Shape;632;p19"/>
+          <p:cNvPr id="631" name="Google Shape;631;p19"/>
           <p:cNvSpPr txBox="1"/>
           <p:nvPr/>
         </p:nvSpPr>
@@ -24951,7 +24892,7 @@
       </p:sp>
       <p:sp>
         <p:nvSpPr>
-          <p:cNvPr id="633" name="Google Shape;633;p19"/>
+          <p:cNvPr id="632" name="Google Shape;632;p19"/>
           <p:cNvSpPr txBox="1"/>
           <p:nvPr/>
         </p:nvSpPr>
@@ -25097,7 +25038,7 @@
       </p:sp>
       <p:sp>
         <p:nvSpPr>
-          <p:cNvPr id="634" name="Google Shape;634;p19"/>
+          <p:cNvPr id="633" name="Google Shape;633;p19"/>
           <p:cNvSpPr/>
           <p:nvPr/>
         </p:nvSpPr>
@@ -25156,7 +25097,7 @@
       </p:sp>
       <p:sp>
         <p:nvSpPr>
-          <p:cNvPr id="635" name="Google Shape;635;p19"/>
+          <p:cNvPr id="634" name="Google Shape;634;p19"/>
           <p:cNvSpPr txBox="1"/>
           <p:nvPr/>
         </p:nvSpPr>
@@ -25222,7 +25163,7 @@
       </p:sp>
       <p:sp>
         <p:nvSpPr>
-          <p:cNvPr id="636" name="Google Shape;636;p19"/>
+          <p:cNvPr id="635" name="Google Shape;635;p19"/>
           <p:cNvSpPr txBox="1"/>
           <p:nvPr/>
         </p:nvSpPr>
@@ -25288,7 +25229,7 @@
       </p:sp>
       <p:sp>
         <p:nvSpPr>
-          <p:cNvPr id="637" name="Google Shape;637;p19"/>
+          <p:cNvPr id="636" name="Google Shape;636;p19"/>
           <p:cNvSpPr/>
           <p:nvPr/>
         </p:nvSpPr>
@@ -25353,7 +25294,7 @@
       </p:sp>
       <p:sp>
         <p:nvSpPr>
-          <p:cNvPr id="638" name="Google Shape;638;p19"/>
+          <p:cNvPr id="637" name="Google Shape;637;p19"/>
           <p:cNvSpPr/>
           <p:nvPr/>
         </p:nvSpPr>
@@ -25412,7 +25353,7 @@
       </p:sp>
       <p:sp>
         <p:nvSpPr>
-          <p:cNvPr id="639" name="Google Shape;639;p19"/>
+          <p:cNvPr id="638" name="Google Shape;638;p19"/>
           <p:cNvSpPr txBox="1"/>
           <p:nvPr/>
         </p:nvSpPr>
@@ -25478,7 +25419,7 @@
       </p:sp>
       <p:sp>
         <p:nvSpPr>
-          <p:cNvPr id="640" name="Google Shape;640;p19"/>
+          <p:cNvPr id="639" name="Google Shape;639;p19"/>
           <p:cNvSpPr/>
           <p:nvPr/>
         </p:nvSpPr>
@@ -25539,7 +25480,7 @@
       </p:sp>
       <p:sp>
         <p:nvSpPr>
-          <p:cNvPr id="641" name="Google Shape;641;p19"/>
+          <p:cNvPr id="640" name="Google Shape;640;p19"/>
           <p:cNvSpPr txBox="1"/>
           <p:nvPr/>
         </p:nvSpPr>
@@ -25605,7 +25546,7 @@
       </p:sp>
       <p:sp>
         <p:nvSpPr>
-          <p:cNvPr id="642" name="Google Shape;642;p19"/>
+          <p:cNvPr id="641" name="Google Shape;641;p19"/>
           <p:cNvSpPr txBox="1"/>
           <p:nvPr/>
         </p:nvSpPr>
@@ -25751,7 +25692,7 @@
       </p:sp>
       <p:sp>
         <p:nvSpPr>
-          <p:cNvPr id="643" name="Google Shape;643;p19"/>
+          <p:cNvPr id="642" name="Google Shape;642;p19"/>
           <p:cNvSpPr/>
           <p:nvPr/>
         </p:nvSpPr>
@@ -25810,7 +25751,7 @@
       </p:sp>
       <p:sp>
         <p:nvSpPr>
-          <p:cNvPr id="644" name="Google Shape;644;p19"/>
+          <p:cNvPr id="643" name="Google Shape;643;p19"/>
           <p:cNvSpPr txBox="1"/>
           <p:nvPr/>
         </p:nvSpPr>
@@ -25888,7 +25829,7 @@
       </p:sp>
       <p:sp>
         <p:nvSpPr>
-          <p:cNvPr id="645" name="Google Shape;645;p19"/>
+          <p:cNvPr id="644" name="Google Shape;644;p19"/>
           <p:cNvSpPr/>
           <p:nvPr/>
         </p:nvSpPr>
@@ -25965,7 +25906,7 @@
     </p:bg>
     <p:spTree>
       <p:nvGrpSpPr>
-        <p:cNvPr id="650" name="Shape 650"/>
+        <p:cNvPr id="649" name="Shape 649"/>
         <p:cNvGrpSpPr/>
         <p:nvPr/>
       </p:nvGrpSpPr>
@@ -25979,7 +25920,7 @@
       </p:grpSpPr>
       <p:sp>
         <p:nvSpPr>
-          <p:cNvPr id="651" name="Google Shape;651;p20"/>
+          <p:cNvPr id="650" name="Google Shape;650;p20"/>
           <p:cNvSpPr txBox="1"/>
           <p:nvPr/>
         </p:nvSpPr>
@@ -26045,7 +25986,7 @@
       </p:sp>
       <p:sp>
         <p:nvSpPr>
-          <p:cNvPr id="652" name="Google Shape;652;p20"/>
+          <p:cNvPr id="651" name="Google Shape;651;p20"/>
           <p:cNvSpPr/>
           <p:nvPr/>
         </p:nvSpPr>
@@ -26104,7 +26045,7 @@
       </p:sp>
       <p:sp>
         <p:nvSpPr>
-          <p:cNvPr id="653" name="Google Shape;653;p20"/>
+          <p:cNvPr id="652" name="Google Shape;652;p20"/>
           <p:cNvSpPr txBox="1"/>
           <p:nvPr/>
         </p:nvSpPr>
@@ -26170,7 +26111,7 @@
       </p:sp>
       <p:sp>
         <p:nvSpPr>
-          <p:cNvPr id="654" name="Google Shape;654;p20"/>
+          <p:cNvPr id="653" name="Google Shape;653;p20"/>
           <p:cNvSpPr/>
           <p:nvPr/>
         </p:nvSpPr>
@@ -26231,7 +26172,7 @@
       </p:sp>
       <p:sp>
         <p:nvSpPr>
-          <p:cNvPr id="655" name="Google Shape;655;p20"/>
+          <p:cNvPr id="654" name="Google Shape;654;p20"/>
           <p:cNvSpPr/>
           <p:nvPr/>
         </p:nvSpPr>
@@ -26294,7 +26235,7 @@
       </p:sp>
       <p:sp>
         <p:nvSpPr>
-          <p:cNvPr id="656" name="Google Shape;656;p20"/>
+          <p:cNvPr id="655" name="Google Shape;655;p20"/>
           <p:cNvSpPr txBox="1"/>
           <p:nvPr/>
         </p:nvSpPr>
@@ -26360,7 +26301,7 @@
       </p:sp>
       <p:sp>
         <p:nvSpPr>
-          <p:cNvPr id="657" name="Google Shape;657;p20"/>
+          <p:cNvPr id="656" name="Google Shape;656;p20"/>
           <p:cNvSpPr txBox="1"/>
           <p:nvPr/>
         </p:nvSpPr>
@@ -26426,7 +26367,7 @@
       </p:sp>
       <p:sp>
         <p:nvSpPr>
-          <p:cNvPr id="658" name="Google Shape;658;p20"/>
+          <p:cNvPr id="657" name="Google Shape;657;p20"/>
           <p:cNvSpPr txBox="1"/>
           <p:nvPr/>
         </p:nvSpPr>
@@ -26492,7 +26433,7 @@
       </p:sp>
       <p:sp>
         <p:nvSpPr>
-          <p:cNvPr id="659" name="Google Shape;659;p20"/>
+          <p:cNvPr id="658" name="Google Shape;658;p20"/>
           <p:cNvSpPr/>
           <p:nvPr/>
         </p:nvSpPr>
@@ -26553,7 +26494,7 @@
       </p:sp>
       <p:sp>
         <p:nvSpPr>
-          <p:cNvPr id="660" name="Google Shape;660;p20"/>
+          <p:cNvPr id="659" name="Google Shape;659;p20"/>
           <p:cNvSpPr/>
           <p:nvPr/>
         </p:nvSpPr>
@@ -26616,7 +26557,7 @@
       </p:sp>
       <p:sp>
         <p:nvSpPr>
-          <p:cNvPr id="661" name="Google Shape;661;p20"/>
+          <p:cNvPr id="660" name="Google Shape;660;p20"/>
           <p:cNvSpPr txBox="1"/>
           <p:nvPr/>
         </p:nvSpPr>
@@ -26682,7 +26623,7 @@
       </p:sp>
       <p:sp>
         <p:nvSpPr>
-          <p:cNvPr id="662" name="Google Shape;662;p20"/>
+          <p:cNvPr id="661" name="Google Shape;661;p20"/>
           <p:cNvSpPr txBox="1"/>
           <p:nvPr/>
         </p:nvSpPr>
@@ -26748,7 +26689,7 @@
       </p:sp>
       <p:sp>
         <p:nvSpPr>
-          <p:cNvPr id="663" name="Google Shape;663;p20"/>
+          <p:cNvPr id="662" name="Google Shape;662;p20"/>
           <p:cNvSpPr txBox="1"/>
           <p:nvPr/>
         </p:nvSpPr>
@@ -26814,7 +26755,7 @@
       </p:sp>
       <p:sp>
         <p:nvSpPr>
-          <p:cNvPr id="664" name="Google Shape;664;p20"/>
+          <p:cNvPr id="663" name="Google Shape;663;p20"/>
           <p:cNvSpPr/>
           <p:nvPr/>
         </p:nvSpPr>
@@ -26875,7 +26816,7 @@
       </p:sp>
       <p:sp>
         <p:nvSpPr>
-          <p:cNvPr id="665" name="Google Shape;665;p20"/>
+          <p:cNvPr id="664" name="Google Shape;664;p20"/>
           <p:cNvSpPr/>
           <p:nvPr/>
         </p:nvSpPr>
@@ -26938,7 +26879,7 @@
       </p:sp>
       <p:sp>
         <p:nvSpPr>
-          <p:cNvPr id="666" name="Google Shape;666;p20"/>
+          <p:cNvPr id="665" name="Google Shape;665;p20"/>
           <p:cNvSpPr txBox="1"/>
           <p:nvPr/>
         </p:nvSpPr>
@@ -27004,7 +26945,7 @@
       </p:sp>
       <p:sp>
         <p:nvSpPr>
-          <p:cNvPr id="667" name="Google Shape;667;p20"/>
+          <p:cNvPr id="666" name="Google Shape;666;p20"/>
           <p:cNvSpPr txBox="1"/>
           <p:nvPr/>
         </p:nvSpPr>
@@ -27070,7 +27011,7 @@
       </p:sp>
       <p:sp>
         <p:nvSpPr>
-          <p:cNvPr id="668" name="Google Shape;668;p20"/>
+          <p:cNvPr id="667" name="Google Shape;667;p20"/>
           <p:cNvSpPr txBox="1"/>
           <p:nvPr/>
         </p:nvSpPr>
@@ -27136,7 +27077,7 @@
       </p:sp>
       <p:sp>
         <p:nvSpPr>
-          <p:cNvPr id="669" name="Google Shape;669;p20"/>
+          <p:cNvPr id="668" name="Google Shape;668;p20"/>
           <p:cNvSpPr/>
           <p:nvPr/>
         </p:nvSpPr>
@@ -27197,7 +27138,7 @@
       </p:sp>
       <p:sp>
         <p:nvSpPr>
-          <p:cNvPr id="670" name="Google Shape;670;p20"/>
+          <p:cNvPr id="669" name="Google Shape;669;p20"/>
           <p:cNvSpPr/>
           <p:nvPr/>
         </p:nvSpPr>
@@ -27260,7 +27201,7 @@
       </p:sp>
       <p:sp>
         <p:nvSpPr>
-          <p:cNvPr id="671" name="Google Shape;671;p20"/>
+          <p:cNvPr id="670" name="Google Shape;670;p20"/>
           <p:cNvSpPr txBox="1"/>
           <p:nvPr/>
         </p:nvSpPr>
@@ -27326,7 +27267,7 @@
       </p:sp>
       <p:sp>
         <p:nvSpPr>
-          <p:cNvPr id="672" name="Google Shape;672;p20"/>
+          <p:cNvPr id="671" name="Google Shape;671;p20"/>
           <p:cNvSpPr txBox="1"/>
           <p:nvPr/>
         </p:nvSpPr>
@@ -27392,7 +27333,7 @@
       </p:sp>
       <p:sp>
         <p:nvSpPr>
-          <p:cNvPr id="673" name="Google Shape;673;p20"/>
+          <p:cNvPr id="672" name="Google Shape;672;p20"/>
           <p:cNvSpPr txBox="1"/>
           <p:nvPr/>
         </p:nvSpPr>
@@ -27458,7 +27399,7 @@
       </p:sp>
       <p:cxnSp>
         <p:nvCxnSpPr>
-          <p:cNvPr id="674" name="Google Shape;674;p20"/>
+          <p:cNvPr id="673" name="Google Shape;673;p20"/>
           <p:cNvCxnSpPr/>
           <p:nvPr/>
         </p:nvCxnSpPr>
@@ -27484,7 +27425,7 @@
       </p:cxnSp>
       <p:sp>
         <p:nvSpPr>
-          <p:cNvPr id="675" name="Google Shape;675;p20"/>
+          <p:cNvPr id="674" name="Google Shape;674;p20"/>
           <p:cNvSpPr txBox="1"/>
           <p:nvPr/>
         </p:nvSpPr>
@@ -27562,7 +27503,7 @@
       </p:sp>
       <p:sp>
         <p:nvSpPr>
-          <p:cNvPr id="676" name="Google Shape;676;p20"/>
+          <p:cNvPr id="675" name="Google Shape;675;p20"/>
           <p:cNvSpPr/>
           <p:nvPr/>
         </p:nvSpPr>
@@ -27639,7 +27580,7 @@
     </p:bg>
     <p:spTree>
       <p:nvGrpSpPr>
-        <p:cNvPr id="681" name="Shape 681"/>
+        <p:cNvPr id="680" name="Shape 680"/>
         <p:cNvGrpSpPr/>
         <p:nvPr/>
       </p:nvGrpSpPr>
@@ -27653,7 +27594,7 @@
       </p:grpSpPr>
       <p:sp>
         <p:nvSpPr>
-          <p:cNvPr id="682" name="Google Shape;682;p21"/>
+          <p:cNvPr id="681" name="Google Shape;681;p21"/>
           <p:cNvSpPr/>
           <p:nvPr/>
         </p:nvSpPr>
@@ -27712,7 +27653,7 @@
       </p:sp>
       <p:sp>
         <p:nvSpPr>
-          <p:cNvPr id="683" name="Google Shape;683;p21"/>
+          <p:cNvPr id="682" name="Google Shape;682;p21"/>
           <p:cNvSpPr txBox="1"/>
           <p:nvPr/>
         </p:nvSpPr>
@@ -27778,7 +27719,7 @@
       </p:sp>
       <p:sp>
         <p:nvSpPr>
-          <p:cNvPr id="684" name="Google Shape;684;p21"/>
+          <p:cNvPr id="683" name="Google Shape;683;p21"/>
           <p:cNvSpPr/>
           <p:nvPr/>
         </p:nvSpPr>
@@ -27837,7 +27778,7 @@
       </p:sp>
       <p:sp>
         <p:nvSpPr>
-          <p:cNvPr id="685" name="Google Shape;685;p21"/>
+          <p:cNvPr id="684" name="Google Shape;684;p21"/>
           <p:cNvSpPr txBox="1"/>
           <p:nvPr/>
         </p:nvSpPr>
@@ -27903,7 +27844,7 @@
       </p:sp>
       <p:sp>
         <p:nvSpPr>
-          <p:cNvPr id="686" name="Google Shape;686;p21"/>
+          <p:cNvPr id="685" name="Google Shape;685;p21"/>
           <p:cNvSpPr/>
           <p:nvPr/>
         </p:nvSpPr>
@@ -27962,7 +27903,7 @@
       </p:sp>
       <p:sp>
         <p:nvSpPr>
-          <p:cNvPr id="687" name="Google Shape;687;p21"/>
+          <p:cNvPr id="686" name="Google Shape;686;p21"/>
           <p:cNvSpPr txBox="1"/>
           <p:nvPr/>
         </p:nvSpPr>
@@ -28028,7 +27969,7 @@
       </p:sp>
       <p:sp>
         <p:nvSpPr>
-          <p:cNvPr id="688" name="Google Shape;688;p21"/>
+          <p:cNvPr id="687" name="Google Shape;687;p21"/>
           <p:cNvSpPr/>
           <p:nvPr/>
         </p:nvSpPr>
@@ -28087,7 +28028,7 @@
       </p:sp>
       <p:sp>
         <p:nvSpPr>
-          <p:cNvPr id="689" name="Google Shape;689;p21"/>
+          <p:cNvPr id="688" name="Google Shape;688;p21"/>
           <p:cNvSpPr txBox="1"/>
           <p:nvPr/>
         </p:nvSpPr>
@@ -28153,7 +28094,7 @@
       </p:sp>
       <p:sp>
         <p:nvSpPr>
-          <p:cNvPr id="690" name="Google Shape;690;p21"/>
+          <p:cNvPr id="689" name="Google Shape;689;p21"/>
           <p:cNvSpPr/>
           <p:nvPr/>
         </p:nvSpPr>
@@ -28212,7 +28153,7 @@
       </p:sp>
       <p:sp>
         <p:nvSpPr>
-          <p:cNvPr id="691" name="Google Shape;691;p21"/>
+          <p:cNvPr id="690" name="Google Shape;690;p21"/>
           <p:cNvSpPr txBox="1"/>
           <p:nvPr/>
         </p:nvSpPr>
@@ -28278,7 +28219,7 @@
       </p:sp>
       <p:sp>
         <p:nvSpPr>
-          <p:cNvPr id="692" name="Google Shape;692;p21"/>
+          <p:cNvPr id="691" name="Google Shape;691;p21"/>
           <p:cNvSpPr/>
           <p:nvPr/>
         </p:nvSpPr>
@@ -28337,7 +28278,7 @@
       </p:sp>
       <p:sp>
         <p:nvSpPr>
-          <p:cNvPr id="693" name="Google Shape;693;p21"/>
+          <p:cNvPr id="692" name="Google Shape;692;p21"/>
           <p:cNvSpPr txBox="1"/>
           <p:nvPr/>
         </p:nvSpPr>
@@ -28403,7 +28344,7 @@
       </p:sp>
       <p:sp>
         <p:nvSpPr>
-          <p:cNvPr id="694" name="Google Shape;694;p21"/>
+          <p:cNvPr id="693" name="Google Shape;693;p21"/>
           <p:cNvSpPr/>
           <p:nvPr/>
         </p:nvSpPr>
@@ -28462,7 +28403,7 @@
       </p:sp>
       <p:sp>
         <p:nvSpPr>
-          <p:cNvPr id="695" name="Google Shape;695;p21"/>
+          <p:cNvPr id="694" name="Google Shape;694;p21"/>
           <p:cNvSpPr txBox="1"/>
           <p:nvPr/>
         </p:nvSpPr>
@@ -28528,7 +28469,7 @@
       </p:sp>
       <p:sp>
         <p:nvSpPr>
-          <p:cNvPr id="696" name="Google Shape;696;p21"/>
+          <p:cNvPr id="695" name="Google Shape;695;p21"/>
           <p:cNvSpPr/>
           <p:nvPr/>
         </p:nvSpPr>
@@ -28587,7 +28528,7 @@
       </p:sp>
       <p:sp>
         <p:nvSpPr>
-          <p:cNvPr id="697" name="Google Shape;697;p21"/>
+          <p:cNvPr id="696" name="Google Shape;696;p21"/>
           <p:cNvSpPr txBox="1"/>
           <p:nvPr/>
         </p:nvSpPr>
@@ -28653,7 +28594,7 @@
       </p:sp>
       <p:sp>
         <p:nvSpPr>
-          <p:cNvPr id="698" name="Google Shape;698;p21"/>
+          <p:cNvPr id="697" name="Google Shape;697;p21"/>
           <p:cNvSpPr/>
           <p:nvPr/>
         </p:nvSpPr>
@@ -28712,7 +28653,7 @@
       </p:sp>
       <p:sp>
         <p:nvSpPr>
-          <p:cNvPr id="699" name="Google Shape;699;p21"/>
+          <p:cNvPr id="698" name="Google Shape;698;p21"/>
           <p:cNvSpPr txBox="1"/>
           <p:nvPr/>
         </p:nvSpPr>
@@ -28778,7 +28719,7 @@
       </p:sp>
       <p:sp>
         <p:nvSpPr>
-          <p:cNvPr id="700" name="Google Shape;700;p21"/>
+          <p:cNvPr id="699" name="Google Shape;699;p21"/>
           <p:cNvSpPr txBox="1"/>
           <p:nvPr/>
         </p:nvSpPr>
@@ -28844,7 +28785,7 @@
       </p:sp>
       <p:cxnSp>
         <p:nvCxnSpPr>
-          <p:cNvPr id="701" name="Google Shape;701;p21"/>
+          <p:cNvPr id="700" name="Google Shape;700;p21"/>
           <p:cNvCxnSpPr/>
           <p:nvPr/>
         </p:nvCxnSpPr>
@@ -28870,7 +28811,7 @@
       </p:cxnSp>
       <p:sp>
         <p:nvSpPr>
-          <p:cNvPr id="702" name="Google Shape;702;p21"/>
+          <p:cNvPr id="701" name="Google Shape;701;p21"/>
           <p:cNvSpPr txBox="1"/>
           <p:nvPr/>
         </p:nvSpPr>
@@ -28936,7 +28877,7 @@
       </p:sp>
       <p:sp>
         <p:nvSpPr>
-          <p:cNvPr id="703" name="Google Shape;703;p21"/>
+          <p:cNvPr id="702" name="Google Shape;702;p21"/>
           <p:cNvSpPr txBox="1"/>
           <p:nvPr/>
         </p:nvSpPr>
@@ -29002,7 +28943,7 @@
       </p:sp>
       <p:cxnSp>
         <p:nvCxnSpPr>
-          <p:cNvPr id="704" name="Google Shape;704;p21"/>
+          <p:cNvPr id="703" name="Google Shape;703;p21"/>
           <p:cNvCxnSpPr/>
           <p:nvPr/>
         </p:nvCxnSpPr>
@@ -29028,7 +28969,7 @@
       </p:cxnSp>
       <p:sp>
         <p:nvSpPr>
-          <p:cNvPr id="705" name="Google Shape;705;p21"/>
+          <p:cNvPr id="704" name="Google Shape;704;p21"/>
           <p:cNvSpPr txBox="1"/>
           <p:nvPr/>
         </p:nvSpPr>
@@ -29094,7 +29035,7 @@
       </p:sp>
       <p:sp>
         <p:nvSpPr>
-          <p:cNvPr id="706" name="Google Shape;706;p21"/>
+          <p:cNvPr id="705" name="Google Shape;705;p21"/>
           <p:cNvSpPr txBox="1"/>
           <p:nvPr/>
         </p:nvSpPr>
@@ -29160,7 +29101,7 @@
       </p:sp>
       <p:cxnSp>
         <p:nvCxnSpPr>
-          <p:cNvPr id="707" name="Google Shape;707;p21"/>
+          <p:cNvPr id="706" name="Google Shape;706;p21"/>
           <p:cNvCxnSpPr/>
           <p:nvPr/>
         </p:nvCxnSpPr>
@@ -29186,7 +29127,7 @@
       </p:cxnSp>
       <p:sp>
         <p:nvSpPr>
-          <p:cNvPr id="708" name="Google Shape;708;p21"/>
+          <p:cNvPr id="707" name="Google Shape;707;p21"/>
           <p:cNvSpPr txBox="1"/>
           <p:nvPr/>
         </p:nvSpPr>
@@ -29252,7 +29193,7 @@
       </p:sp>
       <p:sp>
         <p:nvSpPr>
-          <p:cNvPr id="709" name="Google Shape;709;p21"/>
+          <p:cNvPr id="708" name="Google Shape;708;p21"/>
           <p:cNvSpPr txBox="1"/>
           <p:nvPr/>
         </p:nvSpPr>
@@ -29318,7 +29259,7 @@
       </p:sp>
       <p:cxnSp>
         <p:nvCxnSpPr>
-          <p:cNvPr id="710" name="Google Shape;710;p21"/>
+          <p:cNvPr id="709" name="Google Shape;709;p21"/>
           <p:cNvCxnSpPr/>
           <p:nvPr/>
         </p:nvCxnSpPr>
@@ -29344,7 +29285,7 @@
       </p:cxnSp>
       <p:sp>
         <p:nvSpPr>
-          <p:cNvPr id="711" name="Google Shape;711;p21"/>
+          <p:cNvPr id="710" name="Google Shape;710;p21"/>
           <p:cNvSpPr txBox="1"/>
           <p:nvPr/>
         </p:nvSpPr>
@@ -29410,7 +29351,7 @@
       </p:sp>
       <p:sp>
         <p:nvSpPr>
-          <p:cNvPr id="712" name="Google Shape;712;p21"/>
+          <p:cNvPr id="711" name="Google Shape;711;p21"/>
           <p:cNvSpPr txBox="1"/>
           <p:nvPr/>
         </p:nvSpPr>
@@ -29476,7 +29417,7 @@
       </p:sp>
       <p:cxnSp>
         <p:nvCxnSpPr>
-          <p:cNvPr id="713" name="Google Shape;713;p21"/>
+          <p:cNvPr id="712" name="Google Shape;712;p21"/>
           <p:cNvCxnSpPr/>
           <p:nvPr/>
         </p:nvCxnSpPr>
@@ -29502,7 +29443,7 @@
       </p:cxnSp>
       <p:sp>
         <p:nvSpPr>
-          <p:cNvPr id="714" name="Google Shape;714;p21"/>
+          <p:cNvPr id="713" name="Google Shape;713;p21"/>
           <p:cNvSpPr txBox="1"/>
           <p:nvPr/>
         </p:nvSpPr>
@@ -29568,7 +29509,7 @@
       </p:sp>
       <p:sp>
         <p:nvSpPr>
-          <p:cNvPr id="715" name="Google Shape;715;p21"/>
+          <p:cNvPr id="714" name="Google Shape;714;p21"/>
           <p:cNvSpPr txBox="1"/>
           <p:nvPr/>
         </p:nvSpPr>
@@ -29634,7 +29575,7 @@
       </p:sp>
       <p:cxnSp>
         <p:nvCxnSpPr>
-          <p:cNvPr id="716" name="Google Shape;716;p21"/>
+          <p:cNvPr id="715" name="Google Shape;715;p21"/>
           <p:cNvCxnSpPr/>
           <p:nvPr/>
         </p:nvCxnSpPr>
@@ -29660,7 +29601,7 @@
       </p:cxnSp>
       <p:sp>
         <p:nvSpPr>
-          <p:cNvPr id="717" name="Google Shape;717;p21"/>
+          <p:cNvPr id="716" name="Google Shape;716;p21"/>
           <p:cNvSpPr/>
           <p:nvPr/>
         </p:nvSpPr>
@@ -29719,7 +29660,7 @@
       </p:sp>
       <p:sp>
         <p:nvSpPr>
-          <p:cNvPr id="718" name="Google Shape;718;p21"/>
+          <p:cNvPr id="717" name="Google Shape;717;p21"/>
           <p:cNvSpPr/>
           <p:nvPr/>
         </p:nvSpPr>
@@ -29778,7 +29719,7 @@
       </p:sp>
       <p:sp>
         <p:nvSpPr>
-          <p:cNvPr id="719" name="Google Shape;719;p21"/>
+          <p:cNvPr id="718" name="Google Shape;718;p21"/>
           <p:cNvSpPr txBox="1"/>
           <p:nvPr/>
         </p:nvSpPr>
@@ -29844,7 +29785,7 @@
       </p:sp>
       <p:sp>
         <p:nvSpPr>
-          <p:cNvPr id="720" name="Google Shape;720;p21"/>
+          <p:cNvPr id="719" name="Google Shape;719;p21"/>
           <p:cNvSpPr txBox="1"/>
           <p:nvPr/>
         </p:nvSpPr>
@@ -29910,7 +29851,7 @@
       </p:sp>
       <p:cxnSp>
         <p:nvCxnSpPr>
-          <p:cNvPr id="721" name="Google Shape;721;p21"/>
+          <p:cNvPr id="720" name="Google Shape;720;p21"/>
           <p:cNvCxnSpPr/>
           <p:nvPr/>
         </p:nvCxnSpPr>
@@ -29936,7 +29877,7 @@
       </p:cxnSp>
       <p:sp>
         <p:nvSpPr>
-          <p:cNvPr id="722" name="Google Shape;722;p21"/>
+          <p:cNvPr id="721" name="Google Shape;721;p21"/>
           <p:cNvSpPr txBox="1"/>
           <p:nvPr/>
         </p:nvSpPr>
@@ -30014,7 +29955,7 @@
       </p:sp>
       <p:sp>
         <p:nvSpPr>
-          <p:cNvPr id="723" name="Google Shape;723;p21"/>
+          <p:cNvPr id="722" name="Google Shape;722;p21"/>
           <p:cNvSpPr/>
           <p:nvPr/>
         </p:nvSpPr>
@@ -30091,7 +30032,7 @@
     </p:bg>
     <p:spTree>
       <p:nvGrpSpPr>
-        <p:cNvPr id="33" name="Shape 33"/>
+        <p:cNvPr id="32" name="Shape 32"/>
         <p:cNvGrpSpPr/>
         <p:nvPr/>
       </p:nvGrpSpPr>
@@ -30105,7 +30046,7 @@
       </p:grpSpPr>
       <p:sp>
         <p:nvSpPr>
-          <p:cNvPr id="34" name="Google Shape;34;p4"/>
+          <p:cNvPr id="33" name="Google Shape;33;p4"/>
           <p:cNvSpPr txBox="1"/>
           <p:nvPr/>
         </p:nvSpPr>
@@ -30171,7 +30112,7 @@
       </p:sp>
       <p:sp>
         <p:nvSpPr>
-          <p:cNvPr id="35" name="Google Shape;35;p4"/>
+          <p:cNvPr id="34" name="Google Shape;34;p4"/>
           <p:cNvSpPr/>
           <p:nvPr/>
         </p:nvSpPr>
@@ -30230,7 +30171,7 @@
       </p:sp>
       <p:sp>
         <p:nvSpPr>
-          <p:cNvPr id="36" name="Google Shape;36;p4"/>
+          <p:cNvPr id="35" name="Google Shape;35;p4"/>
           <p:cNvSpPr txBox="1"/>
           <p:nvPr/>
         </p:nvSpPr>
@@ -30296,7 +30237,7 @@
       </p:sp>
       <p:sp>
         <p:nvSpPr>
-          <p:cNvPr id="37" name="Google Shape;37;p4"/>
+          <p:cNvPr id="36" name="Google Shape;36;p4"/>
           <p:cNvSpPr txBox="1"/>
           <p:nvPr/>
         </p:nvSpPr>
@@ -30362,7 +30303,7 @@
       </p:sp>
       <p:sp>
         <p:nvSpPr>
-          <p:cNvPr id="38" name="Google Shape;38;p4"/>
+          <p:cNvPr id="37" name="Google Shape;37;p4"/>
           <p:cNvSpPr txBox="1"/>
           <p:nvPr/>
         </p:nvSpPr>
@@ -30428,7 +30369,7 @@
       </p:sp>
       <p:sp>
         <p:nvSpPr>
-          <p:cNvPr id="39" name="Google Shape;39;p4"/>
+          <p:cNvPr id="38" name="Google Shape;38;p4"/>
           <p:cNvSpPr/>
           <p:nvPr/>
         </p:nvSpPr>
@@ -30487,7 +30428,7 @@
       </p:sp>
       <p:sp>
         <p:nvSpPr>
-          <p:cNvPr id="40" name="Google Shape;40;p4"/>
+          <p:cNvPr id="39" name="Google Shape;39;p4"/>
           <p:cNvSpPr/>
           <p:nvPr/>
         </p:nvSpPr>
@@ -30546,7 +30487,7 @@
       </p:sp>
       <p:sp>
         <p:nvSpPr>
-          <p:cNvPr id="41" name="Google Shape;41;p4"/>
+          <p:cNvPr id="40" name="Google Shape;40;p4"/>
           <p:cNvSpPr txBox="1"/>
           <p:nvPr/>
         </p:nvSpPr>
@@ -30612,7 +30553,7 @@
       </p:sp>
       <p:sp>
         <p:nvSpPr>
-          <p:cNvPr id="42" name="Google Shape;42;p4"/>
+          <p:cNvPr id="41" name="Google Shape;41;p4"/>
           <p:cNvSpPr txBox="1"/>
           <p:nvPr/>
         </p:nvSpPr>
@@ -30678,7 +30619,7 @@
       </p:sp>
       <p:pic>
         <p:nvPicPr>
-          <p:cNvPr descr="graph.png" id="43" name="Google Shape;43;p4"/>
+          <p:cNvPr descr="graph.png" id="42" name="Google Shape;42;p4"/>
           <p:cNvPicPr preferRelativeResize="0"/>
           <p:nvPr/>
         </p:nvPicPr>
@@ -30705,7 +30646,7 @@
       </p:pic>
       <p:sp>
         <p:nvSpPr>
-          <p:cNvPr id="44" name="Google Shape;44;p4"/>
+          <p:cNvPr id="43" name="Google Shape;43;p4"/>
           <p:cNvSpPr/>
           <p:nvPr/>
         </p:nvSpPr>
@@ -30770,7 +30711,7 @@
       </p:sp>
       <p:sp>
         <p:nvSpPr>
-          <p:cNvPr id="45" name="Google Shape;45;p4"/>
+          <p:cNvPr id="44" name="Google Shape;44;p4"/>
           <p:cNvSpPr txBox="1"/>
           <p:nvPr/>
         </p:nvSpPr>
@@ -30836,7 +30777,7 @@
       </p:sp>
       <p:cxnSp>
         <p:nvCxnSpPr>
-          <p:cNvPr id="46" name="Google Shape;46;p4"/>
+          <p:cNvPr id="45" name="Google Shape;45;p4"/>
           <p:cNvCxnSpPr/>
           <p:nvPr/>
         </p:nvCxnSpPr>
@@ -30862,7 +30803,7 @@
       </p:cxnSp>
       <p:sp>
         <p:nvSpPr>
-          <p:cNvPr id="47" name="Google Shape;47;p4"/>
+          <p:cNvPr id="46" name="Google Shape;46;p4"/>
           <p:cNvSpPr txBox="1"/>
           <p:nvPr/>
         </p:nvSpPr>
@@ -30940,7 +30881,7 @@
       </p:sp>
       <p:sp>
         <p:nvSpPr>
-          <p:cNvPr id="48" name="Google Shape;48;p4"/>
+          <p:cNvPr id="47" name="Google Shape;47;p4"/>
           <p:cNvSpPr/>
           <p:nvPr/>
         </p:nvSpPr>
@@ -31017,7 +30958,7 @@
     </p:bg>
     <p:spTree>
       <p:nvGrpSpPr>
-        <p:cNvPr id="728" name="Shape 728"/>
+        <p:cNvPr id="727" name="Shape 727"/>
         <p:cNvGrpSpPr/>
         <p:nvPr/>
       </p:nvGrpSpPr>
@@ -31031,7 +30972,7 @@
       </p:grpSpPr>
       <p:cxnSp>
         <p:nvCxnSpPr>
-          <p:cNvPr id="729" name="Google Shape;729;p22"/>
+          <p:cNvPr id="728" name="Google Shape;728;p22"/>
           <p:cNvCxnSpPr/>
           <p:nvPr/>
         </p:nvCxnSpPr>
@@ -31059,7 +31000,7 @@
       </p:cxnSp>
       <p:cxnSp>
         <p:nvCxnSpPr>
-          <p:cNvPr id="730" name="Google Shape;730;p22"/>
+          <p:cNvPr id="729" name="Google Shape;729;p22"/>
           <p:cNvCxnSpPr/>
           <p:nvPr/>
         </p:nvCxnSpPr>
@@ -31087,7 +31028,7 @@
       </p:cxnSp>
       <p:cxnSp>
         <p:nvCxnSpPr>
-          <p:cNvPr id="731" name="Google Shape;731;p22"/>
+          <p:cNvPr id="730" name="Google Shape;730;p22"/>
           <p:cNvCxnSpPr/>
           <p:nvPr/>
         </p:nvCxnSpPr>
@@ -31115,7 +31056,7 @@
       </p:cxnSp>
       <p:cxnSp>
         <p:nvCxnSpPr>
-          <p:cNvPr id="732" name="Google Shape;732;p22"/>
+          <p:cNvPr id="731" name="Google Shape;731;p22"/>
           <p:cNvCxnSpPr/>
           <p:nvPr/>
         </p:nvCxnSpPr>
@@ -31143,7 +31084,7 @@
       </p:cxnSp>
       <p:cxnSp>
         <p:nvCxnSpPr>
-          <p:cNvPr id="733" name="Google Shape;733;p22"/>
+          <p:cNvPr id="732" name="Google Shape;732;p22"/>
           <p:cNvCxnSpPr/>
           <p:nvPr/>
         </p:nvCxnSpPr>
@@ -31171,7 +31112,7 @@
       </p:cxnSp>
       <p:cxnSp>
         <p:nvCxnSpPr>
-          <p:cNvPr id="734" name="Google Shape;734;p22"/>
+          <p:cNvPr id="733" name="Google Shape;733;p22"/>
           <p:cNvCxnSpPr/>
           <p:nvPr/>
         </p:nvCxnSpPr>
@@ -31199,7 +31140,7 @@
       </p:cxnSp>
       <p:cxnSp>
         <p:nvCxnSpPr>
-          <p:cNvPr id="735" name="Google Shape;735;p22"/>
+          <p:cNvPr id="734" name="Google Shape;734;p22"/>
           <p:cNvCxnSpPr/>
           <p:nvPr/>
         </p:nvCxnSpPr>
@@ -31227,7 +31168,7 @@
       </p:cxnSp>
       <p:cxnSp>
         <p:nvCxnSpPr>
-          <p:cNvPr id="736" name="Google Shape;736;p22"/>
+          <p:cNvPr id="735" name="Google Shape;735;p22"/>
           <p:cNvCxnSpPr/>
           <p:nvPr/>
         </p:nvCxnSpPr>
@@ -31255,7 +31196,7 @@
       </p:cxnSp>
       <p:cxnSp>
         <p:nvCxnSpPr>
-          <p:cNvPr id="737" name="Google Shape;737;p22"/>
+          <p:cNvPr id="736" name="Google Shape;736;p22"/>
           <p:cNvCxnSpPr/>
           <p:nvPr/>
         </p:nvCxnSpPr>
@@ -31283,7 +31224,7 @@
       </p:cxnSp>
       <p:cxnSp>
         <p:nvCxnSpPr>
-          <p:cNvPr id="738" name="Google Shape;738;p22"/>
+          <p:cNvPr id="737" name="Google Shape;737;p22"/>
           <p:cNvCxnSpPr/>
           <p:nvPr/>
         </p:nvCxnSpPr>
@@ -31311,7 +31252,7 @@
       </p:cxnSp>
       <p:cxnSp>
         <p:nvCxnSpPr>
-          <p:cNvPr id="739" name="Google Shape;739;p22"/>
+          <p:cNvPr id="738" name="Google Shape;738;p22"/>
           <p:cNvCxnSpPr/>
           <p:nvPr/>
         </p:nvCxnSpPr>
@@ -31339,7 +31280,7 @@
       </p:cxnSp>
       <p:cxnSp>
         <p:nvCxnSpPr>
-          <p:cNvPr id="740" name="Google Shape;740;p22"/>
+          <p:cNvPr id="739" name="Google Shape;739;p22"/>
           <p:cNvCxnSpPr/>
           <p:nvPr/>
         </p:nvCxnSpPr>
@@ -31367,7 +31308,7 @@
       </p:cxnSp>
       <p:cxnSp>
         <p:nvCxnSpPr>
-          <p:cNvPr id="741" name="Google Shape;741;p22"/>
+          <p:cNvPr id="740" name="Google Shape;740;p22"/>
           <p:cNvCxnSpPr/>
           <p:nvPr/>
         </p:nvCxnSpPr>
@@ -31395,7 +31336,7 @@
       </p:cxnSp>
       <p:cxnSp>
         <p:nvCxnSpPr>
-          <p:cNvPr id="742" name="Google Shape;742;p22"/>
+          <p:cNvPr id="741" name="Google Shape;741;p22"/>
           <p:cNvCxnSpPr/>
           <p:nvPr/>
         </p:nvCxnSpPr>
@@ -31423,7 +31364,7 @@
       </p:cxnSp>
       <p:cxnSp>
         <p:nvCxnSpPr>
-          <p:cNvPr id="743" name="Google Shape;743;p22"/>
+          <p:cNvPr id="742" name="Google Shape;742;p22"/>
           <p:cNvCxnSpPr/>
           <p:nvPr/>
         </p:nvCxnSpPr>
@@ -31451,7 +31392,7 @@
       </p:cxnSp>
       <p:cxnSp>
         <p:nvCxnSpPr>
-          <p:cNvPr id="744" name="Google Shape;744;p22"/>
+          <p:cNvPr id="743" name="Google Shape;743;p22"/>
           <p:cNvCxnSpPr/>
           <p:nvPr/>
         </p:nvCxnSpPr>
@@ -31479,7 +31420,7 @@
       </p:cxnSp>
       <p:cxnSp>
         <p:nvCxnSpPr>
-          <p:cNvPr id="745" name="Google Shape;745;p22"/>
+          <p:cNvPr id="744" name="Google Shape;744;p22"/>
           <p:cNvCxnSpPr/>
           <p:nvPr/>
         </p:nvCxnSpPr>
@@ -31507,7 +31448,7 @@
       </p:cxnSp>
       <p:cxnSp>
         <p:nvCxnSpPr>
-          <p:cNvPr id="746" name="Google Shape;746;p22"/>
+          <p:cNvPr id="745" name="Google Shape;745;p22"/>
           <p:cNvCxnSpPr/>
           <p:nvPr/>
         </p:nvCxnSpPr>
@@ -31535,7 +31476,7 @@
       </p:cxnSp>
       <p:cxnSp>
         <p:nvCxnSpPr>
-          <p:cNvPr id="747" name="Google Shape;747;p22"/>
+          <p:cNvPr id="746" name="Google Shape;746;p22"/>
           <p:cNvCxnSpPr/>
           <p:nvPr/>
         </p:nvCxnSpPr>
@@ -31563,7 +31504,7 @@
       </p:cxnSp>
       <p:cxnSp>
         <p:nvCxnSpPr>
-          <p:cNvPr id="748" name="Google Shape;748;p22"/>
+          <p:cNvPr id="747" name="Google Shape;747;p22"/>
           <p:cNvCxnSpPr/>
           <p:nvPr/>
         </p:nvCxnSpPr>
@@ -31591,7 +31532,7 @@
       </p:cxnSp>
       <p:cxnSp>
         <p:nvCxnSpPr>
-          <p:cNvPr id="749" name="Google Shape;749;p22"/>
+          <p:cNvPr id="748" name="Google Shape;748;p22"/>
           <p:cNvCxnSpPr/>
           <p:nvPr/>
         </p:nvCxnSpPr>
@@ -31619,7 +31560,7 @@
       </p:cxnSp>
       <p:cxnSp>
         <p:nvCxnSpPr>
-          <p:cNvPr id="750" name="Google Shape;750;p22"/>
+          <p:cNvPr id="749" name="Google Shape;749;p22"/>
           <p:cNvCxnSpPr/>
           <p:nvPr/>
         </p:nvCxnSpPr>
@@ -31647,7 +31588,7 @@
       </p:cxnSp>
       <p:cxnSp>
         <p:nvCxnSpPr>
-          <p:cNvPr id="751" name="Google Shape;751;p22"/>
+          <p:cNvPr id="750" name="Google Shape;750;p22"/>
           <p:cNvCxnSpPr/>
           <p:nvPr/>
         </p:nvCxnSpPr>
@@ -31675,7 +31616,7 @@
       </p:cxnSp>
       <p:cxnSp>
         <p:nvCxnSpPr>
-          <p:cNvPr id="752" name="Google Shape;752;p22"/>
+          <p:cNvPr id="751" name="Google Shape;751;p22"/>
           <p:cNvCxnSpPr/>
           <p:nvPr/>
         </p:nvCxnSpPr>
@@ -31703,7 +31644,7 @@
       </p:cxnSp>
       <p:cxnSp>
         <p:nvCxnSpPr>
-          <p:cNvPr id="753" name="Google Shape;753;p22"/>
+          <p:cNvPr id="752" name="Google Shape;752;p22"/>
           <p:cNvCxnSpPr/>
           <p:nvPr/>
         </p:nvCxnSpPr>
@@ -31731,7 +31672,7 @@
       </p:cxnSp>
       <p:cxnSp>
         <p:nvCxnSpPr>
-          <p:cNvPr id="754" name="Google Shape;754;p22"/>
+          <p:cNvPr id="753" name="Google Shape;753;p22"/>
           <p:cNvCxnSpPr/>
           <p:nvPr/>
         </p:nvCxnSpPr>
@@ -31759,7 +31700,7 @@
       </p:cxnSp>
       <p:cxnSp>
         <p:nvCxnSpPr>
-          <p:cNvPr id="755" name="Google Shape;755;p22"/>
+          <p:cNvPr id="754" name="Google Shape;754;p22"/>
           <p:cNvCxnSpPr/>
           <p:nvPr/>
         </p:nvCxnSpPr>
@@ -31787,7 +31728,7 @@
       </p:cxnSp>
       <p:cxnSp>
         <p:nvCxnSpPr>
-          <p:cNvPr id="756" name="Google Shape;756;p22"/>
+          <p:cNvPr id="755" name="Google Shape;755;p22"/>
           <p:cNvCxnSpPr/>
           <p:nvPr/>
         </p:nvCxnSpPr>
@@ -31815,7 +31756,7 @@
       </p:cxnSp>
       <p:cxnSp>
         <p:nvCxnSpPr>
-          <p:cNvPr id="757" name="Google Shape;757;p22"/>
+          <p:cNvPr id="756" name="Google Shape;756;p22"/>
           <p:cNvCxnSpPr/>
           <p:nvPr/>
         </p:nvCxnSpPr>
@@ -31843,7 +31784,7 @@
       </p:cxnSp>
       <p:cxnSp>
         <p:nvCxnSpPr>
-          <p:cNvPr id="758" name="Google Shape;758;p22"/>
+          <p:cNvPr id="757" name="Google Shape;757;p22"/>
           <p:cNvCxnSpPr/>
           <p:nvPr/>
         </p:nvCxnSpPr>
@@ -31871,7 +31812,7 @@
       </p:cxnSp>
       <p:cxnSp>
         <p:nvCxnSpPr>
-          <p:cNvPr id="759" name="Google Shape;759;p22"/>
+          <p:cNvPr id="758" name="Google Shape;758;p22"/>
           <p:cNvCxnSpPr/>
           <p:nvPr/>
         </p:nvCxnSpPr>
@@ -31899,7 +31840,7 @@
       </p:cxnSp>
       <p:cxnSp>
         <p:nvCxnSpPr>
-          <p:cNvPr id="760" name="Google Shape;760;p22"/>
+          <p:cNvPr id="759" name="Google Shape;759;p22"/>
           <p:cNvCxnSpPr/>
           <p:nvPr/>
         </p:nvCxnSpPr>
@@ -31927,7 +31868,7 @@
       </p:cxnSp>
       <p:cxnSp>
         <p:nvCxnSpPr>
-          <p:cNvPr id="761" name="Google Shape;761;p22"/>
+          <p:cNvPr id="760" name="Google Shape;760;p22"/>
           <p:cNvCxnSpPr/>
           <p:nvPr/>
         </p:nvCxnSpPr>
@@ -31955,7 +31896,7 @@
       </p:cxnSp>
       <p:cxnSp>
         <p:nvCxnSpPr>
-          <p:cNvPr id="762" name="Google Shape;762;p22"/>
+          <p:cNvPr id="761" name="Google Shape;761;p22"/>
           <p:cNvCxnSpPr/>
           <p:nvPr/>
         </p:nvCxnSpPr>
@@ -31983,7 +31924,7 @@
       </p:cxnSp>
       <p:cxnSp>
         <p:nvCxnSpPr>
-          <p:cNvPr id="763" name="Google Shape;763;p22"/>
+          <p:cNvPr id="762" name="Google Shape;762;p22"/>
           <p:cNvCxnSpPr/>
           <p:nvPr/>
         </p:nvCxnSpPr>
@@ -32011,7 +31952,7 @@
       </p:cxnSp>
       <p:cxnSp>
         <p:nvCxnSpPr>
-          <p:cNvPr id="764" name="Google Shape;764;p22"/>
+          <p:cNvPr id="763" name="Google Shape;763;p22"/>
           <p:cNvCxnSpPr/>
           <p:nvPr/>
         </p:nvCxnSpPr>
@@ -32039,7 +31980,7 @@
       </p:cxnSp>
       <p:cxnSp>
         <p:nvCxnSpPr>
-          <p:cNvPr id="765" name="Google Shape;765;p22"/>
+          <p:cNvPr id="764" name="Google Shape;764;p22"/>
           <p:cNvCxnSpPr/>
           <p:nvPr/>
         </p:nvCxnSpPr>
@@ -32067,7 +32008,7 @@
       </p:cxnSp>
       <p:cxnSp>
         <p:nvCxnSpPr>
-          <p:cNvPr id="766" name="Google Shape;766;p22"/>
+          <p:cNvPr id="765" name="Google Shape;765;p22"/>
           <p:cNvCxnSpPr/>
           <p:nvPr/>
         </p:nvCxnSpPr>
@@ -32095,7 +32036,7 @@
       </p:cxnSp>
       <p:cxnSp>
         <p:nvCxnSpPr>
-          <p:cNvPr id="767" name="Google Shape;767;p22"/>
+          <p:cNvPr id="766" name="Google Shape;766;p22"/>
           <p:cNvCxnSpPr/>
           <p:nvPr/>
         </p:nvCxnSpPr>
@@ -32123,7 +32064,7 @@
       </p:cxnSp>
       <p:cxnSp>
         <p:nvCxnSpPr>
-          <p:cNvPr id="768" name="Google Shape;768;p22"/>
+          <p:cNvPr id="767" name="Google Shape;767;p22"/>
           <p:cNvCxnSpPr/>
           <p:nvPr/>
         </p:nvCxnSpPr>
@@ -32151,7 +32092,7 @@
       </p:cxnSp>
       <p:cxnSp>
         <p:nvCxnSpPr>
-          <p:cNvPr id="769" name="Google Shape;769;p22"/>
+          <p:cNvPr id="768" name="Google Shape;768;p22"/>
           <p:cNvCxnSpPr/>
           <p:nvPr/>
         </p:nvCxnSpPr>
@@ -32179,7 +32120,7 @@
       </p:cxnSp>
       <p:cxnSp>
         <p:nvCxnSpPr>
-          <p:cNvPr id="770" name="Google Shape;770;p22"/>
+          <p:cNvPr id="769" name="Google Shape;769;p22"/>
           <p:cNvCxnSpPr/>
           <p:nvPr/>
         </p:nvCxnSpPr>
@@ -32207,7 +32148,7 @@
       </p:cxnSp>
       <p:cxnSp>
         <p:nvCxnSpPr>
-          <p:cNvPr id="771" name="Google Shape;771;p22"/>
+          <p:cNvPr id="770" name="Google Shape;770;p22"/>
           <p:cNvCxnSpPr/>
           <p:nvPr/>
         </p:nvCxnSpPr>
@@ -32235,7 +32176,7 @@
       </p:cxnSp>
       <p:cxnSp>
         <p:nvCxnSpPr>
-          <p:cNvPr id="772" name="Google Shape;772;p22"/>
+          <p:cNvPr id="771" name="Google Shape;771;p22"/>
           <p:cNvCxnSpPr/>
           <p:nvPr/>
         </p:nvCxnSpPr>
@@ -32263,7 +32204,7 @@
       </p:cxnSp>
       <p:cxnSp>
         <p:nvCxnSpPr>
-          <p:cNvPr id="773" name="Google Shape;773;p22"/>
+          <p:cNvPr id="772" name="Google Shape;772;p22"/>
           <p:cNvCxnSpPr/>
           <p:nvPr/>
         </p:nvCxnSpPr>
@@ -32291,7 +32232,7 @@
       </p:cxnSp>
       <p:cxnSp>
         <p:nvCxnSpPr>
-          <p:cNvPr id="774" name="Google Shape;774;p22"/>
+          <p:cNvPr id="773" name="Google Shape;773;p22"/>
           <p:cNvCxnSpPr/>
           <p:nvPr/>
         </p:nvCxnSpPr>
@@ -32319,7 +32260,7 @@
       </p:cxnSp>
       <p:cxnSp>
         <p:nvCxnSpPr>
-          <p:cNvPr id="775" name="Google Shape;775;p22"/>
+          <p:cNvPr id="774" name="Google Shape;774;p22"/>
           <p:cNvCxnSpPr/>
           <p:nvPr/>
         </p:nvCxnSpPr>
@@ -32347,7 +32288,7 @@
       </p:cxnSp>
       <p:cxnSp>
         <p:nvCxnSpPr>
-          <p:cNvPr id="776" name="Google Shape;776;p22"/>
+          <p:cNvPr id="775" name="Google Shape;775;p22"/>
           <p:cNvCxnSpPr/>
           <p:nvPr/>
         </p:nvCxnSpPr>
@@ -32375,7 +32316,7 @@
       </p:cxnSp>
       <p:cxnSp>
         <p:nvCxnSpPr>
-          <p:cNvPr id="777" name="Google Shape;777;p22"/>
+          <p:cNvPr id="776" name="Google Shape;776;p22"/>
           <p:cNvCxnSpPr/>
           <p:nvPr/>
         </p:nvCxnSpPr>
@@ -32403,7 +32344,7 @@
       </p:cxnSp>
       <p:cxnSp>
         <p:nvCxnSpPr>
-          <p:cNvPr id="778" name="Google Shape;778;p22"/>
+          <p:cNvPr id="777" name="Google Shape;777;p22"/>
           <p:cNvCxnSpPr/>
           <p:nvPr/>
         </p:nvCxnSpPr>
@@ -32431,7 +32372,7 @@
       </p:cxnSp>
       <p:cxnSp>
         <p:nvCxnSpPr>
-          <p:cNvPr id="779" name="Google Shape;779;p22"/>
+          <p:cNvPr id="778" name="Google Shape;778;p22"/>
           <p:cNvCxnSpPr/>
           <p:nvPr/>
         </p:nvCxnSpPr>
@@ -32459,7 +32400,7 @@
       </p:cxnSp>
       <p:cxnSp>
         <p:nvCxnSpPr>
-          <p:cNvPr id="780" name="Google Shape;780;p22"/>
+          <p:cNvPr id="779" name="Google Shape;779;p22"/>
           <p:cNvCxnSpPr/>
           <p:nvPr/>
         </p:nvCxnSpPr>
@@ -32487,7 +32428,7 @@
       </p:cxnSp>
       <p:sp>
         <p:nvSpPr>
-          <p:cNvPr id="781" name="Google Shape;781;p22"/>
+          <p:cNvPr id="780" name="Google Shape;780;p22"/>
           <p:cNvSpPr txBox="1"/>
           <p:nvPr/>
         </p:nvSpPr>
@@ -32586,7 +32527,7 @@
       </p:sp>
       <p:sp>
         <p:nvSpPr>
-          <p:cNvPr id="782" name="Google Shape;782;p22"/>
+          <p:cNvPr id="781" name="Google Shape;781;p22"/>
           <p:cNvSpPr txBox="1"/>
           <p:nvPr/>
         </p:nvSpPr>
@@ -32649,7 +32590,7 @@
       </p:sp>
       <p:sp>
         <p:nvSpPr>
-          <p:cNvPr id="783" name="Google Shape;783;p22"/>
+          <p:cNvPr id="782" name="Google Shape;782;p22"/>
           <p:cNvSpPr txBox="1"/>
           <p:nvPr/>
         </p:nvSpPr>
@@ -32712,7 +32653,7 @@
       </p:sp>
       <p:sp>
         <p:nvSpPr>
-          <p:cNvPr id="784" name="Google Shape;784;p22"/>
+          <p:cNvPr id="783" name="Google Shape;783;p22"/>
           <p:cNvSpPr/>
           <p:nvPr/>
         </p:nvSpPr>
@@ -32766,7 +32707,7 @@
       </p:sp>
       <p:sp>
         <p:nvSpPr>
-          <p:cNvPr id="785" name="Google Shape;785;p22"/>
+          <p:cNvPr id="784" name="Google Shape;784;p22"/>
           <p:cNvSpPr/>
           <p:nvPr/>
         </p:nvSpPr>
@@ -32809,7 +32750,7 @@
       </p:sp>
       <p:sp>
         <p:nvSpPr>
-          <p:cNvPr id="786" name="Google Shape;786;p22"/>
+          <p:cNvPr id="785" name="Google Shape;785;p22"/>
           <p:cNvSpPr txBox="1"/>
           <p:nvPr/>
         </p:nvSpPr>
@@ -32872,7 +32813,7 @@
       </p:sp>
       <p:sp>
         <p:nvSpPr>
-          <p:cNvPr id="787" name="Google Shape;787;p22"/>
+          <p:cNvPr id="786" name="Google Shape;786;p22"/>
           <p:cNvSpPr txBox="1"/>
           <p:nvPr/>
         </p:nvSpPr>
@@ -32935,7 +32876,7 @@
       </p:sp>
       <p:sp>
         <p:nvSpPr>
-          <p:cNvPr id="788" name="Google Shape;788;p22"/>
+          <p:cNvPr id="787" name="Google Shape;787;p22"/>
           <p:cNvSpPr txBox="1"/>
           <p:nvPr/>
         </p:nvSpPr>
@@ -32998,7 +32939,7 @@
       </p:sp>
       <p:sp>
         <p:nvSpPr>
-          <p:cNvPr id="789" name="Google Shape;789;p22"/>
+          <p:cNvPr id="788" name="Google Shape;788;p22"/>
           <p:cNvSpPr txBox="1"/>
           <p:nvPr/>
         </p:nvSpPr>
@@ -33061,7 +33002,7 @@
       </p:sp>
       <p:cxnSp>
         <p:nvCxnSpPr>
-          <p:cNvPr id="790" name="Google Shape;790;p22"/>
+          <p:cNvPr id="789" name="Google Shape;789;p22"/>
           <p:cNvCxnSpPr/>
           <p:nvPr/>
         </p:nvCxnSpPr>
@@ -33087,7 +33028,7 @@
       </p:cxnSp>
       <p:sp>
         <p:nvSpPr>
-          <p:cNvPr id="791" name="Google Shape;791;p22"/>
+          <p:cNvPr id="790" name="Google Shape;790;p22"/>
           <p:cNvSpPr txBox="1"/>
           <p:nvPr/>
         </p:nvSpPr>
@@ -33150,7 +33091,7 @@
       </p:sp>
       <p:sp>
         <p:nvSpPr>
-          <p:cNvPr id="792" name="Google Shape;792;p22"/>
+          <p:cNvPr id="791" name="Google Shape;791;p22"/>
           <p:cNvSpPr/>
           <p:nvPr/>
         </p:nvSpPr>
@@ -33211,7 +33152,7 @@
     </p:bg>
     <p:spTree>
       <p:nvGrpSpPr>
-        <p:cNvPr id="797" name="Shape 797"/>
+        <p:cNvPr id="796" name="Shape 796"/>
         <p:cNvGrpSpPr/>
         <p:nvPr/>
       </p:nvGrpSpPr>
@@ -33225,7 +33166,7 @@
       </p:grpSpPr>
       <p:sp>
         <p:nvSpPr>
-          <p:cNvPr id="798" name="Google Shape;798;p23"/>
+          <p:cNvPr id="797" name="Google Shape;797;p23"/>
           <p:cNvSpPr txBox="1"/>
           <p:nvPr/>
         </p:nvSpPr>
@@ -33288,7 +33229,7 @@
       </p:sp>
       <p:sp>
         <p:nvSpPr>
-          <p:cNvPr id="799" name="Google Shape;799;p23"/>
+          <p:cNvPr id="798" name="Google Shape;798;p23"/>
           <p:cNvSpPr/>
           <p:nvPr/>
         </p:nvSpPr>
@@ -33331,7 +33272,7 @@
       </p:sp>
       <p:sp>
         <p:nvSpPr>
-          <p:cNvPr id="800" name="Google Shape;800;p23"/>
+          <p:cNvPr id="799" name="Google Shape;799;p23"/>
           <p:cNvSpPr/>
           <p:nvPr/>
         </p:nvSpPr>
@@ -33374,7 +33315,7 @@
       </p:sp>
       <p:sp>
         <p:nvSpPr>
-          <p:cNvPr id="801" name="Google Shape;801;p23"/>
+          <p:cNvPr id="800" name="Google Shape;800;p23"/>
           <p:cNvSpPr txBox="1"/>
           <p:nvPr/>
         </p:nvSpPr>
@@ -33515,7 +33456,7 @@
       </p:sp>
       <p:sp>
         <p:nvSpPr>
-          <p:cNvPr id="802" name="Google Shape;802;p23"/>
+          <p:cNvPr id="801" name="Google Shape;801;p23"/>
           <p:cNvSpPr/>
           <p:nvPr/>
         </p:nvSpPr>
@@ -33558,7 +33499,7 @@
       </p:sp>
       <p:sp>
         <p:nvSpPr>
-          <p:cNvPr id="803" name="Google Shape;803;p23"/>
+          <p:cNvPr id="802" name="Google Shape;802;p23"/>
           <p:cNvSpPr txBox="1"/>
           <p:nvPr/>
         </p:nvSpPr>
@@ -33699,7 +33640,7 @@
       </p:sp>
       <p:sp>
         <p:nvSpPr>
-          <p:cNvPr id="804" name="Google Shape;804;p23"/>
+          <p:cNvPr id="803" name="Google Shape;803;p23"/>
           <p:cNvSpPr/>
           <p:nvPr/>
         </p:nvSpPr>
@@ -33742,7 +33683,7 @@
       </p:sp>
       <p:sp>
         <p:nvSpPr>
-          <p:cNvPr id="805" name="Google Shape;805;p23"/>
+          <p:cNvPr id="804" name="Google Shape;804;p23"/>
           <p:cNvSpPr txBox="1"/>
           <p:nvPr/>
         </p:nvSpPr>
@@ -33883,7 +33824,7 @@
       </p:sp>
       <p:sp>
         <p:nvSpPr>
-          <p:cNvPr id="806" name="Google Shape;806;p23"/>
+          <p:cNvPr id="805" name="Google Shape;805;p23"/>
           <p:cNvSpPr/>
           <p:nvPr/>
         </p:nvSpPr>
@@ -33926,7 +33867,7 @@
       </p:sp>
       <p:sp>
         <p:nvSpPr>
-          <p:cNvPr id="807" name="Google Shape;807;p23"/>
+          <p:cNvPr id="806" name="Google Shape;806;p23"/>
           <p:cNvSpPr txBox="1"/>
           <p:nvPr/>
         </p:nvSpPr>
@@ -34055,7 +33996,7 @@
       </p:sp>
       <p:sp>
         <p:nvSpPr>
-          <p:cNvPr id="808" name="Google Shape;808;p23"/>
+          <p:cNvPr id="807" name="Google Shape;807;p23"/>
           <p:cNvSpPr/>
           <p:nvPr/>
         </p:nvSpPr>
@@ -34098,7 +34039,7 @@
       </p:sp>
       <p:sp>
         <p:nvSpPr>
-          <p:cNvPr id="809" name="Google Shape;809;p23"/>
+          <p:cNvPr id="808" name="Google Shape;808;p23"/>
           <p:cNvSpPr txBox="1"/>
           <p:nvPr/>
         </p:nvSpPr>
@@ -34227,7 +34168,7 @@
       </p:sp>
       <p:sp>
         <p:nvSpPr>
-          <p:cNvPr id="810" name="Google Shape;810;p23"/>
+          <p:cNvPr id="809" name="Google Shape;809;p23"/>
           <p:cNvSpPr/>
           <p:nvPr/>
         </p:nvSpPr>
@@ -34270,7 +34211,7 @@
       </p:sp>
       <p:sp>
         <p:nvSpPr>
-          <p:cNvPr id="811" name="Google Shape;811;p23"/>
+          <p:cNvPr id="810" name="Google Shape;810;p23"/>
           <p:cNvSpPr txBox="1"/>
           <p:nvPr/>
         </p:nvSpPr>
@@ -34399,7 +34340,7 @@
       </p:sp>
       <p:sp>
         <p:nvSpPr>
-          <p:cNvPr id="812" name="Google Shape;812;p23"/>
+          <p:cNvPr id="811" name="Google Shape;811;p23"/>
           <p:cNvSpPr/>
           <p:nvPr/>
         </p:nvSpPr>
@@ -34442,7 +34383,7 @@
       </p:sp>
       <p:sp>
         <p:nvSpPr>
-          <p:cNvPr id="813" name="Google Shape;813;p23"/>
+          <p:cNvPr id="812" name="Google Shape;812;p23"/>
           <p:cNvSpPr txBox="1"/>
           <p:nvPr/>
         </p:nvSpPr>
@@ -34571,7 +34512,7 @@
       </p:sp>
       <p:sp>
         <p:nvSpPr>
-          <p:cNvPr id="814" name="Google Shape;814;p23"/>
+          <p:cNvPr id="813" name="Google Shape;813;p23"/>
           <p:cNvSpPr/>
           <p:nvPr/>
         </p:nvSpPr>
@@ -34614,7 +34555,7 @@
       </p:sp>
       <p:sp>
         <p:nvSpPr>
-          <p:cNvPr id="815" name="Google Shape;815;p23"/>
+          <p:cNvPr id="814" name="Google Shape;814;p23"/>
           <p:cNvSpPr txBox="1"/>
           <p:nvPr/>
         </p:nvSpPr>
@@ -34743,7 +34684,7 @@
       </p:sp>
       <p:sp>
         <p:nvSpPr>
-          <p:cNvPr id="816" name="Google Shape;816;p23"/>
+          <p:cNvPr id="815" name="Google Shape;815;p23"/>
           <p:cNvSpPr/>
           <p:nvPr/>
         </p:nvSpPr>
@@ -34786,7 +34727,7 @@
       </p:sp>
       <p:sp>
         <p:nvSpPr>
-          <p:cNvPr id="817" name="Google Shape;817;p23"/>
+          <p:cNvPr id="816" name="Google Shape;816;p23"/>
           <p:cNvSpPr txBox="1"/>
           <p:nvPr/>
         </p:nvSpPr>
@@ -34915,7 +34856,7 @@
       </p:sp>
       <p:sp>
         <p:nvSpPr>
-          <p:cNvPr id="818" name="Google Shape;818;p23"/>
+          <p:cNvPr id="817" name="Google Shape;817;p23"/>
           <p:cNvSpPr/>
           <p:nvPr/>
         </p:nvSpPr>
@@ -34958,7 +34899,7 @@
       </p:sp>
       <p:sp>
         <p:nvSpPr>
-          <p:cNvPr id="819" name="Google Shape;819;p23"/>
+          <p:cNvPr id="818" name="Google Shape;818;p23"/>
           <p:cNvSpPr txBox="1"/>
           <p:nvPr/>
         </p:nvSpPr>
@@ -35087,7 +35028,7 @@
       </p:sp>
       <p:sp>
         <p:nvSpPr>
-          <p:cNvPr id="820" name="Google Shape;820;p23"/>
+          <p:cNvPr id="819" name="Google Shape;819;p23"/>
           <p:cNvSpPr/>
           <p:nvPr/>
         </p:nvSpPr>
@@ -35130,7 +35071,7 @@
       </p:sp>
       <p:sp>
         <p:nvSpPr>
-          <p:cNvPr id="821" name="Google Shape;821;p23"/>
+          <p:cNvPr id="820" name="Google Shape;820;p23"/>
           <p:cNvSpPr txBox="1"/>
           <p:nvPr/>
         </p:nvSpPr>
@@ -35259,7 +35200,7 @@
       </p:sp>
       <p:sp>
         <p:nvSpPr>
-          <p:cNvPr id="822" name="Google Shape;822;p23"/>
+          <p:cNvPr id="821" name="Google Shape;821;p23"/>
           <p:cNvSpPr/>
           <p:nvPr/>
         </p:nvSpPr>
@@ -35302,7 +35243,7 @@
       </p:sp>
       <p:sp>
         <p:nvSpPr>
-          <p:cNvPr id="823" name="Google Shape;823;p23"/>
+          <p:cNvPr id="822" name="Google Shape;822;p23"/>
           <p:cNvSpPr txBox="1"/>
           <p:nvPr/>
         </p:nvSpPr>
@@ -35443,7 +35384,7 @@
       </p:sp>
       <p:sp>
         <p:nvSpPr>
-          <p:cNvPr id="824" name="Google Shape;824;p23"/>
+          <p:cNvPr id="823" name="Google Shape;823;p23"/>
           <p:cNvSpPr/>
           <p:nvPr/>
         </p:nvSpPr>
@@ -35486,7 +35427,7 @@
       </p:sp>
       <p:sp>
         <p:nvSpPr>
-          <p:cNvPr id="825" name="Google Shape;825;p23"/>
+          <p:cNvPr id="824" name="Google Shape;824;p23"/>
           <p:cNvSpPr txBox="1"/>
           <p:nvPr/>
         </p:nvSpPr>
@@ -35627,7 +35568,7 @@
       </p:sp>
       <p:sp>
         <p:nvSpPr>
-          <p:cNvPr id="826" name="Google Shape;826;p23"/>
+          <p:cNvPr id="825" name="Google Shape;825;p23"/>
           <p:cNvSpPr/>
           <p:nvPr/>
         </p:nvSpPr>
@@ -35670,7 +35611,7 @@
       </p:sp>
       <p:sp>
         <p:nvSpPr>
-          <p:cNvPr id="827" name="Google Shape;827;p23"/>
+          <p:cNvPr id="826" name="Google Shape;826;p23"/>
           <p:cNvSpPr txBox="1"/>
           <p:nvPr/>
         </p:nvSpPr>
@@ -35811,7 +35752,7 @@
       </p:sp>
       <p:cxnSp>
         <p:nvCxnSpPr>
-          <p:cNvPr id="828" name="Google Shape;828;p23"/>
+          <p:cNvPr id="827" name="Google Shape;827;p23"/>
           <p:cNvCxnSpPr/>
           <p:nvPr/>
         </p:nvCxnSpPr>
@@ -35837,7 +35778,7 @@
       </p:cxnSp>
       <p:sp>
         <p:nvSpPr>
-          <p:cNvPr id="829" name="Google Shape;829;p23"/>
+          <p:cNvPr id="828" name="Google Shape;828;p23"/>
           <p:cNvSpPr txBox="1"/>
           <p:nvPr/>
         </p:nvSpPr>
@@ -35900,7 +35841,7 @@
       </p:sp>
       <p:sp>
         <p:nvSpPr>
-          <p:cNvPr id="830" name="Google Shape;830;p23"/>
+          <p:cNvPr id="829" name="Google Shape;829;p23"/>
           <p:cNvSpPr/>
           <p:nvPr/>
         </p:nvSpPr>
@@ -35961,7 +35902,7 @@
     </p:bg>
     <p:spTree>
       <p:nvGrpSpPr>
-        <p:cNvPr id="53" name="Shape 53"/>
+        <p:cNvPr id="52" name="Shape 52"/>
         <p:cNvGrpSpPr/>
         <p:nvPr/>
       </p:nvGrpSpPr>
@@ -35975,7 +35916,7 @@
       </p:grpSpPr>
       <p:sp>
         <p:nvSpPr>
-          <p:cNvPr id="54" name="Google Shape;54;p5"/>
+          <p:cNvPr id="53" name="Google Shape;53;p5"/>
           <p:cNvSpPr txBox="1"/>
           <p:nvPr/>
         </p:nvSpPr>
@@ -36041,7 +35982,7 @@
       </p:sp>
       <p:sp>
         <p:nvSpPr>
-          <p:cNvPr id="55" name="Google Shape;55;p5"/>
+          <p:cNvPr id="54" name="Google Shape;54;p5"/>
           <p:cNvSpPr/>
           <p:nvPr/>
         </p:nvSpPr>
@@ -36100,7 +36041,7 @@
       </p:sp>
       <p:sp>
         <p:nvSpPr>
-          <p:cNvPr id="56" name="Google Shape;56;p5"/>
+          <p:cNvPr id="55" name="Google Shape;55;p5"/>
           <p:cNvSpPr/>
           <p:nvPr/>
         </p:nvSpPr>
@@ -36159,7 +36100,7 @@
       </p:sp>
       <p:sp>
         <p:nvSpPr>
-          <p:cNvPr id="57" name="Google Shape;57;p5"/>
+          <p:cNvPr id="56" name="Google Shape;56;p5"/>
           <p:cNvSpPr txBox="1"/>
           <p:nvPr/>
         </p:nvSpPr>
@@ -36225,7 +36166,7 @@
       </p:sp>
       <p:sp>
         <p:nvSpPr>
-          <p:cNvPr id="58" name="Google Shape;58;p5"/>
+          <p:cNvPr id="57" name="Google Shape;57;p5"/>
           <p:cNvSpPr txBox="1"/>
           <p:nvPr/>
         </p:nvSpPr>
@@ -36291,7 +36232,7 @@
       </p:sp>
       <p:sp>
         <p:nvSpPr>
-          <p:cNvPr id="59" name="Google Shape;59;p5"/>
+          <p:cNvPr id="58" name="Google Shape;58;p5"/>
           <p:cNvSpPr txBox="1"/>
           <p:nvPr/>
         </p:nvSpPr>
@@ -36357,7 +36298,7 @@
       </p:sp>
       <p:cxnSp>
         <p:nvCxnSpPr>
-          <p:cNvPr id="60" name="Google Shape;60;p5"/>
+          <p:cNvPr id="59" name="Google Shape;59;p5"/>
           <p:cNvCxnSpPr/>
           <p:nvPr/>
         </p:nvCxnSpPr>
@@ -36383,7 +36324,7 @@
       </p:cxnSp>
       <p:cxnSp>
         <p:nvCxnSpPr>
-          <p:cNvPr id="61" name="Google Shape;61;p5"/>
+          <p:cNvPr id="60" name="Google Shape;60;p5"/>
           <p:cNvCxnSpPr/>
           <p:nvPr/>
         </p:nvCxnSpPr>
@@ -36409,7 +36350,7 @@
       </p:cxnSp>
       <p:sp>
         <p:nvSpPr>
-          <p:cNvPr id="62" name="Google Shape;62;p5"/>
+          <p:cNvPr id="61" name="Google Shape;61;p5"/>
           <p:cNvSpPr txBox="1"/>
           <p:nvPr/>
         </p:nvSpPr>
@@ -36475,7 +36416,7 @@
       </p:sp>
       <p:sp>
         <p:nvSpPr>
-          <p:cNvPr id="63" name="Google Shape;63;p5"/>
+          <p:cNvPr id="62" name="Google Shape;62;p5"/>
           <p:cNvSpPr txBox="1"/>
           <p:nvPr/>
         </p:nvSpPr>
@@ -36541,7 +36482,7 @@
       </p:sp>
       <p:sp>
         <p:nvSpPr>
-          <p:cNvPr id="64" name="Google Shape;64;p5"/>
+          <p:cNvPr id="63" name="Google Shape;63;p5"/>
           <p:cNvSpPr txBox="1"/>
           <p:nvPr/>
         </p:nvSpPr>
@@ -36607,7 +36548,7 @@
       </p:sp>
       <p:sp>
         <p:nvSpPr>
-          <p:cNvPr id="65" name="Google Shape;65;p5"/>
+          <p:cNvPr id="64" name="Google Shape;64;p5"/>
           <p:cNvSpPr txBox="1"/>
           <p:nvPr/>
         </p:nvSpPr>
@@ -36673,7 +36614,7 @@
       </p:sp>
       <p:sp>
         <p:nvSpPr>
-          <p:cNvPr id="66" name="Google Shape;66;p5"/>
+          <p:cNvPr id="65" name="Google Shape;65;p5"/>
           <p:cNvSpPr txBox="1"/>
           <p:nvPr/>
         </p:nvSpPr>
@@ -36739,7 +36680,7 @@
       </p:sp>
       <p:sp>
         <p:nvSpPr>
-          <p:cNvPr id="67" name="Google Shape;67;p5"/>
+          <p:cNvPr id="66" name="Google Shape;66;p5"/>
           <p:cNvSpPr txBox="1"/>
           <p:nvPr/>
         </p:nvSpPr>
@@ -36805,7 +36746,7 @@
       </p:sp>
       <p:sp>
         <p:nvSpPr>
-          <p:cNvPr id="68" name="Google Shape;68;p5"/>
+          <p:cNvPr id="67" name="Google Shape;67;p5"/>
           <p:cNvSpPr txBox="1"/>
           <p:nvPr/>
         </p:nvSpPr>
@@ -36871,7 +36812,7 @@
       </p:sp>
       <p:sp>
         <p:nvSpPr>
-          <p:cNvPr id="69" name="Google Shape;69;p5"/>
+          <p:cNvPr id="68" name="Google Shape;68;p5"/>
           <p:cNvSpPr txBox="1"/>
           <p:nvPr/>
         </p:nvSpPr>
@@ -36937,7 +36878,7 @@
       </p:sp>
       <p:cxnSp>
         <p:nvCxnSpPr>
-          <p:cNvPr id="70" name="Google Shape;70;p5"/>
+          <p:cNvPr id="69" name="Google Shape;69;p5"/>
           <p:cNvCxnSpPr/>
           <p:nvPr/>
         </p:nvCxnSpPr>
@@ -36963,7 +36904,7 @@
       </p:cxnSp>
       <p:sp>
         <p:nvSpPr>
-          <p:cNvPr id="71" name="Google Shape;71;p5"/>
+          <p:cNvPr id="70" name="Google Shape;70;p5"/>
           <p:cNvSpPr txBox="1"/>
           <p:nvPr/>
         </p:nvSpPr>
@@ -37029,7 +36970,7 @@
       </p:sp>
       <p:sp>
         <p:nvSpPr>
-          <p:cNvPr id="72" name="Google Shape;72;p5"/>
+          <p:cNvPr id="71" name="Google Shape;71;p5"/>
           <p:cNvSpPr txBox="1"/>
           <p:nvPr/>
         </p:nvSpPr>
@@ -37095,7 +37036,7 @@
       </p:sp>
       <p:sp>
         <p:nvSpPr>
-          <p:cNvPr id="73" name="Google Shape;73;p5"/>
+          <p:cNvPr id="72" name="Google Shape;72;p5"/>
           <p:cNvSpPr txBox="1"/>
           <p:nvPr/>
         </p:nvSpPr>
@@ -37161,7 +37102,7 @@
       </p:sp>
       <p:sp>
         <p:nvSpPr>
-          <p:cNvPr id="74" name="Google Shape;74;p5"/>
+          <p:cNvPr id="73" name="Google Shape;73;p5"/>
           <p:cNvSpPr txBox="1"/>
           <p:nvPr/>
         </p:nvSpPr>
@@ -37227,7 +37168,7 @@
       </p:sp>
       <p:cxnSp>
         <p:nvCxnSpPr>
-          <p:cNvPr id="75" name="Google Shape;75;p5"/>
+          <p:cNvPr id="74" name="Google Shape;74;p5"/>
           <p:cNvCxnSpPr/>
           <p:nvPr/>
         </p:nvCxnSpPr>
@@ -37253,7 +37194,7 @@
       </p:cxnSp>
       <p:sp>
         <p:nvSpPr>
-          <p:cNvPr id="76" name="Google Shape;76;p5"/>
+          <p:cNvPr id="75" name="Google Shape;75;p5"/>
           <p:cNvSpPr txBox="1"/>
           <p:nvPr/>
         </p:nvSpPr>
@@ -37319,7 +37260,7 @@
       </p:sp>
       <p:sp>
         <p:nvSpPr>
-          <p:cNvPr id="77" name="Google Shape;77;p5"/>
+          <p:cNvPr id="76" name="Google Shape;76;p5"/>
           <p:cNvSpPr txBox="1"/>
           <p:nvPr/>
         </p:nvSpPr>
@@ -37385,7 +37326,7 @@
       </p:sp>
       <p:sp>
         <p:nvSpPr>
-          <p:cNvPr id="78" name="Google Shape;78;p5"/>
+          <p:cNvPr id="77" name="Google Shape;77;p5"/>
           <p:cNvSpPr txBox="1"/>
           <p:nvPr/>
         </p:nvSpPr>
@@ -37451,7 +37392,7 @@
       </p:sp>
       <p:sp>
         <p:nvSpPr>
-          <p:cNvPr id="79" name="Google Shape;79;p5"/>
+          <p:cNvPr id="78" name="Google Shape;78;p5"/>
           <p:cNvSpPr txBox="1"/>
           <p:nvPr/>
         </p:nvSpPr>
@@ -37517,7 +37458,7 @@
       </p:sp>
       <p:cxnSp>
         <p:nvCxnSpPr>
-          <p:cNvPr id="80" name="Google Shape;80;p5"/>
+          <p:cNvPr id="79" name="Google Shape;79;p5"/>
           <p:cNvCxnSpPr/>
           <p:nvPr/>
         </p:nvCxnSpPr>
@@ -37543,7 +37484,7 @@
       </p:cxnSp>
       <p:sp>
         <p:nvSpPr>
-          <p:cNvPr id="81" name="Google Shape;81;p5"/>
+          <p:cNvPr id="80" name="Google Shape;80;p5"/>
           <p:cNvSpPr txBox="1"/>
           <p:nvPr/>
         </p:nvSpPr>
@@ -37609,7 +37550,7 @@
       </p:sp>
       <p:sp>
         <p:nvSpPr>
-          <p:cNvPr id="82" name="Google Shape;82;p5"/>
+          <p:cNvPr id="81" name="Google Shape;81;p5"/>
           <p:cNvSpPr txBox="1"/>
           <p:nvPr/>
         </p:nvSpPr>
@@ -37675,7 +37616,7 @@
       </p:sp>
       <p:sp>
         <p:nvSpPr>
-          <p:cNvPr id="83" name="Google Shape;83;p5"/>
+          <p:cNvPr id="82" name="Google Shape;82;p5"/>
           <p:cNvSpPr txBox="1"/>
           <p:nvPr/>
         </p:nvSpPr>
@@ -37741,7 +37682,7 @@
       </p:sp>
       <p:sp>
         <p:nvSpPr>
-          <p:cNvPr id="84" name="Google Shape;84;p5"/>
+          <p:cNvPr id="83" name="Google Shape;83;p5"/>
           <p:cNvSpPr txBox="1"/>
           <p:nvPr/>
         </p:nvSpPr>
@@ -37807,7 +37748,7 @@
       </p:sp>
       <p:cxnSp>
         <p:nvCxnSpPr>
-          <p:cNvPr id="85" name="Google Shape;85;p5"/>
+          <p:cNvPr id="84" name="Google Shape;84;p5"/>
           <p:cNvCxnSpPr/>
           <p:nvPr/>
         </p:nvCxnSpPr>
@@ -37833,7 +37774,7 @@
       </p:cxnSp>
       <p:sp>
         <p:nvSpPr>
-          <p:cNvPr id="86" name="Google Shape;86;p5"/>
+          <p:cNvPr id="85" name="Google Shape;85;p5"/>
           <p:cNvSpPr txBox="1"/>
           <p:nvPr/>
         </p:nvSpPr>
@@ -37899,7 +37840,7 @@
       </p:sp>
       <p:sp>
         <p:nvSpPr>
-          <p:cNvPr id="87" name="Google Shape;87;p5"/>
+          <p:cNvPr id="86" name="Google Shape;86;p5"/>
           <p:cNvSpPr txBox="1"/>
           <p:nvPr/>
         </p:nvSpPr>
@@ -37965,7 +37906,7 @@
       </p:sp>
       <p:sp>
         <p:nvSpPr>
-          <p:cNvPr id="88" name="Google Shape;88;p5"/>
+          <p:cNvPr id="87" name="Google Shape;87;p5"/>
           <p:cNvSpPr txBox="1"/>
           <p:nvPr/>
         </p:nvSpPr>
@@ -38031,7 +37972,7 @@
       </p:sp>
       <p:sp>
         <p:nvSpPr>
-          <p:cNvPr id="89" name="Google Shape;89;p5"/>
+          <p:cNvPr id="88" name="Google Shape;88;p5"/>
           <p:cNvSpPr txBox="1"/>
           <p:nvPr/>
         </p:nvSpPr>
@@ -38097,7 +38038,7 @@
       </p:sp>
       <p:cxnSp>
         <p:nvCxnSpPr>
-          <p:cNvPr id="90" name="Google Shape;90;p5"/>
+          <p:cNvPr id="89" name="Google Shape;89;p5"/>
           <p:cNvCxnSpPr/>
           <p:nvPr/>
         </p:nvCxnSpPr>
@@ -38123,7 +38064,7 @@
       </p:cxnSp>
       <p:sp>
         <p:nvSpPr>
-          <p:cNvPr id="91" name="Google Shape;91;p5"/>
+          <p:cNvPr id="90" name="Google Shape;90;p5"/>
           <p:cNvSpPr txBox="1"/>
           <p:nvPr/>
         </p:nvSpPr>
@@ -38189,7 +38130,7 @@
       </p:sp>
       <p:sp>
         <p:nvSpPr>
-          <p:cNvPr id="92" name="Google Shape;92;p5"/>
+          <p:cNvPr id="91" name="Google Shape;91;p5"/>
           <p:cNvSpPr txBox="1"/>
           <p:nvPr/>
         </p:nvSpPr>
@@ -38255,7 +38196,7 @@
       </p:sp>
       <p:sp>
         <p:nvSpPr>
-          <p:cNvPr id="93" name="Google Shape;93;p5"/>
+          <p:cNvPr id="92" name="Google Shape;92;p5"/>
           <p:cNvSpPr txBox="1"/>
           <p:nvPr/>
         </p:nvSpPr>
@@ -38321,7 +38262,7 @@
       </p:sp>
       <p:sp>
         <p:nvSpPr>
-          <p:cNvPr id="94" name="Google Shape;94;p5"/>
+          <p:cNvPr id="93" name="Google Shape;93;p5"/>
           <p:cNvSpPr txBox="1"/>
           <p:nvPr/>
         </p:nvSpPr>
@@ -38387,7 +38328,7 @@
       </p:sp>
       <p:cxnSp>
         <p:nvCxnSpPr>
-          <p:cNvPr id="95" name="Google Shape;95;p5"/>
+          <p:cNvPr id="94" name="Google Shape;94;p5"/>
           <p:cNvCxnSpPr/>
           <p:nvPr/>
         </p:nvCxnSpPr>
@@ -38413,7 +38354,7 @@
       </p:cxnSp>
       <p:sp>
         <p:nvSpPr>
-          <p:cNvPr id="96" name="Google Shape;96;p5"/>
+          <p:cNvPr id="95" name="Google Shape;95;p5"/>
           <p:cNvSpPr txBox="1"/>
           <p:nvPr/>
         </p:nvSpPr>
@@ -38479,7 +38420,7 @@
       </p:sp>
       <p:sp>
         <p:nvSpPr>
-          <p:cNvPr id="97" name="Google Shape;97;p5"/>
+          <p:cNvPr id="96" name="Google Shape;96;p5"/>
           <p:cNvSpPr txBox="1"/>
           <p:nvPr/>
         </p:nvSpPr>
@@ -38545,7 +38486,7 @@
       </p:sp>
       <p:sp>
         <p:nvSpPr>
-          <p:cNvPr id="98" name="Google Shape;98;p5"/>
+          <p:cNvPr id="97" name="Google Shape;97;p5"/>
           <p:cNvSpPr txBox="1"/>
           <p:nvPr/>
         </p:nvSpPr>
@@ -38611,7 +38552,7 @@
       </p:sp>
       <p:sp>
         <p:nvSpPr>
-          <p:cNvPr id="99" name="Google Shape;99;p5"/>
+          <p:cNvPr id="98" name="Google Shape;98;p5"/>
           <p:cNvSpPr txBox="1"/>
           <p:nvPr/>
         </p:nvSpPr>
@@ -38677,7 +38618,7 @@
       </p:sp>
       <p:cxnSp>
         <p:nvCxnSpPr>
-          <p:cNvPr id="100" name="Google Shape;100;p5"/>
+          <p:cNvPr id="99" name="Google Shape;99;p5"/>
           <p:cNvCxnSpPr/>
           <p:nvPr/>
         </p:nvCxnSpPr>
@@ -38703,7 +38644,7 @@
       </p:cxnSp>
       <p:sp>
         <p:nvSpPr>
-          <p:cNvPr id="101" name="Google Shape;101;p5"/>
+          <p:cNvPr id="100" name="Google Shape;100;p5"/>
           <p:cNvSpPr/>
           <p:nvPr/>
         </p:nvSpPr>
@@ -38762,7 +38703,7 @@
       </p:sp>
       <p:sp>
         <p:nvSpPr>
-          <p:cNvPr id="102" name="Google Shape;102;p5"/>
+          <p:cNvPr id="101" name="Google Shape;101;p5"/>
           <p:cNvSpPr txBox="1"/>
           <p:nvPr/>
         </p:nvSpPr>
@@ -38828,7 +38769,7 @@
       </p:sp>
       <p:sp>
         <p:nvSpPr>
-          <p:cNvPr id="103" name="Google Shape;103;p5"/>
+          <p:cNvPr id="102" name="Google Shape;102;p5"/>
           <p:cNvSpPr txBox="1"/>
           <p:nvPr/>
         </p:nvSpPr>
@@ -38894,7 +38835,7 @@
       </p:sp>
       <p:sp>
         <p:nvSpPr>
-          <p:cNvPr id="104" name="Google Shape;104;p5"/>
+          <p:cNvPr id="103" name="Google Shape;103;p5"/>
           <p:cNvSpPr txBox="1"/>
           <p:nvPr/>
         </p:nvSpPr>
@@ -38960,7 +38901,7 @@
       </p:sp>
       <p:cxnSp>
         <p:nvCxnSpPr>
-          <p:cNvPr id="105" name="Google Shape;105;p5"/>
+          <p:cNvPr id="104" name="Google Shape;104;p5"/>
           <p:cNvCxnSpPr/>
           <p:nvPr/>
         </p:nvCxnSpPr>
@@ -38986,7 +38927,7 @@
       </p:cxnSp>
       <p:sp>
         <p:nvSpPr>
-          <p:cNvPr id="106" name="Google Shape;106;p5"/>
+          <p:cNvPr id="105" name="Google Shape;105;p5"/>
           <p:cNvSpPr txBox="1"/>
           <p:nvPr/>
         </p:nvSpPr>
@@ -39052,7 +38993,7 @@
       </p:sp>
       <p:sp>
         <p:nvSpPr>
-          <p:cNvPr id="107" name="Google Shape;107;p5"/>
+          <p:cNvPr id="106" name="Google Shape;106;p5"/>
           <p:cNvSpPr txBox="1"/>
           <p:nvPr/>
         </p:nvSpPr>
@@ -39118,7 +39059,7 @@
       </p:sp>
       <p:sp>
         <p:nvSpPr>
-          <p:cNvPr id="108" name="Google Shape;108;p5"/>
+          <p:cNvPr id="107" name="Google Shape;107;p5"/>
           <p:cNvSpPr txBox="1"/>
           <p:nvPr/>
         </p:nvSpPr>
@@ -39184,7 +39125,7 @@
       </p:sp>
       <p:sp>
         <p:nvSpPr>
-          <p:cNvPr id="109" name="Google Shape;109;p5"/>
+          <p:cNvPr id="108" name="Google Shape;108;p5"/>
           <p:cNvSpPr txBox="1"/>
           <p:nvPr/>
         </p:nvSpPr>
@@ -39250,7 +39191,7 @@
       </p:sp>
       <p:sp>
         <p:nvSpPr>
-          <p:cNvPr id="110" name="Google Shape;110;p5"/>
+          <p:cNvPr id="109" name="Google Shape;109;p5"/>
           <p:cNvSpPr txBox="1"/>
           <p:nvPr/>
         </p:nvSpPr>
@@ -39316,7 +39257,7 @@
       </p:sp>
       <p:sp>
         <p:nvSpPr>
-          <p:cNvPr id="111" name="Google Shape;111;p5"/>
+          <p:cNvPr id="110" name="Google Shape;110;p5"/>
           <p:cNvSpPr txBox="1"/>
           <p:nvPr/>
         </p:nvSpPr>
@@ -39382,7 +39323,7 @@
       </p:sp>
       <p:cxnSp>
         <p:nvCxnSpPr>
-          <p:cNvPr id="112" name="Google Shape;112;p5"/>
+          <p:cNvPr id="111" name="Google Shape;111;p5"/>
           <p:cNvCxnSpPr/>
           <p:nvPr/>
         </p:nvCxnSpPr>
@@ -39408,7 +39349,7 @@
       </p:cxnSp>
       <p:sp>
         <p:nvSpPr>
-          <p:cNvPr id="113" name="Google Shape;113;p5"/>
+          <p:cNvPr id="112" name="Google Shape;112;p5"/>
           <p:cNvSpPr/>
           <p:nvPr/>
         </p:nvSpPr>
@@ -39467,7 +39408,7 @@
       </p:sp>
       <p:sp>
         <p:nvSpPr>
-          <p:cNvPr id="114" name="Google Shape;114;p5"/>
+          <p:cNvPr id="113" name="Google Shape;113;p5"/>
           <p:cNvSpPr txBox="1"/>
           <p:nvPr/>
         </p:nvSpPr>
@@ -39533,7 +39474,7 @@
       </p:sp>
       <p:sp>
         <p:nvSpPr>
-          <p:cNvPr id="115" name="Google Shape;115;p5"/>
+          <p:cNvPr id="114" name="Google Shape;114;p5"/>
           <p:cNvSpPr txBox="1"/>
           <p:nvPr/>
         </p:nvSpPr>
@@ -39599,7 +39540,7 @@
       </p:sp>
       <p:sp>
         <p:nvSpPr>
-          <p:cNvPr id="116" name="Google Shape;116;p5"/>
+          <p:cNvPr id="115" name="Google Shape;115;p5"/>
           <p:cNvSpPr txBox="1"/>
           <p:nvPr/>
         </p:nvSpPr>
@@ -39665,7 +39606,7 @@
       </p:sp>
       <p:cxnSp>
         <p:nvCxnSpPr>
-          <p:cNvPr id="117" name="Google Shape;117;p5"/>
+          <p:cNvPr id="116" name="Google Shape;116;p5"/>
           <p:cNvCxnSpPr/>
           <p:nvPr/>
         </p:nvCxnSpPr>
@@ -39691,7 +39632,7 @@
       </p:cxnSp>
       <p:sp>
         <p:nvSpPr>
-          <p:cNvPr id="118" name="Google Shape;118;p5"/>
+          <p:cNvPr id="117" name="Google Shape;117;p5"/>
           <p:cNvSpPr txBox="1"/>
           <p:nvPr/>
         </p:nvSpPr>
@@ -39757,7 +39698,7 @@
       </p:sp>
       <p:sp>
         <p:nvSpPr>
-          <p:cNvPr id="119" name="Google Shape;119;p5"/>
+          <p:cNvPr id="118" name="Google Shape;118;p5"/>
           <p:cNvSpPr txBox="1"/>
           <p:nvPr/>
         </p:nvSpPr>
@@ -39823,7 +39764,7 @@
       </p:sp>
       <p:sp>
         <p:nvSpPr>
-          <p:cNvPr id="120" name="Google Shape;120;p5"/>
+          <p:cNvPr id="119" name="Google Shape;119;p5"/>
           <p:cNvSpPr txBox="1"/>
           <p:nvPr/>
         </p:nvSpPr>
@@ -39889,7 +39830,7 @@
       </p:sp>
       <p:sp>
         <p:nvSpPr>
-          <p:cNvPr id="121" name="Google Shape;121;p5"/>
+          <p:cNvPr id="120" name="Google Shape;120;p5"/>
           <p:cNvSpPr/>
           <p:nvPr/>
         </p:nvSpPr>
@@ -39963,7 +39904,7 @@
       </p:sp>
       <p:sp>
         <p:nvSpPr>
-          <p:cNvPr id="122" name="Google Shape;122;p5"/>
+          <p:cNvPr id="121" name="Google Shape;121;p5"/>
           <p:cNvSpPr/>
           <p:nvPr/>
         </p:nvSpPr>
@@ -40022,7 +39963,7 @@
       </p:sp>
       <p:sp>
         <p:nvSpPr>
-          <p:cNvPr id="123" name="Google Shape;123;p5"/>
+          <p:cNvPr id="122" name="Google Shape;122;p5"/>
           <p:cNvSpPr txBox="1"/>
           <p:nvPr/>
         </p:nvSpPr>
@@ -40088,7 +40029,7 @@
       </p:sp>
       <p:sp>
         <p:nvSpPr>
-          <p:cNvPr id="124" name="Google Shape;124;p5"/>
+          <p:cNvPr id="123" name="Google Shape;123;p5"/>
           <p:cNvSpPr txBox="1"/>
           <p:nvPr/>
         </p:nvSpPr>
@@ -40154,7 +40095,7 @@
       </p:sp>
       <p:sp>
         <p:nvSpPr>
-          <p:cNvPr id="125" name="Google Shape;125;p5"/>
+          <p:cNvPr id="124" name="Google Shape;124;p5"/>
           <p:cNvSpPr txBox="1"/>
           <p:nvPr/>
         </p:nvSpPr>
@@ -40220,7 +40161,7 @@
       </p:sp>
       <p:cxnSp>
         <p:nvCxnSpPr>
-          <p:cNvPr id="126" name="Google Shape;126;p5"/>
+          <p:cNvPr id="125" name="Google Shape;125;p5"/>
           <p:cNvCxnSpPr/>
           <p:nvPr/>
         </p:nvCxnSpPr>
@@ -40246,7 +40187,7 @@
       </p:cxnSp>
       <p:sp>
         <p:nvSpPr>
-          <p:cNvPr id="127" name="Google Shape;127;p5"/>
+          <p:cNvPr id="126" name="Google Shape;126;p5"/>
           <p:cNvSpPr txBox="1"/>
           <p:nvPr/>
         </p:nvSpPr>
@@ -40324,7 +40265,7 @@
       </p:sp>
       <p:sp>
         <p:nvSpPr>
-          <p:cNvPr id="128" name="Google Shape;128;p5"/>
+          <p:cNvPr id="127" name="Google Shape;127;p5"/>
           <p:cNvSpPr/>
           <p:nvPr/>
         </p:nvSpPr>
@@ -40401,7 +40342,7 @@
     </p:bg>
     <p:spTree>
       <p:nvGrpSpPr>
-        <p:cNvPr id="133" name="Shape 133"/>
+        <p:cNvPr id="132" name="Shape 132"/>
         <p:cNvGrpSpPr/>
         <p:nvPr/>
       </p:nvGrpSpPr>
@@ -40415,7 +40356,7 @@
       </p:grpSpPr>
       <p:sp>
         <p:nvSpPr>
-          <p:cNvPr id="134" name="Google Shape;134;p6"/>
+          <p:cNvPr id="133" name="Google Shape;133;p6"/>
           <p:cNvSpPr txBox="1"/>
           <p:nvPr/>
         </p:nvSpPr>
@@ -40481,7 +40422,7 @@
       </p:sp>
       <p:sp>
         <p:nvSpPr>
-          <p:cNvPr id="135" name="Google Shape;135;p6"/>
+          <p:cNvPr id="134" name="Google Shape;134;p6"/>
           <p:cNvSpPr/>
           <p:nvPr/>
         </p:nvSpPr>
@@ -40540,7 +40481,7 @@
       </p:sp>
       <p:sp>
         <p:nvSpPr>
-          <p:cNvPr id="136" name="Google Shape;136;p6"/>
+          <p:cNvPr id="135" name="Google Shape;135;p6"/>
           <p:cNvSpPr/>
           <p:nvPr/>
         </p:nvSpPr>
@@ -40601,7 +40542,7 @@
       </p:sp>
       <p:sp>
         <p:nvSpPr>
-          <p:cNvPr id="137" name="Google Shape;137;p6"/>
+          <p:cNvPr id="136" name="Google Shape;136;p6"/>
           <p:cNvSpPr/>
           <p:nvPr/>
         </p:nvSpPr>
@@ -40660,7 +40601,7 @@
       </p:sp>
       <p:sp>
         <p:nvSpPr>
-          <p:cNvPr id="138" name="Google Shape;138;p6"/>
+          <p:cNvPr id="137" name="Google Shape;137;p6"/>
           <p:cNvSpPr txBox="1"/>
           <p:nvPr/>
         </p:nvSpPr>
@@ -40726,7 +40667,7 @@
       </p:sp>
       <p:sp>
         <p:nvSpPr>
-          <p:cNvPr id="139" name="Google Shape;139;p6"/>
+          <p:cNvPr id="138" name="Google Shape;138;p6"/>
           <p:cNvSpPr txBox="1"/>
           <p:nvPr/>
         </p:nvSpPr>
@@ -40792,7 +40733,7 @@
       </p:sp>
       <p:sp>
         <p:nvSpPr>
-          <p:cNvPr id="140" name="Google Shape;140;p6"/>
+          <p:cNvPr id="139" name="Google Shape;139;p6"/>
           <p:cNvSpPr/>
           <p:nvPr/>
         </p:nvSpPr>
@@ -40859,7 +40800,7 @@
       </p:sp>
       <p:sp>
         <p:nvSpPr>
-          <p:cNvPr id="141" name="Google Shape;141;p6"/>
+          <p:cNvPr id="140" name="Google Shape;140;p6"/>
           <p:cNvSpPr txBox="1"/>
           <p:nvPr/>
         </p:nvSpPr>
@@ -40925,7 +40866,7 @@
       </p:sp>
       <p:sp>
         <p:nvSpPr>
-          <p:cNvPr id="142" name="Google Shape;142;p6"/>
+          <p:cNvPr id="141" name="Google Shape;141;p6"/>
           <p:cNvSpPr/>
           <p:nvPr/>
         </p:nvSpPr>
@@ -40992,7 +40933,7 @@
       </p:sp>
       <p:sp>
         <p:nvSpPr>
-          <p:cNvPr id="143" name="Google Shape;143;p6"/>
+          <p:cNvPr id="142" name="Google Shape;142;p6"/>
           <p:cNvSpPr txBox="1"/>
           <p:nvPr/>
         </p:nvSpPr>
@@ -41058,7 +40999,7 @@
       </p:sp>
       <p:sp>
         <p:nvSpPr>
-          <p:cNvPr id="144" name="Google Shape;144;p6"/>
+          <p:cNvPr id="143" name="Google Shape;143;p6"/>
           <p:cNvSpPr/>
           <p:nvPr/>
         </p:nvSpPr>
@@ -41125,7 +41066,7 @@
       </p:sp>
       <p:sp>
         <p:nvSpPr>
-          <p:cNvPr id="145" name="Google Shape;145;p6"/>
+          <p:cNvPr id="144" name="Google Shape;144;p6"/>
           <p:cNvSpPr txBox="1"/>
           <p:nvPr/>
         </p:nvSpPr>
@@ -41191,7 +41132,7 @@
       </p:sp>
       <p:sp>
         <p:nvSpPr>
-          <p:cNvPr id="146" name="Google Shape;146;p6"/>
+          <p:cNvPr id="145" name="Google Shape;145;p6"/>
           <p:cNvSpPr/>
           <p:nvPr/>
         </p:nvSpPr>
@@ -41258,7 +41199,7 @@
       </p:sp>
       <p:sp>
         <p:nvSpPr>
-          <p:cNvPr id="147" name="Google Shape;147;p6"/>
+          <p:cNvPr id="146" name="Google Shape;146;p6"/>
           <p:cNvSpPr txBox="1"/>
           <p:nvPr/>
         </p:nvSpPr>
@@ -41324,7 +41265,7 @@
       </p:sp>
       <p:sp>
         <p:nvSpPr>
-          <p:cNvPr id="148" name="Google Shape;148;p6"/>
+          <p:cNvPr id="147" name="Google Shape;147;p6"/>
           <p:cNvSpPr/>
           <p:nvPr/>
         </p:nvSpPr>
@@ -41391,7 +41332,7 @@
       </p:sp>
       <p:sp>
         <p:nvSpPr>
-          <p:cNvPr id="149" name="Google Shape;149;p6"/>
+          <p:cNvPr id="148" name="Google Shape;148;p6"/>
           <p:cNvSpPr txBox="1"/>
           <p:nvPr/>
         </p:nvSpPr>
@@ -41457,7 +41398,7 @@
       </p:sp>
       <p:sp>
         <p:nvSpPr>
-          <p:cNvPr id="150" name="Google Shape;150;p6"/>
+          <p:cNvPr id="149" name="Google Shape;149;p6"/>
           <p:cNvSpPr/>
           <p:nvPr/>
         </p:nvSpPr>
@@ -41524,7 +41465,7 @@
       </p:sp>
       <p:sp>
         <p:nvSpPr>
-          <p:cNvPr id="151" name="Google Shape;151;p6"/>
+          <p:cNvPr id="150" name="Google Shape;150;p6"/>
           <p:cNvSpPr txBox="1"/>
           <p:nvPr/>
         </p:nvSpPr>
@@ -41590,7 +41531,7 @@
       </p:sp>
       <p:graphicFrame>
         <p:nvGraphicFramePr>
-          <p:cNvPr id="152" name="Google Shape;152;p6"/>
+          <p:cNvPr id="151" name="Google Shape;151;p6"/>
           <p:cNvGraphicFramePr/>
           <p:nvPr/>
         </p:nvGraphicFramePr>
@@ -41603,7 +41544,7 @@
             <a:tbl>
               <a:tblPr>
                 <a:noFill/>
-                <a:tableStyleId>{2663F03A-32B3-4559-8D9F-3A11EFFF4BFD}</a:tableStyleId>
+                <a:tableStyleId>{164A1B23-7A83-474B-B4BF-E042B0863BCF}</a:tableStyleId>
               </a:tblPr>
               <a:tblGrid>
                 <a:gridCol w="4000500"/>
@@ -42465,7 +42406,7 @@
       </p:graphicFrame>
       <p:sp>
         <p:nvSpPr>
-          <p:cNvPr id="153" name="Google Shape;153;p6"/>
+          <p:cNvPr id="152" name="Google Shape;152;p6"/>
           <p:cNvSpPr txBox="1"/>
           <p:nvPr/>
         </p:nvSpPr>
@@ -42531,7 +42472,7 @@
       </p:sp>
       <p:cxnSp>
         <p:nvCxnSpPr>
-          <p:cNvPr id="154" name="Google Shape;154;p6"/>
+          <p:cNvPr id="153" name="Google Shape;153;p6"/>
           <p:cNvCxnSpPr/>
           <p:nvPr/>
         </p:nvCxnSpPr>
@@ -42557,7 +42498,7 @@
       </p:cxnSp>
       <p:sp>
         <p:nvSpPr>
-          <p:cNvPr id="155" name="Google Shape;155;p6"/>
+          <p:cNvPr id="154" name="Google Shape;154;p6"/>
           <p:cNvSpPr txBox="1"/>
           <p:nvPr/>
         </p:nvSpPr>
@@ -42635,7 +42576,7 @@
       </p:sp>
       <p:sp>
         <p:nvSpPr>
-          <p:cNvPr id="156" name="Google Shape;156;p6"/>
+          <p:cNvPr id="155" name="Google Shape;155;p6"/>
           <p:cNvSpPr/>
           <p:nvPr/>
         </p:nvSpPr>
@@ -42712,7 +42653,7 @@
     </p:bg>
     <p:spTree>
       <p:nvGrpSpPr>
-        <p:cNvPr id="161" name="Shape 161"/>
+        <p:cNvPr id="160" name="Shape 160"/>
         <p:cNvGrpSpPr/>
         <p:nvPr/>
       </p:nvGrpSpPr>
@@ -42726,7 +42667,7 @@
       </p:grpSpPr>
       <p:sp>
         <p:nvSpPr>
-          <p:cNvPr id="162" name="Google Shape;162;p7"/>
+          <p:cNvPr id="161" name="Google Shape;161;p7"/>
           <p:cNvSpPr txBox="1"/>
           <p:nvPr/>
         </p:nvSpPr>
@@ -42792,7 +42733,7 @@
       </p:sp>
       <p:sp>
         <p:nvSpPr>
-          <p:cNvPr id="163" name="Google Shape;163;p7"/>
+          <p:cNvPr id="162" name="Google Shape;162;p7"/>
           <p:cNvSpPr/>
           <p:nvPr/>
         </p:nvSpPr>
@@ -42851,7 +42792,7 @@
       </p:sp>
       <p:sp>
         <p:nvSpPr>
-          <p:cNvPr id="164" name="Google Shape;164;p7"/>
+          <p:cNvPr id="163" name="Google Shape;163;p7"/>
           <p:cNvSpPr txBox="1"/>
           <p:nvPr/>
         </p:nvSpPr>
@@ -42917,7 +42858,7 @@
       </p:sp>
       <p:sp>
         <p:nvSpPr>
-          <p:cNvPr id="165" name="Google Shape;165;p7"/>
+          <p:cNvPr id="164" name="Google Shape;164;p7"/>
           <p:cNvSpPr txBox="1"/>
           <p:nvPr/>
         </p:nvSpPr>
@@ -42983,7 +42924,7 @@
       </p:sp>
       <p:sp>
         <p:nvSpPr>
-          <p:cNvPr id="166" name="Google Shape;166;p7"/>
+          <p:cNvPr id="165" name="Google Shape;165;p7"/>
           <p:cNvSpPr/>
           <p:nvPr/>
         </p:nvSpPr>
@@ -43042,7 +42983,7 @@
       </p:sp>
       <p:sp>
         <p:nvSpPr>
-          <p:cNvPr id="167" name="Google Shape;167;p7"/>
+          <p:cNvPr id="166" name="Google Shape;166;p7"/>
           <p:cNvSpPr/>
           <p:nvPr/>
         </p:nvSpPr>
@@ -43101,7 +43042,7 @@
       </p:sp>
       <p:sp>
         <p:nvSpPr>
-          <p:cNvPr id="168" name="Google Shape;168;p7"/>
+          <p:cNvPr id="167" name="Google Shape;167;p7"/>
           <p:cNvSpPr txBox="1"/>
           <p:nvPr/>
         </p:nvSpPr>
@@ -43167,7 +43108,7 @@
       </p:sp>
       <p:sp>
         <p:nvSpPr>
-          <p:cNvPr id="169" name="Google Shape;169;p7"/>
+          <p:cNvPr id="168" name="Google Shape;168;p7"/>
           <p:cNvSpPr txBox="1"/>
           <p:nvPr/>
         </p:nvSpPr>
@@ -43245,7 +43186,7 @@
       </p:sp>
       <p:sp>
         <p:nvSpPr>
-          <p:cNvPr id="170" name="Google Shape;170;p7"/>
+          <p:cNvPr id="169" name="Google Shape;169;p7"/>
           <p:cNvSpPr txBox="1"/>
           <p:nvPr/>
         </p:nvSpPr>
@@ -43323,7 +43264,7 @@
       </p:sp>
       <p:sp>
         <p:nvSpPr>
-          <p:cNvPr id="171" name="Google Shape;171;p7"/>
+          <p:cNvPr id="170" name="Google Shape;170;p7"/>
           <p:cNvSpPr txBox="1"/>
           <p:nvPr/>
         </p:nvSpPr>
@@ -43389,7 +43330,7 @@
       </p:sp>
       <p:cxnSp>
         <p:nvCxnSpPr>
-          <p:cNvPr id="172" name="Google Shape;172;p7"/>
+          <p:cNvPr id="171" name="Google Shape;171;p7"/>
           <p:cNvCxnSpPr/>
           <p:nvPr/>
         </p:nvCxnSpPr>
@@ -43415,7 +43356,7 @@
       </p:cxnSp>
       <p:cxnSp>
         <p:nvCxnSpPr>
-          <p:cNvPr id="173" name="Google Shape;173;p7"/>
+          <p:cNvPr id="172" name="Google Shape;172;p7"/>
           <p:cNvCxnSpPr/>
           <p:nvPr/>
         </p:nvCxnSpPr>
@@ -43441,7 +43382,7 @@
       </p:cxnSp>
       <p:sp>
         <p:nvSpPr>
-          <p:cNvPr id="174" name="Google Shape;174;p7"/>
+          <p:cNvPr id="173" name="Google Shape;173;p7"/>
           <p:cNvSpPr txBox="1"/>
           <p:nvPr/>
         </p:nvSpPr>
@@ -43507,7 +43448,7 @@
       </p:sp>
       <p:sp>
         <p:nvSpPr>
-          <p:cNvPr id="175" name="Google Shape;175;p7"/>
+          <p:cNvPr id="174" name="Google Shape;174;p7"/>
           <p:cNvSpPr txBox="1"/>
           <p:nvPr/>
         </p:nvSpPr>
@@ -43573,7 +43514,7 @@
       </p:sp>
       <p:sp>
         <p:nvSpPr>
-          <p:cNvPr id="176" name="Google Shape;176;p7"/>
+          <p:cNvPr id="175" name="Google Shape;175;p7"/>
           <p:cNvSpPr/>
           <p:nvPr/>
         </p:nvSpPr>
@@ -43632,7 +43573,7 @@
       </p:sp>
       <p:sp>
         <p:nvSpPr>
-          <p:cNvPr id="177" name="Google Shape;177;p7"/>
+          <p:cNvPr id="176" name="Google Shape;176;p7"/>
           <p:cNvSpPr txBox="1"/>
           <p:nvPr/>
         </p:nvSpPr>
@@ -43698,7 +43639,7 @@
       </p:sp>
       <p:sp>
         <p:nvSpPr>
-          <p:cNvPr id="178" name="Google Shape;178;p7"/>
+          <p:cNvPr id="177" name="Google Shape;177;p7"/>
           <p:cNvSpPr txBox="1"/>
           <p:nvPr/>
         </p:nvSpPr>
@@ -43764,7 +43705,7 @@
       </p:sp>
       <p:sp>
         <p:nvSpPr>
-          <p:cNvPr id="179" name="Google Shape;179;p7"/>
+          <p:cNvPr id="178" name="Google Shape;178;p7"/>
           <p:cNvSpPr/>
           <p:nvPr/>
         </p:nvSpPr>
@@ -43823,7 +43764,7 @@
       </p:sp>
       <p:sp>
         <p:nvSpPr>
-          <p:cNvPr id="180" name="Google Shape;180;p7"/>
+          <p:cNvPr id="179" name="Google Shape;179;p7"/>
           <p:cNvSpPr txBox="1"/>
           <p:nvPr/>
         </p:nvSpPr>
@@ -43889,7 +43830,7 @@
       </p:sp>
       <p:sp>
         <p:nvSpPr>
-          <p:cNvPr id="181" name="Google Shape;181;p7"/>
+          <p:cNvPr id="180" name="Google Shape;180;p7"/>
           <p:cNvSpPr txBox="1"/>
           <p:nvPr/>
         </p:nvSpPr>
@@ -43955,7 +43896,7 @@
       </p:sp>
       <p:sp>
         <p:nvSpPr>
-          <p:cNvPr id="182" name="Google Shape;182;p7"/>
+          <p:cNvPr id="181" name="Google Shape;181;p7"/>
           <p:cNvSpPr/>
           <p:nvPr/>
         </p:nvSpPr>
@@ -44014,7 +43955,7 @@
       </p:sp>
       <p:sp>
         <p:nvSpPr>
-          <p:cNvPr id="183" name="Google Shape;183;p7"/>
+          <p:cNvPr id="182" name="Google Shape;182;p7"/>
           <p:cNvSpPr txBox="1"/>
           <p:nvPr/>
         </p:nvSpPr>
@@ -44080,7 +44021,7 @@
       </p:sp>
       <p:sp>
         <p:nvSpPr>
-          <p:cNvPr id="184" name="Google Shape;184;p7"/>
+          <p:cNvPr id="183" name="Google Shape;183;p7"/>
           <p:cNvSpPr txBox="1"/>
           <p:nvPr/>
         </p:nvSpPr>
@@ -44146,7 +44087,7 @@
       </p:sp>
       <p:sp>
         <p:nvSpPr>
-          <p:cNvPr id="185" name="Google Shape;185;p7"/>
+          <p:cNvPr id="184" name="Google Shape;184;p7"/>
           <p:cNvSpPr/>
           <p:nvPr/>
         </p:nvSpPr>
@@ -44205,7 +44146,7 @@
       </p:sp>
       <p:sp>
         <p:nvSpPr>
-          <p:cNvPr id="186" name="Google Shape;186;p7"/>
+          <p:cNvPr id="185" name="Google Shape;185;p7"/>
           <p:cNvSpPr txBox="1"/>
           <p:nvPr/>
         </p:nvSpPr>
@@ -44271,7 +44212,7 @@
       </p:sp>
       <p:sp>
         <p:nvSpPr>
-          <p:cNvPr id="187" name="Google Shape;187;p7"/>
+          <p:cNvPr id="186" name="Google Shape;186;p7"/>
           <p:cNvSpPr txBox="1"/>
           <p:nvPr/>
         </p:nvSpPr>
@@ -44337,7 +44278,7 @@
       </p:sp>
       <p:sp>
         <p:nvSpPr>
-          <p:cNvPr id="188" name="Google Shape;188;p7"/>
+          <p:cNvPr id="187" name="Google Shape;187;p7"/>
           <p:cNvSpPr/>
           <p:nvPr/>
         </p:nvSpPr>
@@ -44396,7 +44337,7 @@
       </p:sp>
       <p:sp>
         <p:nvSpPr>
-          <p:cNvPr id="189" name="Google Shape;189;p7"/>
+          <p:cNvPr id="188" name="Google Shape;188;p7"/>
           <p:cNvSpPr txBox="1"/>
           <p:nvPr/>
         </p:nvSpPr>
@@ -44462,7 +44403,7 @@
       </p:sp>
       <p:sp>
         <p:nvSpPr>
-          <p:cNvPr id="190" name="Google Shape;190;p7"/>
+          <p:cNvPr id="189" name="Google Shape;189;p7"/>
           <p:cNvSpPr txBox="1"/>
           <p:nvPr/>
         </p:nvSpPr>
@@ -44528,7 +44469,7 @@
       </p:sp>
       <p:sp>
         <p:nvSpPr>
-          <p:cNvPr id="191" name="Google Shape;191;p7"/>
+          <p:cNvPr id="190" name="Google Shape;190;p7"/>
           <p:cNvSpPr/>
           <p:nvPr/>
         </p:nvSpPr>
@@ -44587,7 +44528,7 @@
       </p:sp>
       <p:sp>
         <p:nvSpPr>
-          <p:cNvPr id="192" name="Google Shape;192;p7"/>
+          <p:cNvPr id="191" name="Google Shape;191;p7"/>
           <p:cNvSpPr txBox="1"/>
           <p:nvPr/>
         </p:nvSpPr>
@@ -44653,7 +44594,7 @@
       </p:sp>
       <p:sp>
         <p:nvSpPr>
-          <p:cNvPr id="193" name="Google Shape;193;p7"/>
+          <p:cNvPr id="192" name="Google Shape;192;p7"/>
           <p:cNvSpPr txBox="1"/>
           <p:nvPr/>
         </p:nvSpPr>
@@ -44719,7 +44660,7 @@
       </p:sp>
       <p:cxnSp>
         <p:nvCxnSpPr>
-          <p:cNvPr id="194" name="Google Shape;194;p7"/>
+          <p:cNvPr id="193" name="Google Shape;193;p7"/>
           <p:cNvCxnSpPr/>
           <p:nvPr/>
         </p:nvCxnSpPr>
@@ -44745,7 +44686,7 @@
       </p:cxnSp>
       <p:sp>
         <p:nvSpPr>
-          <p:cNvPr id="195" name="Google Shape;195;p7"/>
+          <p:cNvPr id="194" name="Google Shape;194;p7"/>
           <p:cNvSpPr txBox="1"/>
           <p:nvPr/>
         </p:nvSpPr>
@@ -44823,7 +44764,7 @@
       </p:sp>
       <p:sp>
         <p:nvSpPr>
-          <p:cNvPr id="196" name="Google Shape;196;p7"/>
+          <p:cNvPr id="195" name="Google Shape;195;p7"/>
           <p:cNvSpPr/>
           <p:nvPr/>
         </p:nvSpPr>
@@ -44900,7 +44841,7 @@
     </p:bg>
     <p:spTree>
       <p:nvGrpSpPr>
-        <p:cNvPr id="201" name="Shape 201"/>
+        <p:cNvPr id="200" name="Shape 200"/>
         <p:cNvGrpSpPr/>
         <p:nvPr/>
       </p:nvGrpSpPr>
@@ -44914,7 +44855,7 @@
       </p:grpSpPr>
       <p:sp>
         <p:nvSpPr>
-          <p:cNvPr id="202" name="Google Shape;202;p8"/>
+          <p:cNvPr id="201" name="Google Shape;201;p8"/>
           <p:cNvSpPr txBox="1"/>
           <p:nvPr/>
         </p:nvSpPr>
@@ -44980,7 +44921,7 @@
       </p:sp>
       <p:sp>
         <p:nvSpPr>
-          <p:cNvPr id="203" name="Google Shape;203;p8"/>
+          <p:cNvPr id="202" name="Google Shape;202;p8"/>
           <p:cNvSpPr/>
           <p:nvPr/>
         </p:nvSpPr>
@@ -45039,7 +44980,7 @@
       </p:sp>
       <p:sp>
         <p:nvSpPr>
-          <p:cNvPr id="204" name="Google Shape;204;p8"/>
+          <p:cNvPr id="203" name="Google Shape;203;p8"/>
           <p:cNvSpPr/>
           <p:nvPr/>
         </p:nvSpPr>
@@ -45098,7 +45039,7 @@
       </p:sp>
       <p:sp>
         <p:nvSpPr>
-          <p:cNvPr id="205" name="Google Shape;205;p8"/>
+          <p:cNvPr id="204" name="Google Shape;204;p8"/>
           <p:cNvSpPr txBox="1"/>
           <p:nvPr/>
         </p:nvSpPr>
@@ -45164,7 +45105,7 @@
       </p:sp>
       <p:sp>
         <p:nvSpPr>
-          <p:cNvPr id="206" name="Google Shape;206;p8"/>
+          <p:cNvPr id="205" name="Google Shape;205;p8"/>
           <p:cNvSpPr/>
           <p:nvPr/>
         </p:nvSpPr>
@@ -45223,7 +45164,7 @@
       </p:sp>
       <p:sp>
         <p:nvSpPr>
-          <p:cNvPr id="207" name="Google Shape;207;p8"/>
+          <p:cNvPr id="206" name="Google Shape;206;p8"/>
           <p:cNvSpPr txBox="1"/>
           <p:nvPr/>
         </p:nvSpPr>
@@ -45289,7 +45230,7 @@
       </p:sp>
       <p:sp>
         <p:nvSpPr>
-          <p:cNvPr id="208" name="Google Shape;208;p8"/>
+          <p:cNvPr id="207" name="Google Shape;207;p8"/>
           <p:cNvSpPr txBox="1"/>
           <p:nvPr/>
         </p:nvSpPr>
@@ -45355,7 +45296,7 @@
       </p:sp>
       <p:sp>
         <p:nvSpPr>
-          <p:cNvPr id="209" name="Google Shape;209;p8"/>
+          <p:cNvPr id="208" name="Google Shape;208;p8"/>
           <p:cNvSpPr txBox="1"/>
           <p:nvPr/>
         </p:nvSpPr>
@@ -45421,7 +45362,7 @@
       </p:sp>
       <p:sp>
         <p:nvSpPr>
-          <p:cNvPr id="210" name="Google Shape;210;p8"/>
+          <p:cNvPr id="209" name="Google Shape;209;p8"/>
           <p:cNvSpPr txBox="1"/>
           <p:nvPr/>
         </p:nvSpPr>
@@ -45487,7 +45428,7 @@
       </p:sp>
       <p:sp>
         <p:nvSpPr>
-          <p:cNvPr id="211" name="Google Shape;211;p8"/>
+          <p:cNvPr id="210" name="Google Shape;210;p8"/>
           <p:cNvSpPr txBox="1"/>
           <p:nvPr/>
         </p:nvSpPr>
@@ -45553,7 +45494,7 @@
       </p:sp>
       <p:sp>
         <p:nvSpPr>
-          <p:cNvPr id="212" name="Google Shape;212;p8"/>
+          <p:cNvPr id="211" name="Google Shape;211;p8"/>
           <p:cNvSpPr/>
           <p:nvPr/>
         </p:nvSpPr>
@@ -45612,7 +45553,7 @@
       </p:sp>
       <p:sp>
         <p:nvSpPr>
-          <p:cNvPr id="213" name="Google Shape;213;p8"/>
+          <p:cNvPr id="212" name="Google Shape;212;p8"/>
           <p:cNvSpPr/>
           <p:nvPr/>
         </p:nvSpPr>
@@ -45671,7 +45612,7 @@
       </p:sp>
       <p:sp>
         <p:nvSpPr>
-          <p:cNvPr id="214" name="Google Shape;214;p8"/>
+          <p:cNvPr id="213" name="Google Shape;213;p8"/>
           <p:cNvSpPr/>
           <p:nvPr/>
         </p:nvSpPr>
@@ -45730,7 +45671,7 @@
       </p:sp>
       <p:sp>
         <p:nvSpPr>
-          <p:cNvPr id="215" name="Google Shape;215;p8"/>
+          <p:cNvPr id="214" name="Google Shape;214;p8"/>
           <p:cNvSpPr/>
           <p:nvPr/>
         </p:nvSpPr>
@@ -45789,7 +45730,7 @@
       </p:sp>
       <p:sp>
         <p:nvSpPr>
-          <p:cNvPr id="216" name="Google Shape;216;p8"/>
+          <p:cNvPr id="215" name="Google Shape;215;p8"/>
           <p:cNvSpPr/>
           <p:nvPr/>
         </p:nvSpPr>
@@ -45848,7 +45789,7 @@
       </p:sp>
       <p:cxnSp>
         <p:nvCxnSpPr>
-          <p:cNvPr id="217" name="Google Shape;217;p8"/>
+          <p:cNvPr id="216" name="Google Shape;216;p8"/>
           <p:cNvCxnSpPr/>
           <p:nvPr/>
         </p:nvCxnSpPr>
@@ -45874,7 +45815,7 @@
       </p:cxnSp>
       <p:cxnSp>
         <p:nvCxnSpPr>
-          <p:cNvPr id="218" name="Google Shape;218;p8"/>
+          <p:cNvPr id="217" name="Google Shape;217;p8"/>
           <p:cNvCxnSpPr/>
           <p:nvPr/>
         </p:nvCxnSpPr>
@@ -45900,7 +45841,7 @@
       </p:cxnSp>
       <p:cxnSp>
         <p:nvCxnSpPr>
-          <p:cNvPr id="219" name="Google Shape;219;p8"/>
+          <p:cNvPr id="218" name="Google Shape;218;p8"/>
           <p:cNvCxnSpPr/>
           <p:nvPr/>
         </p:nvCxnSpPr>
@@ -45926,7 +45867,7 @@
       </p:cxnSp>
       <p:sp>
         <p:nvSpPr>
-          <p:cNvPr id="220" name="Google Shape;220;p8"/>
+          <p:cNvPr id="219" name="Google Shape;219;p8"/>
           <p:cNvSpPr txBox="1"/>
           <p:nvPr/>
         </p:nvSpPr>
@@ -45992,7 +45933,7 @@
       </p:sp>
       <p:sp>
         <p:nvSpPr>
-          <p:cNvPr id="221" name="Google Shape;221;p8"/>
+          <p:cNvPr id="220" name="Google Shape;220;p8"/>
           <p:cNvSpPr txBox="1"/>
           <p:nvPr/>
         </p:nvSpPr>
@@ -46058,7 +45999,7 @@
       </p:sp>
       <p:sp>
         <p:nvSpPr>
-          <p:cNvPr id="222" name="Google Shape;222;p8"/>
+          <p:cNvPr id="221" name="Google Shape;221;p8"/>
           <p:cNvSpPr txBox="1"/>
           <p:nvPr/>
         </p:nvSpPr>
@@ -46124,7 +46065,7 @@
       </p:sp>
       <p:sp>
         <p:nvSpPr>
-          <p:cNvPr id="223" name="Google Shape;223;p8"/>
+          <p:cNvPr id="222" name="Google Shape;222;p8"/>
           <p:cNvSpPr txBox="1"/>
           <p:nvPr/>
         </p:nvSpPr>
@@ -46190,7 +46131,7 @@
       </p:sp>
       <p:sp>
         <p:nvSpPr>
-          <p:cNvPr id="224" name="Google Shape;224;p8"/>
+          <p:cNvPr id="223" name="Google Shape;223;p8"/>
           <p:cNvSpPr/>
           <p:nvPr/>
         </p:nvSpPr>
@@ -46251,7 +46192,7 @@
       </p:sp>
       <p:sp>
         <p:nvSpPr>
-          <p:cNvPr id="225" name="Google Shape;225;p8"/>
+          <p:cNvPr id="224" name="Google Shape;224;p8"/>
           <p:cNvSpPr txBox="1"/>
           <p:nvPr/>
         </p:nvSpPr>
@@ -46317,7 +46258,7 @@
       </p:sp>
       <p:sp>
         <p:nvSpPr>
-          <p:cNvPr id="226" name="Google Shape;226;p8"/>
+          <p:cNvPr id="225" name="Google Shape;225;p8"/>
           <p:cNvSpPr txBox="1"/>
           <p:nvPr/>
         </p:nvSpPr>
@@ -46383,7 +46324,7 @@
       </p:sp>
       <p:sp>
         <p:nvSpPr>
-          <p:cNvPr id="227" name="Google Shape;227;p8"/>
+          <p:cNvPr id="226" name="Google Shape;226;p8"/>
           <p:cNvSpPr txBox="1"/>
           <p:nvPr/>
         </p:nvSpPr>
@@ -46489,7 +46430,7 @@
       </p:sp>
       <p:sp>
         <p:nvSpPr>
-          <p:cNvPr id="228" name="Google Shape;228;p8"/>
+          <p:cNvPr id="227" name="Google Shape;227;p8"/>
           <p:cNvSpPr txBox="1"/>
           <p:nvPr/>
         </p:nvSpPr>
@@ -46595,7 +46536,7 @@
       </p:sp>
       <p:sp>
         <p:nvSpPr>
-          <p:cNvPr id="229" name="Google Shape;229;p8"/>
+          <p:cNvPr id="228" name="Google Shape;228;p8"/>
           <p:cNvSpPr txBox="1"/>
           <p:nvPr/>
         </p:nvSpPr>
@@ -46701,7 +46642,7 @@
       </p:sp>
       <p:sp>
         <p:nvSpPr>
-          <p:cNvPr id="230" name="Google Shape;230;p8"/>
+          <p:cNvPr id="229" name="Google Shape;229;p8"/>
           <p:cNvSpPr txBox="1"/>
           <p:nvPr/>
         </p:nvSpPr>
@@ -46767,7 +46708,7 @@
       </p:sp>
       <p:sp>
         <p:nvSpPr>
-          <p:cNvPr id="231" name="Google Shape;231;p8"/>
+          <p:cNvPr id="230" name="Google Shape;230;p8"/>
           <p:cNvSpPr txBox="1"/>
           <p:nvPr/>
         </p:nvSpPr>
@@ -46833,7 +46774,7 @@
       </p:sp>
       <p:sp>
         <p:nvSpPr>
-          <p:cNvPr id="232" name="Google Shape;232;p8"/>
+          <p:cNvPr id="231" name="Google Shape;231;p8"/>
           <p:cNvSpPr txBox="1"/>
           <p:nvPr/>
         </p:nvSpPr>
@@ -46899,7 +46840,7 @@
       </p:sp>
       <p:sp>
         <p:nvSpPr>
-          <p:cNvPr id="233" name="Google Shape;233;p8"/>
+          <p:cNvPr id="232" name="Google Shape;232;p8"/>
           <p:cNvSpPr/>
           <p:nvPr/>
         </p:nvSpPr>
@@ -46958,7 +46899,7 @@
       </p:sp>
       <p:sp>
         <p:nvSpPr>
-          <p:cNvPr id="234" name="Google Shape;234;p8"/>
+          <p:cNvPr id="233" name="Google Shape;233;p8"/>
           <p:cNvSpPr/>
           <p:nvPr/>
         </p:nvSpPr>
@@ -47017,7 +46958,7 @@
       </p:sp>
       <p:sp>
         <p:nvSpPr>
-          <p:cNvPr id="235" name="Google Shape;235;p8"/>
+          <p:cNvPr id="234" name="Google Shape;234;p8"/>
           <p:cNvSpPr txBox="1"/>
           <p:nvPr/>
         </p:nvSpPr>
@@ -47083,7 +47024,7 @@
       </p:sp>
       <p:sp>
         <p:nvSpPr>
-          <p:cNvPr id="236" name="Google Shape;236;p8"/>
+          <p:cNvPr id="235" name="Google Shape;235;p8"/>
           <p:cNvSpPr txBox="1"/>
           <p:nvPr/>
         </p:nvSpPr>
@@ -47149,7 +47090,7 @@
       </p:sp>
       <p:sp>
         <p:nvSpPr>
-          <p:cNvPr id="237" name="Google Shape;237;p8"/>
+          <p:cNvPr id="236" name="Google Shape;236;p8"/>
           <p:cNvSpPr txBox="1"/>
           <p:nvPr/>
         </p:nvSpPr>
@@ -47215,7 +47156,7 @@
       </p:sp>
       <p:sp>
         <p:nvSpPr>
-          <p:cNvPr id="238" name="Google Shape;238;p8"/>
+          <p:cNvPr id="237" name="Google Shape;237;p8"/>
           <p:cNvSpPr txBox="1"/>
           <p:nvPr/>
         </p:nvSpPr>
@@ -47281,7 +47222,7 @@
       </p:sp>
       <p:sp>
         <p:nvSpPr>
-          <p:cNvPr id="239" name="Google Shape;239;p8"/>
+          <p:cNvPr id="238" name="Google Shape;238;p8"/>
           <p:cNvSpPr txBox="1"/>
           <p:nvPr/>
         </p:nvSpPr>
@@ -47347,7 +47288,7 @@
       </p:sp>
       <p:sp>
         <p:nvSpPr>
-          <p:cNvPr id="240" name="Google Shape;240;p8"/>
+          <p:cNvPr id="239" name="Google Shape;239;p8"/>
           <p:cNvSpPr/>
           <p:nvPr/>
         </p:nvSpPr>
@@ -47406,7 +47347,7 @@
       </p:sp>
       <p:sp>
         <p:nvSpPr>
-          <p:cNvPr id="241" name="Google Shape;241;p8"/>
+          <p:cNvPr id="240" name="Google Shape;240;p8"/>
           <p:cNvSpPr txBox="1"/>
           <p:nvPr/>
         </p:nvSpPr>
@@ -47484,7 +47425,7 @@
       </p:sp>
       <p:sp>
         <p:nvSpPr>
-          <p:cNvPr id="242" name="Google Shape;242;p8"/>
+          <p:cNvPr id="241" name="Google Shape;241;p8"/>
           <p:cNvSpPr/>
           <p:nvPr/>
         </p:nvSpPr>
@@ -47561,7 +47502,7 @@
     </p:bg>
     <p:spTree>
       <p:nvGrpSpPr>
-        <p:cNvPr id="247" name="Shape 247"/>
+        <p:cNvPr id="246" name="Shape 246"/>
         <p:cNvGrpSpPr/>
         <p:nvPr/>
       </p:nvGrpSpPr>
@@ -47575,7 +47516,7 @@
       </p:grpSpPr>
       <p:sp>
         <p:nvSpPr>
-          <p:cNvPr id="248" name="Google Shape;248;p9"/>
+          <p:cNvPr id="247" name="Google Shape;247;p9"/>
           <p:cNvSpPr txBox="1"/>
           <p:nvPr/>
         </p:nvSpPr>
@@ -47641,7 +47582,7 @@
       </p:sp>
       <p:sp>
         <p:nvSpPr>
-          <p:cNvPr id="249" name="Google Shape;249;p9"/>
+          <p:cNvPr id="248" name="Google Shape;248;p9"/>
           <p:cNvSpPr/>
           <p:nvPr/>
         </p:nvSpPr>
@@ -47700,7 +47641,7 @@
       </p:sp>
       <p:sp>
         <p:nvSpPr>
-          <p:cNvPr id="250" name="Google Shape;250;p9"/>
+          <p:cNvPr id="249" name="Google Shape;249;p9"/>
           <p:cNvSpPr/>
           <p:nvPr/>
         </p:nvSpPr>
@@ -47774,7 +47715,7 @@
       </p:sp>
       <p:sp>
         <p:nvSpPr>
-          <p:cNvPr id="251" name="Google Shape;251;p9"/>
+          <p:cNvPr id="250" name="Google Shape;250;p9"/>
           <p:cNvSpPr/>
           <p:nvPr/>
         </p:nvSpPr>
@@ -47833,7 +47774,7 @@
       </p:sp>
       <p:sp>
         <p:nvSpPr>
-          <p:cNvPr id="252" name="Google Shape;252;p9"/>
+          <p:cNvPr id="251" name="Google Shape;251;p9"/>
           <p:cNvSpPr txBox="1"/>
           <p:nvPr/>
         </p:nvSpPr>
@@ -47899,7 +47840,7 @@
       </p:sp>
       <p:sp>
         <p:nvSpPr>
-          <p:cNvPr id="253" name="Google Shape;253;p9"/>
+          <p:cNvPr id="252" name="Google Shape;252;p9"/>
           <p:cNvSpPr/>
           <p:nvPr/>
         </p:nvSpPr>
@@ -47969,7 +47910,7 @@
       </p:sp>
       <p:sp>
         <p:nvSpPr>
-          <p:cNvPr id="254" name="Google Shape;254;p9"/>
+          <p:cNvPr id="253" name="Google Shape;253;p9"/>
           <p:cNvSpPr/>
           <p:nvPr/>
         </p:nvSpPr>
@@ -48039,7 +47980,7 @@
       </p:sp>
       <p:sp>
         <p:nvSpPr>
-          <p:cNvPr id="255" name="Google Shape;255;p9"/>
+          <p:cNvPr id="254" name="Google Shape;254;p9"/>
           <p:cNvSpPr/>
           <p:nvPr/>
         </p:nvSpPr>
@@ -48109,7 +48050,7 @@
       </p:sp>
       <p:sp>
         <p:nvSpPr>
-          <p:cNvPr id="256" name="Google Shape;256;p9"/>
+          <p:cNvPr id="255" name="Google Shape;255;p9"/>
           <p:cNvSpPr/>
           <p:nvPr/>
         </p:nvSpPr>
@@ -48179,7 +48120,7 @@
       </p:sp>
       <p:cxnSp>
         <p:nvCxnSpPr>
-          <p:cNvPr id="257" name="Google Shape;257;p9"/>
+          <p:cNvPr id="256" name="Google Shape;256;p9"/>
           <p:cNvCxnSpPr/>
           <p:nvPr/>
         </p:nvCxnSpPr>
@@ -48205,7 +48146,7 @@
       </p:cxnSp>
       <p:sp>
         <p:nvSpPr>
-          <p:cNvPr id="258" name="Google Shape;258;p9"/>
+          <p:cNvPr id="257" name="Google Shape;257;p9"/>
           <p:cNvSpPr txBox="1"/>
           <p:nvPr/>
         </p:nvSpPr>
@@ -48283,7 +48224,7 @@
       </p:sp>
       <p:sp>
         <p:nvSpPr>
-          <p:cNvPr id="259" name="Google Shape;259;p9"/>
+          <p:cNvPr id="258" name="Google Shape;258;p9"/>
           <p:cNvSpPr txBox="1"/>
           <p:nvPr/>
         </p:nvSpPr>
@@ -48361,7 +48302,7 @@
       </p:sp>
       <p:sp>
         <p:nvSpPr>
-          <p:cNvPr id="260" name="Google Shape;260;p9"/>
+          <p:cNvPr id="259" name="Google Shape;259;p9"/>
           <p:cNvSpPr txBox="1"/>
           <p:nvPr/>
         </p:nvSpPr>
@@ -48439,7 +48380,7 @@
       </p:sp>
       <p:sp>
         <p:nvSpPr>
-          <p:cNvPr id="261" name="Google Shape;261;p9"/>
+          <p:cNvPr id="260" name="Google Shape;260;p9"/>
           <p:cNvSpPr/>
           <p:nvPr/>
         </p:nvSpPr>
@@ -48513,7 +48454,7 @@
       </p:sp>
       <p:sp>
         <p:nvSpPr>
-          <p:cNvPr id="262" name="Google Shape;262;p9"/>
+          <p:cNvPr id="261" name="Google Shape;261;p9"/>
           <p:cNvSpPr/>
           <p:nvPr/>
         </p:nvSpPr>
@@ -48572,7 +48513,7 @@
       </p:sp>
       <p:sp>
         <p:nvSpPr>
-          <p:cNvPr id="263" name="Google Shape;263;p9"/>
+          <p:cNvPr id="262" name="Google Shape;262;p9"/>
           <p:cNvSpPr txBox="1"/>
           <p:nvPr/>
         </p:nvSpPr>
@@ -48638,7 +48579,7 @@
       </p:sp>
       <p:sp>
         <p:nvSpPr>
-          <p:cNvPr id="264" name="Google Shape;264;p9"/>
+          <p:cNvPr id="263" name="Google Shape;263;p9"/>
           <p:cNvSpPr/>
           <p:nvPr/>
         </p:nvSpPr>
@@ -48708,7 +48649,7 @@
       </p:sp>
       <p:sp>
         <p:nvSpPr>
-          <p:cNvPr id="265" name="Google Shape;265;p9"/>
+          <p:cNvPr id="264" name="Google Shape;264;p9"/>
           <p:cNvSpPr/>
           <p:nvPr/>
         </p:nvSpPr>
@@ -48778,7 +48719,7 @@
       </p:sp>
       <p:cxnSp>
         <p:nvCxnSpPr>
-          <p:cNvPr id="266" name="Google Shape;266;p9"/>
+          <p:cNvPr id="265" name="Google Shape;265;p9"/>
           <p:cNvCxnSpPr/>
           <p:nvPr/>
         </p:nvCxnSpPr>
@@ -48804,7 +48745,7 @@
       </p:cxnSp>
       <p:sp>
         <p:nvSpPr>
-          <p:cNvPr id="267" name="Google Shape;267;p9"/>
+          <p:cNvPr id="266" name="Google Shape;266;p9"/>
           <p:cNvSpPr txBox="1"/>
           <p:nvPr/>
         </p:nvSpPr>
@@ -48882,7 +48823,7 @@
       </p:sp>
       <p:sp>
         <p:nvSpPr>
-          <p:cNvPr id="268" name="Google Shape;268;p9"/>
+          <p:cNvPr id="267" name="Google Shape;267;p9"/>
           <p:cNvSpPr txBox="1"/>
           <p:nvPr/>
         </p:nvSpPr>
@@ -48960,7 +48901,7 @@
       </p:sp>
       <p:sp>
         <p:nvSpPr>
-          <p:cNvPr id="269" name="Google Shape;269;p9"/>
+          <p:cNvPr id="268" name="Google Shape;268;p9"/>
           <p:cNvSpPr txBox="1"/>
           <p:nvPr/>
         </p:nvSpPr>
@@ -49038,7 +48979,7 @@
       </p:sp>
       <p:sp>
         <p:nvSpPr>
-          <p:cNvPr id="270" name="Google Shape;270;p9"/>
+          <p:cNvPr id="269" name="Google Shape;269;p9"/>
           <p:cNvSpPr/>
           <p:nvPr/>
         </p:nvSpPr>
@@ -49110,7 +49051,7 @@
       </p:sp>
       <p:sp>
         <p:nvSpPr>
-          <p:cNvPr id="271" name="Google Shape;271;p9"/>
+          <p:cNvPr id="270" name="Google Shape;270;p9"/>
           <p:cNvSpPr txBox="1"/>
           <p:nvPr/>
         </p:nvSpPr>
@@ -49176,7 +49117,7 @@
       </p:sp>
       <p:sp>
         <p:nvSpPr>
-          <p:cNvPr id="272" name="Google Shape;272;p9"/>
+          <p:cNvPr id="271" name="Google Shape;271;p9"/>
           <p:cNvSpPr txBox="1"/>
           <p:nvPr/>
         </p:nvSpPr>
@@ -49322,7 +49263,7 @@
       </p:sp>
       <p:sp>
         <p:nvSpPr>
-          <p:cNvPr id="273" name="Google Shape;273;p9"/>
+          <p:cNvPr id="272" name="Google Shape;272;p9"/>
           <p:cNvSpPr/>
           <p:nvPr/>
         </p:nvSpPr>
@@ -49387,7 +49328,7 @@
       </p:sp>
       <p:sp>
         <p:nvSpPr>
-          <p:cNvPr id="274" name="Google Shape;274;p9"/>
+          <p:cNvPr id="273" name="Google Shape;273;p9"/>
           <p:cNvSpPr txBox="1"/>
           <p:nvPr/>
         </p:nvSpPr>
@@ -49547,7 +49488,7 @@
       </p:sp>
       <p:cxnSp>
         <p:nvCxnSpPr>
-          <p:cNvPr id="275" name="Google Shape;275;p9"/>
+          <p:cNvPr id="274" name="Google Shape;274;p9"/>
           <p:cNvCxnSpPr/>
           <p:nvPr/>
         </p:nvCxnSpPr>
@@ -49573,7 +49514,7 @@
       </p:cxnSp>
       <p:sp>
         <p:nvSpPr>
-          <p:cNvPr id="276" name="Google Shape;276;p9"/>
+          <p:cNvPr id="275" name="Google Shape;275;p9"/>
           <p:cNvSpPr txBox="1"/>
           <p:nvPr/>
         </p:nvSpPr>
@@ -49651,7 +49592,7 @@
       </p:sp>
       <p:sp>
         <p:nvSpPr>
-          <p:cNvPr id="277" name="Google Shape;277;p9"/>
+          <p:cNvPr id="276" name="Google Shape;276;p9"/>
           <p:cNvSpPr/>
           <p:nvPr/>
         </p:nvSpPr>
@@ -49728,7 +49669,7 @@
     </p:bg>
     <p:spTree>
       <p:nvGrpSpPr>
-        <p:cNvPr id="282" name="Shape 282"/>
+        <p:cNvPr id="281" name="Shape 281"/>
         <p:cNvGrpSpPr/>
         <p:nvPr/>
       </p:nvGrpSpPr>
@@ -49742,7 +49683,7 @@
       </p:grpSpPr>
       <p:sp>
         <p:nvSpPr>
-          <p:cNvPr id="283" name="Google Shape;283;p10"/>
+          <p:cNvPr id="282" name="Google Shape;282;p10"/>
           <p:cNvSpPr txBox="1"/>
           <p:nvPr/>
         </p:nvSpPr>
@@ -49808,7 +49749,7 @@
       </p:sp>
       <p:sp>
         <p:nvSpPr>
-          <p:cNvPr id="284" name="Google Shape;284;p10"/>
+          <p:cNvPr id="283" name="Google Shape;283;p10"/>
           <p:cNvSpPr/>
           <p:nvPr/>
         </p:nvSpPr>
@@ -49867,7 +49808,7 @@
       </p:sp>
       <p:sp>
         <p:nvSpPr>
-          <p:cNvPr id="285" name="Google Shape;285;p10"/>
+          <p:cNvPr id="284" name="Google Shape;284;p10"/>
           <p:cNvSpPr txBox="1"/>
           <p:nvPr/>
         </p:nvSpPr>
@@ -49933,7 +49874,7 @@
       </p:sp>
       <p:graphicFrame>
         <p:nvGraphicFramePr>
-          <p:cNvPr id="286" name="Google Shape;286;p10"/>
+          <p:cNvPr id="285" name="Google Shape;285;p10"/>
           <p:cNvGraphicFramePr/>
           <p:nvPr/>
         </p:nvGraphicFramePr>
@@ -49946,7 +49887,7 @@
             <a:tbl>
               <a:tblPr>
                 <a:noFill/>
-                <a:tableStyleId>{2663F03A-32B3-4559-8D9F-3A11EFFF4BFD}</a:tableStyleId>
+                <a:tableStyleId>{164A1B23-7A83-474B-B4BF-E042B0863BCF}</a:tableStyleId>
               </a:tblPr>
               <a:tblGrid>
                 <a:gridCol w="1200150"/>
@@ -53795,7 +53736,7 @@
       </p:graphicFrame>
       <p:sp>
         <p:nvSpPr>
-          <p:cNvPr id="287" name="Google Shape;287;p10"/>
+          <p:cNvPr id="286" name="Google Shape;286;p10"/>
           <p:cNvSpPr txBox="1"/>
           <p:nvPr/>
         </p:nvSpPr>
@@ -53861,7 +53802,7 @@
       </p:sp>
       <p:cxnSp>
         <p:nvCxnSpPr>
-          <p:cNvPr id="288" name="Google Shape;288;p10"/>
+          <p:cNvPr id="287" name="Google Shape;287;p10"/>
           <p:cNvCxnSpPr/>
           <p:nvPr/>
         </p:nvCxnSpPr>
@@ -53887,7 +53828,7 @@
       </p:cxnSp>
       <p:sp>
         <p:nvSpPr>
-          <p:cNvPr id="289" name="Google Shape;289;p10"/>
+          <p:cNvPr id="288" name="Google Shape;288;p10"/>
           <p:cNvSpPr txBox="1"/>
           <p:nvPr/>
         </p:nvSpPr>
@@ -53965,7 +53906,7 @@
       </p:sp>
       <p:sp>
         <p:nvSpPr>
-          <p:cNvPr id="290" name="Google Shape;290;p10"/>
+          <p:cNvPr id="289" name="Google Shape;289;p10"/>
           <p:cNvSpPr/>
           <p:nvPr/>
         </p:nvSpPr>
@@ -54042,7 +53983,7 @@
     </p:bg>
     <p:spTree>
       <p:nvGrpSpPr>
-        <p:cNvPr id="295" name="Shape 295"/>
+        <p:cNvPr id="294" name="Shape 294"/>
         <p:cNvGrpSpPr/>
         <p:nvPr/>
       </p:nvGrpSpPr>
@@ -54056,7 +53997,7 @@
       </p:grpSpPr>
       <p:sp>
         <p:nvSpPr>
-          <p:cNvPr id="296" name="Google Shape;296;p11"/>
+          <p:cNvPr id="295" name="Google Shape;295;p11"/>
           <p:cNvSpPr txBox="1"/>
           <p:nvPr/>
         </p:nvSpPr>
@@ -54122,7 +54063,7 @@
       </p:sp>
       <p:sp>
         <p:nvSpPr>
-          <p:cNvPr id="297" name="Google Shape;297;p11"/>
+          <p:cNvPr id="296" name="Google Shape;296;p11"/>
           <p:cNvSpPr/>
           <p:nvPr/>
         </p:nvSpPr>
@@ -54181,7 +54122,7 @@
       </p:sp>
       <p:sp>
         <p:nvSpPr>
-          <p:cNvPr id="298" name="Google Shape;298;p11"/>
+          <p:cNvPr id="297" name="Google Shape;297;p11"/>
           <p:cNvSpPr/>
           <p:nvPr/>
         </p:nvSpPr>
@@ -54240,7 +54181,7 @@
       </p:sp>
       <p:sp>
         <p:nvSpPr>
-          <p:cNvPr id="299" name="Google Shape;299;p11"/>
+          <p:cNvPr id="298" name="Google Shape;298;p11"/>
           <p:cNvSpPr/>
           <p:nvPr/>
         </p:nvSpPr>
@@ -54299,7 +54240,7 @@
       </p:sp>
       <p:sp>
         <p:nvSpPr>
-          <p:cNvPr id="300" name="Google Shape;300;p11"/>
+          <p:cNvPr id="299" name="Google Shape;299;p11"/>
           <p:cNvSpPr txBox="1"/>
           <p:nvPr/>
         </p:nvSpPr>
@@ -54525,7 +54466,7 @@
       </p:sp>
       <p:sp>
         <p:nvSpPr>
-          <p:cNvPr id="301" name="Google Shape;301;p11"/>
+          <p:cNvPr id="300" name="Google Shape;300;p11"/>
           <p:cNvSpPr txBox="1"/>
           <p:nvPr/>
         </p:nvSpPr>
@@ -54591,7 +54532,7 @@
       </p:sp>
       <p:sp>
         <p:nvSpPr>
-          <p:cNvPr id="302" name="Google Shape;302;p11"/>
+          <p:cNvPr id="301" name="Google Shape;301;p11"/>
           <p:cNvSpPr txBox="1"/>
           <p:nvPr/>
         </p:nvSpPr>
@@ -54657,7 +54598,7 @@
       </p:sp>
       <p:sp>
         <p:nvSpPr>
-          <p:cNvPr id="303" name="Google Shape;303;p11"/>
+          <p:cNvPr id="302" name="Google Shape;302;p11"/>
           <p:cNvSpPr txBox="1"/>
           <p:nvPr/>
         </p:nvSpPr>
@@ -54723,7 +54664,7 @@
       </p:sp>
       <p:sp>
         <p:nvSpPr>
-          <p:cNvPr id="304" name="Google Shape;304;p11"/>
+          <p:cNvPr id="303" name="Google Shape;303;p11"/>
           <p:cNvSpPr/>
           <p:nvPr/>
         </p:nvSpPr>
@@ -54789,7 +54730,7 @@
       </p:sp>
       <p:sp>
         <p:nvSpPr>
-          <p:cNvPr id="305" name="Google Shape;305;p11"/>
+          <p:cNvPr id="304" name="Google Shape;304;p11"/>
           <p:cNvSpPr/>
           <p:nvPr/>
         </p:nvSpPr>
@@ -54848,7 +54789,7 @@
       </p:sp>
       <p:sp>
         <p:nvSpPr>
-          <p:cNvPr id="306" name="Google Shape;306;p11"/>
+          <p:cNvPr id="305" name="Google Shape;305;p11"/>
           <p:cNvSpPr txBox="1"/>
           <p:nvPr/>
         </p:nvSpPr>
@@ -54914,7 +54855,7 @@
       </p:sp>
       <p:cxnSp>
         <p:nvCxnSpPr>
-          <p:cNvPr id="307" name="Google Shape;307;p11"/>
+          <p:cNvPr id="306" name="Google Shape;306;p11"/>
           <p:cNvCxnSpPr/>
           <p:nvPr/>
         </p:nvCxnSpPr>
@@ -54940,7 +54881,7 @@
       </p:cxnSp>
       <p:sp>
         <p:nvSpPr>
-          <p:cNvPr id="308" name="Google Shape;308;p11"/>
+          <p:cNvPr id="307" name="Google Shape;307;p11"/>
           <p:cNvSpPr txBox="1"/>
           <p:nvPr/>
         </p:nvSpPr>
@@ -55006,7 +54947,7 @@
       </p:sp>
       <p:sp>
         <p:nvSpPr>
-          <p:cNvPr id="309" name="Google Shape;309;p11"/>
+          <p:cNvPr id="308" name="Google Shape;308;p11"/>
           <p:cNvSpPr txBox="1"/>
           <p:nvPr/>
         </p:nvSpPr>
@@ -55072,7 +55013,7 @@
       </p:sp>
       <p:sp>
         <p:nvSpPr>
-          <p:cNvPr id="310" name="Google Shape;310;p11"/>
+          <p:cNvPr id="309" name="Google Shape;309;p11"/>
           <p:cNvSpPr txBox="1"/>
           <p:nvPr/>
         </p:nvSpPr>
@@ -55138,7 +55079,7 @@
       </p:sp>
       <p:sp>
         <p:nvSpPr>
-          <p:cNvPr id="311" name="Google Shape;311;p11"/>
+          <p:cNvPr id="310" name="Google Shape;310;p11"/>
           <p:cNvSpPr/>
           <p:nvPr/>
         </p:nvSpPr>
@@ -55204,7 +55145,7 @@
       </p:sp>
       <p:sp>
         <p:nvSpPr>
-          <p:cNvPr id="312" name="Google Shape;312;p11"/>
+          <p:cNvPr id="311" name="Google Shape;311;p11"/>
           <p:cNvSpPr/>
           <p:nvPr/>
         </p:nvSpPr>
@@ -55263,7 +55204,7 @@
       </p:sp>
       <p:sp>
         <p:nvSpPr>
-          <p:cNvPr id="313" name="Google Shape;313;p11"/>
+          <p:cNvPr id="312" name="Google Shape;312;p11"/>
           <p:cNvSpPr txBox="1"/>
           <p:nvPr/>
         </p:nvSpPr>
@@ -55329,7 +55270,7 @@
       </p:sp>
       <p:cxnSp>
         <p:nvCxnSpPr>
-          <p:cNvPr id="314" name="Google Shape;314;p11"/>
+          <p:cNvPr id="313" name="Google Shape;313;p11"/>
           <p:cNvCxnSpPr/>
           <p:nvPr/>
         </p:nvCxnSpPr>
@@ -55355,7 +55296,7 @@
       </p:cxnSp>
       <p:sp>
         <p:nvSpPr>
-          <p:cNvPr id="315" name="Google Shape;315;p11"/>
+          <p:cNvPr id="314" name="Google Shape;314;p11"/>
           <p:cNvSpPr txBox="1"/>
           <p:nvPr/>
         </p:nvSpPr>
@@ -55421,7 +55362,7 @@
       </p:sp>
       <p:sp>
         <p:nvSpPr>
-          <p:cNvPr id="316" name="Google Shape;316;p11"/>
+          <p:cNvPr id="315" name="Google Shape;315;p11"/>
           <p:cNvSpPr txBox="1"/>
           <p:nvPr/>
         </p:nvSpPr>
@@ -55487,7 +55428,7 @@
       </p:sp>
       <p:sp>
         <p:nvSpPr>
-          <p:cNvPr id="317" name="Google Shape;317;p11"/>
+          <p:cNvPr id="316" name="Google Shape;316;p11"/>
           <p:cNvSpPr txBox="1"/>
           <p:nvPr/>
         </p:nvSpPr>
@@ -55553,7 +55494,7 @@
       </p:sp>
       <p:sp>
         <p:nvSpPr>
-          <p:cNvPr id="318" name="Google Shape;318;p11"/>
+          <p:cNvPr id="317" name="Google Shape;317;p11"/>
           <p:cNvSpPr/>
           <p:nvPr/>
         </p:nvSpPr>
@@ -55619,7 +55560,7 @@
       </p:sp>
       <p:sp>
         <p:nvSpPr>
-          <p:cNvPr id="319" name="Google Shape;319;p11"/>
+          <p:cNvPr id="318" name="Google Shape;318;p11"/>
           <p:cNvSpPr/>
           <p:nvPr/>
         </p:nvSpPr>
@@ -55678,7 +55619,7 @@
       </p:sp>
       <p:sp>
         <p:nvSpPr>
-          <p:cNvPr id="320" name="Google Shape;320;p11"/>
+          <p:cNvPr id="319" name="Google Shape;319;p11"/>
           <p:cNvSpPr txBox="1"/>
           <p:nvPr/>
         </p:nvSpPr>
@@ -55744,7 +55685,7 @@
       </p:sp>
       <p:sp>
         <p:nvSpPr>
-          <p:cNvPr id="321" name="Google Shape;321;p11"/>
+          <p:cNvPr id="320" name="Google Shape;320;p11"/>
           <p:cNvSpPr/>
           <p:nvPr/>
         </p:nvSpPr>
@@ -55810,7 +55751,7 @@
       </p:sp>
       <p:sp>
         <p:nvSpPr>
-          <p:cNvPr id="322" name="Google Shape;322;p11"/>
+          <p:cNvPr id="321" name="Google Shape;321;p11"/>
           <p:cNvSpPr txBox="1"/>
           <p:nvPr/>
         </p:nvSpPr>
@@ -55900,7 +55841,7 @@
       </p:sp>
       <p:cxnSp>
         <p:nvCxnSpPr>
-          <p:cNvPr id="323" name="Google Shape;323;p11"/>
+          <p:cNvPr id="322" name="Google Shape;322;p11"/>
           <p:cNvCxnSpPr/>
           <p:nvPr/>
         </p:nvCxnSpPr>
@@ -55926,7 +55867,7 @@
       </p:cxnSp>
       <p:sp>
         <p:nvSpPr>
-          <p:cNvPr id="324" name="Google Shape;324;p11"/>
+          <p:cNvPr id="323" name="Google Shape;323;p11"/>
           <p:cNvSpPr txBox="1"/>
           <p:nvPr/>
         </p:nvSpPr>
@@ -56004,7 +55945,7 @@
       </p:sp>
       <p:sp>
         <p:nvSpPr>
-          <p:cNvPr id="325" name="Google Shape;325;p11"/>
+          <p:cNvPr id="324" name="Google Shape;324;p11"/>
           <p:cNvSpPr/>
           <p:nvPr/>
         </p:nvSpPr>

--- a/docs/presentation/CSE-810-PRESENTATION-INCEPTION.pptx
+++ b/docs/presentation/CSE-810-PRESENTATION-INCEPTION.pptx
@@ -5988,7 +5988,7 @@
             <a:tbl>
               <a:tblPr>
                 <a:noFill/>
-                <a:tableStyleId>{164A1B23-7A83-474B-B4BF-E042B0863BCF}</a:tableStyleId>
+                <a:tableStyleId>{81637843-7EEC-42DC-84F5-4FF2FDD21AC6}</a:tableStyleId>
               </a:tblPr>
               <a:tblGrid>
                 <a:gridCol w="1571625"/>
@@ -10758,7 +10758,7 @@
         <p:spPr>
           <a:xfrm>
             <a:off x="0" y="4886203"/>
-            <a:ext cx="9143771" cy="6858"/>
+            <a:ext cx="9143700" cy="6900"/>
           </a:xfrm>
           <a:prstGeom prst="rect">
             <a:avLst/>
@@ -10811,13 +10811,72 @@
       <p:sp>
         <p:nvSpPr>
           <p:cNvPr id="387" name="Google Shape;387;p12"/>
+          <p:cNvSpPr/>
+          <p:nvPr/>
+        </p:nvSpPr>
+        <p:spPr>
+          <a:xfrm>
+            <a:off x="0" y="5122926"/>
+            <a:ext cx="4114697" cy="20574"/>
+          </a:xfrm>
+          <a:prstGeom prst="rect">
+            <a:avLst/>
+          </a:prstGeom>
+          <a:solidFill>
+            <a:srgbClr val="8B1A1A"/>
+          </a:solidFill>
+          <a:ln>
+            <a:noFill/>
+          </a:ln>
+        </p:spPr>
+        <p:txBody>
+          <a:bodyPr anchorCtr="0" anchor="ctr" bIns="68575" lIns="68575" spcFirstLastPara="1" rIns="68575" wrap="square" tIns="68575">
+            <a:noAutofit/>
+          </a:bodyPr>
+          <a:lstStyle/>
+          <a:p>
+            <a:pPr indent="0" lvl="0" marL="0" marR="0" rtl="0" algn="l">
+              <a:lnSpc>
+                <a:spcPct val="100000"/>
+              </a:lnSpc>
+              <a:spcBef>
+                <a:spcPts val="0"/>
+              </a:spcBef>
+              <a:spcAft>
+                <a:spcPts val="0"/>
+              </a:spcAft>
+              <a:buClr>
+                <a:srgbClr val="000000"/>
+              </a:buClr>
+              <a:buSzPts val="1400"/>
+              <a:buFont typeface="Arial"/>
+              <a:buNone/>
+            </a:pPr>
+            <a:r>
+              <a:t/>
+            </a:r>
+            <a:endParaRPr b="0" i="0" sz="1400" u="none" cap="none" strike="noStrike">
+              <a:solidFill>
+                <a:srgbClr val="000000"/>
+              </a:solidFill>
+              <a:latin typeface="Arial"/>
+              <a:ea typeface="Arial"/>
+              <a:cs typeface="Arial"/>
+              <a:sym typeface="Arial"/>
+            </a:endParaRPr>
+          </a:p>
+        </p:txBody>
+      </p:sp>
+      <p:sp>
+        <p:nvSpPr>
+          <p:cNvPr id="388" name="Google Shape;388;p12"/>
           <p:cNvSpPr txBox="1"/>
           <p:nvPr/>
         </p:nvSpPr>
         <p:spPr>
           <a:xfrm>
-            <a:off x="7886700" y="4896612"/>
-            <a:ext cx="569214" cy="171450"/>
+            <a:off x="8286600" y="4886313"/>
+            <a:ext cx="857400" cy="128700"/>
           </a:xfrm>
           <a:prstGeom prst="rect">
             <a:avLst/>
@@ -10828,7 +10887,7 @@
           </a:ln>
         </p:spPr>
         <p:txBody>
-          <a:bodyPr anchorCtr="0" anchor="ctr" bIns="0" lIns="0" spcFirstLastPara="1" rIns="0" wrap="square" tIns="0">
+          <a:bodyPr anchorCtr="0" anchor="t" bIns="0" lIns="0" spcFirstLastPara="1" rIns="0" wrap="square" tIns="0">
             <a:noAutofit/>
           </a:bodyPr>
           <a:lstStyle/>
@@ -10851,7 +10910,7 @@
               <a:buNone/>
             </a:pPr>
             <a:r>
-              <a:rPr b="0" i="0" lang="en" sz="700" u="none" cap="none" strike="noStrike">
+              <a:rPr lang="en" sz="700">
                 <a:solidFill>
                   <a:schemeClr val="dk1"/>
                 </a:solidFill>
@@ -10860,10 +10919,10 @@
                 <a:cs typeface="IBM Plex Mono"/>
                 <a:sym typeface="IBM Plex Mono"/>
               </a:rPr>
-              <a:t>10 / 2</a:t>
-            </a:r>
-            <a:r>
-              <a:rPr lang="en" sz="700">
+              <a:t>1</a:t>
+            </a:r>
+            <a:r>
+              <a:rPr i="0" lang="en" sz="700" u="none" cap="none" strike="noStrike">
                 <a:solidFill>
                   <a:schemeClr val="dk1"/>
                 </a:solidFill>
@@ -10872,75 +10931,28 @@
                 <a:cs typeface="IBM Plex Mono"/>
                 <a:sym typeface="IBM Plex Mono"/>
               </a:rPr>
+              <a:t>0 / 2</a:t>
+            </a:r>
+            <a:r>
+              <a:rPr lang="en" sz="700">
+                <a:solidFill>
+                  <a:schemeClr val="dk1"/>
+                </a:solidFill>
+                <a:latin typeface="IBM Plex Mono"/>
+                <a:ea typeface="IBM Plex Mono"/>
+                <a:cs typeface="IBM Plex Mono"/>
+                <a:sym typeface="IBM Plex Mono"/>
+              </a:rPr>
               <a:t>1</a:t>
             </a:r>
-            <a:endParaRPr b="0" i="0" sz="700" u="none" cap="none" strike="noStrike">
+            <a:endParaRPr i="0" sz="700" u="none" cap="none" strike="noStrike">
               <a:solidFill>
                 <a:schemeClr val="dk1"/>
               </a:solidFill>
-              <a:latin typeface="Calibri"/>
-              <a:ea typeface="Calibri"/>
-              <a:cs typeface="Calibri"/>
-              <a:sym typeface="Calibri"/>
-            </a:endParaRPr>
-          </a:p>
-        </p:txBody>
-      </p:sp>
-      <p:sp>
-        <p:nvSpPr>
-          <p:cNvPr id="388" name="Google Shape;388;p12"/>
-          <p:cNvSpPr/>
-          <p:nvPr/>
-        </p:nvSpPr>
-        <p:spPr>
-          <a:xfrm>
-            <a:off x="0" y="5122926"/>
-            <a:ext cx="4114697" cy="20574"/>
-          </a:xfrm>
-          <a:prstGeom prst="rect">
-            <a:avLst/>
-          </a:prstGeom>
-          <a:solidFill>
-            <a:srgbClr val="8B1A1A"/>
-          </a:solidFill>
-          <a:ln>
-            <a:noFill/>
-          </a:ln>
-        </p:spPr>
-        <p:txBody>
-          <a:bodyPr anchorCtr="0" anchor="ctr" bIns="68575" lIns="68575" spcFirstLastPara="1" rIns="68575" wrap="square" tIns="68575">
-            <a:noAutofit/>
-          </a:bodyPr>
-          <a:lstStyle/>
-          <a:p>
-            <a:pPr indent="0" lvl="0" marL="0" marR="0" rtl="0" algn="l">
-              <a:lnSpc>
-                <a:spcPct val="100000"/>
-              </a:lnSpc>
-              <a:spcBef>
-                <a:spcPts val="0"/>
-              </a:spcBef>
-              <a:spcAft>
-                <a:spcPts val="0"/>
-              </a:spcAft>
-              <a:buClr>
-                <a:srgbClr val="000000"/>
-              </a:buClr>
-              <a:buSzPts val="1400"/>
-              <a:buFont typeface="Arial"/>
-              <a:buNone/>
-            </a:pPr>
-            <a:r>
-              <a:t/>
-            </a:r>
-            <a:endParaRPr b="0" i="0" sz="1400" u="none" cap="none" strike="noStrike">
-              <a:solidFill>
-                <a:srgbClr val="000000"/>
-              </a:solidFill>
-              <a:latin typeface="Arial"/>
-              <a:ea typeface="Arial"/>
-              <a:cs typeface="Arial"/>
-              <a:sym typeface="Arial"/>
+              <a:latin typeface="IBM Plex Mono"/>
+              <a:ea typeface="IBM Plex Mono"/>
+              <a:cs typeface="IBM Plex Mono"/>
+              <a:sym typeface="IBM Plex Mono"/>
             </a:endParaRPr>
           </a:p>
         </p:txBody>
@@ -13091,53 +13103,145 @@
           </a:p>
         </p:txBody>
       </p:sp>
-      <p:cxnSp>
-        <p:nvCxnSpPr>
+      <p:sp>
+        <p:nvSpPr>
           <p:cNvPr id="423" name="Google Shape;423;p13"/>
-          <p:cNvCxnSpPr/>
-          <p:nvPr/>
-        </p:nvCxnSpPr>
-        <p:spPr>
-          <a:xfrm>
-            <a:off x="0" y="4886325"/>
-            <a:ext cx="9143771" cy="0"/>
-          </a:xfrm>
-          <a:prstGeom prst="straightConnector1">
+          <p:cNvSpPr/>
+          <p:nvPr/>
+        </p:nvSpPr>
+        <p:spPr>
+          <a:xfrm>
+            <a:off x="0" y="5122069"/>
+            <a:ext cx="4571886" cy="21431"/>
+          </a:xfrm>
+          <a:prstGeom prst="rect">
+            <a:avLst/>
+          </a:prstGeom>
+          <a:solidFill>
+            <a:srgbClr val="8B1A1A"/>
+          </a:solidFill>
+          <a:ln>
+            <a:noFill/>
+          </a:ln>
+        </p:spPr>
+        <p:txBody>
+          <a:bodyPr anchorCtr="0" anchor="ctr" bIns="68575" lIns="68575" spcFirstLastPara="1" rIns="68575" wrap="square" tIns="68575">
+            <a:noAutofit/>
+          </a:bodyPr>
+          <a:lstStyle/>
+          <a:p>
+            <a:pPr indent="0" lvl="0" marL="0" marR="0" rtl="0" algn="l">
+              <a:lnSpc>
+                <a:spcPct val="100000"/>
+              </a:lnSpc>
+              <a:spcBef>
+                <a:spcPts val="0"/>
+              </a:spcBef>
+              <a:spcAft>
+                <a:spcPts val="0"/>
+              </a:spcAft>
+              <a:buClr>
+                <a:srgbClr val="000000"/>
+              </a:buClr>
+              <a:buSzPts val="1400"/>
+              <a:buFont typeface="Arial"/>
+              <a:buNone/>
+            </a:pPr>
+            <a:r>
+              <a:t/>
+            </a:r>
+            <a:endParaRPr b="0" i="0" sz="1400" u="none" cap="none" strike="noStrike">
+              <a:solidFill>
+                <a:srgbClr val="000000"/>
+              </a:solidFill>
+              <a:latin typeface="Arial"/>
+              <a:ea typeface="Arial"/>
+              <a:cs typeface="Arial"/>
+              <a:sym typeface="Arial"/>
+            </a:endParaRPr>
+          </a:p>
+        </p:txBody>
+      </p:sp>
+      <p:sp>
+        <p:nvSpPr>
+          <p:cNvPr id="424" name="Google Shape;424;p13"/>
+          <p:cNvSpPr/>
+          <p:nvPr/>
+        </p:nvSpPr>
+        <p:spPr>
+          <a:xfrm>
+            <a:off x="0" y="4886203"/>
+            <a:ext cx="9143700" cy="6900"/>
+          </a:xfrm>
+          <a:prstGeom prst="rect">
+            <a:avLst/>
+          </a:prstGeom>
+          <a:solidFill>
+            <a:srgbClr val="D4CFC8"/>
+          </a:solidFill>
+          <a:ln>
+            <a:noFill/>
+          </a:ln>
+        </p:spPr>
+        <p:txBody>
+          <a:bodyPr anchorCtr="0" anchor="ctr" bIns="68575" lIns="68575" spcFirstLastPara="1" rIns="68575" wrap="square" tIns="68575">
+            <a:noAutofit/>
+          </a:bodyPr>
+          <a:lstStyle/>
+          <a:p>
+            <a:pPr indent="0" lvl="0" marL="0" marR="0" rtl="0" algn="l">
+              <a:lnSpc>
+                <a:spcPct val="100000"/>
+              </a:lnSpc>
+              <a:spcBef>
+                <a:spcPts val="0"/>
+              </a:spcBef>
+              <a:spcAft>
+                <a:spcPts val="0"/>
+              </a:spcAft>
+              <a:buClr>
+                <a:srgbClr val="000000"/>
+              </a:buClr>
+              <a:buSzPts val="1400"/>
+              <a:buFont typeface="Arial"/>
+              <a:buNone/>
+            </a:pPr>
+            <a:r>
+              <a:t/>
+            </a:r>
+            <a:endParaRPr b="0" i="0" sz="1400" u="none" cap="none" strike="noStrike">
+              <a:solidFill>
+                <a:srgbClr val="000000"/>
+              </a:solidFill>
+              <a:latin typeface="Arial"/>
+              <a:ea typeface="Arial"/>
+              <a:cs typeface="Arial"/>
+              <a:sym typeface="Arial"/>
+            </a:endParaRPr>
+          </a:p>
+        </p:txBody>
+      </p:sp>
+      <p:sp>
+        <p:nvSpPr>
+          <p:cNvPr id="425" name="Google Shape;425;p13"/>
+          <p:cNvSpPr txBox="1"/>
+          <p:nvPr/>
+        </p:nvSpPr>
+        <p:spPr>
+          <a:xfrm>
+            <a:off x="8286600" y="4886313"/>
+            <a:ext cx="857400" cy="128700"/>
+          </a:xfrm>
+          <a:prstGeom prst="rect">
             <a:avLst/>
           </a:prstGeom>
           <a:noFill/>
-          <a:ln cap="flat" cmpd="sng" w="9525">
-            <a:solidFill>
-              <a:srgbClr val="D4CFC8"/>
-            </a:solidFill>
-            <a:prstDash val="solid"/>
-            <a:round/>
-            <a:headEnd len="sm" w="sm" type="none"/>
-            <a:tailEnd len="sm" w="sm" type="none"/>
-          </a:ln>
-        </p:spPr>
-      </p:cxnSp>
-      <p:sp>
-        <p:nvSpPr>
-          <p:cNvPr id="424" name="Google Shape;424;p13"/>
-          <p:cNvSpPr txBox="1"/>
-          <p:nvPr/>
-        </p:nvSpPr>
-        <p:spPr>
-          <a:xfrm>
-            <a:off x="7886471" y="4957763"/>
-            <a:ext cx="685800" cy="114300"/>
-          </a:xfrm>
-          <a:prstGeom prst="rect">
-            <a:avLst/>
-          </a:prstGeom>
-          <a:noFill/>
-          <a:ln>
-            <a:noFill/>
-          </a:ln>
-        </p:spPr>
-        <p:txBody>
-          <a:bodyPr anchorCtr="0" anchor="ctr" bIns="0" lIns="0" spcFirstLastPara="1" rIns="0" wrap="square" tIns="0">
+          <a:ln>
+            <a:noFill/>
+          </a:ln>
+        </p:spPr>
+        <p:txBody>
+          <a:bodyPr anchorCtr="0" anchor="t" bIns="0" lIns="0" spcFirstLastPara="1" rIns="0" wrap="square" tIns="0">
             <a:noAutofit/>
           </a:bodyPr>
           <a:lstStyle/>
@@ -13160,7 +13264,7 @@
               <a:buNone/>
             </a:pPr>
             <a:r>
-              <a:rPr b="0" i="0" lang="en" sz="700" u="none" cap="none" strike="noStrike">
+              <a:rPr lang="en" sz="700">
                 <a:solidFill>
                   <a:schemeClr val="dk1"/>
                 </a:solidFill>
@@ -13169,10 +13273,10 @@
                 <a:cs typeface="IBM Plex Mono"/>
                 <a:sym typeface="IBM Plex Mono"/>
               </a:rPr>
-              <a:t>11 / </a:t>
-            </a:r>
-            <a:r>
-              <a:rPr lang="en" sz="700">
+              <a:t>11</a:t>
+            </a:r>
+            <a:r>
+              <a:rPr i="0" lang="en" sz="700" u="none" cap="none" strike="noStrike">
                 <a:solidFill>
                   <a:schemeClr val="dk1"/>
                 </a:solidFill>
@@ -13181,75 +13285,28 @@
                 <a:cs typeface="IBM Plex Mono"/>
                 <a:sym typeface="IBM Plex Mono"/>
               </a:rPr>
-              <a:t>21</a:t>
-            </a:r>
-            <a:endParaRPr b="0" i="0" sz="700" u="none" cap="none" strike="noStrike">
+              <a:t> / 2</a:t>
+            </a:r>
+            <a:r>
+              <a:rPr lang="en" sz="700">
+                <a:solidFill>
+                  <a:schemeClr val="dk1"/>
+                </a:solidFill>
+                <a:latin typeface="IBM Plex Mono"/>
+                <a:ea typeface="IBM Plex Mono"/>
+                <a:cs typeface="IBM Plex Mono"/>
+                <a:sym typeface="IBM Plex Mono"/>
+              </a:rPr>
+              <a:t>1</a:t>
+            </a:r>
+            <a:endParaRPr i="0" sz="700" u="none" cap="none" strike="noStrike">
               <a:solidFill>
                 <a:schemeClr val="dk1"/>
               </a:solidFill>
-              <a:latin typeface="Calibri"/>
-              <a:ea typeface="Calibri"/>
-              <a:cs typeface="Calibri"/>
-              <a:sym typeface="Calibri"/>
-            </a:endParaRPr>
-          </a:p>
-        </p:txBody>
-      </p:sp>
-      <p:sp>
-        <p:nvSpPr>
-          <p:cNvPr id="425" name="Google Shape;425;p13"/>
-          <p:cNvSpPr/>
-          <p:nvPr/>
-        </p:nvSpPr>
-        <p:spPr>
-          <a:xfrm>
-            <a:off x="0" y="5122069"/>
-            <a:ext cx="4571886" cy="21431"/>
-          </a:xfrm>
-          <a:prstGeom prst="rect">
-            <a:avLst/>
-          </a:prstGeom>
-          <a:solidFill>
-            <a:srgbClr val="8B1A1A"/>
-          </a:solidFill>
-          <a:ln>
-            <a:noFill/>
-          </a:ln>
-        </p:spPr>
-        <p:txBody>
-          <a:bodyPr anchorCtr="0" anchor="ctr" bIns="68575" lIns="68575" spcFirstLastPara="1" rIns="68575" wrap="square" tIns="68575">
-            <a:noAutofit/>
-          </a:bodyPr>
-          <a:lstStyle/>
-          <a:p>
-            <a:pPr indent="0" lvl="0" marL="0" marR="0" rtl="0" algn="l">
-              <a:lnSpc>
-                <a:spcPct val="100000"/>
-              </a:lnSpc>
-              <a:spcBef>
-                <a:spcPts val="0"/>
-              </a:spcBef>
-              <a:spcAft>
-                <a:spcPts val="0"/>
-              </a:spcAft>
-              <a:buClr>
-                <a:srgbClr val="000000"/>
-              </a:buClr>
-              <a:buSzPts val="1400"/>
-              <a:buFont typeface="Arial"/>
-              <a:buNone/>
-            </a:pPr>
-            <a:r>
-              <a:t/>
-            </a:r>
-            <a:endParaRPr b="0" i="0" sz="1400" u="none" cap="none" strike="noStrike">
-              <a:solidFill>
-                <a:srgbClr val="000000"/>
-              </a:solidFill>
-              <a:latin typeface="Arial"/>
-              <a:ea typeface="Arial"/>
-              <a:cs typeface="Arial"/>
-              <a:sym typeface="Arial"/>
+              <a:latin typeface="IBM Plex Mono"/>
+              <a:ea typeface="IBM Plex Mono"/>
+              <a:cs typeface="IBM Plex Mono"/>
+              <a:sym typeface="IBM Plex Mono"/>
             </a:endParaRPr>
           </a:p>
         </p:txBody>
@@ -14747,53 +14804,145 @@
           </a:p>
         </p:txBody>
       </p:sp>
-      <p:cxnSp>
-        <p:nvCxnSpPr>
+      <p:sp>
+        <p:nvSpPr>
           <p:cNvPr id="455" name="Google Shape;455;p14"/>
-          <p:cNvCxnSpPr/>
-          <p:nvPr/>
-        </p:nvCxnSpPr>
-        <p:spPr>
-          <a:xfrm>
-            <a:off x="0" y="4886325"/>
-            <a:ext cx="9143771" cy="0"/>
-          </a:xfrm>
-          <a:prstGeom prst="straightConnector1">
+          <p:cNvSpPr/>
+          <p:nvPr/>
+        </p:nvSpPr>
+        <p:spPr>
+          <a:xfrm>
+            <a:off x="0" y="5122926"/>
+            <a:ext cx="5028971" cy="20574"/>
+          </a:xfrm>
+          <a:prstGeom prst="rect">
+            <a:avLst/>
+          </a:prstGeom>
+          <a:solidFill>
+            <a:srgbClr val="8B1A1A"/>
+          </a:solidFill>
+          <a:ln>
+            <a:noFill/>
+          </a:ln>
+        </p:spPr>
+        <p:txBody>
+          <a:bodyPr anchorCtr="0" anchor="ctr" bIns="68575" lIns="68575" spcFirstLastPara="1" rIns="68575" wrap="square" tIns="68575">
+            <a:noAutofit/>
+          </a:bodyPr>
+          <a:lstStyle/>
+          <a:p>
+            <a:pPr indent="0" lvl="0" marL="0" marR="0" rtl="0" algn="l">
+              <a:lnSpc>
+                <a:spcPct val="100000"/>
+              </a:lnSpc>
+              <a:spcBef>
+                <a:spcPts val="0"/>
+              </a:spcBef>
+              <a:spcAft>
+                <a:spcPts val="0"/>
+              </a:spcAft>
+              <a:buClr>
+                <a:srgbClr val="000000"/>
+              </a:buClr>
+              <a:buSzPts val="1400"/>
+              <a:buFont typeface="Arial"/>
+              <a:buNone/>
+            </a:pPr>
+            <a:r>
+              <a:t/>
+            </a:r>
+            <a:endParaRPr b="0" i="0" sz="1400" u="none" cap="none" strike="noStrike">
+              <a:solidFill>
+                <a:srgbClr val="000000"/>
+              </a:solidFill>
+              <a:latin typeface="Arial"/>
+              <a:ea typeface="Arial"/>
+              <a:cs typeface="Arial"/>
+              <a:sym typeface="Arial"/>
+            </a:endParaRPr>
+          </a:p>
+        </p:txBody>
+      </p:sp>
+      <p:sp>
+        <p:nvSpPr>
+          <p:cNvPr id="456" name="Google Shape;456;p14"/>
+          <p:cNvSpPr/>
+          <p:nvPr/>
+        </p:nvSpPr>
+        <p:spPr>
+          <a:xfrm>
+            <a:off x="0" y="4886203"/>
+            <a:ext cx="9143700" cy="6900"/>
+          </a:xfrm>
+          <a:prstGeom prst="rect">
+            <a:avLst/>
+          </a:prstGeom>
+          <a:solidFill>
+            <a:srgbClr val="D4CFC8"/>
+          </a:solidFill>
+          <a:ln>
+            <a:noFill/>
+          </a:ln>
+        </p:spPr>
+        <p:txBody>
+          <a:bodyPr anchorCtr="0" anchor="ctr" bIns="68575" lIns="68575" spcFirstLastPara="1" rIns="68575" wrap="square" tIns="68575">
+            <a:noAutofit/>
+          </a:bodyPr>
+          <a:lstStyle/>
+          <a:p>
+            <a:pPr indent="0" lvl="0" marL="0" marR="0" rtl="0" algn="l">
+              <a:lnSpc>
+                <a:spcPct val="100000"/>
+              </a:lnSpc>
+              <a:spcBef>
+                <a:spcPts val="0"/>
+              </a:spcBef>
+              <a:spcAft>
+                <a:spcPts val="0"/>
+              </a:spcAft>
+              <a:buClr>
+                <a:srgbClr val="000000"/>
+              </a:buClr>
+              <a:buSzPts val="1400"/>
+              <a:buFont typeface="Arial"/>
+              <a:buNone/>
+            </a:pPr>
+            <a:r>
+              <a:t/>
+            </a:r>
+            <a:endParaRPr b="0" i="0" sz="1400" u="none" cap="none" strike="noStrike">
+              <a:solidFill>
+                <a:srgbClr val="000000"/>
+              </a:solidFill>
+              <a:latin typeface="Arial"/>
+              <a:ea typeface="Arial"/>
+              <a:cs typeface="Arial"/>
+              <a:sym typeface="Arial"/>
+            </a:endParaRPr>
+          </a:p>
+        </p:txBody>
+      </p:sp>
+      <p:sp>
+        <p:nvSpPr>
+          <p:cNvPr id="457" name="Google Shape;457;p14"/>
+          <p:cNvSpPr txBox="1"/>
+          <p:nvPr/>
+        </p:nvSpPr>
+        <p:spPr>
+          <a:xfrm>
+            <a:off x="8286600" y="4886313"/>
+            <a:ext cx="857400" cy="128700"/>
+          </a:xfrm>
+          <a:prstGeom prst="rect">
             <a:avLst/>
           </a:prstGeom>
           <a:noFill/>
-          <a:ln cap="flat" cmpd="sng" w="9525">
-            <a:solidFill>
-              <a:srgbClr val="D4CFC8"/>
-            </a:solidFill>
-            <a:prstDash val="solid"/>
-            <a:round/>
-            <a:headEnd len="sm" w="sm" type="none"/>
-            <a:tailEnd len="sm" w="sm" type="none"/>
-          </a:ln>
-        </p:spPr>
-      </p:cxnSp>
-      <p:sp>
-        <p:nvSpPr>
-          <p:cNvPr id="456" name="Google Shape;456;p14"/>
-          <p:cNvSpPr txBox="1"/>
-          <p:nvPr/>
-        </p:nvSpPr>
-        <p:spPr>
-          <a:xfrm>
-            <a:off x="7886700" y="4969307"/>
-            <a:ext cx="685800" cy="137160"/>
-          </a:xfrm>
-          <a:prstGeom prst="rect">
-            <a:avLst/>
-          </a:prstGeom>
-          <a:noFill/>
-          <a:ln>
-            <a:noFill/>
-          </a:ln>
-        </p:spPr>
-        <p:txBody>
-          <a:bodyPr anchorCtr="0" anchor="ctr" bIns="0" lIns="0" spcFirstLastPara="1" rIns="0" wrap="square" tIns="0">
+          <a:ln>
+            <a:noFill/>
+          </a:ln>
+        </p:spPr>
+        <p:txBody>
+          <a:bodyPr anchorCtr="0" anchor="t" bIns="0" lIns="0" spcFirstLastPara="1" rIns="0" wrap="square" tIns="0">
             <a:noAutofit/>
           </a:bodyPr>
           <a:lstStyle/>
@@ -14816,7 +14965,7 @@
               <a:buNone/>
             </a:pPr>
             <a:r>
-              <a:rPr b="0" i="0" lang="en" sz="700" u="none" cap="none" strike="noStrike">
+              <a:rPr lang="en" sz="700">
                 <a:solidFill>
                   <a:schemeClr val="dk1"/>
                 </a:solidFill>
@@ -14825,10 +14974,10 @@
                 <a:cs typeface="IBM Plex Mono"/>
                 <a:sym typeface="IBM Plex Mono"/>
               </a:rPr>
-              <a:t>12 / 2</a:t>
-            </a:r>
-            <a:r>
-              <a:rPr lang="en" sz="700">
+              <a:t>12</a:t>
+            </a:r>
+            <a:r>
+              <a:rPr i="0" lang="en" sz="700" u="none" cap="none" strike="noStrike">
                 <a:solidFill>
                   <a:schemeClr val="dk1"/>
                 </a:solidFill>
@@ -14837,75 +14986,28 @@
                 <a:cs typeface="IBM Plex Mono"/>
                 <a:sym typeface="IBM Plex Mono"/>
               </a:rPr>
+              <a:t> / 2</a:t>
+            </a:r>
+            <a:r>
+              <a:rPr lang="en" sz="700">
+                <a:solidFill>
+                  <a:schemeClr val="dk1"/>
+                </a:solidFill>
+                <a:latin typeface="IBM Plex Mono"/>
+                <a:ea typeface="IBM Plex Mono"/>
+                <a:cs typeface="IBM Plex Mono"/>
+                <a:sym typeface="IBM Plex Mono"/>
+              </a:rPr>
               <a:t>1</a:t>
             </a:r>
-            <a:endParaRPr b="0" i="0" sz="700" u="none" cap="none" strike="noStrike">
+            <a:endParaRPr i="0" sz="700" u="none" cap="none" strike="noStrike">
               <a:solidFill>
                 <a:schemeClr val="dk1"/>
               </a:solidFill>
-              <a:latin typeface="Calibri"/>
-              <a:ea typeface="Calibri"/>
-              <a:cs typeface="Calibri"/>
-              <a:sym typeface="Calibri"/>
-            </a:endParaRPr>
-          </a:p>
-        </p:txBody>
-      </p:sp>
-      <p:sp>
-        <p:nvSpPr>
-          <p:cNvPr id="457" name="Google Shape;457;p14"/>
-          <p:cNvSpPr/>
-          <p:nvPr/>
-        </p:nvSpPr>
-        <p:spPr>
-          <a:xfrm>
-            <a:off x="0" y="5122926"/>
-            <a:ext cx="5028971" cy="20574"/>
-          </a:xfrm>
-          <a:prstGeom prst="rect">
-            <a:avLst/>
-          </a:prstGeom>
-          <a:solidFill>
-            <a:srgbClr val="8B1A1A"/>
-          </a:solidFill>
-          <a:ln>
-            <a:noFill/>
-          </a:ln>
-        </p:spPr>
-        <p:txBody>
-          <a:bodyPr anchorCtr="0" anchor="ctr" bIns="68575" lIns="68575" spcFirstLastPara="1" rIns="68575" wrap="square" tIns="68575">
-            <a:noAutofit/>
-          </a:bodyPr>
-          <a:lstStyle/>
-          <a:p>
-            <a:pPr indent="0" lvl="0" marL="0" marR="0" rtl="0" algn="l">
-              <a:lnSpc>
-                <a:spcPct val="100000"/>
-              </a:lnSpc>
-              <a:spcBef>
-                <a:spcPts val="0"/>
-              </a:spcBef>
-              <a:spcAft>
-                <a:spcPts val="0"/>
-              </a:spcAft>
-              <a:buClr>
-                <a:srgbClr val="000000"/>
-              </a:buClr>
-              <a:buSzPts val="1400"/>
-              <a:buFont typeface="Arial"/>
-              <a:buNone/>
-            </a:pPr>
-            <a:r>
-              <a:t/>
-            </a:r>
-            <a:endParaRPr b="0" i="0" sz="1400" u="none" cap="none" strike="noStrike">
-              <a:solidFill>
-                <a:srgbClr val="000000"/>
-              </a:solidFill>
-              <a:latin typeface="Arial"/>
-              <a:ea typeface="Arial"/>
-              <a:cs typeface="Arial"/>
-              <a:sym typeface="Arial"/>
+              <a:latin typeface="IBM Plex Mono"/>
+              <a:ea typeface="IBM Plex Mono"/>
+              <a:cs typeface="IBM Plex Mono"/>
+              <a:sym typeface="IBM Plex Mono"/>
             </a:endParaRPr>
           </a:p>
         </p:txBody>
@@ -16959,13 +17061,72 @@
       <p:sp>
         <p:nvSpPr>
           <p:cNvPr id="494" name="Google Shape;494;p15"/>
+          <p:cNvSpPr/>
+          <p:nvPr/>
+        </p:nvSpPr>
+        <p:spPr>
+          <a:xfrm>
+            <a:off x="0" y="5122241"/>
+            <a:ext cx="5486400" cy="21260"/>
+          </a:xfrm>
+          <a:prstGeom prst="rect">
+            <a:avLst/>
+          </a:prstGeom>
+          <a:solidFill>
+            <a:srgbClr val="8B1A1A"/>
+          </a:solidFill>
+          <a:ln>
+            <a:noFill/>
+          </a:ln>
+        </p:spPr>
+        <p:txBody>
+          <a:bodyPr anchorCtr="0" anchor="ctr" bIns="68575" lIns="68575" spcFirstLastPara="1" rIns="68575" wrap="square" tIns="68575">
+            <a:noAutofit/>
+          </a:bodyPr>
+          <a:lstStyle/>
+          <a:p>
+            <a:pPr indent="0" lvl="0" marL="0" marR="0" rtl="0" algn="l">
+              <a:lnSpc>
+                <a:spcPct val="100000"/>
+              </a:lnSpc>
+              <a:spcBef>
+                <a:spcPts val="0"/>
+              </a:spcBef>
+              <a:spcAft>
+                <a:spcPts val="0"/>
+              </a:spcAft>
+              <a:buClr>
+                <a:srgbClr val="000000"/>
+              </a:buClr>
+              <a:buSzPts val="1400"/>
+              <a:buFont typeface="Arial"/>
+              <a:buNone/>
+            </a:pPr>
+            <a:r>
+              <a:t/>
+            </a:r>
+            <a:endParaRPr b="0" i="0" sz="1400" u="none" cap="none" strike="noStrike">
+              <a:solidFill>
+                <a:srgbClr val="000000"/>
+              </a:solidFill>
+              <a:latin typeface="Arial"/>
+              <a:ea typeface="Arial"/>
+              <a:cs typeface="Arial"/>
+              <a:sym typeface="Arial"/>
+            </a:endParaRPr>
+          </a:p>
+        </p:txBody>
+      </p:sp>
+      <p:sp>
+        <p:nvSpPr>
+          <p:cNvPr id="495" name="Google Shape;495;p15"/>
           <p:cNvSpPr txBox="1"/>
           <p:nvPr/>
         </p:nvSpPr>
         <p:spPr>
           <a:xfrm>
-            <a:off x="7200900" y="4930902"/>
-            <a:ext cx="1371600" cy="192024"/>
+            <a:off x="8286600" y="4886313"/>
+            <a:ext cx="857400" cy="128700"/>
           </a:xfrm>
           <a:prstGeom prst="rect">
             <a:avLst/>
@@ -16976,7 +17137,7 @@
           </a:ln>
         </p:spPr>
         <p:txBody>
-          <a:bodyPr anchorCtr="0" anchor="ctr" bIns="0" lIns="0" spcFirstLastPara="1" rIns="0" wrap="square" tIns="0">
+          <a:bodyPr anchorCtr="0" anchor="t" bIns="0" lIns="0" spcFirstLastPara="1" rIns="0" wrap="square" tIns="0">
             <a:noAutofit/>
           </a:bodyPr>
           <a:lstStyle/>
@@ -16999,7 +17160,7 @@
               <a:buNone/>
             </a:pPr>
             <a:r>
-              <a:rPr b="0" i="0" lang="en" sz="700" u="none" cap="none" strike="noStrike">
+              <a:rPr lang="en" sz="700">
                 <a:solidFill>
                   <a:schemeClr val="dk1"/>
                 </a:solidFill>
@@ -17008,10 +17169,10 @@
                 <a:cs typeface="IBM Plex Mono"/>
                 <a:sym typeface="IBM Plex Mono"/>
               </a:rPr>
-              <a:t>13 / 2</a:t>
-            </a:r>
-            <a:r>
-              <a:rPr lang="en" sz="700">
+              <a:t>13</a:t>
+            </a:r>
+            <a:r>
+              <a:rPr i="0" lang="en" sz="700" u="none" cap="none" strike="noStrike">
                 <a:solidFill>
                   <a:schemeClr val="dk1"/>
                 </a:solidFill>
@@ -17020,75 +17181,28 @@
                 <a:cs typeface="IBM Plex Mono"/>
                 <a:sym typeface="IBM Plex Mono"/>
               </a:rPr>
+              <a:t> / 2</a:t>
+            </a:r>
+            <a:r>
+              <a:rPr lang="en" sz="700">
+                <a:solidFill>
+                  <a:schemeClr val="dk1"/>
+                </a:solidFill>
+                <a:latin typeface="IBM Plex Mono"/>
+                <a:ea typeface="IBM Plex Mono"/>
+                <a:cs typeface="IBM Plex Mono"/>
+                <a:sym typeface="IBM Plex Mono"/>
+              </a:rPr>
               <a:t>1</a:t>
             </a:r>
-            <a:endParaRPr b="0" i="0" sz="700" u="none" cap="none" strike="noStrike">
+            <a:endParaRPr i="0" sz="700" u="none" cap="none" strike="noStrike">
               <a:solidFill>
                 <a:schemeClr val="dk1"/>
               </a:solidFill>
-              <a:latin typeface="Calibri"/>
-              <a:ea typeface="Calibri"/>
-              <a:cs typeface="Calibri"/>
-              <a:sym typeface="Calibri"/>
-            </a:endParaRPr>
-          </a:p>
-        </p:txBody>
-      </p:sp>
-      <p:sp>
-        <p:nvSpPr>
-          <p:cNvPr id="495" name="Google Shape;495;p15"/>
-          <p:cNvSpPr/>
-          <p:nvPr/>
-        </p:nvSpPr>
-        <p:spPr>
-          <a:xfrm>
-            <a:off x="0" y="5122241"/>
-            <a:ext cx="5486400" cy="21260"/>
-          </a:xfrm>
-          <a:prstGeom prst="rect">
-            <a:avLst/>
-          </a:prstGeom>
-          <a:solidFill>
-            <a:srgbClr val="8B1A1A"/>
-          </a:solidFill>
-          <a:ln>
-            <a:noFill/>
-          </a:ln>
-        </p:spPr>
-        <p:txBody>
-          <a:bodyPr anchorCtr="0" anchor="ctr" bIns="68575" lIns="68575" spcFirstLastPara="1" rIns="68575" wrap="square" tIns="68575">
-            <a:noAutofit/>
-          </a:bodyPr>
-          <a:lstStyle/>
-          <a:p>
-            <a:pPr indent="0" lvl="0" marL="0" marR="0" rtl="0" algn="l">
-              <a:lnSpc>
-                <a:spcPct val="100000"/>
-              </a:lnSpc>
-              <a:spcBef>
-                <a:spcPts val="0"/>
-              </a:spcBef>
-              <a:spcAft>
-                <a:spcPts val="0"/>
-              </a:spcAft>
-              <a:buClr>
-                <a:srgbClr val="000000"/>
-              </a:buClr>
-              <a:buSzPts val="1400"/>
-              <a:buFont typeface="Arial"/>
-              <a:buNone/>
-            </a:pPr>
-            <a:r>
-              <a:t/>
-            </a:r>
-            <a:endParaRPr b="0" i="0" sz="1400" u="none" cap="none" strike="noStrike">
-              <a:solidFill>
-                <a:srgbClr val="000000"/>
-              </a:solidFill>
-              <a:latin typeface="Arial"/>
-              <a:ea typeface="Arial"/>
-              <a:cs typeface="Arial"/>
-              <a:sym typeface="Arial"/>
+              <a:latin typeface="IBM Plex Mono"/>
+              <a:ea typeface="IBM Plex Mono"/>
+              <a:cs typeface="IBM Plex Mono"/>
+              <a:sym typeface="IBM Plex Mono"/>
             </a:endParaRPr>
           </a:p>
         </p:txBody>
@@ -19082,13 +19196,72 @@
       <p:sp>
         <p:nvSpPr>
           <p:cNvPr id="530" name="Google Shape;530;p16"/>
+          <p:cNvSpPr/>
+          <p:nvPr/>
+        </p:nvSpPr>
+        <p:spPr>
+          <a:xfrm>
+            <a:off x="0" y="5122069"/>
+            <a:ext cx="5943600" cy="21431"/>
+          </a:xfrm>
+          <a:prstGeom prst="rect">
+            <a:avLst/>
+          </a:prstGeom>
+          <a:solidFill>
+            <a:srgbClr val="8B1A1A"/>
+          </a:solidFill>
+          <a:ln>
+            <a:noFill/>
+          </a:ln>
+        </p:spPr>
+        <p:txBody>
+          <a:bodyPr anchorCtr="0" anchor="ctr" bIns="68575" lIns="68575" spcFirstLastPara="1" rIns="68575" wrap="square" tIns="68575">
+            <a:noAutofit/>
+          </a:bodyPr>
+          <a:lstStyle/>
+          <a:p>
+            <a:pPr indent="0" lvl="0" marL="0" marR="0" rtl="0" algn="l">
+              <a:lnSpc>
+                <a:spcPct val="100000"/>
+              </a:lnSpc>
+              <a:spcBef>
+                <a:spcPts val="0"/>
+              </a:spcBef>
+              <a:spcAft>
+                <a:spcPts val="0"/>
+              </a:spcAft>
+              <a:buClr>
+                <a:srgbClr val="000000"/>
+              </a:buClr>
+              <a:buSzPts val="1400"/>
+              <a:buFont typeface="Arial"/>
+              <a:buNone/>
+            </a:pPr>
+            <a:r>
+              <a:t/>
+            </a:r>
+            <a:endParaRPr b="0" i="0" sz="1400" u="none" cap="none" strike="noStrike">
+              <a:solidFill>
+                <a:srgbClr val="000000"/>
+              </a:solidFill>
+              <a:latin typeface="Arial"/>
+              <a:ea typeface="Arial"/>
+              <a:cs typeface="Arial"/>
+              <a:sym typeface="Arial"/>
+            </a:endParaRPr>
+          </a:p>
+        </p:txBody>
+      </p:sp>
+      <p:sp>
+        <p:nvSpPr>
+          <p:cNvPr id="531" name="Google Shape;531;p16"/>
           <p:cNvSpPr txBox="1"/>
           <p:nvPr/>
         </p:nvSpPr>
         <p:spPr>
           <a:xfrm>
-            <a:off x="7143750" y="4964906"/>
-            <a:ext cx="1428750" cy="128588"/>
+            <a:off x="8286600" y="4886313"/>
+            <a:ext cx="857400" cy="128700"/>
           </a:xfrm>
           <a:prstGeom prst="rect">
             <a:avLst/>
@@ -19099,7 +19272,7 @@
           </a:ln>
         </p:spPr>
         <p:txBody>
-          <a:bodyPr anchorCtr="0" anchor="ctr" bIns="0" lIns="0" spcFirstLastPara="1" rIns="0" wrap="square" tIns="0">
+          <a:bodyPr anchorCtr="0" anchor="t" bIns="0" lIns="0" spcFirstLastPara="1" rIns="0" wrap="square" tIns="0">
             <a:noAutofit/>
           </a:bodyPr>
           <a:lstStyle/>
@@ -19117,12 +19290,12 @@
               <a:buClr>
                 <a:srgbClr val="9A9AAA"/>
               </a:buClr>
-              <a:buSzPts val="800"/>
+              <a:buSzPts val="700"/>
               <a:buFont typeface="IBM Plex Mono"/>
               <a:buNone/>
             </a:pPr>
             <a:r>
-              <a:rPr b="0" i="0" lang="en" sz="800" u="none" cap="none" strike="noStrike">
+              <a:rPr lang="en" sz="700">
                 <a:solidFill>
                   <a:schemeClr val="dk1"/>
                 </a:solidFill>
@@ -19131,10 +19304,10 @@
                 <a:cs typeface="IBM Plex Mono"/>
                 <a:sym typeface="IBM Plex Mono"/>
               </a:rPr>
-              <a:t>14 / 2</a:t>
-            </a:r>
-            <a:r>
-              <a:rPr lang="en" sz="800">
+              <a:t>14</a:t>
+            </a:r>
+            <a:r>
+              <a:rPr i="0" lang="en" sz="700" u="none" cap="none" strike="noStrike">
                 <a:solidFill>
                   <a:schemeClr val="dk1"/>
                 </a:solidFill>
@@ -19143,75 +19316,28 @@
                 <a:cs typeface="IBM Plex Mono"/>
                 <a:sym typeface="IBM Plex Mono"/>
               </a:rPr>
+              <a:t> / 2</a:t>
+            </a:r>
+            <a:r>
+              <a:rPr lang="en" sz="700">
+                <a:solidFill>
+                  <a:schemeClr val="dk1"/>
+                </a:solidFill>
+                <a:latin typeface="IBM Plex Mono"/>
+                <a:ea typeface="IBM Plex Mono"/>
+                <a:cs typeface="IBM Plex Mono"/>
+                <a:sym typeface="IBM Plex Mono"/>
+              </a:rPr>
               <a:t>1</a:t>
             </a:r>
-            <a:endParaRPr b="0" i="0" sz="800" u="none" cap="none" strike="noStrike">
+            <a:endParaRPr i="0" sz="700" u="none" cap="none" strike="noStrike">
               <a:solidFill>
                 <a:schemeClr val="dk1"/>
               </a:solidFill>
-              <a:latin typeface="Calibri"/>
-              <a:ea typeface="Calibri"/>
-              <a:cs typeface="Calibri"/>
-              <a:sym typeface="Calibri"/>
-            </a:endParaRPr>
-          </a:p>
-        </p:txBody>
-      </p:sp>
-      <p:sp>
-        <p:nvSpPr>
-          <p:cNvPr id="531" name="Google Shape;531;p16"/>
-          <p:cNvSpPr/>
-          <p:nvPr/>
-        </p:nvSpPr>
-        <p:spPr>
-          <a:xfrm>
-            <a:off x="0" y="5122069"/>
-            <a:ext cx="5943600" cy="21431"/>
-          </a:xfrm>
-          <a:prstGeom prst="rect">
-            <a:avLst/>
-          </a:prstGeom>
-          <a:solidFill>
-            <a:srgbClr val="8B1A1A"/>
-          </a:solidFill>
-          <a:ln>
-            <a:noFill/>
-          </a:ln>
-        </p:spPr>
-        <p:txBody>
-          <a:bodyPr anchorCtr="0" anchor="ctr" bIns="68575" lIns="68575" spcFirstLastPara="1" rIns="68575" wrap="square" tIns="68575">
-            <a:noAutofit/>
-          </a:bodyPr>
-          <a:lstStyle/>
-          <a:p>
-            <a:pPr indent="0" lvl="0" marL="0" marR="0" rtl="0" algn="l">
-              <a:lnSpc>
-                <a:spcPct val="100000"/>
-              </a:lnSpc>
-              <a:spcBef>
-                <a:spcPts val="0"/>
-              </a:spcBef>
-              <a:spcAft>
-                <a:spcPts val="0"/>
-              </a:spcAft>
-              <a:buClr>
-                <a:srgbClr val="000000"/>
-              </a:buClr>
-              <a:buSzPts val="1400"/>
-              <a:buFont typeface="Arial"/>
-              <a:buNone/>
-            </a:pPr>
-            <a:r>
-              <a:t/>
-            </a:r>
-            <a:endParaRPr b="0" i="0" sz="1400" u="none" cap="none" strike="noStrike">
-              <a:solidFill>
-                <a:srgbClr val="000000"/>
-              </a:solidFill>
-              <a:latin typeface="Arial"/>
-              <a:ea typeface="Arial"/>
-              <a:cs typeface="Arial"/>
-              <a:sym typeface="Arial"/>
+              <a:latin typeface="IBM Plex Mono"/>
+              <a:ea typeface="IBM Plex Mono"/>
+              <a:cs typeface="IBM Plex Mono"/>
+              <a:sym typeface="IBM Plex Mono"/>
             </a:endParaRPr>
           </a:p>
         </p:txBody>
@@ -21490,53 +21616,145 @@
           </a:p>
         </p:txBody>
       </p:sp>
-      <p:cxnSp>
-        <p:nvCxnSpPr>
+      <p:sp>
+        <p:nvSpPr>
           <p:cNvPr id="571" name="Google Shape;571;p17"/>
-          <p:cNvCxnSpPr/>
-          <p:nvPr/>
-        </p:nvCxnSpPr>
-        <p:spPr>
-          <a:xfrm>
-            <a:off x="0" y="4886341"/>
-            <a:ext cx="9144029" cy="0"/>
-          </a:xfrm>
-          <a:prstGeom prst="straightConnector1">
+          <p:cNvSpPr/>
+          <p:nvPr/>
+        </p:nvSpPr>
+        <p:spPr>
+          <a:xfrm>
+            <a:off x="0" y="5122085"/>
+            <a:ext cx="6400820" cy="21431"/>
+          </a:xfrm>
+          <a:prstGeom prst="rect">
+            <a:avLst/>
+          </a:prstGeom>
+          <a:solidFill>
+            <a:srgbClr val="8B1A1A"/>
+          </a:solidFill>
+          <a:ln>
+            <a:noFill/>
+          </a:ln>
+        </p:spPr>
+        <p:txBody>
+          <a:bodyPr anchorCtr="0" anchor="ctr" bIns="68575" lIns="68575" spcFirstLastPara="1" rIns="68575" wrap="square" tIns="68575">
+            <a:noAutofit/>
+          </a:bodyPr>
+          <a:lstStyle/>
+          <a:p>
+            <a:pPr indent="0" lvl="0" marL="0" marR="0" rtl="0" algn="l">
+              <a:lnSpc>
+                <a:spcPct val="100000"/>
+              </a:lnSpc>
+              <a:spcBef>
+                <a:spcPts val="0"/>
+              </a:spcBef>
+              <a:spcAft>
+                <a:spcPts val="0"/>
+              </a:spcAft>
+              <a:buClr>
+                <a:srgbClr val="000000"/>
+              </a:buClr>
+              <a:buSzPts val="1400"/>
+              <a:buFont typeface="Arial"/>
+              <a:buNone/>
+            </a:pPr>
+            <a:r>
+              <a:t/>
+            </a:r>
+            <a:endParaRPr b="0" i="0" sz="1400" u="none" cap="none" strike="noStrike">
+              <a:solidFill>
+                <a:srgbClr val="000000"/>
+              </a:solidFill>
+              <a:latin typeface="Arial"/>
+              <a:ea typeface="Arial"/>
+              <a:cs typeface="Arial"/>
+              <a:sym typeface="Arial"/>
+            </a:endParaRPr>
+          </a:p>
+        </p:txBody>
+      </p:sp>
+      <p:sp>
+        <p:nvSpPr>
+          <p:cNvPr id="572" name="Google Shape;572;p17"/>
+          <p:cNvSpPr/>
+          <p:nvPr/>
+        </p:nvSpPr>
+        <p:spPr>
+          <a:xfrm>
+            <a:off x="0" y="4886203"/>
+            <a:ext cx="9143700" cy="6900"/>
+          </a:xfrm>
+          <a:prstGeom prst="rect">
+            <a:avLst/>
+          </a:prstGeom>
+          <a:solidFill>
+            <a:srgbClr val="D4CFC8"/>
+          </a:solidFill>
+          <a:ln>
+            <a:noFill/>
+          </a:ln>
+        </p:spPr>
+        <p:txBody>
+          <a:bodyPr anchorCtr="0" anchor="ctr" bIns="68575" lIns="68575" spcFirstLastPara="1" rIns="68575" wrap="square" tIns="68575">
+            <a:noAutofit/>
+          </a:bodyPr>
+          <a:lstStyle/>
+          <a:p>
+            <a:pPr indent="0" lvl="0" marL="0" marR="0" rtl="0" algn="l">
+              <a:lnSpc>
+                <a:spcPct val="100000"/>
+              </a:lnSpc>
+              <a:spcBef>
+                <a:spcPts val="0"/>
+              </a:spcBef>
+              <a:spcAft>
+                <a:spcPts val="0"/>
+              </a:spcAft>
+              <a:buClr>
+                <a:srgbClr val="000000"/>
+              </a:buClr>
+              <a:buSzPts val="1400"/>
+              <a:buFont typeface="Arial"/>
+              <a:buNone/>
+            </a:pPr>
+            <a:r>
+              <a:t/>
+            </a:r>
+            <a:endParaRPr b="0" i="0" sz="1400" u="none" cap="none" strike="noStrike">
+              <a:solidFill>
+                <a:srgbClr val="000000"/>
+              </a:solidFill>
+              <a:latin typeface="Arial"/>
+              <a:ea typeface="Arial"/>
+              <a:cs typeface="Arial"/>
+              <a:sym typeface="Arial"/>
+            </a:endParaRPr>
+          </a:p>
+        </p:txBody>
+      </p:sp>
+      <p:sp>
+        <p:nvSpPr>
+          <p:cNvPr id="573" name="Google Shape;573;p17"/>
+          <p:cNvSpPr txBox="1"/>
+          <p:nvPr/>
+        </p:nvSpPr>
+        <p:spPr>
+          <a:xfrm>
+            <a:off x="8286600" y="4886313"/>
+            <a:ext cx="857400" cy="128700"/>
+          </a:xfrm>
+          <a:prstGeom prst="rect">
             <a:avLst/>
           </a:prstGeom>
           <a:noFill/>
-          <a:ln cap="flat" cmpd="sng" w="9525">
-            <a:solidFill>
-              <a:srgbClr val="D4CFC8"/>
-            </a:solidFill>
-            <a:prstDash val="solid"/>
-            <a:round/>
-            <a:headEnd len="sm" w="sm" type="none"/>
-            <a:tailEnd len="sm" w="sm" type="none"/>
-          </a:ln>
-        </p:spPr>
-      </p:cxnSp>
-      <p:sp>
-        <p:nvSpPr>
-          <p:cNvPr id="572" name="Google Shape;572;p17"/>
-          <p:cNvSpPr txBox="1"/>
-          <p:nvPr/>
-        </p:nvSpPr>
-        <p:spPr>
-          <a:xfrm>
-            <a:off x="7858151" y="5000641"/>
-            <a:ext cx="714377" cy="114300"/>
-          </a:xfrm>
-          <a:prstGeom prst="rect">
-            <a:avLst/>
-          </a:prstGeom>
-          <a:noFill/>
-          <a:ln>
-            <a:noFill/>
-          </a:ln>
-        </p:spPr>
-        <p:txBody>
-          <a:bodyPr anchorCtr="0" anchor="ctr" bIns="0" lIns="0" spcFirstLastPara="1" rIns="0" wrap="square" tIns="0">
+          <a:ln>
+            <a:noFill/>
+          </a:ln>
+        </p:spPr>
+        <p:txBody>
+          <a:bodyPr anchorCtr="0" anchor="t" bIns="0" lIns="0" spcFirstLastPara="1" rIns="0" wrap="square" tIns="0">
             <a:noAutofit/>
           </a:bodyPr>
           <a:lstStyle/>
@@ -21559,7 +21777,7 @@
               <a:buNone/>
             </a:pPr>
             <a:r>
-              <a:rPr b="0" i="0" lang="en" sz="700" u="none" cap="none" strike="noStrike">
+              <a:rPr lang="en" sz="700">
                 <a:solidFill>
                   <a:schemeClr val="dk1"/>
                 </a:solidFill>
@@ -21568,10 +21786,10 @@
                 <a:cs typeface="IBM Plex Mono"/>
                 <a:sym typeface="IBM Plex Mono"/>
               </a:rPr>
-              <a:t>15 / 2</a:t>
-            </a:r>
-            <a:r>
-              <a:rPr lang="en" sz="700">
+              <a:t>15</a:t>
+            </a:r>
+            <a:r>
+              <a:rPr i="0" lang="en" sz="700" u="none" cap="none" strike="noStrike">
                 <a:solidFill>
                   <a:schemeClr val="dk1"/>
                 </a:solidFill>
@@ -21580,75 +21798,28 @@
                 <a:cs typeface="IBM Plex Mono"/>
                 <a:sym typeface="IBM Plex Mono"/>
               </a:rPr>
+              <a:t> / 2</a:t>
+            </a:r>
+            <a:r>
+              <a:rPr lang="en" sz="700">
+                <a:solidFill>
+                  <a:schemeClr val="dk1"/>
+                </a:solidFill>
+                <a:latin typeface="IBM Plex Mono"/>
+                <a:ea typeface="IBM Plex Mono"/>
+                <a:cs typeface="IBM Plex Mono"/>
+                <a:sym typeface="IBM Plex Mono"/>
+              </a:rPr>
               <a:t>1</a:t>
             </a:r>
-            <a:endParaRPr b="0" i="0" sz="700" u="none" cap="none" strike="noStrike">
+            <a:endParaRPr i="0" sz="700" u="none" cap="none" strike="noStrike">
               <a:solidFill>
                 <a:schemeClr val="dk1"/>
               </a:solidFill>
-              <a:latin typeface="Calibri"/>
-              <a:ea typeface="Calibri"/>
-              <a:cs typeface="Calibri"/>
-              <a:sym typeface="Calibri"/>
-            </a:endParaRPr>
-          </a:p>
-        </p:txBody>
-      </p:sp>
-      <p:sp>
-        <p:nvSpPr>
-          <p:cNvPr id="573" name="Google Shape;573;p17"/>
-          <p:cNvSpPr/>
-          <p:nvPr/>
-        </p:nvSpPr>
-        <p:spPr>
-          <a:xfrm>
-            <a:off x="0" y="5122085"/>
-            <a:ext cx="6400820" cy="21431"/>
-          </a:xfrm>
-          <a:prstGeom prst="rect">
-            <a:avLst/>
-          </a:prstGeom>
-          <a:solidFill>
-            <a:srgbClr val="8B1A1A"/>
-          </a:solidFill>
-          <a:ln>
-            <a:noFill/>
-          </a:ln>
-        </p:spPr>
-        <p:txBody>
-          <a:bodyPr anchorCtr="0" anchor="ctr" bIns="68575" lIns="68575" spcFirstLastPara="1" rIns="68575" wrap="square" tIns="68575">
-            <a:noAutofit/>
-          </a:bodyPr>
-          <a:lstStyle/>
-          <a:p>
-            <a:pPr indent="0" lvl="0" marL="0" marR="0" rtl="0" algn="l">
-              <a:lnSpc>
-                <a:spcPct val="100000"/>
-              </a:lnSpc>
-              <a:spcBef>
-                <a:spcPts val="0"/>
-              </a:spcBef>
-              <a:spcAft>
-                <a:spcPts val="0"/>
-              </a:spcAft>
-              <a:buClr>
-                <a:srgbClr val="000000"/>
-              </a:buClr>
-              <a:buSzPts val="1400"/>
-              <a:buFont typeface="Arial"/>
-              <a:buNone/>
-            </a:pPr>
-            <a:r>
-              <a:t/>
-            </a:r>
-            <a:endParaRPr b="0" i="0" sz="1400" u="none" cap="none" strike="noStrike">
-              <a:solidFill>
-                <a:srgbClr val="000000"/>
-              </a:solidFill>
-              <a:latin typeface="Arial"/>
-              <a:ea typeface="Arial"/>
-              <a:cs typeface="Arial"/>
-              <a:sym typeface="Arial"/>
+              <a:latin typeface="IBM Plex Mono"/>
+              <a:ea typeface="IBM Plex Mono"/>
+              <a:cs typeface="IBM Plex Mono"/>
+              <a:sym typeface="IBM Plex Mono"/>
             </a:endParaRPr>
           </a:p>
         </p:txBody>
@@ -23068,53 +23239,145 @@
           </a:p>
         </p:txBody>
       </p:sp>
-      <p:cxnSp>
-        <p:nvCxnSpPr>
+      <p:sp>
+        <p:nvSpPr>
           <p:cNvPr id="600" name="Google Shape;600;p18"/>
-          <p:cNvCxnSpPr/>
-          <p:nvPr/>
-        </p:nvCxnSpPr>
-        <p:spPr>
-          <a:xfrm>
-            <a:off x="0" y="4886325"/>
-            <a:ext cx="9144000" cy="0"/>
-          </a:xfrm>
-          <a:prstGeom prst="straightConnector1">
+          <p:cNvSpPr/>
+          <p:nvPr/>
+        </p:nvSpPr>
+        <p:spPr>
+          <a:xfrm>
+            <a:off x="0" y="5122069"/>
+            <a:ext cx="6858000" cy="21431"/>
+          </a:xfrm>
+          <a:prstGeom prst="rect">
+            <a:avLst/>
+          </a:prstGeom>
+          <a:solidFill>
+            <a:srgbClr val="8B1A1A"/>
+          </a:solidFill>
+          <a:ln>
+            <a:noFill/>
+          </a:ln>
+        </p:spPr>
+        <p:txBody>
+          <a:bodyPr anchorCtr="0" anchor="ctr" bIns="68575" lIns="68575" spcFirstLastPara="1" rIns="68575" wrap="square" tIns="68575">
+            <a:noAutofit/>
+          </a:bodyPr>
+          <a:lstStyle/>
+          <a:p>
+            <a:pPr indent="0" lvl="0" marL="0" marR="0" rtl="0" algn="l">
+              <a:lnSpc>
+                <a:spcPct val="100000"/>
+              </a:lnSpc>
+              <a:spcBef>
+                <a:spcPts val="0"/>
+              </a:spcBef>
+              <a:spcAft>
+                <a:spcPts val="0"/>
+              </a:spcAft>
+              <a:buClr>
+                <a:srgbClr val="000000"/>
+              </a:buClr>
+              <a:buSzPts val="1400"/>
+              <a:buFont typeface="Arial"/>
+              <a:buNone/>
+            </a:pPr>
+            <a:r>
+              <a:t/>
+            </a:r>
+            <a:endParaRPr b="0" i="0" sz="1400" u="none" cap="none" strike="noStrike">
+              <a:solidFill>
+                <a:srgbClr val="000000"/>
+              </a:solidFill>
+              <a:latin typeface="Arial"/>
+              <a:ea typeface="Arial"/>
+              <a:cs typeface="Arial"/>
+              <a:sym typeface="Arial"/>
+            </a:endParaRPr>
+          </a:p>
+        </p:txBody>
+      </p:sp>
+      <p:sp>
+        <p:nvSpPr>
+          <p:cNvPr id="601" name="Google Shape;601;p18"/>
+          <p:cNvSpPr/>
+          <p:nvPr/>
+        </p:nvSpPr>
+        <p:spPr>
+          <a:xfrm>
+            <a:off x="0" y="4886203"/>
+            <a:ext cx="9143700" cy="6900"/>
+          </a:xfrm>
+          <a:prstGeom prst="rect">
+            <a:avLst/>
+          </a:prstGeom>
+          <a:solidFill>
+            <a:srgbClr val="D4CFC8"/>
+          </a:solidFill>
+          <a:ln>
+            <a:noFill/>
+          </a:ln>
+        </p:spPr>
+        <p:txBody>
+          <a:bodyPr anchorCtr="0" anchor="ctr" bIns="68575" lIns="68575" spcFirstLastPara="1" rIns="68575" wrap="square" tIns="68575">
+            <a:noAutofit/>
+          </a:bodyPr>
+          <a:lstStyle/>
+          <a:p>
+            <a:pPr indent="0" lvl="0" marL="0" marR="0" rtl="0" algn="l">
+              <a:lnSpc>
+                <a:spcPct val="100000"/>
+              </a:lnSpc>
+              <a:spcBef>
+                <a:spcPts val="0"/>
+              </a:spcBef>
+              <a:spcAft>
+                <a:spcPts val="0"/>
+              </a:spcAft>
+              <a:buClr>
+                <a:srgbClr val="000000"/>
+              </a:buClr>
+              <a:buSzPts val="1400"/>
+              <a:buFont typeface="Arial"/>
+              <a:buNone/>
+            </a:pPr>
+            <a:r>
+              <a:t/>
+            </a:r>
+            <a:endParaRPr b="0" i="0" sz="1400" u="none" cap="none" strike="noStrike">
+              <a:solidFill>
+                <a:srgbClr val="000000"/>
+              </a:solidFill>
+              <a:latin typeface="Arial"/>
+              <a:ea typeface="Arial"/>
+              <a:cs typeface="Arial"/>
+              <a:sym typeface="Arial"/>
+            </a:endParaRPr>
+          </a:p>
+        </p:txBody>
+      </p:sp>
+      <p:sp>
+        <p:nvSpPr>
+          <p:cNvPr id="602" name="Google Shape;602;p18"/>
+          <p:cNvSpPr txBox="1"/>
+          <p:nvPr/>
+        </p:nvSpPr>
+        <p:spPr>
+          <a:xfrm>
+            <a:off x="8286600" y="4886313"/>
+            <a:ext cx="857400" cy="128700"/>
+          </a:xfrm>
+          <a:prstGeom prst="rect">
             <a:avLst/>
           </a:prstGeom>
           <a:noFill/>
-          <a:ln cap="flat" cmpd="sng" w="9525">
-            <a:solidFill>
-              <a:srgbClr val="D4CFC8"/>
-            </a:solidFill>
-            <a:prstDash val="solid"/>
-            <a:round/>
-            <a:headEnd len="sm" w="sm" type="none"/>
-            <a:tailEnd len="sm" w="sm" type="none"/>
-          </a:ln>
-        </p:spPr>
-      </p:cxnSp>
-      <p:sp>
-        <p:nvSpPr>
-          <p:cNvPr id="601" name="Google Shape;601;p18"/>
-          <p:cNvSpPr txBox="1"/>
-          <p:nvPr/>
-        </p:nvSpPr>
-        <p:spPr>
-          <a:xfrm>
-            <a:off x="7858125" y="5000625"/>
-            <a:ext cx="714375" cy="114300"/>
-          </a:xfrm>
-          <a:prstGeom prst="rect">
-            <a:avLst/>
-          </a:prstGeom>
-          <a:noFill/>
-          <a:ln>
-            <a:noFill/>
-          </a:ln>
-        </p:spPr>
-        <p:txBody>
-          <a:bodyPr anchorCtr="0" anchor="ctr" bIns="0" lIns="0" spcFirstLastPara="1" rIns="0" wrap="square" tIns="0">
+          <a:ln>
+            <a:noFill/>
+          </a:ln>
+        </p:spPr>
+        <p:txBody>
+          <a:bodyPr anchorCtr="0" anchor="t" bIns="0" lIns="0" spcFirstLastPara="1" rIns="0" wrap="square" tIns="0">
             <a:noAutofit/>
           </a:bodyPr>
           <a:lstStyle/>
@@ -23132,12 +23395,12 @@
               <a:buClr>
                 <a:srgbClr val="9A9AAA"/>
               </a:buClr>
-              <a:buSzPts val="800"/>
+              <a:buSzPts val="700"/>
               <a:buFont typeface="IBM Plex Mono"/>
               <a:buNone/>
             </a:pPr>
             <a:r>
-              <a:rPr b="0" i="0" lang="en" sz="800" u="none" cap="none" strike="noStrike">
+              <a:rPr lang="en" sz="700">
                 <a:solidFill>
                   <a:schemeClr val="dk1"/>
                 </a:solidFill>
@@ -23146,10 +23409,10 @@
                 <a:cs typeface="IBM Plex Mono"/>
                 <a:sym typeface="IBM Plex Mono"/>
               </a:rPr>
-              <a:t>16 / 2</a:t>
-            </a:r>
-            <a:r>
-              <a:rPr lang="en" sz="800">
+              <a:t>16</a:t>
+            </a:r>
+            <a:r>
+              <a:rPr i="0" lang="en" sz="700" u="none" cap="none" strike="noStrike">
                 <a:solidFill>
                   <a:schemeClr val="dk1"/>
                 </a:solidFill>
@@ -23158,75 +23421,28 @@
                 <a:cs typeface="IBM Plex Mono"/>
                 <a:sym typeface="IBM Plex Mono"/>
               </a:rPr>
+              <a:t> / 2</a:t>
+            </a:r>
+            <a:r>
+              <a:rPr lang="en" sz="700">
+                <a:solidFill>
+                  <a:schemeClr val="dk1"/>
+                </a:solidFill>
+                <a:latin typeface="IBM Plex Mono"/>
+                <a:ea typeface="IBM Plex Mono"/>
+                <a:cs typeface="IBM Plex Mono"/>
+                <a:sym typeface="IBM Plex Mono"/>
+              </a:rPr>
               <a:t>1</a:t>
             </a:r>
-            <a:endParaRPr b="0" i="0" sz="800" u="none" cap="none" strike="noStrike">
+            <a:endParaRPr i="0" sz="700" u="none" cap="none" strike="noStrike">
               <a:solidFill>
                 <a:schemeClr val="dk1"/>
               </a:solidFill>
-              <a:latin typeface="Calibri"/>
-              <a:ea typeface="Calibri"/>
-              <a:cs typeface="Calibri"/>
-              <a:sym typeface="Calibri"/>
-            </a:endParaRPr>
-          </a:p>
-        </p:txBody>
-      </p:sp>
-      <p:sp>
-        <p:nvSpPr>
-          <p:cNvPr id="602" name="Google Shape;602;p18"/>
-          <p:cNvSpPr/>
-          <p:nvPr/>
-        </p:nvSpPr>
-        <p:spPr>
-          <a:xfrm>
-            <a:off x="0" y="5122069"/>
-            <a:ext cx="6858000" cy="21431"/>
-          </a:xfrm>
-          <a:prstGeom prst="rect">
-            <a:avLst/>
-          </a:prstGeom>
-          <a:solidFill>
-            <a:srgbClr val="8B1A1A"/>
-          </a:solidFill>
-          <a:ln>
-            <a:noFill/>
-          </a:ln>
-        </p:spPr>
-        <p:txBody>
-          <a:bodyPr anchorCtr="0" anchor="ctr" bIns="68575" lIns="68575" spcFirstLastPara="1" rIns="68575" wrap="square" tIns="68575">
-            <a:noAutofit/>
-          </a:bodyPr>
-          <a:lstStyle/>
-          <a:p>
-            <a:pPr indent="0" lvl="0" marL="0" marR="0" rtl="0" algn="l">
-              <a:lnSpc>
-                <a:spcPct val="100000"/>
-              </a:lnSpc>
-              <a:spcBef>
-                <a:spcPts val="0"/>
-              </a:spcBef>
-              <a:spcAft>
-                <a:spcPts val="0"/>
-              </a:spcAft>
-              <a:buClr>
-                <a:srgbClr val="000000"/>
-              </a:buClr>
-              <a:buSzPts val="1400"/>
-              <a:buFont typeface="Arial"/>
-              <a:buNone/>
-            </a:pPr>
-            <a:r>
-              <a:t/>
-            </a:r>
-            <a:endParaRPr b="0" i="0" sz="1400" u="none" cap="none" strike="noStrike">
-              <a:solidFill>
-                <a:srgbClr val="000000"/>
-              </a:solidFill>
-              <a:latin typeface="Arial"/>
-              <a:ea typeface="Arial"/>
-              <a:cs typeface="Arial"/>
-              <a:sym typeface="Arial"/>
+              <a:latin typeface="IBM Plex Mono"/>
+              <a:ea typeface="IBM Plex Mono"/>
+              <a:cs typeface="IBM Plex Mono"/>
+              <a:sym typeface="IBM Plex Mono"/>
             </a:endParaRPr>
           </a:p>
         </p:txBody>
@@ -25752,13 +25968,72 @@
       <p:sp>
         <p:nvSpPr>
           <p:cNvPr id="643" name="Google Shape;643;p19"/>
+          <p:cNvSpPr/>
+          <p:nvPr/>
+        </p:nvSpPr>
+        <p:spPr>
+          <a:xfrm>
+            <a:off x="0" y="5122069"/>
+            <a:ext cx="7315200" cy="21431"/>
+          </a:xfrm>
+          <a:prstGeom prst="rect">
+            <a:avLst/>
+          </a:prstGeom>
+          <a:solidFill>
+            <a:srgbClr val="8B1A1A"/>
+          </a:solidFill>
+          <a:ln>
+            <a:noFill/>
+          </a:ln>
+        </p:spPr>
+        <p:txBody>
+          <a:bodyPr anchorCtr="0" anchor="ctr" bIns="68575" lIns="68575" spcFirstLastPara="1" rIns="68575" wrap="square" tIns="68575">
+            <a:noAutofit/>
+          </a:bodyPr>
+          <a:lstStyle/>
+          <a:p>
+            <a:pPr indent="0" lvl="0" marL="0" marR="0" rtl="0" algn="l">
+              <a:lnSpc>
+                <a:spcPct val="100000"/>
+              </a:lnSpc>
+              <a:spcBef>
+                <a:spcPts val="0"/>
+              </a:spcBef>
+              <a:spcAft>
+                <a:spcPts val="0"/>
+              </a:spcAft>
+              <a:buClr>
+                <a:srgbClr val="000000"/>
+              </a:buClr>
+              <a:buSzPts val="1400"/>
+              <a:buFont typeface="Arial"/>
+              <a:buNone/>
+            </a:pPr>
+            <a:r>
+              <a:t/>
+            </a:r>
+            <a:endParaRPr b="0" i="0" sz="1400" u="none" cap="none" strike="noStrike">
+              <a:solidFill>
+                <a:srgbClr val="000000"/>
+              </a:solidFill>
+              <a:latin typeface="Arial"/>
+              <a:ea typeface="Arial"/>
+              <a:cs typeface="Arial"/>
+              <a:sym typeface="Arial"/>
+            </a:endParaRPr>
+          </a:p>
+        </p:txBody>
+      </p:sp>
+      <p:sp>
+        <p:nvSpPr>
+          <p:cNvPr id="644" name="Google Shape;644;p19"/>
           <p:cNvSpPr txBox="1"/>
           <p:nvPr/>
         </p:nvSpPr>
         <p:spPr>
           <a:xfrm>
-            <a:off x="7858125" y="4964906"/>
-            <a:ext cx="714375" cy="114300"/>
+            <a:off x="8286600" y="4886313"/>
+            <a:ext cx="857400" cy="128700"/>
           </a:xfrm>
           <a:prstGeom prst="rect">
             <a:avLst/>
@@ -25769,7 +26044,7 @@
           </a:ln>
         </p:spPr>
         <p:txBody>
-          <a:bodyPr anchorCtr="0" anchor="ctr" bIns="0" lIns="0" spcFirstLastPara="1" rIns="0" wrap="square" tIns="0">
+          <a:bodyPr anchorCtr="0" anchor="t" bIns="0" lIns="0" spcFirstLastPara="1" rIns="0" wrap="square" tIns="0">
             <a:noAutofit/>
           </a:bodyPr>
           <a:lstStyle/>
@@ -25792,7 +26067,7 @@
               <a:buNone/>
             </a:pPr>
             <a:r>
-              <a:rPr b="0" i="0" lang="en" sz="700" u="none" cap="none" strike="noStrike">
+              <a:rPr lang="en" sz="700">
                 <a:solidFill>
                   <a:schemeClr val="dk1"/>
                 </a:solidFill>
@@ -25801,10 +26076,10 @@
                 <a:cs typeface="IBM Plex Mono"/>
                 <a:sym typeface="IBM Plex Mono"/>
               </a:rPr>
-              <a:t>17 / 2</a:t>
-            </a:r>
-            <a:r>
-              <a:rPr lang="en" sz="700">
+              <a:t>17</a:t>
+            </a:r>
+            <a:r>
+              <a:rPr i="0" lang="en" sz="700" u="none" cap="none" strike="noStrike">
                 <a:solidFill>
                   <a:schemeClr val="dk1"/>
                 </a:solidFill>
@@ -25813,75 +26088,28 @@
                 <a:cs typeface="IBM Plex Mono"/>
                 <a:sym typeface="IBM Plex Mono"/>
               </a:rPr>
+              <a:t> / 2</a:t>
+            </a:r>
+            <a:r>
+              <a:rPr lang="en" sz="700">
+                <a:solidFill>
+                  <a:schemeClr val="dk1"/>
+                </a:solidFill>
+                <a:latin typeface="IBM Plex Mono"/>
+                <a:ea typeface="IBM Plex Mono"/>
+                <a:cs typeface="IBM Plex Mono"/>
+                <a:sym typeface="IBM Plex Mono"/>
+              </a:rPr>
               <a:t>1</a:t>
             </a:r>
-            <a:endParaRPr b="0" i="0" sz="700" u="none" cap="none" strike="noStrike">
+            <a:endParaRPr i="0" sz="700" u="none" cap="none" strike="noStrike">
               <a:solidFill>
                 <a:schemeClr val="dk1"/>
               </a:solidFill>
-              <a:latin typeface="Calibri"/>
-              <a:ea typeface="Calibri"/>
-              <a:cs typeface="Calibri"/>
-              <a:sym typeface="Calibri"/>
-            </a:endParaRPr>
-          </a:p>
-        </p:txBody>
-      </p:sp>
-      <p:sp>
-        <p:nvSpPr>
-          <p:cNvPr id="644" name="Google Shape;644;p19"/>
-          <p:cNvSpPr/>
-          <p:nvPr/>
-        </p:nvSpPr>
-        <p:spPr>
-          <a:xfrm>
-            <a:off x="0" y="5122069"/>
-            <a:ext cx="7315200" cy="21431"/>
-          </a:xfrm>
-          <a:prstGeom prst="rect">
-            <a:avLst/>
-          </a:prstGeom>
-          <a:solidFill>
-            <a:srgbClr val="8B1A1A"/>
-          </a:solidFill>
-          <a:ln>
-            <a:noFill/>
-          </a:ln>
-        </p:spPr>
-        <p:txBody>
-          <a:bodyPr anchorCtr="0" anchor="ctr" bIns="68575" lIns="68575" spcFirstLastPara="1" rIns="68575" wrap="square" tIns="68575">
-            <a:noAutofit/>
-          </a:bodyPr>
-          <a:lstStyle/>
-          <a:p>
-            <a:pPr indent="0" lvl="0" marL="0" marR="0" rtl="0" algn="l">
-              <a:lnSpc>
-                <a:spcPct val="100000"/>
-              </a:lnSpc>
-              <a:spcBef>
-                <a:spcPts val="0"/>
-              </a:spcBef>
-              <a:spcAft>
-                <a:spcPts val="0"/>
-              </a:spcAft>
-              <a:buClr>
-                <a:srgbClr val="000000"/>
-              </a:buClr>
-              <a:buSzPts val="1400"/>
-              <a:buFont typeface="Arial"/>
-              <a:buNone/>
-            </a:pPr>
-            <a:r>
-              <a:t/>
-            </a:r>
-            <a:endParaRPr b="0" i="0" sz="1400" u="none" cap="none" strike="noStrike">
-              <a:solidFill>
-                <a:srgbClr val="000000"/>
-              </a:solidFill>
-              <a:latin typeface="Arial"/>
-              <a:ea typeface="Arial"/>
-              <a:cs typeface="Arial"/>
-              <a:sym typeface="Arial"/>
+              <a:latin typeface="IBM Plex Mono"/>
+              <a:ea typeface="IBM Plex Mono"/>
+              <a:cs typeface="IBM Plex Mono"/>
+              <a:sym typeface="IBM Plex Mono"/>
             </a:endParaRPr>
           </a:p>
         </p:txBody>
@@ -27397,53 +27625,145 @@
           </a:p>
         </p:txBody>
       </p:sp>
-      <p:cxnSp>
-        <p:nvCxnSpPr>
+      <p:sp>
+        <p:nvSpPr>
           <p:cNvPr id="673" name="Google Shape;673;p20"/>
-          <p:cNvCxnSpPr/>
-          <p:nvPr/>
-        </p:nvCxnSpPr>
+          <p:cNvSpPr/>
+          <p:nvPr/>
+        </p:nvSpPr>
+        <p:spPr>
+          <a:xfrm>
+            <a:off x="0" y="5121941"/>
+            <a:ext cx="7772206" cy="21431"/>
+          </a:xfrm>
+          <a:prstGeom prst="rect">
+            <a:avLst/>
+          </a:prstGeom>
+          <a:solidFill>
+            <a:srgbClr val="8B1A1A"/>
+          </a:solidFill>
+          <a:ln>
+            <a:noFill/>
+          </a:ln>
+        </p:spPr>
+        <p:txBody>
+          <a:bodyPr anchorCtr="0" anchor="ctr" bIns="68575" lIns="68575" spcFirstLastPara="1" rIns="68575" wrap="square" tIns="68575">
+            <a:noAutofit/>
+          </a:bodyPr>
+          <a:lstStyle/>
+          <a:p>
+            <a:pPr indent="0" lvl="0" marL="0" marR="0" rtl="0" algn="l">
+              <a:lnSpc>
+                <a:spcPct val="100000"/>
+              </a:lnSpc>
+              <a:spcBef>
+                <a:spcPts val="0"/>
+              </a:spcBef>
+              <a:spcAft>
+                <a:spcPts val="0"/>
+              </a:spcAft>
+              <a:buClr>
+                <a:srgbClr val="000000"/>
+              </a:buClr>
+              <a:buSzPts val="1400"/>
+              <a:buFont typeface="Arial"/>
+              <a:buNone/>
+            </a:pPr>
+            <a:r>
+              <a:t/>
+            </a:r>
+            <a:endParaRPr b="0" i="0" sz="1400" u="none" cap="none" strike="noStrike">
+              <a:solidFill>
+                <a:srgbClr val="000000"/>
+              </a:solidFill>
+              <a:latin typeface="Arial"/>
+              <a:ea typeface="Arial"/>
+              <a:cs typeface="Arial"/>
+              <a:sym typeface="Arial"/>
+            </a:endParaRPr>
+          </a:p>
+        </p:txBody>
+      </p:sp>
+      <p:sp>
+        <p:nvSpPr>
+          <p:cNvPr id="674" name="Google Shape;674;p20"/>
+          <p:cNvSpPr/>
+          <p:nvPr/>
+        </p:nvSpPr>
         <p:spPr>
           <a:xfrm>
             <a:off x="0" y="4886203"/>
-            <a:ext cx="9143771" cy="0"/>
-          </a:xfrm>
-          <a:prstGeom prst="straightConnector1">
+            <a:ext cx="9143700" cy="6900"/>
+          </a:xfrm>
+          <a:prstGeom prst="rect">
+            <a:avLst/>
+          </a:prstGeom>
+          <a:solidFill>
+            <a:srgbClr val="D4CFC8"/>
+          </a:solidFill>
+          <a:ln>
+            <a:noFill/>
+          </a:ln>
+        </p:spPr>
+        <p:txBody>
+          <a:bodyPr anchorCtr="0" anchor="ctr" bIns="68575" lIns="68575" spcFirstLastPara="1" rIns="68575" wrap="square" tIns="68575">
+            <a:noAutofit/>
+          </a:bodyPr>
+          <a:lstStyle/>
+          <a:p>
+            <a:pPr indent="0" lvl="0" marL="0" marR="0" rtl="0" algn="l">
+              <a:lnSpc>
+                <a:spcPct val="100000"/>
+              </a:lnSpc>
+              <a:spcBef>
+                <a:spcPts val="0"/>
+              </a:spcBef>
+              <a:spcAft>
+                <a:spcPts val="0"/>
+              </a:spcAft>
+              <a:buClr>
+                <a:srgbClr val="000000"/>
+              </a:buClr>
+              <a:buSzPts val="1400"/>
+              <a:buFont typeface="Arial"/>
+              <a:buNone/>
+            </a:pPr>
+            <a:r>
+              <a:t/>
+            </a:r>
+            <a:endParaRPr b="0" i="0" sz="1400" u="none" cap="none" strike="noStrike">
+              <a:solidFill>
+                <a:srgbClr val="000000"/>
+              </a:solidFill>
+              <a:latin typeface="Arial"/>
+              <a:ea typeface="Arial"/>
+              <a:cs typeface="Arial"/>
+              <a:sym typeface="Arial"/>
+            </a:endParaRPr>
+          </a:p>
+        </p:txBody>
+      </p:sp>
+      <p:sp>
+        <p:nvSpPr>
+          <p:cNvPr id="675" name="Google Shape;675;p20"/>
+          <p:cNvSpPr txBox="1"/>
+          <p:nvPr/>
+        </p:nvSpPr>
+        <p:spPr>
+          <a:xfrm>
+            <a:off x="8286600" y="4886313"/>
+            <a:ext cx="857400" cy="128700"/>
+          </a:xfrm>
+          <a:prstGeom prst="rect">
             <a:avLst/>
           </a:prstGeom>
           <a:noFill/>
-          <a:ln cap="flat" cmpd="sng" w="9525">
-            <a:solidFill>
-              <a:srgbClr val="D4CFC8"/>
-            </a:solidFill>
-            <a:prstDash val="solid"/>
-            <a:round/>
-            <a:headEnd len="sm" w="sm" type="none"/>
-            <a:tailEnd len="sm" w="sm" type="none"/>
-          </a:ln>
-        </p:spPr>
-      </p:cxnSp>
-      <p:sp>
-        <p:nvSpPr>
-          <p:cNvPr id="674" name="Google Shape;674;p20"/>
-          <p:cNvSpPr txBox="1"/>
-          <p:nvPr/>
-        </p:nvSpPr>
-        <p:spPr>
-          <a:xfrm>
-            <a:off x="7715057" y="5000500"/>
-            <a:ext cx="857228" cy="142871"/>
-          </a:xfrm>
-          <a:prstGeom prst="rect">
-            <a:avLst/>
-          </a:prstGeom>
-          <a:noFill/>
-          <a:ln>
-            <a:noFill/>
-          </a:ln>
-        </p:spPr>
-        <p:txBody>
-          <a:bodyPr anchorCtr="0" anchor="ctr" bIns="0" lIns="0" spcFirstLastPara="1" rIns="0" wrap="square" tIns="0">
+          <a:ln>
+            <a:noFill/>
+          </a:ln>
+        </p:spPr>
+        <p:txBody>
+          <a:bodyPr anchorCtr="0" anchor="t" bIns="0" lIns="0" spcFirstLastPara="1" rIns="0" wrap="square" tIns="0">
             <a:noAutofit/>
           </a:bodyPr>
           <a:lstStyle/>
@@ -27461,12 +27781,12 @@
               <a:buClr>
                 <a:srgbClr val="9A9AAA"/>
               </a:buClr>
-              <a:buSzPts val="800"/>
+              <a:buSzPts val="700"/>
               <a:buFont typeface="IBM Plex Mono"/>
               <a:buNone/>
             </a:pPr>
             <a:r>
-              <a:rPr b="0" i="0" lang="en" sz="800" u="none" cap="none" strike="noStrike">
+              <a:rPr lang="en" sz="700">
                 <a:solidFill>
                   <a:schemeClr val="dk1"/>
                 </a:solidFill>
@@ -27475,10 +27795,10 @@
                 <a:cs typeface="IBM Plex Mono"/>
                 <a:sym typeface="IBM Plex Mono"/>
               </a:rPr>
-              <a:t>18 / 2</a:t>
-            </a:r>
-            <a:r>
-              <a:rPr lang="en" sz="800">
+              <a:t>18</a:t>
+            </a:r>
+            <a:r>
+              <a:rPr i="0" lang="en" sz="700" u="none" cap="none" strike="noStrike">
                 <a:solidFill>
                   <a:schemeClr val="dk1"/>
                 </a:solidFill>
@@ -27487,75 +27807,28 @@
                 <a:cs typeface="IBM Plex Mono"/>
                 <a:sym typeface="IBM Plex Mono"/>
               </a:rPr>
+              <a:t> / 2</a:t>
+            </a:r>
+            <a:r>
+              <a:rPr lang="en" sz="700">
+                <a:solidFill>
+                  <a:schemeClr val="dk1"/>
+                </a:solidFill>
+                <a:latin typeface="IBM Plex Mono"/>
+                <a:ea typeface="IBM Plex Mono"/>
+                <a:cs typeface="IBM Plex Mono"/>
+                <a:sym typeface="IBM Plex Mono"/>
+              </a:rPr>
               <a:t>1</a:t>
             </a:r>
-            <a:endParaRPr b="0" i="0" sz="800" u="none" cap="none" strike="noStrike">
+            <a:endParaRPr i="0" sz="700" u="none" cap="none" strike="noStrike">
               <a:solidFill>
                 <a:schemeClr val="dk1"/>
               </a:solidFill>
-              <a:latin typeface="Calibri"/>
-              <a:ea typeface="Calibri"/>
-              <a:cs typeface="Calibri"/>
-              <a:sym typeface="Calibri"/>
-            </a:endParaRPr>
-          </a:p>
-        </p:txBody>
-      </p:sp>
-      <p:sp>
-        <p:nvSpPr>
-          <p:cNvPr id="675" name="Google Shape;675;p20"/>
-          <p:cNvSpPr/>
-          <p:nvPr/>
-        </p:nvSpPr>
-        <p:spPr>
-          <a:xfrm>
-            <a:off x="0" y="5121941"/>
-            <a:ext cx="7772206" cy="21431"/>
-          </a:xfrm>
-          <a:prstGeom prst="rect">
-            <a:avLst/>
-          </a:prstGeom>
-          <a:solidFill>
-            <a:srgbClr val="8B1A1A"/>
-          </a:solidFill>
-          <a:ln>
-            <a:noFill/>
-          </a:ln>
-        </p:spPr>
-        <p:txBody>
-          <a:bodyPr anchorCtr="0" anchor="ctr" bIns="68575" lIns="68575" spcFirstLastPara="1" rIns="68575" wrap="square" tIns="68575">
-            <a:noAutofit/>
-          </a:bodyPr>
-          <a:lstStyle/>
-          <a:p>
-            <a:pPr indent="0" lvl="0" marL="0" marR="0" rtl="0" algn="l">
-              <a:lnSpc>
-                <a:spcPct val="100000"/>
-              </a:lnSpc>
-              <a:spcBef>
-                <a:spcPts val="0"/>
-              </a:spcBef>
-              <a:spcAft>
-                <a:spcPts val="0"/>
-              </a:spcAft>
-              <a:buClr>
-                <a:srgbClr val="000000"/>
-              </a:buClr>
-              <a:buSzPts val="1400"/>
-              <a:buFont typeface="Arial"/>
-              <a:buNone/>
-            </a:pPr>
-            <a:r>
-              <a:t/>
-            </a:r>
-            <a:endParaRPr b="0" i="0" sz="1400" u="none" cap="none" strike="noStrike">
-              <a:solidFill>
-                <a:srgbClr val="000000"/>
-              </a:solidFill>
-              <a:latin typeface="Arial"/>
-              <a:ea typeface="Arial"/>
-              <a:cs typeface="Arial"/>
-              <a:sym typeface="Arial"/>
+              <a:latin typeface="IBM Plex Mono"/>
+              <a:ea typeface="IBM Plex Mono"/>
+              <a:cs typeface="IBM Plex Mono"/>
+              <a:sym typeface="IBM Plex Mono"/>
             </a:endParaRPr>
           </a:p>
         </p:txBody>
@@ -29849,113 +30122,9 @@
           </a:p>
         </p:txBody>
       </p:sp>
-      <p:cxnSp>
-        <p:nvCxnSpPr>
+      <p:sp>
+        <p:nvSpPr>
           <p:cNvPr id="720" name="Google Shape;720;p21"/>
-          <p:cNvCxnSpPr/>
-          <p:nvPr/>
-        </p:nvCxnSpPr>
-        <p:spPr>
-          <a:xfrm>
-            <a:off x="0" y="4886325"/>
-            <a:ext cx="9144000" cy="0"/>
-          </a:xfrm>
-          <a:prstGeom prst="straightConnector1">
-            <a:avLst/>
-          </a:prstGeom>
-          <a:noFill/>
-          <a:ln cap="flat" cmpd="sng" w="9525">
-            <a:solidFill>
-              <a:srgbClr val="D4CFC8"/>
-            </a:solidFill>
-            <a:prstDash val="solid"/>
-            <a:round/>
-            <a:headEnd len="sm" w="sm" type="none"/>
-            <a:tailEnd len="sm" w="sm" type="none"/>
-          </a:ln>
-        </p:spPr>
-      </p:cxnSp>
-      <p:sp>
-        <p:nvSpPr>
-          <p:cNvPr id="721" name="Google Shape;721;p21"/>
-          <p:cNvSpPr txBox="1"/>
-          <p:nvPr/>
-        </p:nvSpPr>
-        <p:spPr>
-          <a:xfrm>
-            <a:off x="7500938" y="4957763"/>
-            <a:ext cx="1071563" cy="114300"/>
-          </a:xfrm>
-          <a:prstGeom prst="rect">
-            <a:avLst/>
-          </a:prstGeom>
-          <a:noFill/>
-          <a:ln>
-            <a:noFill/>
-          </a:ln>
-        </p:spPr>
-        <p:txBody>
-          <a:bodyPr anchorCtr="0" anchor="ctr" bIns="0" lIns="0" spcFirstLastPara="1" rIns="0" wrap="square" tIns="0">
-            <a:noAutofit/>
-          </a:bodyPr>
-          <a:lstStyle/>
-          <a:p>
-            <a:pPr indent="0" lvl="0" marL="0" marR="0" rtl="0" algn="r">
-              <a:lnSpc>
-                <a:spcPct val="100000"/>
-              </a:lnSpc>
-              <a:spcBef>
-                <a:spcPts val="0"/>
-              </a:spcBef>
-              <a:spcAft>
-                <a:spcPts val="0"/>
-              </a:spcAft>
-              <a:buClr>
-                <a:srgbClr val="9A9AAA"/>
-              </a:buClr>
-              <a:buSzPts val="800"/>
-              <a:buFont typeface="Courier New"/>
-              <a:buNone/>
-            </a:pPr>
-            <a:r>
-              <a:rPr b="0" i="0" lang="en" sz="800" u="none" cap="none" strike="noStrike">
-                <a:solidFill>
-                  <a:schemeClr val="dk1"/>
-                </a:solidFill>
-                <a:latin typeface="Courier New"/>
-                <a:ea typeface="Courier New"/>
-                <a:cs typeface="Courier New"/>
-                <a:sym typeface="Courier New"/>
-              </a:rPr>
-              <a:t>19 / </a:t>
-            </a:r>
-            <a:r>
-              <a:rPr lang="en" sz="800">
-                <a:solidFill>
-                  <a:schemeClr val="dk1"/>
-                </a:solidFill>
-                <a:latin typeface="Courier New"/>
-                <a:ea typeface="Courier New"/>
-                <a:cs typeface="Courier New"/>
-                <a:sym typeface="Courier New"/>
-              </a:rPr>
-              <a:t>21</a:t>
-            </a:r>
-            <a:endParaRPr b="0" i="0" sz="800" u="none" cap="none" strike="noStrike">
-              <a:solidFill>
-                <a:schemeClr val="dk1"/>
-              </a:solidFill>
-              <a:latin typeface="Calibri"/>
-              <a:ea typeface="Calibri"/>
-              <a:cs typeface="Calibri"/>
-              <a:sym typeface="Calibri"/>
-            </a:endParaRPr>
-          </a:p>
-        </p:txBody>
-      </p:sp>
-      <p:sp>
-        <p:nvSpPr>
-          <p:cNvPr id="722" name="Google Shape;722;p21"/>
           <p:cNvSpPr/>
           <p:nvPr/>
         </p:nvSpPr>
@@ -30008,6 +30177,155 @@
               <a:ea typeface="Arial"/>
               <a:cs typeface="Arial"/>
               <a:sym typeface="Arial"/>
+            </a:endParaRPr>
+          </a:p>
+        </p:txBody>
+      </p:sp>
+      <p:sp>
+        <p:nvSpPr>
+          <p:cNvPr id="721" name="Google Shape;721;p21"/>
+          <p:cNvSpPr/>
+          <p:nvPr/>
+        </p:nvSpPr>
+        <p:spPr>
+          <a:xfrm>
+            <a:off x="0" y="4886203"/>
+            <a:ext cx="9143700" cy="6900"/>
+          </a:xfrm>
+          <a:prstGeom prst="rect">
+            <a:avLst/>
+          </a:prstGeom>
+          <a:solidFill>
+            <a:srgbClr val="D4CFC8"/>
+          </a:solidFill>
+          <a:ln>
+            <a:noFill/>
+          </a:ln>
+        </p:spPr>
+        <p:txBody>
+          <a:bodyPr anchorCtr="0" anchor="ctr" bIns="68575" lIns="68575" spcFirstLastPara="1" rIns="68575" wrap="square" tIns="68575">
+            <a:noAutofit/>
+          </a:bodyPr>
+          <a:lstStyle/>
+          <a:p>
+            <a:pPr indent="0" lvl="0" marL="0" marR="0" rtl="0" algn="l">
+              <a:lnSpc>
+                <a:spcPct val="100000"/>
+              </a:lnSpc>
+              <a:spcBef>
+                <a:spcPts val="0"/>
+              </a:spcBef>
+              <a:spcAft>
+                <a:spcPts val="0"/>
+              </a:spcAft>
+              <a:buClr>
+                <a:srgbClr val="000000"/>
+              </a:buClr>
+              <a:buSzPts val="1400"/>
+              <a:buFont typeface="Arial"/>
+              <a:buNone/>
+            </a:pPr>
+            <a:r>
+              <a:t/>
+            </a:r>
+            <a:endParaRPr b="0" i="0" sz="1400" u="none" cap="none" strike="noStrike">
+              <a:solidFill>
+                <a:srgbClr val="000000"/>
+              </a:solidFill>
+              <a:latin typeface="Arial"/>
+              <a:ea typeface="Arial"/>
+              <a:cs typeface="Arial"/>
+              <a:sym typeface="Arial"/>
+            </a:endParaRPr>
+          </a:p>
+        </p:txBody>
+      </p:sp>
+      <p:sp>
+        <p:nvSpPr>
+          <p:cNvPr id="722" name="Google Shape;722;p21"/>
+          <p:cNvSpPr txBox="1"/>
+          <p:nvPr/>
+        </p:nvSpPr>
+        <p:spPr>
+          <a:xfrm>
+            <a:off x="8286600" y="4886313"/>
+            <a:ext cx="857400" cy="128700"/>
+          </a:xfrm>
+          <a:prstGeom prst="rect">
+            <a:avLst/>
+          </a:prstGeom>
+          <a:noFill/>
+          <a:ln>
+            <a:noFill/>
+          </a:ln>
+        </p:spPr>
+        <p:txBody>
+          <a:bodyPr anchorCtr="0" anchor="t" bIns="0" lIns="0" spcFirstLastPara="1" rIns="0" wrap="square" tIns="0">
+            <a:noAutofit/>
+          </a:bodyPr>
+          <a:lstStyle/>
+          <a:p>
+            <a:pPr indent="0" lvl="0" marL="0" marR="0" rtl="0" algn="r">
+              <a:lnSpc>
+                <a:spcPct val="100000"/>
+              </a:lnSpc>
+              <a:spcBef>
+                <a:spcPts val="0"/>
+              </a:spcBef>
+              <a:spcAft>
+                <a:spcPts val="0"/>
+              </a:spcAft>
+              <a:buClr>
+                <a:srgbClr val="9A9AAA"/>
+              </a:buClr>
+              <a:buSzPts val="700"/>
+              <a:buFont typeface="IBM Plex Mono"/>
+              <a:buNone/>
+            </a:pPr>
+            <a:r>
+              <a:rPr lang="en" sz="700">
+                <a:solidFill>
+                  <a:schemeClr val="dk1"/>
+                </a:solidFill>
+                <a:latin typeface="IBM Plex Mono"/>
+                <a:ea typeface="IBM Plex Mono"/>
+                <a:cs typeface="IBM Plex Mono"/>
+                <a:sym typeface="IBM Plex Mono"/>
+              </a:rPr>
+              <a:t>19</a:t>
+            </a:r>
+            <a:r>
+              <a:rPr i="0" lang="en" sz="700" u="none" cap="none" strike="noStrike">
+                <a:solidFill>
+                  <a:schemeClr val="dk1"/>
+                </a:solidFill>
+                <a:latin typeface="IBM Plex Mono"/>
+                <a:ea typeface="IBM Plex Mono"/>
+                <a:cs typeface="IBM Plex Mono"/>
+                <a:sym typeface="IBM Plex Mono"/>
+              </a:rPr>
+              <a:t> / 2</a:t>
+            </a:r>
+            <a:r>
+              <a:rPr lang="en" sz="700">
+                <a:solidFill>
+                  <a:schemeClr val="dk1"/>
+                </a:solidFill>
+                <a:latin typeface="IBM Plex Mono"/>
+                <a:ea typeface="IBM Plex Mono"/>
+                <a:cs typeface="IBM Plex Mono"/>
+                <a:sym typeface="IBM Plex Mono"/>
+              </a:rPr>
+              <a:t>1</a:t>
+            </a:r>
+            <a:endParaRPr i="0" sz="700" u="none" cap="none" strike="noStrike">
+              <a:solidFill>
+                <a:schemeClr val="dk1"/>
+              </a:solidFill>
+              <a:latin typeface="IBM Plex Mono"/>
+              <a:ea typeface="IBM Plex Mono"/>
+              <a:cs typeface="IBM Plex Mono"/>
+              <a:sym typeface="IBM Plex Mono"/>
             </a:endParaRPr>
           </a:p>
         </p:txBody>
@@ -30775,53 +31093,27 @@
           </a:p>
         </p:txBody>
       </p:sp>
-      <p:cxnSp>
-        <p:nvCxnSpPr>
+      <p:sp>
+        <p:nvSpPr>
           <p:cNvPr id="45" name="Google Shape;45;p4"/>
-          <p:cNvCxnSpPr/>
-          <p:nvPr/>
-        </p:nvCxnSpPr>
-        <p:spPr>
-          <a:xfrm>
-            <a:off x="0" y="4886325"/>
-            <a:ext cx="9144000" cy="0"/>
-          </a:xfrm>
-          <a:prstGeom prst="straightConnector1">
+          <p:cNvSpPr txBox="1"/>
+          <p:nvPr/>
+        </p:nvSpPr>
+        <p:spPr>
+          <a:xfrm>
+            <a:off x="8286600" y="4886313"/>
+            <a:ext cx="857400" cy="128700"/>
+          </a:xfrm>
+          <a:prstGeom prst="rect">
             <a:avLst/>
           </a:prstGeom>
           <a:noFill/>
-          <a:ln cap="flat" cmpd="sng" w="9525">
-            <a:solidFill>
-              <a:srgbClr val="D4CFC8"/>
-            </a:solidFill>
-            <a:prstDash val="solid"/>
-            <a:round/>
-            <a:headEnd len="sm" w="sm" type="none"/>
-            <a:tailEnd len="sm" w="sm" type="none"/>
-          </a:ln>
-        </p:spPr>
-      </p:cxnSp>
-      <p:sp>
-        <p:nvSpPr>
-          <p:cNvPr id="46" name="Google Shape;46;p4"/>
-          <p:cNvSpPr txBox="1"/>
-          <p:nvPr/>
-        </p:nvSpPr>
-        <p:spPr>
-          <a:xfrm>
-            <a:off x="7715250" y="4957763"/>
-            <a:ext cx="857250" cy="128588"/>
-          </a:xfrm>
-          <a:prstGeom prst="rect">
-            <a:avLst/>
-          </a:prstGeom>
-          <a:noFill/>
-          <a:ln>
-            <a:noFill/>
-          </a:ln>
-        </p:spPr>
-        <p:txBody>
-          <a:bodyPr anchorCtr="0" anchor="ctr" bIns="0" lIns="0" spcFirstLastPara="1" rIns="0" wrap="square" tIns="0">
+          <a:ln>
+            <a:noFill/>
+          </a:ln>
+        </p:spPr>
+        <p:txBody>
+          <a:bodyPr anchorCtr="0" anchor="t" bIns="0" lIns="0" spcFirstLastPara="1" rIns="0" wrap="square" tIns="0">
             <a:noAutofit/>
           </a:bodyPr>
           <a:lstStyle/>
@@ -30844,7 +31136,7 @@
               <a:buNone/>
             </a:pPr>
             <a:r>
-              <a:rPr b="0" i="0" lang="en" sz="700" u="none" cap="none" strike="noStrike">
+              <a:rPr i="0" lang="en" sz="700" u="none" cap="none" strike="noStrike">
                 <a:solidFill>
                   <a:schemeClr val="dk1"/>
                 </a:solidFill>
@@ -30867,14 +31159,73 @@
               </a:rPr>
               <a:t>1</a:t>
             </a:r>
-            <a:endParaRPr b="0" i="0" sz="700" u="none" cap="none" strike="noStrike">
+            <a:endParaRPr i="0" sz="700" u="none" cap="none" strike="noStrike">
               <a:solidFill>
                 <a:schemeClr val="dk1"/>
               </a:solidFill>
-              <a:latin typeface="Calibri"/>
-              <a:ea typeface="Calibri"/>
-              <a:cs typeface="Calibri"/>
-              <a:sym typeface="Calibri"/>
+              <a:latin typeface="IBM Plex Mono"/>
+              <a:ea typeface="IBM Plex Mono"/>
+              <a:cs typeface="IBM Plex Mono"/>
+              <a:sym typeface="IBM Plex Mono"/>
+            </a:endParaRPr>
+          </a:p>
+        </p:txBody>
+      </p:sp>
+      <p:sp>
+        <p:nvSpPr>
+          <p:cNvPr id="46" name="Google Shape;46;p4"/>
+          <p:cNvSpPr/>
+          <p:nvPr/>
+        </p:nvSpPr>
+        <p:spPr>
+          <a:xfrm>
+            <a:off x="0" y="5122069"/>
+            <a:ext cx="457200" cy="21431"/>
+          </a:xfrm>
+          <a:prstGeom prst="rect">
+            <a:avLst/>
+          </a:prstGeom>
+          <a:solidFill>
+            <a:srgbClr val="8B1A1A"/>
+          </a:solidFill>
+          <a:ln>
+            <a:noFill/>
+          </a:ln>
+        </p:spPr>
+        <p:txBody>
+          <a:bodyPr anchorCtr="0" anchor="ctr" bIns="68575" lIns="68575" spcFirstLastPara="1" rIns="68575" wrap="square" tIns="68575">
+            <a:noAutofit/>
+          </a:bodyPr>
+          <a:lstStyle/>
+          <a:p>
+            <a:pPr indent="0" lvl="0" marL="0" marR="0" rtl="0" algn="l">
+              <a:lnSpc>
+                <a:spcPct val="100000"/>
+              </a:lnSpc>
+              <a:spcBef>
+                <a:spcPts val="0"/>
+              </a:spcBef>
+              <a:spcAft>
+                <a:spcPts val="0"/>
+              </a:spcAft>
+              <a:buClr>
+                <a:srgbClr val="000000"/>
+              </a:buClr>
+              <a:buSzPts val="1400"/>
+              <a:buFont typeface="Arial"/>
+              <a:buNone/>
+            </a:pPr>
+            <a:r>
+              <a:t/>
+            </a:r>
+            <a:endParaRPr b="0" i="0" sz="1400" u="none" cap="none" strike="noStrike">
+              <a:solidFill>
+                <a:srgbClr val="000000"/>
+              </a:solidFill>
+              <a:latin typeface="Arial"/>
+              <a:ea typeface="Arial"/>
+              <a:cs typeface="Arial"/>
+              <a:sym typeface="Arial"/>
             </a:endParaRPr>
           </a:p>
         </p:txBody>
@@ -30887,14 +31238,14 @@
         </p:nvSpPr>
         <p:spPr>
           <a:xfrm>
-            <a:off x="0" y="5122069"/>
-            <a:ext cx="457200" cy="21431"/>
+            <a:off x="0" y="4886203"/>
+            <a:ext cx="9143700" cy="6900"/>
           </a:xfrm>
           <a:prstGeom prst="rect">
             <a:avLst/>
           </a:prstGeom>
           <a:solidFill>
-            <a:srgbClr val="8B1A1A"/>
+            <a:srgbClr val="D4CFC8"/>
           </a:solidFill>
           <a:ln>
             <a:noFill/>
@@ -32378,7 +32729,7 @@
         </p:nvCxnSpPr>
         <p:spPr>
           <a:xfrm>
-            <a:off x="0" y="4857750"/>
+            <a:off x="0" y="5143500"/>
             <a:ext cx="9144015" cy="0"/>
           </a:xfrm>
           <a:prstGeom prst="straightConnector1">
@@ -32398,37 +32749,9 @@
           </a:ln>
         </p:spPr>
       </p:cxnSp>
-      <p:cxnSp>
-        <p:nvCxnSpPr>
+      <p:sp>
+        <p:nvSpPr>
           <p:cNvPr id="779" name="Google Shape;779;p22"/>
-          <p:cNvCxnSpPr/>
-          <p:nvPr/>
-        </p:nvCxnSpPr>
-        <p:spPr>
-          <a:xfrm>
-            <a:off x="0" y="5143500"/>
-            <a:ext cx="9144015" cy="0"/>
-          </a:xfrm>
-          <a:prstGeom prst="straightConnector1">
-            <a:avLst/>
-          </a:prstGeom>
-          <a:noFill/>
-          <a:ln cap="flat" cmpd="sng" w="9525">
-            <a:solidFill>
-              <a:srgbClr val="000000">
-                <a:alpha val="5098"/>
-              </a:srgbClr>
-            </a:solidFill>
-            <a:prstDash val="solid"/>
-            <a:round/>
-            <a:headEnd len="sm" w="sm" type="none"/>
-            <a:tailEnd len="sm" w="sm" type="none"/>
-          </a:ln>
-        </p:spPr>
-      </p:cxnSp>
-      <p:sp>
-        <p:nvSpPr>
-          <p:cNvPr id="780" name="Google Shape;780;p22"/>
           <p:cNvSpPr txBox="1"/>
           <p:nvPr/>
         </p:nvSpPr>
@@ -32527,7 +32850,7 @@
       </p:sp>
       <p:sp>
         <p:nvSpPr>
-          <p:cNvPr id="781" name="Google Shape;781;p22"/>
+          <p:cNvPr id="780" name="Google Shape;780;p22"/>
           <p:cNvSpPr txBox="1"/>
           <p:nvPr/>
         </p:nvSpPr>
@@ -32590,7 +32913,7 @@
       </p:sp>
       <p:sp>
         <p:nvSpPr>
-          <p:cNvPr id="782" name="Google Shape;782;p22"/>
+          <p:cNvPr id="781" name="Google Shape;781;p22"/>
           <p:cNvSpPr txBox="1"/>
           <p:nvPr/>
         </p:nvSpPr>
@@ -32653,7 +32976,7 @@
       </p:sp>
       <p:sp>
         <p:nvSpPr>
-          <p:cNvPr id="783" name="Google Shape;783;p22"/>
+          <p:cNvPr id="782" name="Google Shape;782;p22"/>
           <p:cNvSpPr/>
           <p:nvPr/>
         </p:nvSpPr>
@@ -32707,7 +33030,7 @@
       </p:sp>
       <p:sp>
         <p:nvSpPr>
-          <p:cNvPr id="784" name="Google Shape;784;p22"/>
+          <p:cNvPr id="783" name="Google Shape;783;p22"/>
           <p:cNvSpPr/>
           <p:nvPr/>
         </p:nvSpPr>
@@ -32750,7 +33073,7 @@
       </p:sp>
       <p:sp>
         <p:nvSpPr>
-          <p:cNvPr id="785" name="Google Shape;785;p22"/>
+          <p:cNvPr id="784" name="Google Shape;784;p22"/>
           <p:cNvSpPr txBox="1"/>
           <p:nvPr/>
         </p:nvSpPr>
@@ -32813,7 +33136,7 @@
       </p:sp>
       <p:sp>
         <p:nvSpPr>
-          <p:cNvPr id="786" name="Google Shape;786;p22"/>
+          <p:cNvPr id="785" name="Google Shape;785;p22"/>
           <p:cNvSpPr txBox="1"/>
           <p:nvPr/>
         </p:nvSpPr>
@@ -32876,7 +33199,7 @@
       </p:sp>
       <p:sp>
         <p:nvSpPr>
-          <p:cNvPr id="787" name="Google Shape;787;p22"/>
+          <p:cNvPr id="786" name="Google Shape;786;p22"/>
           <p:cNvSpPr txBox="1"/>
           <p:nvPr/>
         </p:nvSpPr>
@@ -32939,7 +33262,7 @@
       </p:sp>
       <p:sp>
         <p:nvSpPr>
-          <p:cNvPr id="788" name="Google Shape;788;p22"/>
+          <p:cNvPr id="787" name="Google Shape;787;p22"/>
           <p:cNvSpPr txBox="1"/>
           <p:nvPr/>
         </p:nvSpPr>
@@ -33002,7 +33325,7 @@
       </p:sp>
       <p:cxnSp>
         <p:nvCxnSpPr>
-          <p:cNvPr id="789" name="Google Shape;789;p22"/>
+          <p:cNvPr id="788" name="Google Shape;788;p22"/>
           <p:cNvCxnSpPr/>
           <p:nvPr/>
         </p:nvCxnSpPr>
@@ -33028,14 +33351,116 @@
       </p:cxnSp>
       <p:sp>
         <p:nvSpPr>
+          <p:cNvPr id="789" name="Google Shape;789;p22"/>
+          <p:cNvSpPr/>
+          <p:nvPr/>
+        </p:nvSpPr>
+        <p:spPr>
+          <a:xfrm>
+            <a:off x="0" y="5114925"/>
+            <a:ext cx="8687032" cy="28575"/>
+          </a:xfrm>
+          <a:prstGeom prst="rect">
+            <a:avLst/>
+          </a:prstGeom>
+          <a:solidFill>
+            <a:srgbClr val="8B1A1A"/>
+          </a:solidFill>
+          <a:ln>
+            <a:noFill/>
+          </a:ln>
+        </p:spPr>
+        <p:txBody>
+          <a:bodyPr anchorCtr="0" anchor="ctr" bIns="68575" lIns="68575" spcFirstLastPara="1" rIns="68575" wrap="square" tIns="68575">
+            <a:noAutofit/>
+          </a:bodyPr>
+          <a:lstStyle/>
+          <a:p>
+            <a:pPr indent="0" lvl="0" marL="0" rtl="0" algn="l">
+              <a:spcBef>
+                <a:spcPts val="0"/>
+              </a:spcBef>
+              <a:spcAft>
+                <a:spcPts val="0"/>
+              </a:spcAft>
+              <a:buNone/>
+            </a:pPr>
+            <a:r>
+              <a:t/>
+            </a:r>
+            <a:endParaRPr/>
+          </a:p>
+        </p:txBody>
+      </p:sp>
+      <p:sp>
+        <p:nvSpPr>
           <p:cNvPr id="790" name="Google Shape;790;p22"/>
+          <p:cNvSpPr/>
+          <p:nvPr/>
+        </p:nvSpPr>
+        <p:spPr>
+          <a:xfrm>
+            <a:off x="0" y="4886203"/>
+            <a:ext cx="9143700" cy="6900"/>
+          </a:xfrm>
+          <a:prstGeom prst="rect">
+            <a:avLst/>
+          </a:prstGeom>
+          <a:solidFill>
+            <a:srgbClr val="D4CFC8"/>
+          </a:solidFill>
+          <a:ln>
+            <a:noFill/>
+          </a:ln>
+        </p:spPr>
+        <p:txBody>
+          <a:bodyPr anchorCtr="0" anchor="ctr" bIns="68575" lIns="68575" spcFirstLastPara="1" rIns="68575" wrap="square" tIns="68575">
+            <a:noAutofit/>
+          </a:bodyPr>
+          <a:lstStyle/>
+          <a:p>
+            <a:pPr indent="0" lvl="0" marL="0" marR="0" rtl="0" algn="l">
+              <a:lnSpc>
+                <a:spcPct val="100000"/>
+              </a:lnSpc>
+              <a:spcBef>
+                <a:spcPts val="0"/>
+              </a:spcBef>
+              <a:spcAft>
+                <a:spcPts val="0"/>
+              </a:spcAft>
+              <a:buClr>
+                <a:srgbClr val="000000"/>
+              </a:buClr>
+              <a:buSzPts val="1400"/>
+              <a:buFont typeface="Arial"/>
+              <a:buNone/>
+            </a:pPr>
+            <a:r>
+              <a:t/>
+            </a:r>
+            <a:endParaRPr b="0" i="0" sz="1400" u="none" cap="none" strike="noStrike">
+              <a:solidFill>
+                <a:srgbClr val="000000"/>
+              </a:solidFill>
+              <a:latin typeface="Arial"/>
+              <a:ea typeface="Arial"/>
+              <a:cs typeface="Arial"/>
+              <a:sym typeface="Arial"/>
+            </a:endParaRPr>
+          </a:p>
+        </p:txBody>
+      </p:sp>
+      <p:sp>
+        <p:nvSpPr>
+          <p:cNvPr id="791" name="Google Shape;791;p22"/>
           <p:cNvSpPr txBox="1"/>
           <p:nvPr/>
         </p:nvSpPr>
         <p:spPr>
           <a:xfrm>
-            <a:off x="7338256" y="4929188"/>
-            <a:ext cx="1165891" cy="171450"/>
+            <a:off x="8286600" y="4886313"/>
+            <a:ext cx="857400" cy="128700"/>
           </a:xfrm>
           <a:prstGeom prst="rect">
             <a:avLst/>
@@ -33046,12 +33471,15 @@
           </a:ln>
         </p:spPr>
         <p:txBody>
-          <a:bodyPr anchorCtr="0" anchor="ctr" bIns="0" lIns="0" spcFirstLastPara="1" rIns="0" wrap="square" tIns="0">
+          <a:bodyPr anchorCtr="0" anchor="t" bIns="0" lIns="0" spcFirstLastPara="1" rIns="0" wrap="square" tIns="0">
             <a:noAutofit/>
           </a:bodyPr>
           <a:lstStyle/>
           <a:p>
             <a:pPr indent="0" lvl="0" marL="0" marR="0" rtl="0" algn="r">
+              <a:lnSpc>
+                <a:spcPct val="100000"/>
+              </a:lnSpc>
               <a:spcBef>
                 <a:spcPts val="0"/>
               </a:spcBef>
@@ -33066,69 +33494,50 @@
               <a:buNone/>
             </a:pPr>
             <a:r>
-              <a:rPr b="1" i="0" lang="en" sz="700" u="none" cap="none" strike="noStrike">
-                <a:solidFill>
-                  <a:srgbClr val="9A9AAA"/>
+              <a:rPr lang="en" sz="700">
+                <a:solidFill>
+                  <a:schemeClr val="dk1"/>
                 </a:solidFill>
                 <a:latin typeface="IBM Plex Mono"/>
                 <a:ea typeface="IBM Plex Mono"/>
                 <a:cs typeface="IBM Plex Mono"/>
                 <a:sym typeface="IBM Plex Mono"/>
               </a:rPr>
-              <a:t>20 / 21</a:t>
-            </a:r>
-            <a:endParaRPr b="0" i="0" sz="700" u="none" cap="none" strike="noStrike">
+              <a:t>2</a:t>
+            </a:r>
+            <a:r>
+              <a:rPr i="0" lang="en" sz="700" u="none" cap="none" strike="noStrike">
+                <a:solidFill>
+                  <a:schemeClr val="dk1"/>
+                </a:solidFill>
+                <a:latin typeface="IBM Plex Mono"/>
+                <a:ea typeface="IBM Plex Mono"/>
+                <a:cs typeface="IBM Plex Mono"/>
+                <a:sym typeface="IBM Plex Mono"/>
+              </a:rPr>
+              <a:t>0 / 2</a:t>
+            </a:r>
+            <a:r>
+              <a:rPr lang="en" sz="700">
+                <a:solidFill>
+                  <a:schemeClr val="dk1"/>
+                </a:solidFill>
+                <a:latin typeface="IBM Plex Mono"/>
+                <a:ea typeface="IBM Plex Mono"/>
+                <a:cs typeface="IBM Plex Mono"/>
+                <a:sym typeface="IBM Plex Mono"/>
+              </a:rPr>
+              <a:t>1</a:t>
+            </a:r>
+            <a:endParaRPr i="0" sz="700" u="none" cap="none" strike="noStrike">
               <a:solidFill>
                 <a:schemeClr val="dk1"/>
               </a:solidFill>
-              <a:latin typeface="Calibri"/>
-              <a:ea typeface="Calibri"/>
-              <a:cs typeface="Calibri"/>
-              <a:sym typeface="Calibri"/>
-            </a:endParaRPr>
-          </a:p>
-        </p:txBody>
-      </p:sp>
-      <p:sp>
-        <p:nvSpPr>
-          <p:cNvPr id="791" name="Google Shape;791;p22"/>
-          <p:cNvSpPr/>
-          <p:nvPr/>
-        </p:nvSpPr>
-        <p:spPr>
-          <a:xfrm>
-            <a:off x="0" y="5114925"/>
-            <a:ext cx="8687032" cy="28575"/>
-          </a:xfrm>
-          <a:prstGeom prst="rect">
-            <a:avLst/>
-          </a:prstGeom>
-          <a:solidFill>
-            <a:srgbClr val="8B1A1A"/>
-          </a:solidFill>
-          <a:ln>
-            <a:noFill/>
-          </a:ln>
-        </p:spPr>
-        <p:txBody>
-          <a:bodyPr anchorCtr="0" anchor="ctr" bIns="68575" lIns="68575" spcFirstLastPara="1" rIns="68575" wrap="square" tIns="68575">
-            <a:noAutofit/>
-          </a:bodyPr>
-          <a:lstStyle/>
-          <a:p>
-            <a:pPr indent="0" lvl="0" marL="0" rtl="0" algn="l">
-              <a:spcBef>
-                <a:spcPts val="0"/>
-              </a:spcBef>
-              <a:spcAft>
-                <a:spcPts val="0"/>
-              </a:spcAft>
-              <a:buNone/>
-            </a:pPr>
-            <a:r>
-              <a:t/>
-            </a:r>
-            <a:endParaRPr/>
+              <a:latin typeface="IBM Plex Mono"/>
+              <a:ea typeface="IBM Plex Mono"/>
+              <a:cs typeface="IBM Plex Mono"/>
+              <a:sym typeface="IBM Plex Mono"/>
+            </a:endParaRPr>
           </a:p>
         </p:txBody>
       </p:sp>
@@ -35750,98 +36159,9 @@
           </a:p>
         </p:txBody>
       </p:sp>
-      <p:cxnSp>
-        <p:nvCxnSpPr>
+      <p:sp>
+        <p:nvSpPr>
           <p:cNvPr id="827" name="Google Shape;827;p23"/>
-          <p:cNvCxnSpPr/>
-          <p:nvPr/>
-        </p:nvCxnSpPr>
-        <p:spPr>
-          <a:xfrm>
-            <a:off x="0" y="4886325"/>
-            <a:ext cx="9144000" cy="0"/>
-          </a:xfrm>
-          <a:prstGeom prst="straightConnector1">
-            <a:avLst/>
-          </a:prstGeom>
-          <a:noFill/>
-          <a:ln cap="flat" cmpd="sng" w="12700">
-            <a:solidFill>
-              <a:srgbClr val="D4CFC8"/>
-            </a:solidFill>
-            <a:prstDash val="solid"/>
-            <a:round/>
-            <a:headEnd len="sm" w="sm" type="none"/>
-            <a:tailEnd len="sm" w="sm" type="none"/>
-          </a:ln>
-        </p:spPr>
-      </p:cxnSp>
-      <p:sp>
-        <p:nvSpPr>
-          <p:cNvPr id="828" name="Google Shape;828;p23"/>
-          <p:cNvSpPr txBox="1"/>
-          <p:nvPr/>
-        </p:nvSpPr>
-        <p:spPr>
-          <a:xfrm>
-            <a:off x="8001000" y="5000625"/>
-            <a:ext cx="571500" cy="114300"/>
-          </a:xfrm>
-          <a:prstGeom prst="rect">
-            <a:avLst/>
-          </a:prstGeom>
-          <a:noFill/>
-          <a:ln>
-            <a:noFill/>
-          </a:ln>
-        </p:spPr>
-        <p:txBody>
-          <a:bodyPr anchorCtr="0" anchor="ctr" bIns="0" lIns="0" spcFirstLastPara="1" rIns="0" wrap="square" tIns="0">
-            <a:noAutofit/>
-          </a:bodyPr>
-          <a:lstStyle/>
-          <a:p>
-            <a:pPr indent="0" lvl="0" marL="0" marR="0" rtl="0" algn="r">
-              <a:spcBef>
-                <a:spcPts val="0"/>
-              </a:spcBef>
-              <a:spcAft>
-                <a:spcPts val="0"/>
-              </a:spcAft>
-              <a:buClr>
-                <a:srgbClr val="9A9AAA"/>
-              </a:buClr>
-              <a:buSzPts val="800"/>
-              <a:buFont typeface="Consolas"/>
-              <a:buNone/>
-            </a:pPr>
-            <a:r>
-              <a:rPr b="1" i="0" lang="en" sz="800" u="none" cap="none" strike="noStrike">
-                <a:solidFill>
-                  <a:srgbClr val="9A9AAA"/>
-                </a:solidFill>
-                <a:latin typeface="Consolas"/>
-                <a:ea typeface="Consolas"/>
-                <a:cs typeface="Consolas"/>
-                <a:sym typeface="Consolas"/>
-              </a:rPr>
-              <a:t>21 / 21</a:t>
-            </a:r>
-            <a:endParaRPr b="0" i="0" sz="800" u="none" cap="none" strike="noStrike">
-              <a:solidFill>
-                <a:schemeClr val="dk1"/>
-              </a:solidFill>
-              <a:latin typeface="Calibri"/>
-              <a:ea typeface="Calibri"/>
-              <a:cs typeface="Calibri"/>
-              <a:sym typeface="Calibri"/>
-            </a:endParaRPr>
-          </a:p>
-        </p:txBody>
-      </p:sp>
-      <p:sp>
-        <p:nvSpPr>
-          <p:cNvPr id="829" name="Google Shape;829;p23"/>
           <p:cNvSpPr/>
           <p:nvPr/>
         </p:nvSpPr>
@@ -35879,6 +36199,143 @@
               <a:t/>
             </a:r>
             <a:endParaRPr/>
+          </a:p>
+        </p:txBody>
+      </p:sp>
+      <p:sp>
+        <p:nvSpPr>
+          <p:cNvPr id="828" name="Google Shape;828;p23"/>
+          <p:cNvSpPr/>
+          <p:nvPr/>
+        </p:nvSpPr>
+        <p:spPr>
+          <a:xfrm>
+            <a:off x="0" y="4886203"/>
+            <a:ext cx="9143700" cy="6900"/>
+          </a:xfrm>
+          <a:prstGeom prst="rect">
+            <a:avLst/>
+          </a:prstGeom>
+          <a:solidFill>
+            <a:srgbClr val="D4CFC8"/>
+          </a:solidFill>
+          <a:ln>
+            <a:noFill/>
+          </a:ln>
+        </p:spPr>
+        <p:txBody>
+          <a:bodyPr anchorCtr="0" anchor="ctr" bIns="68575" lIns="68575" spcFirstLastPara="1" rIns="68575" wrap="square" tIns="68575">
+            <a:noAutofit/>
+          </a:bodyPr>
+          <a:lstStyle/>
+          <a:p>
+            <a:pPr indent="0" lvl="0" marL="0" marR="0" rtl="0" algn="l">
+              <a:lnSpc>
+                <a:spcPct val="100000"/>
+              </a:lnSpc>
+              <a:spcBef>
+                <a:spcPts val="0"/>
+              </a:spcBef>
+              <a:spcAft>
+                <a:spcPts val="0"/>
+              </a:spcAft>
+              <a:buClr>
+                <a:srgbClr val="000000"/>
+              </a:buClr>
+              <a:buSzPts val="1400"/>
+              <a:buFont typeface="Arial"/>
+              <a:buNone/>
+            </a:pPr>
+            <a:r>
+              <a:t/>
+            </a:r>
+            <a:endParaRPr b="0" i="0" sz="1400" u="none" cap="none" strike="noStrike">
+              <a:solidFill>
+                <a:srgbClr val="000000"/>
+              </a:solidFill>
+              <a:latin typeface="Arial"/>
+              <a:ea typeface="Arial"/>
+              <a:cs typeface="Arial"/>
+              <a:sym typeface="Arial"/>
+            </a:endParaRPr>
+          </a:p>
+        </p:txBody>
+      </p:sp>
+      <p:sp>
+        <p:nvSpPr>
+          <p:cNvPr id="829" name="Google Shape;829;p23"/>
+          <p:cNvSpPr txBox="1"/>
+          <p:nvPr/>
+        </p:nvSpPr>
+        <p:spPr>
+          <a:xfrm>
+            <a:off x="8286600" y="4886313"/>
+            <a:ext cx="857400" cy="128700"/>
+          </a:xfrm>
+          <a:prstGeom prst="rect">
+            <a:avLst/>
+          </a:prstGeom>
+          <a:noFill/>
+          <a:ln>
+            <a:noFill/>
+          </a:ln>
+        </p:spPr>
+        <p:txBody>
+          <a:bodyPr anchorCtr="0" anchor="t" bIns="0" lIns="0" spcFirstLastPara="1" rIns="0" wrap="square" tIns="0">
+            <a:noAutofit/>
+          </a:bodyPr>
+          <a:lstStyle/>
+          <a:p>
+            <a:pPr indent="0" lvl="0" marL="0" marR="0" rtl="0" algn="r">
+              <a:lnSpc>
+                <a:spcPct val="100000"/>
+              </a:lnSpc>
+              <a:spcBef>
+                <a:spcPts val="0"/>
+              </a:spcBef>
+              <a:spcAft>
+                <a:spcPts val="0"/>
+              </a:spcAft>
+              <a:buClr>
+                <a:srgbClr val="9A9AAA"/>
+              </a:buClr>
+              <a:buSzPts val="700"/>
+              <a:buFont typeface="IBM Plex Mono"/>
+              <a:buNone/>
+            </a:pPr>
+            <a:r>
+              <a:rPr i="0" lang="en" sz="700" u="none" cap="none" strike="noStrike">
+                <a:solidFill>
+                  <a:schemeClr val="dk1"/>
+                </a:solidFill>
+                <a:latin typeface="IBM Plex Mono"/>
+                <a:ea typeface="IBM Plex Mono"/>
+                <a:cs typeface="IBM Plex Mono"/>
+                <a:sym typeface="IBM Plex Mono"/>
+              </a:rPr>
+              <a:t>21 / 2</a:t>
+            </a:r>
+            <a:r>
+              <a:rPr lang="en" sz="700">
+                <a:solidFill>
+                  <a:schemeClr val="dk1"/>
+                </a:solidFill>
+                <a:latin typeface="IBM Plex Mono"/>
+                <a:ea typeface="IBM Plex Mono"/>
+                <a:cs typeface="IBM Plex Mono"/>
+                <a:sym typeface="IBM Plex Mono"/>
+              </a:rPr>
+              <a:t>1</a:t>
+            </a:r>
+            <a:endParaRPr i="0" sz="700" u="none" cap="none" strike="noStrike">
+              <a:solidFill>
+                <a:schemeClr val="dk1"/>
+              </a:solidFill>
+              <a:latin typeface="IBM Plex Mono"/>
+              <a:ea typeface="IBM Plex Mono"/>
+              <a:cs typeface="IBM Plex Mono"/>
+              <a:sym typeface="IBM Plex Mono"/>
+            </a:endParaRPr>
           </a:p>
         </p:txBody>
       </p:sp>
@@ -40159,53 +40616,145 @@
           </a:p>
         </p:txBody>
       </p:sp>
-      <p:cxnSp>
-        <p:nvCxnSpPr>
+      <p:sp>
+        <p:nvSpPr>
           <p:cNvPr id="125" name="Google Shape;125;p5"/>
-          <p:cNvCxnSpPr/>
-          <p:nvPr/>
-        </p:nvCxnSpPr>
-        <p:spPr>
-          <a:xfrm>
-            <a:off x="0" y="4886325"/>
-            <a:ext cx="9143771" cy="0"/>
-          </a:xfrm>
-          <a:prstGeom prst="straightConnector1">
+          <p:cNvSpPr/>
+          <p:nvPr/>
+        </p:nvSpPr>
+        <p:spPr>
+          <a:xfrm>
+            <a:off x="0" y="5122241"/>
+            <a:ext cx="914378" cy="21260"/>
+          </a:xfrm>
+          <a:prstGeom prst="rect">
+            <a:avLst/>
+          </a:prstGeom>
+          <a:solidFill>
+            <a:srgbClr val="8B1A1A"/>
+          </a:solidFill>
+          <a:ln>
+            <a:noFill/>
+          </a:ln>
+        </p:spPr>
+        <p:txBody>
+          <a:bodyPr anchorCtr="0" anchor="ctr" bIns="68575" lIns="68575" spcFirstLastPara="1" rIns="68575" wrap="square" tIns="68575">
+            <a:noAutofit/>
+          </a:bodyPr>
+          <a:lstStyle/>
+          <a:p>
+            <a:pPr indent="0" lvl="0" marL="0" marR="0" rtl="0" algn="l">
+              <a:lnSpc>
+                <a:spcPct val="100000"/>
+              </a:lnSpc>
+              <a:spcBef>
+                <a:spcPts val="0"/>
+              </a:spcBef>
+              <a:spcAft>
+                <a:spcPts val="0"/>
+              </a:spcAft>
+              <a:buClr>
+                <a:srgbClr val="000000"/>
+              </a:buClr>
+              <a:buSzPts val="1400"/>
+              <a:buFont typeface="Arial"/>
+              <a:buNone/>
+            </a:pPr>
+            <a:r>
+              <a:t/>
+            </a:r>
+            <a:endParaRPr b="0" i="0" sz="1400" u="none" cap="none" strike="noStrike">
+              <a:solidFill>
+                <a:srgbClr val="000000"/>
+              </a:solidFill>
+              <a:latin typeface="Arial"/>
+              <a:ea typeface="Arial"/>
+              <a:cs typeface="Arial"/>
+              <a:sym typeface="Arial"/>
+            </a:endParaRPr>
+          </a:p>
+        </p:txBody>
+      </p:sp>
+      <p:sp>
+        <p:nvSpPr>
+          <p:cNvPr id="126" name="Google Shape;126;p5"/>
+          <p:cNvSpPr/>
+          <p:nvPr/>
+        </p:nvSpPr>
+        <p:spPr>
+          <a:xfrm>
+            <a:off x="0" y="4886203"/>
+            <a:ext cx="9143700" cy="6900"/>
+          </a:xfrm>
+          <a:prstGeom prst="rect">
+            <a:avLst/>
+          </a:prstGeom>
+          <a:solidFill>
+            <a:srgbClr val="D4CFC8"/>
+          </a:solidFill>
+          <a:ln>
+            <a:noFill/>
+          </a:ln>
+        </p:spPr>
+        <p:txBody>
+          <a:bodyPr anchorCtr="0" anchor="ctr" bIns="68575" lIns="68575" spcFirstLastPara="1" rIns="68575" wrap="square" tIns="68575">
+            <a:noAutofit/>
+          </a:bodyPr>
+          <a:lstStyle/>
+          <a:p>
+            <a:pPr indent="0" lvl="0" marL="0" marR="0" rtl="0" algn="l">
+              <a:lnSpc>
+                <a:spcPct val="100000"/>
+              </a:lnSpc>
+              <a:spcBef>
+                <a:spcPts val="0"/>
+              </a:spcBef>
+              <a:spcAft>
+                <a:spcPts val="0"/>
+              </a:spcAft>
+              <a:buClr>
+                <a:srgbClr val="000000"/>
+              </a:buClr>
+              <a:buSzPts val="1400"/>
+              <a:buFont typeface="Arial"/>
+              <a:buNone/>
+            </a:pPr>
+            <a:r>
+              <a:t/>
+            </a:r>
+            <a:endParaRPr b="0" i="0" sz="1400" u="none" cap="none" strike="noStrike">
+              <a:solidFill>
+                <a:srgbClr val="000000"/>
+              </a:solidFill>
+              <a:latin typeface="Arial"/>
+              <a:ea typeface="Arial"/>
+              <a:cs typeface="Arial"/>
+              <a:sym typeface="Arial"/>
+            </a:endParaRPr>
+          </a:p>
+        </p:txBody>
+      </p:sp>
+      <p:sp>
+        <p:nvSpPr>
+          <p:cNvPr id="127" name="Google Shape;127;p5"/>
+          <p:cNvSpPr txBox="1"/>
+          <p:nvPr/>
+        </p:nvSpPr>
+        <p:spPr>
+          <a:xfrm>
+            <a:off x="8286600" y="4886313"/>
+            <a:ext cx="857400" cy="128700"/>
+          </a:xfrm>
+          <a:prstGeom prst="rect">
             <a:avLst/>
           </a:prstGeom>
           <a:noFill/>
-          <a:ln cap="flat" cmpd="sng" w="9525">
-            <a:solidFill>
-              <a:srgbClr val="D4CFC8"/>
-            </a:solidFill>
-            <a:prstDash val="solid"/>
-            <a:round/>
-            <a:headEnd len="sm" w="sm" type="none"/>
-            <a:tailEnd len="sm" w="sm" type="none"/>
-          </a:ln>
-        </p:spPr>
-      </p:cxnSp>
-      <p:sp>
-        <p:nvSpPr>
-          <p:cNvPr id="126" name="Google Shape;126;p5"/>
-          <p:cNvSpPr txBox="1"/>
-          <p:nvPr/>
-        </p:nvSpPr>
-        <p:spPr>
-          <a:xfrm>
-            <a:off x="7543800" y="4903470"/>
-            <a:ext cx="1028700" cy="171450"/>
-          </a:xfrm>
-          <a:prstGeom prst="rect">
-            <a:avLst/>
-          </a:prstGeom>
-          <a:noFill/>
-          <a:ln>
-            <a:noFill/>
-          </a:ln>
-        </p:spPr>
-        <p:txBody>
-          <a:bodyPr anchorCtr="0" anchor="ctr" bIns="0" lIns="0" spcFirstLastPara="1" rIns="0" wrap="square" tIns="0">
+          <a:ln>
+            <a:noFill/>
+          </a:ln>
+        </p:spPr>
+        <p:txBody>
+          <a:bodyPr anchorCtr="0" anchor="t" bIns="0" lIns="0" spcFirstLastPara="1" rIns="0" wrap="square" tIns="0">
             <a:noAutofit/>
           </a:bodyPr>
           <a:lstStyle/>
@@ -40228,7 +40777,7 @@
               <a:buNone/>
             </a:pPr>
             <a:r>
-              <a:rPr b="0" i="0" lang="en" sz="700" u="none" cap="none" strike="noStrike">
+              <a:rPr i="0" lang="en" sz="700" u="none" cap="none" strike="noStrike">
                 <a:solidFill>
                   <a:schemeClr val="dk1"/>
                 </a:solidFill>
@@ -40237,7 +40786,7 @@
                 <a:cs typeface="IBM Plex Mono"/>
                 <a:sym typeface="IBM Plex Mono"/>
               </a:rPr>
-              <a:t>03 / 2</a:t>
+              <a:t>0</a:t>
             </a:r>
             <a:r>
               <a:rPr lang="en" sz="700">
@@ -40249,75 +40798,40 @@
                 <a:cs typeface="IBM Plex Mono"/>
                 <a:sym typeface="IBM Plex Mono"/>
               </a:rPr>
+              <a:t>3</a:t>
+            </a:r>
+            <a:r>
+              <a:rPr i="0" lang="en" sz="700" u="none" cap="none" strike="noStrike">
+                <a:solidFill>
+                  <a:schemeClr val="dk1"/>
+                </a:solidFill>
+                <a:latin typeface="IBM Plex Mono"/>
+                <a:ea typeface="IBM Plex Mono"/>
+                <a:cs typeface="IBM Plex Mono"/>
+                <a:sym typeface="IBM Plex Mono"/>
+              </a:rPr>
+              <a:t> / 2</a:t>
+            </a:r>
+            <a:r>
+              <a:rPr lang="en" sz="700">
+                <a:solidFill>
+                  <a:schemeClr val="dk1"/>
+                </a:solidFill>
+                <a:latin typeface="IBM Plex Mono"/>
+                <a:ea typeface="IBM Plex Mono"/>
+                <a:cs typeface="IBM Plex Mono"/>
+                <a:sym typeface="IBM Plex Mono"/>
+              </a:rPr>
               <a:t>1</a:t>
             </a:r>
-            <a:endParaRPr b="0" i="0" sz="700" u="none" cap="none" strike="noStrike">
+            <a:endParaRPr i="0" sz="700" u="none" cap="none" strike="noStrike">
               <a:solidFill>
                 <a:schemeClr val="dk1"/>
               </a:solidFill>
-              <a:latin typeface="Calibri"/>
-              <a:ea typeface="Calibri"/>
-              <a:cs typeface="Calibri"/>
-              <a:sym typeface="Calibri"/>
-            </a:endParaRPr>
-          </a:p>
-        </p:txBody>
-      </p:sp>
-      <p:sp>
-        <p:nvSpPr>
-          <p:cNvPr id="127" name="Google Shape;127;p5"/>
-          <p:cNvSpPr/>
-          <p:nvPr/>
-        </p:nvSpPr>
-        <p:spPr>
-          <a:xfrm>
-            <a:off x="0" y="5122241"/>
-            <a:ext cx="914378" cy="21260"/>
-          </a:xfrm>
-          <a:prstGeom prst="rect">
-            <a:avLst/>
-          </a:prstGeom>
-          <a:solidFill>
-            <a:srgbClr val="8B1A1A"/>
-          </a:solidFill>
-          <a:ln>
-            <a:noFill/>
-          </a:ln>
-        </p:spPr>
-        <p:txBody>
-          <a:bodyPr anchorCtr="0" anchor="ctr" bIns="68575" lIns="68575" spcFirstLastPara="1" rIns="68575" wrap="square" tIns="68575">
-            <a:noAutofit/>
-          </a:bodyPr>
-          <a:lstStyle/>
-          <a:p>
-            <a:pPr indent="0" lvl="0" marL="0" marR="0" rtl="0" algn="l">
-              <a:lnSpc>
-                <a:spcPct val="100000"/>
-              </a:lnSpc>
-              <a:spcBef>
-                <a:spcPts val="0"/>
-              </a:spcBef>
-              <a:spcAft>
-                <a:spcPts val="0"/>
-              </a:spcAft>
-              <a:buClr>
-                <a:srgbClr val="000000"/>
-              </a:buClr>
-              <a:buSzPts val="1400"/>
-              <a:buFont typeface="Arial"/>
-              <a:buNone/>
-            </a:pPr>
-            <a:r>
-              <a:t/>
-            </a:r>
-            <a:endParaRPr b="0" i="0" sz="1400" u="none" cap="none" strike="noStrike">
-              <a:solidFill>
-                <a:srgbClr val="000000"/>
-              </a:solidFill>
-              <a:latin typeface="Arial"/>
-              <a:ea typeface="Arial"/>
-              <a:cs typeface="Arial"/>
-              <a:sym typeface="Arial"/>
+              <a:latin typeface="IBM Plex Mono"/>
+              <a:ea typeface="IBM Plex Mono"/>
+              <a:cs typeface="IBM Plex Mono"/>
+              <a:sym typeface="IBM Plex Mono"/>
             </a:endParaRPr>
           </a:p>
         </p:txBody>
@@ -41544,7 +42058,7 @@
             <a:tbl>
               <a:tblPr>
                 <a:noFill/>
-                <a:tableStyleId>{164A1B23-7A83-474B-B4BF-E042B0863BCF}</a:tableStyleId>
+                <a:tableStyleId>{81637843-7EEC-42DC-84F5-4FF2FDD21AC6}</a:tableStyleId>
               </a:tblPr>
               <a:tblGrid>
                 <a:gridCol w="4000500"/>
@@ -42470,53 +42984,145 @@
           </a:p>
         </p:txBody>
       </p:sp>
-      <p:cxnSp>
-        <p:nvCxnSpPr>
+      <p:sp>
+        <p:nvSpPr>
           <p:cNvPr id="153" name="Google Shape;153;p6"/>
-          <p:cNvCxnSpPr/>
-          <p:nvPr/>
-        </p:nvCxnSpPr>
-        <p:spPr>
-          <a:xfrm>
-            <a:off x="0" y="4886325"/>
-            <a:ext cx="9144000" cy="0"/>
-          </a:xfrm>
-          <a:prstGeom prst="straightConnector1">
+          <p:cNvSpPr/>
+          <p:nvPr/>
+        </p:nvSpPr>
+        <p:spPr>
+          <a:xfrm>
+            <a:off x="0" y="5122069"/>
+            <a:ext cx="1371600" cy="21431"/>
+          </a:xfrm>
+          <a:prstGeom prst="rect">
+            <a:avLst/>
+          </a:prstGeom>
+          <a:solidFill>
+            <a:srgbClr val="8B1A1A"/>
+          </a:solidFill>
+          <a:ln>
+            <a:noFill/>
+          </a:ln>
+        </p:spPr>
+        <p:txBody>
+          <a:bodyPr anchorCtr="0" anchor="ctr" bIns="68575" lIns="68575" spcFirstLastPara="1" rIns="68575" wrap="square" tIns="68575">
+            <a:noAutofit/>
+          </a:bodyPr>
+          <a:lstStyle/>
+          <a:p>
+            <a:pPr indent="0" lvl="0" marL="0" marR="0" rtl="0" algn="l">
+              <a:lnSpc>
+                <a:spcPct val="100000"/>
+              </a:lnSpc>
+              <a:spcBef>
+                <a:spcPts val="0"/>
+              </a:spcBef>
+              <a:spcAft>
+                <a:spcPts val="0"/>
+              </a:spcAft>
+              <a:buClr>
+                <a:srgbClr val="000000"/>
+              </a:buClr>
+              <a:buSzPts val="1400"/>
+              <a:buFont typeface="Arial"/>
+              <a:buNone/>
+            </a:pPr>
+            <a:r>
+              <a:t/>
+            </a:r>
+            <a:endParaRPr b="0" i="0" sz="1400" u="none" cap="none" strike="noStrike">
+              <a:solidFill>
+                <a:srgbClr val="000000"/>
+              </a:solidFill>
+              <a:latin typeface="Arial"/>
+              <a:ea typeface="Arial"/>
+              <a:cs typeface="Arial"/>
+              <a:sym typeface="Arial"/>
+            </a:endParaRPr>
+          </a:p>
+        </p:txBody>
+      </p:sp>
+      <p:sp>
+        <p:nvSpPr>
+          <p:cNvPr id="154" name="Google Shape;154;p6"/>
+          <p:cNvSpPr/>
+          <p:nvPr/>
+        </p:nvSpPr>
+        <p:spPr>
+          <a:xfrm>
+            <a:off x="0" y="4886203"/>
+            <a:ext cx="9143700" cy="6900"/>
+          </a:xfrm>
+          <a:prstGeom prst="rect">
+            <a:avLst/>
+          </a:prstGeom>
+          <a:solidFill>
+            <a:srgbClr val="D4CFC8"/>
+          </a:solidFill>
+          <a:ln>
+            <a:noFill/>
+          </a:ln>
+        </p:spPr>
+        <p:txBody>
+          <a:bodyPr anchorCtr="0" anchor="ctr" bIns="68575" lIns="68575" spcFirstLastPara="1" rIns="68575" wrap="square" tIns="68575">
+            <a:noAutofit/>
+          </a:bodyPr>
+          <a:lstStyle/>
+          <a:p>
+            <a:pPr indent="0" lvl="0" marL="0" marR="0" rtl="0" algn="l">
+              <a:lnSpc>
+                <a:spcPct val="100000"/>
+              </a:lnSpc>
+              <a:spcBef>
+                <a:spcPts val="0"/>
+              </a:spcBef>
+              <a:spcAft>
+                <a:spcPts val="0"/>
+              </a:spcAft>
+              <a:buClr>
+                <a:srgbClr val="000000"/>
+              </a:buClr>
+              <a:buSzPts val="1400"/>
+              <a:buFont typeface="Arial"/>
+              <a:buNone/>
+            </a:pPr>
+            <a:r>
+              <a:t/>
+            </a:r>
+            <a:endParaRPr b="0" i="0" sz="1400" u="none" cap="none" strike="noStrike">
+              <a:solidFill>
+                <a:srgbClr val="000000"/>
+              </a:solidFill>
+              <a:latin typeface="Arial"/>
+              <a:ea typeface="Arial"/>
+              <a:cs typeface="Arial"/>
+              <a:sym typeface="Arial"/>
+            </a:endParaRPr>
+          </a:p>
+        </p:txBody>
+      </p:sp>
+      <p:sp>
+        <p:nvSpPr>
+          <p:cNvPr id="155" name="Google Shape;155;p6"/>
+          <p:cNvSpPr txBox="1"/>
+          <p:nvPr/>
+        </p:nvSpPr>
+        <p:spPr>
+          <a:xfrm>
+            <a:off x="8286600" y="4886313"/>
+            <a:ext cx="857400" cy="128700"/>
+          </a:xfrm>
+          <a:prstGeom prst="rect">
             <a:avLst/>
           </a:prstGeom>
           <a:noFill/>
-          <a:ln cap="flat" cmpd="sng" w="9525">
-            <a:solidFill>
-              <a:srgbClr val="D4CFC8"/>
-            </a:solidFill>
-            <a:prstDash val="solid"/>
-            <a:round/>
-            <a:headEnd len="sm" w="sm" type="none"/>
-            <a:tailEnd len="sm" w="sm" type="none"/>
-          </a:ln>
-        </p:spPr>
-      </p:cxnSp>
-      <p:sp>
-        <p:nvSpPr>
-          <p:cNvPr id="154" name="Google Shape;154;p6"/>
-          <p:cNvSpPr txBox="1"/>
-          <p:nvPr/>
-        </p:nvSpPr>
-        <p:spPr>
-          <a:xfrm>
-            <a:off x="8001000" y="5000625"/>
-            <a:ext cx="857250" cy="128588"/>
-          </a:xfrm>
-          <a:prstGeom prst="rect">
-            <a:avLst/>
-          </a:prstGeom>
-          <a:noFill/>
-          <a:ln>
-            <a:noFill/>
-          </a:ln>
-        </p:spPr>
-        <p:txBody>
-          <a:bodyPr anchorCtr="0" anchor="ctr" bIns="0" lIns="0" spcFirstLastPara="1" rIns="0" wrap="square" tIns="0">
+          <a:ln>
+            <a:noFill/>
+          </a:ln>
+        </p:spPr>
+        <p:txBody>
+          <a:bodyPr anchorCtr="0" anchor="t" bIns="0" lIns="0" spcFirstLastPara="1" rIns="0" wrap="square" tIns="0">
             <a:noAutofit/>
           </a:bodyPr>
           <a:lstStyle/>
@@ -42539,7 +43145,7 @@
               <a:buNone/>
             </a:pPr>
             <a:r>
-              <a:rPr b="0" i="0" lang="en" sz="700" u="none" cap="none" strike="noStrike">
+              <a:rPr i="0" lang="en" sz="700" u="none" cap="none" strike="noStrike">
                 <a:solidFill>
                   <a:schemeClr val="dk1"/>
                 </a:solidFill>
@@ -42548,7 +43154,7 @@
                 <a:cs typeface="IBM Plex Mono"/>
                 <a:sym typeface="IBM Plex Mono"/>
               </a:rPr>
-              <a:t>04 / 2</a:t>
+              <a:t>0</a:t>
             </a:r>
             <a:r>
               <a:rPr lang="en" sz="700">
@@ -42560,75 +43166,40 @@
                 <a:cs typeface="IBM Plex Mono"/>
                 <a:sym typeface="IBM Plex Mono"/>
               </a:rPr>
+              <a:t>4</a:t>
+            </a:r>
+            <a:r>
+              <a:rPr i="0" lang="en" sz="700" u="none" cap="none" strike="noStrike">
+                <a:solidFill>
+                  <a:schemeClr val="dk1"/>
+                </a:solidFill>
+                <a:latin typeface="IBM Plex Mono"/>
+                <a:ea typeface="IBM Plex Mono"/>
+                <a:cs typeface="IBM Plex Mono"/>
+                <a:sym typeface="IBM Plex Mono"/>
+              </a:rPr>
+              <a:t> / 2</a:t>
+            </a:r>
+            <a:r>
+              <a:rPr lang="en" sz="700">
+                <a:solidFill>
+                  <a:schemeClr val="dk1"/>
+                </a:solidFill>
+                <a:latin typeface="IBM Plex Mono"/>
+                <a:ea typeface="IBM Plex Mono"/>
+                <a:cs typeface="IBM Plex Mono"/>
+                <a:sym typeface="IBM Plex Mono"/>
+              </a:rPr>
               <a:t>1</a:t>
             </a:r>
-            <a:endParaRPr b="0" i="0" sz="700" u="none" cap="none" strike="noStrike">
+            <a:endParaRPr i="0" sz="700" u="none" cap="none" strike="noStrike">
               <a:solidFill>
                 <a:schemeClr val="dk1"/>
               </a:solidFill>
-              <a:latin typeface="Calibri"/>
-              <a:ea typeface="Calibri"/>
-              <a:cs typeface="Calibri"/>
-              <a:sym typeface="Calibri"/>
-            </a:endParaRPr>
-          </a:p>
-        </p:txBody>
-      </p:sp>
-      <p:sp>
-        <p:nvSpPr>
-          <p:cNvPr id="155" name="Google Shape;155;p6"/>
-          <p:cNvSpPr/>
-          <p:nvPr/>
-        </p:nvSpPr>
-        <p:spPr>
-          <a:xfrm>
-            <a:off x="0" y="5122069"/>
-            <a:ext cx="1371600" cy="21431"/>
-          </a:xfrm>
-          <a:prstGeom prst="rect">
-            <a:avLst/>
-          </a:prstGeom>
-          <a:solidFill>
-            <a:srgbClr val="8B1A1A"/>
-          </a:solidFill>
-          <a:ln>
-            <a:noFill/>
-          </a:ln>
-        </p:spPr>
-        <p:txBody>
-          <a:bodyPr anchorCtr="0" anchor="ctr" bIns="68575" lIns="68575" spcFirstLastPara="1" rIns="68575" wrap="square" tIns="68575">
-            <a:noAutofit/>
-          </a:bodyPr>
-          <a:lstStyle/>
-          <a:p>
-            <a:pPr indent="0" lvl="0" marL="0" marR="0" rtl="0" algn="l">
-              <a:lnSpc>
-                <a:spcPct val="100000"/>
-              </a:lnSpc>
-              <a:spcBef>
-                <a:spcPts val="0"/>
-              </a:spcBef>
-              <a:spcAft>
-                <a:spcPts val="0"/>
-              </a:spcAft>
-              <a:buClr>
-                <a:srgbClr val="000000"/>
-              </a:buClr>
-              <a:buSzPts val="1400"/>
-              <a:buFont typeface="Arial"/>
-              <a:buNone/>
-            </a:pPr>
-            <a:r>
-              <a:t/>
-            </a:r>
-            <a:endParaRPr b="0" i="0" sz="1400" u="none" cap="none" strike="noStrike">
-              <a:solidFill>
-                <a:srgbClr val="000000"/>
-              </a:solidFill>
-              <a:latin typeface="Arial"/>
-              <a:ea typeface="Arial"/>
-              <a:cs typeface="Arial"/>
-              <a:sym typeface="Arial"/>
+              <a:latin typeface="IBM Plex Mono"/>
+              <a:ea typeface="IBM Plex Mono"/>
+              <a:cs typeface="IBM Plex Mono"/>
+              <a:sym typeface="IBM Plex Mono"/>
             </a:endParaRPr>
           </a:p>
         </p:txBody>
@@ -44658,113 +45229,9 @@
           </a:p>
         </p:txBody>
       </p:sp>
-      <p:cxnSp>
-        <p:nvCxnSpPr>
+      <p:sp>
+        <p:nvSpPr>
           <p:cNvPr id="193" name="Google Shape;193;p7"/>
-          <p:cNvCxnSpPr/>
-          <p:nvPr/>
-        </p:nvCxnSpPr>
-        <p:spPr>
-          <a:xfrm>
-            <a:off x="0" y="4886325"/>
-            <a:ext cx="9144015" cy="0"/>
-          </a:xfrm>
-          <a:prstGeom prst="straightConnector1">
-            <a:avLst/>
-          </a:prstGeom>
-          <a:noFill/>
-          <a:ln cap="flat" cmpd="sng" w="9525">
-            <a:solidFill>
-              <a:srgbClr val="D4CFC8"/>
-            </a:solidFill>
-            <a:prstDash val="solid"/>
-            <a:round/>
-            <a:headEnd len="sm" w="sm" type="none"/>
-            <a:tailEnd len="sm" w="sm" type="none"/>
-          </a:ln>
-        </p:spPr>
-      </p:cxnSp>
-      <p:sp>
-        <p:nvSpPr>
-          <p:cNvPr id="194" name="Google Shape;194;p7"/>
-          <p:cNvSpPr txBox="1"/>
-          <p:nvPr/>
-        </p:nvSpPr>
-        <p:spPr>
-          <a:xfrm>
-            <a:off x="7201092" y="4937760"/>
-            <a:ext cx="1257105" cy="150876"/>
-          </a:xfrm>
-          <a:prstGeom prst="rect">
-            <a:avLst/>
-          </a:prstGeom>
-          <a:noFill/>
-          <a:ln>
-            <a:noFill/>
-          </a:ln>
-        </p:spPr>
-        <p:txBody>
-          <a:bodyPr anchorCtr="0" anchor="t" bIns="0" lIns="0" spcFirstLastPara="1" rIns="0" wrap="square" tIns="0">
-            <a:noAutofit/>
-          </a:bodyPr>
-          <a:lstStyle/>
-          <a:p>
-            <a:pPr indent="0" lvl="0" marL="0" marR="0" rtl="0" algn="r">
-              <a:lnSpc>
-                <a:spcPct val="100000"/>
-              </a:lnSpc>
-              <a:spcBef>
-                <a:spcPts val="0"/>
-              </a:spcBef>
-              <a:spcAft>
-                <a:spcPts val="0"/>
-              </a:spcAft>
-              <a:buClr>
-                <a:srgbClr val="9A9AAA"/>
-              </a:buClr>
-              <a:buSzPts val="700"/>
-              <a:buFont typeface="Courier New"/>
-              <a:buNone/>
-            </a:pPr>
-            <a:r>
-              <a:rPr b="0" i="0" lang="en" sz="700" u="none" cap="none" strike="noStrike">
-                <a:solidFill>
-                  <a:schemeClr val="dk1"/>
-                </a:solidFill>
-                <a:latin typeface="Courier New"/>
-                <a:ea typeface="Courier New"/>
-                <a:cs typeface="Courier New"/>
-                <a:sym typeface="Courier New"/>
-              </a:rPr>
-              <a:t>05 / 2</a:t>
-            </a:r>
-            <a:r>
-              <a:rPr lang="en" sz="700">
-                <a:solidFill>
-                  <a:schemeClr val="dk1"/>
-                </a:solidFill>
-                <a:latin typeface="Courier New"/>
-                <a:ea typeface="Courier New"/>
-                <a:cs typeface="Courier New"/>
-                <a:sym typeface="Courier New"/>
-              </a:rPr>
-              <a:t>1</a:t>
-            </a:r>
-            <a:endParaRPr b="0" i="0" sz="700" u="none" cap="none" strike="noStrike">
-              <a:solidFill>
-                <a:schemeClr val="dk1"/>
-              </a:solidFill>
-              <a:latin typeface="Calibri"/>
-              <a:ea typeface="Calibri"/>
-              <a:cs typeface="Calibri"/>
-              <a:sym typeface="Calibri"/>
-            </a:endParaRPr>
-          </a:p>
-        </p:txBody>
-      </p:sp>
-      <p:sp>
-        <p:nvSpPr>
-          <p:cNvPr id="195" name="Google Shape;195;p7"/>
           <p:cNvSpPr/>
           <p:nvPr/>
         </p:nvSpPr>
@@ -44817,6 +45284,167 @@
               <a:ea typeface="Arial"/>
               <a:cs typeface="Arial"/>
               <a:sym typeface="Arial"/>
+            </a:endParaRPr>
+          </a:p>
+        </p:txBody>
+      </p:sp>
+      <p:sp>
+        <p:nvSpPr>
+          <p:cNvPr id="194" name="Google Shape;194;p7"/>
+          <p:cNvSpPr/>
+          <p:nvPr/>
+        </p:nvSpPr>
+        <p:spPr>
+          <a:xfrm>
+            <a:off x="0" y="4886203"/>
+            <a:ext cx="9143700" cy="6900"/>
+          </a:xfrm>
+          <a:prstGeom prst="rect">
+            <a:avLst/>
+          </a:prstGeom>
+          <a:solidFill>
+            <a:srgbClr val="D4CFC8"/>
+          </a:solidFill>
+          <a:ln>
+            <a:noFill/>
+          </a:ln>
+        </p:spPr>
+        <p:txBody>
+          <a:bodyPr anchorCtr="0" anchor="ctr" bIns="68575" lIns="68575" spcFirstLastPara="1" rIns="68575" wrap="square" tIns="68575">
+            <a:noAutofit/>
+          </a:bodyPr>
+          <a:lstStyle/>
+          <a:p>
+            <a:pPr indent="0" lvl="0" marL="0" marR="0" rtl="0" algn="l">
+              <a:lnSpc>
+                <a:spcPct val="100000"/>
+              </a:lnSpc>
+              <a:spcBef>
+                <a:spcPts val="0"/>
+              </a:spcBef>
+              <a:spcAft>
+                <a:spcPts val="0"/>
+              </a:spcAft>
+              <a:buClr>
+                <a:srgbClr val="000000"/>
+              </a:buClr>
+              <a:buSzPts val="1400"/>
+              <a:buFont typeface="Arial"/>
+              <a:buNone/>
+            </a:pPr>
+            <a:r>
+              <a:t/>
+            </a:r>
+            <a:endParaRPr b="0" i="0" sz="1400" u="none" cap="none" strike="noStrike">
+              <a:solidFill>
+                <a:srgbClr val="000000"/>
+              </a:solidFill>
+              <a:latin typeface="Arial"/>
+              <a:ea typeface="Arial"/>
+              <a:cs typeface="Arial"/>
+              <a:sym typeface="Arial"/>
+            </a:endParaRPr>
+          </a:p>
+        </p:txBody>
+      </p:sp>
+      <p:sp>
+        <p:nvSpPr>
+          <p:cNvPr id="195" name="Google Shape;195;p7"/>
+          <p:cNvSpPr txBox="1"/>
+          <p:nvPr/>
+        </p:nvSpPr>
+        <p:spPr>
+          <a:xfrm>
+            <a:off x="8286600" y="4886313"/>
+            <a:ext cx="857400" cy="128700"/>
+          </a:xfrm>
+          <a:prstGeom prst="rect">
+            <a:avLst/>
+          </a:prstGeom>
+          <a:noFill/>
+          <a:ln>
+            <a:noFill/>
+          </a:ln>
+        </p:spPr>
+        <p:txBody>
+          <a:bodyPr anchorCtr="0" anchor="t" bIns="0" lIns="0" spcFirstLastPara="1" rIns="0" wrap="square" tIns="0">
+            <a:noAutofit/>
+          </a:bodyPr>
+          <a:lstStyle/>
+          <a:p>
+            <a:pPr indent="0" lvl="0" marL="0" marR="0" rtl="0" algn="r">
+              <a:lnSpc>
+                <a:spcPct val="100000"/>
+              </a:lnSpc>
+              <a:spcBef>
+                <a:spcPts val="0"/>
+              </a:spcBef>
+              <a:spcAft>
+                <a:spcPts val="0"/>
+              </a:spcAft>
+              <a:buClr>
+                <a:srgbClr val="9A9AAA"/>
+              </a:buClr>
+              <a:buSzPts val="700"/>
+              <a:buFont typeface="IBM Plex Mono"/>
+              <a:buNone/>
+            </a:pPr>
+            <a:r>
+              <a:rPr i="0" lang="en" sz="700" u="none" cap="none" strike="noStrike">
+                <a:solidFill>
+                  <a:schemeClr val="dk1"/>
+                </a:solidFill>
+                <a:latin typeface="IBM Plex Mono"/>
+                <a:ea typeface="IBM Plex Mono"/>
+                <a:cs typeface="IBM Plex Mono"/>
+                <a:sym typeface="IBM Plex Mono"/>
+              </a:rPr>
+              <a:t>0</a:t>
+            </a:r>
+            <a:r>
+              <a:rPr lang="en" sz="700">
+                <a:solidFill>
+                  <a:schemeClr val="dk1"/>
+                </a:solidFill>
+                <a:latin typeface="IBM Plex Mono"/>
+                <a:ea typeface="IBM Plex Mono"/>
+                <a:cs typeface="IBM Plex Mono"/>
+                <a:sym typeface="IBM Plex Mono"/>
+              </a:rPr>
+              <a:t>5</a:t>
+            </a:r>
+            <a:r>
+              <a:rPr i="0" lang="en" sz="700" u="none" cap="none" strike="noStrike">
+                <a:solidFill>
+                  <a:schemeClr val="dk1"/>
+                </a:solidFill>
+                <a:latin typeface="IBM Plex Mono"/>
+                <a:ea typeface="IBM Plex Mono"/>
+                <a:cs typeface="IBM Plex Mono"/>
+                <a:sym typeface="IBM Plex Mono"/>
+              </a:rPr>
+              <a:t> / 2</a:t>
+            </a:r>
+            <a:r>
+              <a:rPr lang="en" sz="700">
+                <a:solidFill>
+                  <a:schemeClr val="dk1"/>
+                </a:solidFill>
+                <a:latin typeface="IBM Plex Mono"/>
+                <a:ea typeface="IBM Plex Mono"/>
+                <a:cs typeface="IBM Plex Mono"/>
+                <a:sym typeface="IBM Plex Mono"/>
+              </a:rPr>
+              <a:t>1</a:t>
+            </a:r>
+            <a:endParaRPr i="0" sz="700" u="none" cap="none" strike="noStrike">
+              <a:solidFill>
+                <a:schemeClr val="dk1"/>
+              </a:solidFill>
+              <a:latin typeface="IBM Plex Mono"/>
+              <a:ea typeface="IBM Plex Mono"/>
+              <a:cs typeface="IBM Plex Mono"/>
+              <a:sym typeface="IBM Plex Mono"/>
             </a:endParaRPr>
           </a:p>
         </p:txBody>
@@ -47294,14 +47922,14 @@
         </p:nvSpPr>
         <p:spPr>
           <a:xfrm>
-            <a:off x="0" y="4886325"/>
-            <a:ext cx="9143771" cy="7543"/>
+            <a:off x="0" y="5122241"/>
+            <a:ext cx="2285771" cy="21260"/>
           </a:xfrm>
           <a:prstGeom prst="rect">
             <a:avLst/>
           </a:prstGeom>
           <a:solidFill>
-            <a:srgbClr val="D4CFC8"/>
+            <a:srgbClr val="8B1A1A"/>
           </a:solidFill>
           <a:ln>
             <a:noFill/>
@@ -47348,97 +47976,19 @@
       <p:sp>
         <p:nvSpPr>
           <p:cNvPr id="240" name="Google Shape;240;p8"/>
-          <p:cNvSpPr txBox="1"/>
-          <p:nvPr/>
-        </p:nvSpPr>
-        <p:spPr>
-          <a:xfrm>
-            <a:off x="7749540" y="4965192"/>
-            <a:ext cx="822960" cy="137160"/>
+          <p:cNvSpPr/>
+          <p:nvPr/>
+        </p:nvSpPr>
+        <p:spPr>
+          <a:xfrm>
+            <a:off x="0" y="4886203"/>
+            <a:ext cx="9143700" cy="6900"/>
           </a:xfrm>
           <a:prstGeom prst="rect">
             <a:avLst/>
           </a:prstGeom>
-          <a:noFill/>
-          <a:ln>
-            <a:noFill/>
-          </a:ln>
-        </p:spPr>
-        <p:txBody>
-          <a:bodyPr anchorCtr="0" anchor="ctr" bIns="0" lIns="0" spcFirstLastPara="1" rIns="0" wrap="square" tIns="0">
-            <a:noAutofit/>
-          </a:bodyPr>
-          <a:lstStyle/>
-          <a:p>
-            <a:pPr indent="0" lvl="0" marL="0" marR="0" rtl="0" algn="r">
-              <a:lnSpc>
-                <a:spcPct val="100000"/>
-              </a:lnSpc>
-              <a:spcBef>
-                <a:spcPts val="0"/>
-              </a:spcBef>
-              <a:spcAft>
-                <a:spcPts val="0"/>
-              </a:spcAft>
-              <a:buClr>
-                <a:srgbClr val="9A9AAA"/>
-              </a:buClr>
-              <a:buSzPts val="700"/>
-              <a:buFont typeface="Courier New"/>
-              <a:buNone/>
-            </a:pPr>
-            <a:r>
-              <a:rPr b="0" i="0" lang="en" sz="700" u="none" cap="none" strike="noStrike">
-                <a:solidFill>
-                  <a:schemeClr val="dk1"/>
-                </a:solidFill>
-                <a:latin typeface="Courier New"/>
-                <a:ea typeface="Courier New"/>
-                <a:cs typeface="Courier New"/>
-                <a:sym typeface="Courier New"/>
-              </a:rPr>
-              <a:t>06 / 2</a:t>
-            </a:r>
-            <a:r>
-              <a:rPr lang="en" sz="700">
-                <a:solidFill>
-                  <a:schemeClr val="dk1"/>
-                </a:solidFill>
-                <a:latin typeface="Courier New"/>
-                <a:ea typeface="Courier New"/>
-                <a:cs typeface="Courier New"/>
-                <a:sym typeface="Courier New"/>
-              </a:rPr>
-              <a:t>1</a:t>
-            </a:r>
-            <a:endParaRPr b="0" i="0" sz="700" u="none" cap="none" strike="noStrike">
-              <a:solidFill>
-                <a:schemeClr val="dk1"/>
-              </a:solidFill>
-              <a:latin typeface="Calibri"/>
-              <a:ea typeface="Calibri"/>
-              <a:cs typeface="Calibri"/>
-              <a:sym typeface="Calibri"/>
-            </a:endParaRPr>
-          </a:p>
-        </p:txBody>
-      </p:sp>
-      <p:sp>
-        <p:nvSpPr>
-          <p:cNvPr id="241" name="Google Shape;241;p8"/>
-          <p:cNvSpPr/>
-          <p:nvPr/>
-        </p:nvSpPr>
-        <p:spPr>
-          <a:xfrm>
-            <a:off x="0" y="5122241"/>
-            <a:ext cx="2285771" cy="21260"/>
-          </a:xfrm>
-          <a:prstGeom prst="rect">
-            <a:avLst/>
-          </a:prstGeom>
           <a:solidFill>
-            <a:srgbClr val="8B1A1A"/>
+            <a:srgbClr val="D4CFC8"/>
           </a:solidFill>
           <a:ln>
             <a:noFill/>
@@ -47478,6 +48028,108 @@
               <a:ea typeface="Arial"/>
               <a:cs typeface="Arial"/>
               <a:sym typeface="Arial"/>
+            </a:endParaRPr>
+          </a:p>
+        </p:txBody>
+      </p:sp>
+      <p:sp>
+        <p:nvSpPr>
+          <p:cNvPr id="241" name="Google Shape;241;p8"/>
+          <p:cNvSpPr txBox="1"/>
+          <p:nvPr/>
+        </p:nvSpPr>
+        <p:spPr>
+          <a:xfrm>
+            <a:off x="8286600" y="4886313"/>
+            <a:ext cx="857400" cy="128700"/>
+          </a:xfrm>
+          <a:prstGeom prst="rect">
+            <a:avLst/>
+          </a:prstGeom>
+          <a:noFill/>
+          <a:ln>
+            <a:noFill/>
+          </a:ln>
+        </p:spPr>
+        <p:txBody>
+          <a:bodyPr anchorCtr="0" anchor="t" bIns="0" lIns="0" spcFirstLastPara="1" rIns="0" wrap="square" tIns="0">
+            <a:noAutofit/>
+          </a:bodyPr>
+          <a:lstStyle/>
+          <a:p>
+            <a:pPr indent="0" lvl="0" marL="0" marR="0" rtl="0" algn="r">
+              <a:lnSpc>
+                <a:spcPct val="100000"/>
+              </a:lnSpc>
+              <a:spcBef>
+                <a:spcPts val="0"/>
+              </a:spcBef>
+              <a:spcAft>
+                <a:spcPts val="0"/>
+              </a:spcAft>
+              <a:buClr>
+                <a:srgbClr val="9A9AAA"/>
+              </a:buClr>
+              <a:buSzPts val="700"/>
+              <a:buFont typeface="IBM Plex Mono"/>
+              <a:buNone/>
+            </a:pPr>
+            <a:r>
+              <a:rPr i="0" lang="en" sz="700" u="none" cap="none" strike="noStrike">
+                <a:solidFill>
+                  <a:schemeClr val="dk1"/>
+                </a:solidFill>
+                <a:latin typeface="IBM Plex Mono"/>
+                <a:ea typeface="IBM Plex Mono"/>
+                <a:cs typeface="IBM Plex Mono"/>
+                <a:sym typeface="IBM Plex Mono"/>
+              </a:rPr>
+              <a:t>0</a:t>
+            </a:r>
+            <a:r>
+              <a:rPr lang="en" sz="700">
+                <a:solidFill>
+                  <a:schemeClr val="dk1"/>
+                </a:solidFill>
+                <a:latin typeface="IBM Plex Mono"/>
+                <a:ea typeface="IBM Plex Mono"/>
+                <a:cs typeface="IBM Plex Mono"/>
+                <a:sym typeface="IBM Plex Mono"/>
+              </a:rPr>
+              <a:t>6</a:t>
+            </a:r>
+            <a:r>
+              <a:rPr i="0" lang="en" sz="700" u="none" cap="none" strike="noStrike">
+                <a:solidFill>
+                  <a:schemeClr val="dk1"/>
+                </a:solidFill>
+                <a:latin typeface="IBM Plex Mono"/>
+                <a:ea typeface="IBM Plex Mono"/>
+                <a:cs typeface="IBM Plex Mono"/>
+                <a:sym typeface="IBM Plex Mono"/>
+              </a:rPr>
+              <a:t> / 2</a:t>
+            </a:r>
+            <a:r>
+              <a:rPr lang="en" sz="700">
+                <a:solidFill>
+                  <a:schemeClr val="dk1"/>
+                </a:solidFill>
+                <a:latin typeface="IBM Plex Mono"/>
+                <a:ea typeface="IBM Plex Mono"/>
+                <a:cs typeface="IBM Plex Mono"/>
+                <a:sym typeface="IBM Plex Mono"/>
+              </a:rPr>
+              <a:t>1</a:t>
+            </a:r>
+            <a:endParaRPr i="0" sz="700" u="none" cap="none" strike="noStrike">
+              <a:solidFill>
+                <a:schemeClr val="dk1"/>
+              </a:solidFill>
+              <a:latin typeface="IBM Plex Mono"/>
+              <a:ea typeface="IBM Plex Mono"/>
+              <a:cs typeface="IBM Plex Mono"/>
+              <a:sym typeface="IBM Plex Mono"/>
             </a:endParaRPr>
           </a:p>
         </p:txBody>
@@ -49486,113 +50138,9 @@
           </a:p>
         </p:txBody>
       </p:sp>
-      <p:cxnSp>
-        <p:nvCxnSpPr>
+      <p:sp>
+        <p:nvSpPr>
           <p:cNvPr id="274" name="Google Shape;274;p9"/>
-          <p:cNvCxnSpPr/>
-          <p:nvPr/>
-        </p:nvCxnSpPr>
-        <p:spPr>
-          <a:xfrm>
-            <a:off x="0" y="4886325"/>
-            <a:ext cx="9144015" cy="0"/>
-          </a:xfrm>
-          <a:prstGeom prst="straightConnector1">
-            <a:avLst/>
-          </a:prstGeom>
-          <a:noFill/>
-          <a:ln cap="flat" cmpd="sng" w="12700">
-            <a:solidFill>
-              <a:srgbClr val="D4CFC8"/>
-            </a:solidFill>
-            <a:prstDash val="solid"/>
-            <a:round/>
-            <a:headEnd len="sm" w="sm" type="none"/>
-            <a:tailEnd len="sm" w="sm" type="none"/>
-          </a:ln>
-        </p:spPr>
-      </p:cxnSp>
-      <p:sp>
-        <p:nvSpPr>
-          <p:cNvPr id="275" name="Google Shape;275;p9"/>
-          <p:cNvSpPr txBox="1"/>
-          <p:nvPr/>
-        </p:nvSpPr>
-        <p:spPr>
-          <a:xfrm>
-            <a:off x="7858334" y="5000625"/>
-            <a:ext cx="714394" cy="114300"/>
-          </a:xfrm>
-          <a:prstGeom prst="rect">
-            <a:avLst/>
-          </a:prstGeom>
-          <a:noFill/>
-          <a:ln>
-            <a:noFill/>
-          </a:ln>
-        </p:spPr>
-        <p:txBody>
-          <a:bodyPr anchorCtr="0" anchor="ctr" bIns="0" lIns="0" spcFirstLastPara="1" rIns="0" wrap="square" tIns="0">
-            <a:noAutofit/>
-          </a:bodyPr>
-          <a:lstStyle/>
-          <a:p>
-            <a:pPr indent="0" lvl="0" marL="0" marR="0" rtl="0" algn="r">
-              <a:lnSpc>
-                <a:spcPct val="100000"/>
-              </a:lnSpc>
-              <a:spcBef>
-                <a:spcPts val="0"/>
-              </a:spcBef>
-              <a:spcAft>
-                <a:spcPts val="0"/>
-              </a:spcAft>
-              <a:buClr>
-                <a:srgbClr val="9A9AAA"/>
-              </a:buClr>
-              <a:buSzPts val="700"/>
-              <a:buFont typeface="Courier New"/>
-              <a:buNone/>
-            </a:pPr>
-            <a:r>
-              <a:rPr b="0" i="0" lang="en" sz="700" u="none" cap="none" strike="noStrike">
-                <a:solidFill>
-                  <a:schemeClr val="dk1"/>
-                </a:solidFill>
-                <a:latin typeface="Courier New"/>
-                <a:ea typeface="Courier New"/>
-                <a:cs typeface="Courier New"/>
-                <a:sym typeface="Courier New"/>
-              </a:rPr>
-              <a:t>07 / </a:t>
-            </a:r>
-            <a:r>
-              <a:rPr lang="en" sz="700">
-                <a:solidFill>
-                  <a:schemeClr val="dk1"/>
-                </a:solidFill>
-                <a:latin typeface="Courier New"/>
-                <a:ea typeface="Courier New"/>
-                <a:cs typeface="Courier New"/>
-                <a:sym typeface="Courier New"/>
-              </a:rPr>
-              <a:t>21</a:t>
-            </a:r>
-            <a:endParaRPr b="0" i="0" sz="700" u="none" cap="none" strike="noStrike">
-              <a:solidFill>
-                <a:schemeClr val="dk1"/>
-              </a:solidFill>
-              <a:latin typeface="Calibri"/>
-              <a:ea typeface="Calibri"/>
-              <a:cs typeface="Calibri"/>
-              <a:sym typeface="Calibri"/>
-            </a:endParaRPr>
-          </a:p>
-        </p:txBody>
-      </p:sp>
-      <p:sp>
-        <p:nvSpPr>
-          <p:cNvPr id="276" name="Google Shape;276;p9"/>
           <p:cNvSpPr/>
           <p:nvPr/>
         </p:nvSpPr>
@@ -49645,6 +50193,167 @@
               <a:ea typeface="Arial"/>
               <a:cs typeface="Arial"/>
               <a:sym typeface="Arial"/>
+            </a:endParaRPr>
+          </a:p>
+        </p:txBody>
+      </p:sp>
+      <p:sp>
+        <p:nvSpPr>
+          <p:cNvPr id="275" name="Google Shape;275;p9"/>
+          <p:cNvSpPr/>
+          <p:nvPr/>
+        </p:nvSpPr>
+        <p:spPr>
+          <a:xfrm>
+            <a:off x="0" y="4886203"/>
+            <a:ext cx="9143700" cy="6900"/>
+          </a:xfrm>
+          <a:prstGeom prst="rect">
+            <a:avLst/>
+          </a:prstGeom>
+          <a:solidFill>
+            <a:srgbClr val="D4CFC8"/>
+          </a:solidFill>
+          <a:ln>
+            <a:noFill/>
+          </a:ln>
+        </p:spPr>
+        <p:txBody>
+          <a:bodyPr anchorCtr="0" anchor="ctr" bIns="68575" lIns="68575" spcFirstLastPara="1" rIns="68575" wrap="square" tIns="68575">
+            <a:noAutofit/>
+          </a:bodyPr>
+          <a:lstStyle/>
+          <a:p>
+            <a:pPr indent="0" lvl="0" marL="0" marR="0" rtl="0" algn="l">
+              <a:lnSpc>
+                <a:spcPct val="100000"/>
+              </a:lnSpc>
+              <a:spcBef>
+                <a:spcPts val="0"/>
+              </a:spcBef>
+              <a:spcAft>
+                <a:spcPts val="0"/>
+              </a:spcAft>
+              <a:buClr>
+                <a:srgbClr val="000000"/>
+              </a:buClr>
+              <a:buSzPts val="1400"/>
+              <a:buFont typeface="Arial"/>
+              <a:buNone/>
+            </a:pPr>
+            <a:r>
+              <a:t/>
+            </a:r>
+            <a:endParaRPr b="0" i="0" sz="1400" u="none" cap="none" strike="noStrike">
+              <a:solidFill>
+                <a:srgbClr val="000000"/>
+              </a:solidFill>
+              <a:latin typeface="Arial"/>
+              <a:ea typeface="Arial"/>
+              <a:cs typeface="Arial"/>
+              <a:sym typeface="Arial"/>
+            </a:endParaRPr>
+          </a:p>
+        </p:txBody>
+      </p:sp>
+      <p:sp>
+        <p:nvSpPr>
+          <p:cNvPr id="276" name="Google Shape;276;p9"/>
+          <p:cNvSpPr txBox="1"/>
+          <p:nvPr/>
+        </p:nvSpPr>
+        <p:spPr>
+          <a:xfrm>
+            <a:off x="8286600" y="4886313"/>
+            <a:ext cx="857400" cy="128700"/>
+          </a:xfrm>
+          <a:prstGeom prst="rect">
+            <a:avLst/>
+          </a:prstGeom>
+          <a:noFill/>
+          <a:ln>
+            <a:noFill/>
+          </a:ln>
+        </p:spPr>
+        <p:txBody>
+          <a:bodyPr anchorCtr="0" anchor="t" bIns="0" lIns="0" spcFirstLastPara="1" rIns="0" wrap="square" tIns="0">
+            <a:noAutofit/>
+          </a:bodyPr>
+          <a:lstStyle/>
+          <a:p>
+            <a:pPr indent="0" lvl="0" marL="0" marR="0" rtl="0" algn="r">
+              <a:lnSpc>
+                <a:spcPct val="100000"/>
+              </a:lnSpc>
+              <a:spcBef>
+                <a:spcPts val="0"/>
+              </a:spcBef>
+              <a:spcAft>
+                <a:spcPts val="0"/>
+              </a:spcAft>
+              <a:buClr>
+                <a:srgbClr val="9A9AAA"/>
+              </a:buClr>
+              <a:buSzPts val="700"/>
+              <a:buFont typeface="IBM Plex Mono"/>
+              <a:buNone/>
+            </a:pPr>
+            <a:r>
+              <a:rPr i="0" lang="en" sz="700" u="none" cap="none" strike="noStrike">
+                <a:solidFill>
+                  <a:schemeClr val="dk1"/>
+                </a:solidFill>
+                <a:latin typeface="IBM Plex Mono"/>
+                <a:ea typeface="IBM Plex Mono"/>
+                <a:cs typeface="IBM Plex Mono"/>
+                <a:sym typeface="IBM Plex Mono"/>
+              </a:rPr>
+              <a:t>0</a:t>
+            </a:r>
+            <a:r>
+              <a:rPr lang="en" sz="700">
+                <a:solidFill>
+                  <a:schemeClr val="dk1"/>
+                </a:solidFill>
+                <a:latin typeface="IBM Plex Mono"/>
+                <a:ea typeface="IBM Plex Mono"/>
+                <a:cs typeface="IBM Plex Mono"/>
+                <a:sym typeface="IBM Plex Mono"/>
+              </a:rPr>
+              <a:t>7</a:t>
+            </a:r>
+            <a:r>
+              <a:rPr i="0" lang="en" sz="700" u="none" cap="none" strike="noStrike">
+                <a:solidFill>
+                  <a:schemeClr val="dk1"/>
+                </a:solidFill>
+                <a:latin typeface="IBM Plex Mono"/>
+                <a:ea typeface="IBM Plex Mono"/>
+                <a:cs typeface="IBM Plex Mono"/>
+                <a:sym typeface="IBM Plex Mono"/>
+              </a:rPr>
+              <a:t> / 2</a:t>
+            </a:r>
+            <a:r>
+              <a:rPr lang="en" sz="700">
+                <a:solidFill>
+                  <a:schemeClr val="dk1"/>
+                </a:solidFill>
+                <a:latin typeface="IBM Plex Mono"/>
+                <a:ea typeface="IBM Plex Mono"/>
+                <a:cs typeface="IBM Plex Mono"/>
+                <a:sym typeface="IBM Plex Mono"/>
+              </a:rPr>
+              <a:t>1</a:t>
+            </a:r>
+            <a:endParaRPr i="0" sz="700" u="none" cap="none" strike="noStrike">
+              <a:solidFill>
+                <a:schemeClr val="dk1"/>
+              </a:solidFill>
+              <a:latin typeface="IBM Plex Mono"/>
+              <a:ea typeface="IBM Plex Mono"/>
+              <a:cs typeface="IBM Plex Mono"/>
+              <a:sym typeface="IBM Plex Mono"/>
             </a:endParaRPr>
           </a:p>
         </p:txBody>
@@ -49887,7 +50596,7 @@
             <a:tbl>
               <a:tblPr>
                 <a:noFill/>
-                <a:tableStyleId>{164A1B23-7A83-474B-B4BF-E042B0863BCF}</a:tableStyleId>
+                <a:tableStyleId>{81637843-7EEC-42DC-84F5-4FF2FDD21AC6}</a:tableStyleId>
               </a:tblPr>
               <a:tblGrid>
                 <a:gridCol w="1200150"/>
@@ -53800,53 +54509,145 @@
           </a:p>
         </p:txBody>
       </p:sp>
-      <p:cxnSp>
-        <p:nvCxnSpPr>
+      <p:sp>
+        <p:nvSpPr>
           <p:cNvPr id="287" name="Google Shape;287;p10"/>
-          <p:cNvCxnSpPr/>
-          <p:nvPr/>
-        </p:nvCxnSpPr>
-        <p:spPr>
-          <a:xfrm>
-            <a:off x="0" y="4886325"/>
-            <a:ext cx="9143771" cy="0"/>
-          </a:xfrm>
-          <a:prstGeom prst="straightConnector1">
+          <p:cNvSpPr/>
+          <p:nvPr/>
+        </p:nvSpPr>
+        <p:spPr>
+          <a:xfrm>
+            <a:off x="0" y="5122069"/>
+            <a:ext cx="3200320" cy="21431"/>
+          </a:xfrm>
+          <a:prstGeom prst="rect">
+            <a:avLst/>
+          </a:prstGeom>
+          <a:solidFill>
+            <a:srgbClr val="8B1A1A"/>
+          </a:solidFill>
+          <a:ln>
+            <a:noFill/>
+          </a:ln>
+        </p:spPr>
+        <p:txBody>
+          <a:bodyPr anchorCtr="0" anchor="ctr" bIns="68575" lIns="68575" spcFirstLastPara="1" rIns="68575" wrap="square" tIns="68575">
+            <a:noAutofit/>
+          </a:bodyPr>
+          <a:lstStyle/>
+          <a:p>
+            <a:pPr indent="0" lvl="0" marL="0" marR="0" rtl="0" algn="l">
+              <a:lnSpc>
+                <a:spcPct val="100000"/>
+              </a:lnSpc>
+              <a:spcBef>
+                <a:spcPts val="0"/>
+              </a:spcBef>
+              <a:spcAft>
+                <a:spcPts val="0"/>
+              </a:spcAft>
+              <a:buClr>
+                <a:srgbClr val="000000"/>
+              </a:buClr>
+              <a:buSzPts val="1400"/>
+              <a:buFont typeface="Arial"/>
+              <a:buNone/>
+            </a:pPr>
+            <a:r>
+              <a:t/>
+            </a:r>
+            <a:endParaRPr b="0" i="0" sz="1400" u="none" cap="none" strike="noStrike">
+              <a:solidFill>
+                <a:srgbClr val="000000"/>
+              </a:solidFill>
+              <a:latin typeface="Arial"/>
+              <a:ea typeface="Arial"/>
+              <a:cs typeface="Arial"/>
+              <a:sym typeface="Arial"/>
+            </a:endParaRPr>
+          </a:p>
+        </p:txBody>
+      </p:sp>
+      <p:sp>
+        <p:nvSpPr>
+          <p:cNvPr id="288" name="Google Shape;288;p10"/>
+          <p:cNvSpPr/>
+          <p:nvPr/>
+        </p:nvSpPr>
+        <p:spPr>
+          <a:xfrm>
+            <a:off x="0" y="4886203"/>
+            <a:ext cx="9143700" cy="6900"/>
+          </a:xfrm>
+          <a:prstGeom prst="rect">
+            <a:avLst/>
+          </a:prstGeom>
+          <a:solidFill>
+            <a:srgbClr val="D4CFC8"/>
+          </a:solidFill>
+          <a:ln>
+            <a:noFill/>
+          </a:ln>
+        </p:spPr>
+        <p:txBody>
+          <a:bodyPr anchorCtr="0" anchor="ctr" bIns="68575" lIns="68575" spcFirstLastPara="1" rIns="68575" wrap="square" tIns="68575">
+            <a:noAutofit/>
+          </a:bodyPr>
+          <a:lstStyle/>
+          <a:p>
+            <a:pPr indent="0" lvl="0" marL="0" marR="0" rtl="0" algn="l">
+              <a:lnSpc>
+                <a:spcPct val="100000"/>
+              </a:lnSpc>
+              <a:spcBef>
+                <a:spcPts val="0"/>
+              </a:spcBef>
+              <a:spcAft>
+                <a:spcPts val="0"/>
+              </a:spcAft>
+              <a:buClr>
+                <a:srgbClr val="000000"/>
+              </a:buClr>
+              <a:buSzPts val="1400"/>
+              <a:buFont typeface="Arial"/>
+              <a:buNone/>
+            </a:pPr>
+            <a:r>
+              <a:t/>
+            </a:r>
+            <a:endParaRPr b="0" i="0" sz="1400" u="none" cap="none" strike="noStrike">
+              <a:solidFill>
+                <a:srgbClr val="000000"/>
+              </a:solidFill>
+              <a:latin typeface="Arial"/>
+              <a:ea typeface="Arial"/>
+              <a:cs typeface="Arial"/>
+              <a:sym typeface="Arial"/>
+            </a:endParaRPr>
+          </a:p>
+        </p:txBody>
+      </p:sp>
+      <p:sp>
+        <p:nvSpPr>
+          <p:cNvPr id="289" name="Google Shape;289;p10"/>
+          <p:cNvSpPr txBox="1"/>
+          <p:nvPr/>
+        </p:nvSpPr>
+        <p:spPr>
+          <a:xfrm>
+            <a:off x="8286600" y="4886313"/>
+            <a:ext cx="857400" cy="128700"/>
+          </a:xfrm>
+          <a:prstGeom prst="rect">
             <a:avLst/>
           </a:prstGeom>
           <a:noFill/>
-          <a:ln cap="flat" cmpd="sng" w="9525">
-            <a:solidFill>
-              <a:srgbClr val="D4CFC8"/>
-            </a:solidFill>
-            <a:prstDash val="solid"/>
-            <a:round/>
-            <a:headEnd len="sm" w="sm" type="none"/>
-            <a:tailEnd len="sm" w="sm" type="none"/>
-          </a:ln>
-        </p:spPr>
-      </p:cxnSp>
-      <p:sp>
-        <p:nvSpPr>
-          <p:cNvPr id="288" name="Google Shape;288;p10"/>
-          <p:cNvSpPr txBox="1"/>
-          <p:nvPr/>
-        </p:nvSpPr>
-        <p:spPr>
-          <a:xfrm>
-            <a:off x="7886471" y="4957763"/>
-            <a:ext cx="685800" cy="137160"/>
-          </a:xfrm>
-          <a:prstGeom prst="rect">
-            <a:avLst/>
-          </a:prstGeom>
-          <a:noFill/>
-          <a:ln>
-            <a:noFill/>
-          </a:ln>
-        </p:spPr>
-        <p:txBody>
-          <a:bodyPr anchorCtr="0" anchor="ctr" bIns="0" lIns="0" spcFirstLastPara="1" rIns="0" wrap="square" tIns="0">
+          <a:ln>
+            <a:noFill/>
+          </a:ln>
+        </p:spPr>
+        <p:txBody>
+          <a:bodyPr anchorCtr="0" anchor="t" bIns="0" lIns="0" spcFirstLastPara="1" rIns="0" wrap="square" tIns="0">
             <a:noAutofit/>
           </a:bodyPr>
           <a:lstStyle/>
@@ -53864,12 +54665,12 @@
               <a:buClr>
                 <a:srgbClr val="9A9AAA"/>
               </a:buClr>
-              <a:buSzPts val="800"/>
+              <a:buSzPts val="700"/>
               <a:buFont typeface="IBM Plex Mono"/>
               <a:buNone/>
             </a:pPr>
             <a:r>
-              <a:rPr b="0" i="0" lang="en" sz="800" u="none" cap="none" strike="noStrike">
+              <a:rPr i="0" lang="en" sz="700" u="none" cap="none" strike="noStrike">
                 <a:solidFill>
                   <a:schemeClr val="dk1"/>
                 </a:solidFill>
@@ -53878,10 +54679,10 @@
                 <a:cs typeface="IBM Plex Mono"/>
                 <a:sym typeface="IBM Plex Mono"/>
               </a:rPr>
-              <a:t>08 / 2</a:t>
-            </a:r>
-            <a:r>
-              <a:rPr lang="en" sz="800">
+              <a:t>0</a:t>
+            </a:r>
+            <a:r>
+              <a:rPr lang="en" sz="700">
                 <a:solidFill>
                   <a:schemeClr val="dk1"/>
                 </a:solidFill>
@@ -53890,75 +54691,40 @@
                 <a:cs typeface="IBM Plex Mono"/>
                 <a:sym typeface="IBM Plex Mono"/>
               </a:rPr>
+              <a:t>8</a:t>
+            </a:r>
+            <a:r>
+              <a:rPr i="0" lang="en" sz="700" u="none" cap="none" strike="noStrike">
+                <a:solidFill>
+                  <a:schemeClr val="dk1"/>
+                </a:solidFill>
+                <a:latin typeface="IBM Plex Mono"/>
+                <a:ea typeface="IBM Plex Mono"/>
+                <a:cs typeface="IBM Plex Mono"/>
+                <a:sym typeface="IBM Plex Mono"/>
+              </a:rPr>
+              <a:t> / 2</a:t>
+            </a:r>
+            <a:r>
+              <a:rPr lang="en" sz="700">
+                <a:solidFill>
+                  <a:schemeClr val="dk1"/>
+                </a:solidFill>
+                <a:latin typeface="IBM Plex Mono"/>
+                <a:ea typeface="IBM Plex Mono"/>
+                <a:cs typeface="IBM Plex Mono"/>
+                <a:sym typeface="IBM Plex Mono"/>
+              </a:rPr>
               <a:t>1</a:t>
             </a:r>
-            <a:endParaRPr b="0" i="0" sz="800" u="none" cap="none" strike="noStrike">
+            <a:endParaRPr i="0" sz="700" u="none" cap="none" strike="noStrike">
               <a:solidFill>
                 <a:schemeClr val="dk1"/>
               </a:solidFill>
-              <a:latin typeface="Calibri"/>
-              <a:ea typeface="Calibri"/>
-              <a:cs typeface="Calibri"/>
-              <a:sym typeface="Calibri"/>
-            </a:endParaRPr>
-          </a:p>
-        </p:txBody>
-      </p:sp>
-      <p:sp>
-        <p:nvSpPr>
-          <p:cNvPr id="289" name="Google Shape;289;p10"/>
-          <p:cNvSpPr/>
-          <p:nvPr/>
-        </p:nvSpPr>
-        <p:spPr>
-          <a:xfrm>
-            <a:off x="0" y="5122069"/>
-            <a:ext cx="3200320" cy="21431"/>
-          </a:xfrm>
-          <a:prstGeom prst="rect">
-            <a:avLst/>
-          </a:prstGeom>
-          <a:solidFill>
-            <a:srgbClr val="8B1A1A"/>
-          </a:solidFill>
-          <a:ln>
-            <a:noFill/>
-          </a:ln>
-        </p:spPr>
-        <p:txBody>
-          <a:bodyPr anchorCtr="0" anchor="ctr" bIns="68575" lIns="68575" spcFirstLastPara="1" rIns="68575" wrap="square" tIns="68575">
-            <a:noAutofit/>
-          </a:bodyPr>
-          <a:lstStyle/>
-          <a:p>
-            <a:pPr indent="0" lvl="0" marL="0" marR="0" rtl="0" algn="l">
-              <a:lnSpc>
-                <a:spcPct val="100000"/>
-              </a:lnSpc>
-              <a:spcBef>
-                <a:spcPts val="0"/>
-              </a:spcBef>
-              <a:spcAft>
-                <a:spcPts val="0"/>
-              </a:spcAft>
-              <a:buClr>
-                <a:srgbClr val="000000"/>
-              </a:buClr>
-              <a:buSzPts val="1400"/>
-              <a:buFont typeface="Arial"/>
-              <a:buNone/>
-            </a:pPr>
-            <a:r>
-              <a:t/>
-            </a:r>
-            <a:endParaRPr b="0" i="0" sz="1400" u="none" cap="none" strike="noStrike">
-              <a:solidFill>
-                <a:srgbClr val="000000"/>
-              </a:solidFill>
-              <a:latin typeface="Arial"/>
-              <a:ea typeface="Arial"/>
-              <a:cs typeface="Arial"/>
-              <a:sym typeface="Arial"/>
+              <a:latin typeface="IBM Plex Mono"/>
+              <a:ea typeface="IBM Plex Mono"/>
+              <a:cs typeface="IBM Plex Mono"/>
+              <a:sym typeface="IBM Plex Mono"/>
             </a:endParaRPr>
           </a:p>
         </p:txBody>
@@ -55839,53 +56605,145 @@
           </a:p>
         </p:txBody>
       </p:sp>
-      <p:cxnSp>
-        <p:nvCxnSpPr>
+      <p:sp>
+        <p:nvSpPr>
           <p:cNvPr id="322" name="Google Shape;322;p11"/>
-          <p:cNvCxnSpPr/>
-          <p:nvPr/>
-        </p:nvCxnSpPr>
-        <p:spPr>
-          <a:xfrm>
-            <a:off x="0" y="4886325"/>
-            <a:ext cx="9144000" cy="0"/>
-          </a:xfrm>
-          <a:prstGeom prst="straightConnector1">
+          <p:cNvSpPr/>
+          <p:nvPr/>
+        </p:nvSpPr>
+        <p:spPr>
+          <a:xfrm>
+            <a:off x="0" y="5122069"/>
+            <a:ext cx="3657600" cy="21431"/>
+          </a:xfrm>
+          <a:prstGeom prst="rect">
+            <a:avLst/>
+          </a:prstGeom>
+          <a:solidFill>
+            <a:srgbClr val="8B1A1A"/>
+          </a:solidFill>
+          <a:ln>
+            <a:noFill/>
+          </a:ln>
+        </p:spPr>
+        <p:txBody>
+          <a:bodyPr anchorCtr="0" anchor="ctr" bIns="68575" lIns="68575" spcFirstLastPara="1" rIns="68575" wrap="square" tIns="68575">
+            <a:noAutofit/>
+          </a:bodyPr>
+          <a:lstStyle/>
+          <a:p>
+            <a:pPr indent="0" lvl="0" marL="0" marR="0" rtl="0" algn="l">
+              <a:lnSpc>
+                <a:spcPct val="100000"/>
+              </a:lnSpc>
+              <a:spcBef>
+                <a:spcPts val="0"/>
+              </a:spcBef>
+              <a:spcAft>
+                <a:spcPts val="0"/>
+              </a:spcAft>
+              <a:buClr>
+                <a:srgbClr val="000000"/>
+              </a:buClr>
+              <a:buSzPts val="1400"/>
+              <a:buFont typeface="Arial"/>
+              <a:buNone/>
+            </a:pPr>
+            <a:r>
+              <a:t/>
+            </a:r>
+            <a:endParaRPr b="0" i="0" sz="1400" u="none" cap="none" strike="noStrike">
+              <a:solidFill>
+                <a:srgbClr val="000000"/>
+              </a:solidFill>
+              <a:latin typeface="Arial"/>
+              <a:ea typeface="Arial"/>
+              <a:cs typeface="Arial"/>
+              <a:sym typeface="Arial"/>
+            </a:endParaRPr>
+          </a:p>
+        </p:txBody>
+      </p:sp>
+      <p:sp>
+        <p:nvSpPr>
+          <p:cNvPr id="323" name="Google Shape;323;p11"/>
+          <p:cNvSpPr/>
+          <p:nvPr/>
+        </p:nvSpPr>
+        <p:spPr>
+          <a:xfrm>
+            <a:off x="0" y="4886203"/>
+            <a:ext cx="9143700" cy="6900"/>
+          </a:xfrm>
+          <a:prstGeom prst="rect">
+            <a:avLst/>
+          </a:prstGeom>
+          <a:solidFill>
+            <a:srgbClr val="D4CFC8"/>
+          </a:solidFill>
+          <a:ln>
+            <a:noFill/>
+          </a:ln>
+        </p:spPr>
+        <p:txBody>
+          <a:bodyPr anchorCtr="0" anchor="ctr" bIns="68575" lIns="68575" spcFirstLastPara="1" rIns="68575" wrap="square" tIns="68575">
+            <a:noAutofit/>
+          </a:bodyPr>
+          <a:lstStyle/>
+          <a:p>
+            <a:pPr indent="0" lvl="0" marL="0" marR="0" rtl="0" algn="l">
+              <a:lnSpc>
+                <a:spcPct val="100000"/>
+              </a:lnSpc>
+              <a:spcBef>
+                <a:spcPts val="0"/>
+              </a:spcBef>
+              <a:spcAft>
+                <a:spcPts val="0"/>
+              </a:spcAft>
+              <a:buClr>
+                <a:srgbClr val="000000"/>
+              </a:buClr>
+              <a:buSzPts val="1400"/>
+              <a:buFont typeface="Arial"/>
+              <a:buNone/>
+            </a:pPr>
+            <a:r>
+              <a:t/>
+            </a:r>
+            <a:endParaRPr b="0" i="0" sz="1400" u="none" cap="none" strike="noStrike">
+              <a:solidFill>
+                <a:srgbClr val="000000"/>
+              </a:solidFill>
+              <a:latin typeface="Arial"/>
+              <a:ea typeface="Arial"/>
+              <a:cs typeface="Arial"/>
+              <a:sym typeface="Arial"/>
+            </a:endParaRPr>
+          </a:p>
+        </p:txBody>
+      </p:sp>
+      <p:sp>
+        <p:nvSpPr>
+          <p:cNvPr id="324" name="Google Shape;324;p11"/>
+          <p:cNvSpPr txBox="1"/>
+          <p:nvPr/>
+        </p:nvSpPr>
+        <p:spPr>
+          <a:xfrm>
+            <a:off x="8286600" y="4886313"/>
+            <a:ext cx="857400" cy="128700"/>
+          </a:xfrm>
+          <a:prstGeom prst="rect">
             <a:avLst/>
           </a:prstGeom>
           <a:noFill/>
-          <a:ln cap="flat" cmpd="sng" w="9525">
-            <a:solidFill>
-              <a:srgbClr val="D4CFC8"/>
-            </a:solidFill>
-            <a:prstDash val="solid"/>
-            <a:round/>
-            <a:headEnd len="sm" w="sm" type="none"/>
-            <a:tailEnd len="sm" w="sm" type="none"/>
-          </a:ln>
-        </p:spPr>
-      </p:cxnSp>
-      <p:sp>
-        <p:nvSpPr>
-          <p:cNvPr id="323" name="Google Shape;323;p11"/>
-          <p:cNvSpPr txBox="1"/>
-          <p:nvPr/>
-        </p:nvSpPr>
-        <p:spPr>
-          <a:xfrm>
-            <a:off x="7858125" y="5000625"/>
-            <a:ext cx="714375" cy="114300"/>
-          </a:xfrm>
-          <a:prstGeom prst="rect">
-            <a:avLst/>
-          </a:prstGeom>
-          <a:noFill/>
-          <a:ln>
-            <a:noFill/>
-          </a:ln>
-        </p:spPr>
-        <p:txBody>
-          <a:bodyPr anchorCtr="0" anchor="ctr" bIns="0" lIns="0" spcFirstLastPara="1" rIns="0" wrap="square" tIns="0">
+          <a:ln>
+            <a:noFill/>
+          </a:ln>
+        </p:spPr>
+        <p:txBody>
+          <a:bodyPr anchorCtr="0" anchor="t" bIns="0" lIns="0" spcFirstLastPara="1" rIns="0" wrap="square" tIns="0">
             <a:noAutofit/>
           </a:bodyPr>
           <a:lstStyle/>
@@ -55908,7 +56766,7 @@
               <a:buNone/>
             </a:pPr>
             <a:r>
-              <a:rPr b="0" i="0" lang="en" sz="700" u="none" cap="none" strike="noStrike">
+              <a:rPr i="0" lang="en" sz="700" u="none" cap="none" strike="noStrike">
                 <a:solidFill>
                   <a:schemeClr val="dk1"/>
                 </a:solidFill>
@@ -55917,7 +56775,7 @@
                 <a:cs typeface="IBM Plex Mono"/>
                 <a:sym typeface="IBM Plex Mono"/>
               </a:rPr>
-              <a:t>09 / 2</a:t>
+              <a:t>0</a:t>
             </a:r>
             <a:r>
               <a:rPr lang="en" sz="700">
@@ -55929,75 +56787,40 @@
                 <a:cs typeface="IBM Plex Mono"/>
                 <a:sym typeface="IBM Plex Mono"/>
               </a:rPr>
+              <a:t>9</a:t>
+            </a:r>
+            <a:r>
+              <a:rPr i="0" lang="en" sz="700" u="none" cap="none" strike="noStrike">
+                <a:solidFill>
+                  <a:schemeClr val="dk1"/>
+                </a:solidFill>
+                <a:latin typeface="IBM Plex Mono"/>
+                <a:ea typeface="IBM Plex Mono"/>
+                <a:cs typeface="IBM Plex Mono"/>
+                <a:sym typeface="IBM Plex Mono"/>
+              </a:rPr>
+              <a:t> / 2</a:t>
+            </a:r>
+            <a:r>
+              <a:rPr lang="en" sz="700">
+                <a:solidFill>
+                  <a:schemeClr val="dk1"/>
+                </a:solidFill>
+                <a:latin typeface="IBM Plex Mono"/>
+                <a:ea typeface="IBM Plex Mono"/>
+                <a:cs typeface="IBM Plex Mono"/>
+                <a:sym typeface="IBM Plex Mono"/>
+              </a:rPr>
               <a:t>1</a:t>
             </a:r>
-            <a:endParaRPr b="0" i="0" sz="700" u="none" cap="none" strike="noStrike">
+            <a:endParaRPr i="0" sz="700" u="none" cap="none" strike="noStrike">
               <a:solidFill>
                 <a:schemeClr val="dk1"/>
               </a:solidFill>
-              <a:latin typeface="Calibri"/>
-              <a:ea typeface="Calibri"/>
-              <a:cs typeface="Calibri"/>
-              <a:sym typeface="Calibri"/>
-            </a:endParaRPr>
-          </a:p>
-        </p:txBody>
-      </p:sp>
-      <p:sp>
-        <p:nvSpPr>
-          <p:cNvPr id="324" name="Google Shape;324;p11"/>
-          <p:cNvSpPr/>
-          <p:nvPr/>
-        </p:nvSpPr>
-        <p:spPr>
-          <a:xfrm>
-            <a:off x="0" y="5122069"/>
-            <a:ext cx="3657600" cy="21431"/>
-          </a:xfrm>
-          <a:prstGeom prst="rect">
-            <a:avLst/>
-          </a:prstGeom>
-          <a:solidFill>
-            <a:srgbClr val="8B1A1A"/>
-          </a:solidFill>
-          <a:ln>
-            <a:noFill/>
-          </a:ln>
-        </p:spPr>
-        <p:txBody>
-          <a:bodyPr anchorCtr="0" anchor="ctr" bIns="68575" lIns="68575" spcFirstLastPara="1" rIns="68575" wrap="square" tIns="68575">
-            <a:noAutofit/>
-          </a:bodyPr>
-          <a:lstStyle/>
-          <a:p>
-            <a:pPr indent="0" lvl="0" marL="0" marR="0" rtl="0" algn="l">
-              <a:lnSpc>
-                <a:spcPct val="100000"/>
-              </a:lnSpc>
-              <a:spcBef>
-                <a:spcPts val="0"/>
-              </a:spcBef>
-              <a:spcAft>
-                <a:spcPts val="0"/>
-              </a:spcAft>
-              <a:buClr>
-                <a:srgbClr val="000000"/>
-              </a:buClr>
-              <a:buSzPts val="1400"/>
-              <a:buFont typeface="Arial"/>
-              <a:buNone/>
-            </a:pPr>
-            <a:r>
-              <a:t/>
-            </a:r>
-            <a:endParaRPr b="0" i="0" sz="1400" u="none" cap="none" strike="noStrike">
-              <a:solidFill>
-                <a:srgbClr val="000000"/>
-              </a:solidFill>
-              <a:latin typeface="Arial"/>
-              <a:ea typeface="Arial"/>
-              <a:cs typeface="Arial"/>
-              <a:sym typeface="Arial"/>
+              <a:latin typeface="IBM Plex Mono"/>
+              <a:ea typeface="IBM Plex Mono"/>
+              <a:cs typeface="IBM Plex Mono"/>
+              <a:sym typeface="IBM Plex Mono"/>
             </a:endParaRPr>
           </a:p>
         </p:txBody>
@@ -56011,6 +56834,285 @@
 </file>
 
 <file path=ppt/theme/theme1.xml><?xml version="1.0" encoding="utf-8"?>
+<a:theme xmlns:a="http://schemas.openxmlformats.org/drawingml/2006/main" xmlns:r="http://schemas.openxmlformats.org/officeDocument/2006/relationships" name="Office Theme">
+  <a:themeElements>
+    <a:clrScheme name="Office">
+      <a:dk1>
+        <a:srgbClr val="000000"/>
+      </a:dk1>
+      <a:lt1>
+        <a:srgbClr val="FFFFFF"/>
+      </a:lt1>
+      <a:dk2>
+        <a:srgbClr val="44546A"/>
+      </a:dk2>
+      <a:lt2>
+        <a:srgbClr val="E7E6E6"/>
+      </a:lt2>
+      <a:accent1>
+        <a:srgbClr val="4472C4"/>
+      </a:accent1>
+      <a:accent2>
+        <a:srgbClr val="ED7D31"/>
+      </a:accent2>
+      <a:accent3>
+        <a:srgbClr val="A5A5A5"/>
+      </a:accent3>
+      <a:accent4>
+        <a:srgbClr val="FFC000"/>
+      </a:accent4>
+      <a:accent5>
+        <a:srgbClr val="5B9BD5"/>
+      </a:accent5>
+      <a:accent6>
+        <a:srgbClr val="70AD47"/>
+      </a:accent6>
+      <a:hlink>
+        <a:srgbClr val="0563C1"/>
+      </a:hlink>
+      <a:folHlink>
+        <a:srgbClr val="954F72"/>
+      </a:folHlink>
+    </a:clrScheme>
+    <a:fontScheme name="Office">
+      <a:majorFont>
+        <a:latin typeface="Arial"/>
+        <a:ea typeface=""/>
+        <a:cs typeface=""/>
+        <a:font script="Jpan" typeface="ＭＳ Ｐゴシック"/>
+        <a:font script="Hang" typeface="맑은 고딕"/>
+        <a:font script="Hans" typeface="宋体"/>
+        <a:font script="Hant" typeface="新細明體"/>
+        <a:font script="Arab" typeface="Times New Roman"/>
+        <a:font script="Hebr" typeface="Times New Roman"/>
+        <a:font script="Thai" typeface="Angsana New"/>
+        <a:font script="Ethi" typeface="Nyala"/>
+        <a:font script="Beng" typeface="Vrinda"/>
+        <a:font script="Gujr" typeface="Shruti"/>
+        <a:font script="Khmr" typeface="MoolBoran"/>
+        <a:font script="Knda" typeface="Tunga"/>
+        <a:font script="Guru" typeface="Raavi"/>
+        <a:font script="Cans" typeface="Euphemia"/>
+        <a:font script="Cher" typeface="Plantagenet Cherokee"/>
+        <a:font script="Yiii" typeface="Microsoft Yi Baiti"/>
+        <a:font script="Tibt" typeface="Microsoft Himalaya"/>
+        <a:font script="Thaa" typeface="MV Boli"/>
+        <a:font script="Deva" typeface="Mangal"/>
+        <a:font script="Telu" typeface="Gautami"/>
+        <a:font script="Taml" typeface="Latha"/>
+        <a:font script="Syrc" typeface="Estrangelo Edessa"/>
+        <a:font script="Orya" typeface="Kalinga"/>
+        <a:font script="Mlym" typeface="Kartika"/>
+        <a:font script="Laoo" typeface="DokChampa"/>
+        <a:font script="Sinh" typeface="Iskoola Pota"/>
+        <a:font script="Mong" typeface="Mongolian Baiti"/>
+        <a:font script="Viet" typeface="Times New Roman"/>
+        <a:font script="Uigh" typeface="Microsoft Uighur"/>
+        <a:font script="Geor" typeface="Sylfaen"/>
+      </a:majorFont>
+      <a:minorFont>
+        <a:latin typeface="Arial"/>
+        <a:ea typeface=""/>
+        <a:cs typeface=""/>
+        <a:font script="Jpan" typeface="ＭＳ Ｐゴシック"/>
+        <a:font script="Hang" typeface="맑은 고딕"/>
+        <a:font script="Hans" typeface="宋体"/>
+        <a:font script="Hant" typeface="新細明體"/>
+        <a:font script="Arab" typeface="Arial"/>
+        <a:font script="Hebr" typeface="Arial"/>
+        <a:font script="Thai" typeface="Cordia New"/>
+        <a:font script="Ethi" typeface="Nyala"/>
+        <a:font script="Beng" typeface="Vrinda"/>
+        <a:font script="Gujr" typeface="Shruti"/>
+        <a:font script="Khmr" typeface="DaunPenh"/>
+        <a:font script="Knda" typeface="Tunga"/>
+        <a:font script="Guru" typeface="Raavi"/>
+        <a:font script="Cans" typeface="Euphemia"/>
+        <a:font script="Cher" typeface="Plantagenet Cherokee"/>
+        <a:font script="Yiii" typeface="Microsoft Yi Baiti"/>
+        <a:font script="Tibt" typeface="Microsoft Himalaya"/>
+        <a:font script="Thaa" typeface="MV Boli"/>
+        <a:font script="Deva" typeface="Mangal"/>
+        <a:font script="Telu" typeface="Gautami"/>
+        <a:font script="Taml" typeface="Latha"/>
+        <a:font script="Syrc" typeface="Estrangelo Edessa"/>
+        <a:font script="Orya" typeface="Kalinga"/>
+        <a:font script="Mlym" typeface="Kartika"/>
+        <a:font script="Laoo" typeface="DokChampa"/>
+        <a:font script="Sinh" typeface="Iskoola Pota"/>
+        <a:font script="Mong" typeface="Mongolian Baiti"/>
+        <a:font script="Viet" typeface="Arial"/>
+        <a:font script="Uigh" typeface="Microsoft Uighur"/>
+        <a:font script="Geor" typeface="Sylfaen"/>
+      </a:minorFont>
+    </a:fontScheme>
+    <a:fmtScheme name="Office">
+      <a:fillStyleLst>
+        <a:solidFill>
+          <a:schemeClr val="phClr"/>
+        </a:solidFill>
+        <a:gradFill rotWithShape="1">
+          <a:gsLst>
+            <a:gs pos="0">
+              <a:schemeClr val="phClr">
+                <a:tint val="50000"/>
+                <a:satMod val="300000"/>
+              </a:schemeClr>
+            </a:gs>
+            <a:gs pos="35000">
+              <a:schemeClr val="phClr">
+                <a:tint val="37000"/>
+                <a:satMod val="300000"/>
+              </a:schemeClr>
+            </a:gs>
+            <a:gs pos="100000">
+              <a:schemeClr val="phClr">
+                <a:tint val="15000"/>
+                <a:satMod val="350000"/>
+              </a:schemeClr>
+            </a:gs>
+          </a:gsLst>
+          <a:lin ang="16200000" scaled="1"/>
+        </a:gradFill>
+        <a:gradFill rotWithShape="1">
+          <a:gsLst>
+            <a:gs pos="0">
+              <a:schemeClr val="phClr">
+                <a:tint val="100000"/>
+                <a:shade val="100000"/>
+                <a:satMod val="130000"/>
+              </a:schemeClr>
+            </a:gs>
+            <a:gs pos="100000">
+              <a:schemeClr val="phClr">
+                <a:tint val="50000"/>
+                <a:shade val="100000"/>
+                <a:satMod val="350000"/>
+              </a:schemeClr>
+            </a:gs>
+          </a:gsLst>
+          <a:lin ang="16200000" scaled="0"/>
+        </a:gradFill>
+      </a:fillStyleLst>
+      <a:lnStyleLst>
+        <a:ln w="9525" cap="flat" cmpd="sng" algn="ctr">
+          <a:solidFill>
+            <a:schemeClr val="phClr">
+              <a:shade val="95000"/>
+              <a:satMod val="105000"/>
+            </a:schemeClr>
+          </a:solidFill>
+          <a:prstDash val="solid"/>
+        </a:ln>
+        <a:ln w="25400" cap="flat" cmpd="sng" algn="ctr">
+          <a:solidFill>
+            <a:schemeClr val="phClr"/>
+          </a:solidFill>
+          <a:prstDash val="solid"/>
+        </a:ln>
+        <a:ln w="38100" cap="flat" cmpd="sng" algn="ctr">
+          <a:solidFill>
+            <a:schemeClr val="phClr"/>
+          </a:solidFill>
+          <a:prstDash val="solid"/>
+        </a:ln>
+      </a:lnStyleLst>
+      <a:effectStyleLst>
+        <a:effectStyle>
+          <a:effectLst>
+            <a:outerShdw blurRad="40000" dist="20000" dir="5400000" rotWithShape="0">
+              <a:srgbClr val="000000">
+                <a:alpha val="38000"/>
+              </a:srgbClr>
+            </a:outerShdw>
+          </a:effectLst>
+        </a:effectStyle>
+        <a:effectStyle>
+          <a:effectLst>
+            <a:outerShdw blurRad="40000" dist="23000" dir="5400000" rotWithShape="0">
+              <a:srgbClr val="000000">
+                <a:alpha val="35000"/>
+              </a:srgbClr>
+            </a:outerShdw>
+          </a:effectLst>
+        </a:effectStyle>
+        <a:effectStyle>
+          <a:effectLst>
+            <a:outerShdw blurRad="40000" dist="23000" dir="5400000" rotWithShape="0">
+              <a:srgbClr val="000000">
+                <a:alpha val="35000"/>
+              </a:srgbClr>
+            </a:outerShdw>
+          </a:effectLst>
+          <a:scene3d>
+            <a:camera prst="orthographicFront">
+              <a:rot lat="0" lon="0" rev="0"/>
+            </a:camera>
+            <a:lightRig rig="threePt" dir="t">
+              <a:rot lat="0" lon="0" rev="1200000"/>
+            </a:lightRig>
+          </a:scene3d>
+          <a:sp3d>
+            <a:bevelT w="63500" h="25400"/>
+          </a:sp3d>
+        </a:effectStyle>
+      </a:effectStyleLst>
+      <a:bgFillStyleLst>
+        <a:solidFill>
+          <a:schemeClr val="phClr"/>
+        </a:solidFill>
+        <a:gradFill rotWithShape="1">
+          <a:gsLst>
+            <a:gs pos="0">
+              <a:schemeClr val="phClr">
+                <a:tint val="40000"/>
+                <a:satMod val="350000"/>
+              </a:schemeClr>
+            </a:gs>
+            <a:gs pos="40000">
+              <a:schemeClr val="phClr">
+                <a:tint val="45000"/>
+                <a:shade val="99000"/>
+                <a:satMod val="350000"/>
+              </a:schemeClr>
+            </a:gs>
+            <a:gs pos="100000">
+              <a:schemeClr val="phClr">
+                <a:shade val="20000"/>
+                <a:satMod val="255000"/>
+              </a:schemeClr>
+            </a:gs>
+          </a:gsLst>
+          <a:path path="circle">
+            <a:fillToRect l="50000" t="-80000" r="50000" b="180000"/>
+          </a:path>
+        </a:gradFill>
+        <a:gradFill rotWithShape="1">
+          <a:gsLst>
+            <a:gs pos="0">
+              <a:schemeClr val="phClr">
+                <a:tint val="80000"/>
+                <a:satMod val="300000"/>
+              </a:schemeClr>
+            </a:gs>
+            <a:gs pos="100000">
+              <a:schemeClr val="phClr">
+                <a:shade val="30000"/>
+                <a:satMod val="200000"/>
+              </a:schemeClr>
+            </a:gs>
+          </a:gsLst>
+          <a:path path="circle">
+            <a:fillToRect l="50000" t="50000" r="50000" b="50000"/>
+          </a:path>
+        </a:gradFill>
+      </a:bgFillStyleLst>
+    </a:fmtScheme>
+  </a:themeElements>
+</a:theme>
+</file>
+
+<file path=ppt/theme/theme2.xml><?xml version="1.0" encoding="utf-8"?>
 <a:theme xmlns:a="http://schemas.openxmlformats.org/drawingml/2006/main" xmlns:r="http://schemas.openxmlformats.org/officeDocument/2006/relationships">
   <a:themeElements>
     <a:clrScheme name="Default">
@@ -56287,283 +57389,4 @@
     </a:fmtScheme>
   </a:themeElements>
 </a:theme>
-</file>
-
-<file path=ppt/theme/theme2.xml><?xml version="1.0" encoding="utf-8"?>
-<a:theme xmlns:a="http://schemas.openxmlformats.org/drawingml/2006/main" xmlns:r="http://schemas.openxmlformats.org/officeDocument/2006/relationships" name="Office Theme">
-  <a:themeElements>
-    <a:clrScheme name="Office">
-      <a:dk1>
-        <a:srgbClr val="000000"/>
-      </a:dk1>
-      <a:lt1>
-        <a:srgbClr val="FFFFFF"/>
-      </a:lt1>
-      <a:dk2>
-        <a:srgbClr val="44546A"/>
-      </a:dk2>
-      <a:lt2>
-        <a:srgbClr val="E7E6E6"/>
-      </a:lt2>
-      <a:accent1>
-        <a:srgbClr val="4472C4"/>
-      </a:accent1>
-      <a:accent2>
-        <a:srgbClr val="ED7D31"/>
-      </a:accent2>
-      <a:accent3>
-        <a:srgbClr val="A5A5A5"/>
-      </a:accent3>
-      <a:accent4>
-        <a:srgbClr val="FFC000"/>
-      </a:accent4>
-      <a:accent5>
-        <a:srgbClr val="5B9BD5"/>
-      </a:accent5>
-      <a:accent6>
-        <a:srgbClr val="70AD47"/>
-      </a:accent6>
-      <a:hlink>
-        <a:srgbClr val="0563C1"/>
-      </a:hlink>
-      <a:folHlink>
-        <a:srgbClr val="954F72"/>
-      </a:folHlink>
-    </a:clrScheme>
-    <a:fontScheme name="Office">
-      <a:majorFont>
-        <a:latin typeface="Arial"/>
-        <a:ea typeface=""/>
-        <a:cs typeface=""/>
-        <a:font script="Jpan" typeface="ＭＳ Ｐゴシック"/>
-        <a:font script="Hang" typeface="맑은 고딕"/>
-        <a:font script="Hans" typeface="宋体"/>
-        <a:font script="Hant" typeface="新細明體"/>
-        <a:font script="Arab" typeface="Times New Roman"/>
-        <a:font script="Hebr" typeface="Times New Roman"/>
-        <a:font script="Thai" typeface="Angsana New"/>
-        <a:font script="Ethi" typeface="Nyala"/>
-        <a:font script="Beng" typeface="Vrinda"/>
-        <a:font script="Gujr" typeface="Shruti"/>
-        <a:font script="Khmr" typeface="MoolBoran"/>
-        <a:font script="Knda" typeface="Tunga"/>
-        <a:font script="Guru" typeface="Raavi"/>
-        <a:font script="Cans" typeface="Euphemia"/>
-        <a:font script="Cher" typeface="Plantagenet Cherokee"/>
-        <a:font script="Yiii" typeface="Microsoft Yi Baiti"/>
-        <a:font script="Tibt" typeface="Microsoft Himalaya"/>
-        <a:font script="Thaa" typeface="MV Boli"/>
-        <a:font script="Deva" typeface="Mangal"/>
-        <a:font script="Telu" typeface="Gautami"/>
-        <a:font script="Taml" typeface="Latha"/>
-        <a:font script="Syrc" typeface="Estrangelo Edessa"/>
-        <a:font script="Orya" typeface="Kalinga"/>
-        <a:font script="Mlym" typeface="Kartika"/>
-        <a:font script="Laoo" typeface="DokChampa"/>
-        <a:font script="Sinh" typeface="Iskoola Pota"/>
-        <a:font script="Mong" typeface="Mongolian Baiti"/>
-        <a:font script="Viet" typeface="Times New Roman"/>
-        <a:font script="Uigh" typeface="Microsoft Uighur"/>
-        <a:font script="Geor" typeface="Sylfaen"/>
-      </a:majorFont>
-      <a:minorFont>
-        <a:latin typeface="Arial"/>
-        <a:ea typeface=""/>
-        <a:cs typeface=""/>
-        <a:font script="Jpan" typeface="ＭＳ Ｐゴシック"/>
-        <a:font script="Hang" typeface="맑은 고딕"/>
-        <a:font script="Hans" typeface="宋体"/>
-        <a:font script="Hant" typeface="新細明體"/>
-        <a:font script="Arab" typeface="Arial"/>
-        <a:font script="Hebr" typeface="Arial"/>
-        <a:font script="Thai" typeface="Cordia New"/>
-        <a:font script="Ethi" typeface="Nyala"/>
-        <a:font script="Beng" typeface="Vrinda"/>
-        <a:font script="Gujr" typeface="Shruti"/>
-        <a:font script="Khmr" typeface="DaunPenh"/>
-        <a:font script="Knda" typeface="Tunga"/>
-        <a:font script="Guru" typeface="Raavi"/>
-        <a:font script="Cans" typeface="Euphemia"/>
-        <a:font script="Cher" typeface="Plantagenet Cherokee"/>
-        <a:font script="Yiii" typeface="Microsoft Yi Baiti"/>
-        <a:font script="Tibt" typeface="Microsoft Himalaya"/>
-        <a:font script="Thaa" typeface="MV Boli"/>
-        <a:font script="Deva" typeface="Mangal"/>
-        <a:font script="Telu" typeface="Gautami"/>
-        <a:font script="Taml" typeface="Latha"/>
-        <a:font script="Syrc" typeface="Estrangelo Edessa"/>
-        <a:font script="Orya" typeface="Kalinga"/>
-        <a:font script="Mlym" typeface="Kartika"/>
-        <a:font script="Laoo" typeface="DokChampa"/>
-        <a:font script="Sinh" typeface="Iskoola Pota"/>
-        <a:font script="Mong" typeface="Mongolian Baiti"/>
-        <a:font script="Viet" typeface="Arial"/>
-        <a:font script="Uigh" typeface="Microsoft Uighur"/>
-        <a:font script="Geor" typeface="Sylfaen"/>
-      </a:minorFont>
-    </a:fontScheme>
-    <a:fmtScheme name="Office">
-      <a:fillStyleLst>
-        <a:solidFill>
-          <a:schemeClr val="phClr"/>
-        </a:solidFill>
-        <a:gradFill rotWithShape="1">
-          <a:gsLst>
-            <a:gs pos="0">
-              <a:schemeClr val="phClr">
-                <a:tint val="50000"/>
-                <a:satMod val="300000"/>
-              </a:schemeClr>
-            </a:gs>
-            <a:gs pos="35000">
-              <a:schemeClr val="phClr">
-                <a:tint val="37000"/>
-                <a:satMod val="300000"/>
-              </a:schemeClr>
-            </a:gs>
-            <a:gs pos="100000">
-              <a:schemeClr val="phClr">
-                <a:tint val="15000"/>
-                <a:satMod val="350000"/>
-              </a:schemeClr>
-            </a:gs>
-          </a:gsLst>
-          <a:lin ang="16200000" scaled="1"/>
-        </a:gradFill>
-        <a:gradFill rotWithShape="1">
-          <a:gsLst>
-            <a:gs pos="0">
-              <a:schemeClr val="phClr">
-                <a:tint val="100000"/>
-                <a:shade val="100000"/>
-                <a:satMod val="130000"/>
-              </a:schemeClr>
-            </a:gs>
-            <a:gs pos="100000">
-              <a:schemeClr val="phClr">
-                <a:tint val="50000"/>
-                <a:shade val="100000"/>
-                <a:satMod val="350000"/>
-              </a:schemeClr>
-            </a:gs>
-          </a:gsLst>
-          <a:lin ang="16200000" scaled="0"/>
-        </a:gradFill>
-      </a:fillStyleLst>
-      <a:lnStyleLst>
-        <a:ln w="9525" cap="flat" cmpd="sng" algn="ctr">
-          <a:solidFill>
-            <a:schemeClr val="phClr">
-              <a:shade val="95000"/>
-              <a:satMod val="105000"/>
-            </a:schemeClr>
-          </a:solidFill>
-          <a:prstDash val="solid"/>
-        </a:ln>
-        <a:ln w="25400" cap="flat" cmpd="sng" algn="ctr">
-          <a:solidFill>
-            <a:schemeClr val="phClr"/>
-          </a:solidFill>
-          <a:prstDash val="solid"/>
-        </a:ln>
-        <a:ln w="38100" cap="flat" cmpd="sng" algn="ctr">
-          <a:solidFill>
-            <a:schemeClr val="phClr"/>
-          </a:solidFill>
-          <a:prstDash val="solid"/>
-        </a:ln>
-      </a:lnStyleLst>
-      <a:effectStyleLst>
-        <a:effectStyle>
-          <a:effectLst>
-            <a:outerShdw blurRad="40000" dist="20000" dir="5400000" rotWithShape="0">
-              <a:srgbClr val="000000">
-                <a:alpha val="38000"/>
-              </a:srgbClr>
-            </a:outerShdw>
-          </a:effectLst>
-        </a:effectStyle>
-        <a:effectStyle>
-          <a:effectLst>
-            <a:outerShdw blurRad="40000" dist="23000" dir="5400000" rotWithShape="0">
-              <a:srgbClr val="000000">
-                <a:alpha val="35000"/>
-              </a:srgbClr>
-            </a:outerShdw>
-          </a:effectLst>
-        </a:effectStyle>
-        <a:effectStyle>
-          <a:effectLst>
-            <a:outerShdw blurRad="40000" dist="23000" dir="5400000" rotWithShape="0">
-              <a:srgbClr val="000000">
-                <a:alpha val="35000"/>
-              </a:srgbClr>
-            </a:outerShdw>
-          </a:effectLst>
-          <a:scene3d>
-            <a:camera prst="orthographicFront">
-              <a:rot lat="0" lon="0" rev="0"/>
-            </a:camera>
-            <a:lightRig rig="threePt" dir="t">
-              <a:rot lat="0" lon="0" rev="1200000"/>
-            </a:lightRig>
-          </a:scene3d>
-          <a:sp3d>
-            <a:bevelT w="63500" h="25400"/>
-          </a:sp3d>
-        </a:effectStyle>
-      </a:effectStyleLst>
-      <a:bgFillStyleLst>
-        <a:solidFill>
-          <a:schemeClr val="phClr"/>
-        </a:solidFill>
-        <a:gradFill rotWithShape="1">
-          <a:gsLst>
-            <a:gs pos="0">
-              <a:schemeClr val="phClr">
-                <a:tint val="40000"/>
-                <a:satMod val="350000"/>
-              </a:schemeClr>
-            </a:gs>
-            <a:gs pos="40000">
-              <a:schemeClr val="phClr">
-                <a:tint val="45000"/>
-                <a:shade val="99000"/>
-                <a:satMod val="350000"/>
-              </a:schemeClr>
-            </a:gs>
-            <a:gs pos="100000">
-              <a:schemeClr val="phClr">
-                <a:shade val="20000"/>
-                <a:satMod val="255000"/>
-              </a:schemeClr>
-            </a:gs>
-          </a:gsLst>
-          <a:path path="circle">
-            <a:fillToRect l="50000" t="-80000" r="50000" b="180000"/>
-          </a:path>
-        </a:gradFill>
-        <a:gradFill rotWithShape="1">
-          <a:gsLst>
-            <a:gs pos="0">
-              <a:schemeClr val="phClr">
-                <a:tint val="80000"/>
-                <a:satMod val="300000"/>
-              </a:schemeClr>
-            </a:gs>
-            <a:gs pos="100000">
-              <a:schemeClr val="phClr">
-                <a:shade val="30000"/>
-                <a:satMod val="200000"/>
-              </a:schemeClr>
-            </a:gs>
-          </a:gsLst>
-          <a:path path="circle">
-            <a:fillToRect l="50000" t="50000" r="50000" b="50000"/>
-          </a:path>
-        </a:gradFill>
-      </a:bgFillStyleLst>
-    </a:fmtScheme>
-  </a:themeElements>
-</a:theme>
 </file>